--- a/report/04_220kV新能源汇集变电所_答辩汇报.pptx
+++ b/report/04_220kV新能源汇集变电所_答辩汇报.pptx
@@ -1,32 +1,32 @@
 
 <file path=ppt/presentation.xml><?xml version="1.0" encoding="utf-8"?>
-<p:presentation xmlns:a="http://schemas.openxmlformats.org/drawingml/2006/main" xmlns:r="http://schemas.openxmlformats.org/officeDocument/2006/relationships" xmlns:p="http://schemas.openxmlformats.org/presentationml/2006/main">
+<p:presentation xmlns:p="http://schemas.openxmlformats.org/presentationml/2006/main">
   <p:sldMasterIdLst>
-    <p:sldMasterId id="2147483648" r:id="rId1"/>
+    <p:sldMasterId xmlns:r="http://schemas.openxmlformats.org/officeDocument/2006/relationships" id="2147483648" r:id="R14503917f87d42a2"/>
   </p:sldMasterIdLst>
   <p:notesMasterIdLst>
-    <p:notesMasterId r:id="rId13"/>
+    <p:notesMasterId xmlns:r="http://schemas.openxmlformats.org/officeDocument/2006/relationships" r:id="Rfb2ded3e154140da"/>
   </p:notesMasterIdLst>
   <p:sldIdLst>
-    <p:sldId id="256" r:id="rId2"/>
-    <p:sldId id="257" r:id="rId3"/>
-    <p:sldId id="258" r:id="rId4"/>
-    <p:sldId id="259" r:id="rId5"/>
-    <p:sldId id="260" r:id="rId6"/>
-    <p:sldId id="261" r:id="rId7"/>
-    <p:sldId id="262" r:id="rId8"/>
-    <p:sldId id="263" r:id="rId9"/>
-    <p:sldId id="264" r:id="rId10"/>
-    <p:sldId id="265" r:id="rId11"/>
-    <p:sldId id="266" r:id="rId12"/>
+    <p:sldId xmlns:r="http://schemas.openxmlformats.org/officeDocument/2006/relationships" id="256" r:id="R1d818ccc7b01441c"/>
+    <p:sldId xmlns:r="http://schemas.openxmlformats.org/officeDocument/2006/relationships" id="257" r:id="R1e7680b8bdc14e06"/>
+    <p:sldId xmlns:r="http://schemas.openxmlformats.org/officeDocument/2006/relationships" id="258" r:id="Rd5f0c556462a4cc5"/>
+    <p:sldId xmlns:r="http://schemas.openxmlformats.org/officeDocument/2006/relationships" id="259" r:id="Ra9d55f9fa4d44ab1"/>
+    <p:sldId xmlns:r="http://schemas.openxmlformats.org/officeDocument/2006/relationships" id="260" r:id="R0ffe8ebec92c49b6"/>
+    <p:sldId xmlns:r="http://schemas.openxmlformats.org/officeDocument/2006/relationships" id="261" r:id="R21e15d08c50e4123"/>
+    <p:sldId xmlns:r="http://schemas.openxmlformats.org/officeDocument/2006/relationships" id="262" r:id="Rf65edbe1bb7a4425"/>
+    <p:sldId xmlns:r="http://schemas.openxmlformats.org/officeDocument/2006/relationships" id="263" r:id="Rd270b6ec75254e1f"/>
+    <p:sldId xmlns:r="http://schemas.openxmlformats.org/officeDocument/2006/relationships" id="264" r:id="Rfbc5d9aa1f3449b1"/>
+    <p:sldId xmlns:r="http://schemas.openxmlformats.org/officeDocument/2006/relationships" id="265" r:id="R75039e5ba91c4dd1"/>
+    <p:sldId xmlns:r="http://schemas.openxmlformats.org/officeDocument/2006/relationships" id="266" r:id="Ra91bdc424c8c4030"/>
   </p:sldIdLst>
   <p:sldSz cx="12192000" cy="6858000"/>
   <p:notesSz cx="6858000" cy="9144000"/>
   <p:defaultTextStyle>
-    <a:defPPr>
+    <a:defPPr xmlns:a="http://schemas.openxmlformats.org/drawingml/2006/main">
       <a:defRPr lang="en-US"/>
     </a:defPPr>
-    <a:lvl1pPr marL="0" indent="0" algn="l" defTabSz="914400">
+    <a:lvl1pPr xmlns:a="http://schemas.openxmlformats.org/drawingml/2006/main" marL="0" indent="0" algn="l" defTabSz="914400">
       <a:defRPr sz="1800" kern="1200">
         <a:solidFill>
           <a:schemeClr val="tx1"/>
@@ -36,7 +36,7 @@
         <a:cs typeface="+mn-cs"/>
       </a:defRPr>
     </a:lvl1pPr>
-    <a:lvl2pPr marL="457200" indent="0" algn="l" defTabSz="914400">
+    <a:lvl2pPr xmlns:a="http://schemas.openxmlformats.org/drawingml/2006/main" marL="457200" indent="0" algn="l" defTabSz="914400">
       <a:defRPr sz="1800" kern="1200">
         <a:solidFill>
           <a:schemeClr val="tx1"/>
@@ -46,7 +46,7 @@
         <a:cs typeface="+mn-cs"/>
       </a:defRPr>
     </a:lvl2pPr>
-    <a:lvl3pPr marL="914400" indent="0" algn="l" defTabSz="914400">
+    <a:lvl3pPr xmlns:a="http://schemas.openxmlformats.org/drawingml/2006/main" marL="914400" indent="0" algn="l" defTabSz="914400">
       <a:defRPr sz="1800" kern="1200">
         <a:solidFill>
           <a:schemeClr val="tx1"/>
@@ -56,7 +56,7 @@
         <a:cs typeface="+mn-cs"/>
       </a:defRPr>
     </a:lvl3pPr>
-    <a:lvl4pPr marL="1371600" indent="0" algn="l" defTabSz="914400">
+    <a:lvl4pPr xmlns:a="http://schemas.openxmlformats.org/drawingml/2006/main" marL="1371600" indent="0" algn="l" defTabSz="914400">
       <a:defRPr sz="1800" kern="1200">
         <a:solidFill>
           <a:schemeClr val="tx1"/>
@@ -66,7 +66,7 @@
         <a:cs typeface="+mn-cs"/>
       </a:defRPr>
     </a:lvl4pPr>
-    <a:lvl5pPr marL="1828800" indent="0" algn="l" defTabSz="914400">
+    <a:lvl5pPr xmlns:a="http://schemas.openxmlformats.org/drawingml/2006/main" marL="1828800" indent="0" algn="l" defTabSz="914400">
       <a:defRPr sz="1800" kern="1200">
         <a:solidFill>
           <a:schemeClr val="tx1"/>
@@ -76,7 +76,7 @@
         <a:cs typeface="+mn-cs"/>
       </a:defRPr>
     </a:lvl5pPr>
-    <a:lvl6pPr marL="2286000" indent="0" algn="l" defTabSz="914400">
+    <a:lvl6pPr xmlns:a="http://schemas.openxmlformats.org/drawingml/2006/main" marL="2286000" indent="0" algn="l" defTabSz="914400">
       <a:defRPr sz="1800" kern="1200">
         <a:solidFill>
           <a:schemeClr val="tx1"/>
@@ -86,7 +86,7 @@
         <a:cs typeface="+mn-cs"/>
       </a:defRPr>
     </a:lvl6pPr>
-    <a:lvl7pPr marL="2743200" indent="0" algn="l" defTabSz="914400">
+    <a:lvl7pPr xmlns:a="http://schemas.openxmlformats.org/drawingml/2006/main" marL="2743200" indent="0" algn="l" defTabSz="914400">
       <a:defRPr sz="1800" kern="1200">
         <a:solidFill>
           <a:schemeClr val="tx1"/>
@@ -96,7 +96,7 @@
         <a:cs typeface="+mn-cs"/>
       </a:defRPr>
     </a:lvl7pPr>
-    <a:lvl8pPr marL="3200400" indent="0" algn="l" defTabSz="914400">
+    <a:lvl8pPr xmlns:a="http://schemas.openxmlformats.org/drawingml/2006/main" marL="3200400" indent="0" algn="l" defTabSz="914400">
       <a:defRPr sz="1800" kern="1200">
         <a:solidFill>
           <a:schemeClr val="tx1"/>
@@ -106,7 +106,7 @@
         <a:cs typeface="+mn-cs"/>
       </a:defRPr>
     </a:lvl8pPr>
-    <a:lvl9pPr marL="3657600" indent="0" algn="l" defTabSz="914400">
+    <a:lvl9pPr xmlns:a="http://schemas.openxmlformats.org/drawingml/2006/main" marL="3657600" indent="0" algn="l" defTabSz="914400">
       <a:defRPr sz="1800" kern="1200">
         <a:solidFill>
           <a:schemeClr val="tx1"/>
@@ -120,16 +120,1692 @@
 </p:presentation>
 </file>
 
-<file path=ppt/charts/chart1.xml><?xml version="1.0" encoding="utf-8"?>
-<c:chartSpace xmlns:c="http://schemas.openxmlformats.org/drawingml/2006/chart" xmlns:a="http://schemas.openxmlformats.org/drawingml/2006/main" xmlns:r="http://schemas.openxmlformats.org/officeDocument/2006/relationships" xmlns:c16r2="http://schemas.microsoft.com/office/drawing/2015/06/chart">
-  <c:date1904 val="1"/>
-  <c:lang val="zh-CN"/>
+<file path=ppt/notesMasters/notesMaster1.xml><?xml version="1.0" encoding="utf-8"?>
+<p:notesMaster xmlns:p="http://schemas.openxmlformats.org/presentationml/2006/main">
+  <p:cSld>
+    <p:bg>
+      <p:bgRef idx="1001">
+        <a:schemeClr xmlns:a="http://schemas.openxmlformats.org/drawingml/2006/main" val="bg1"/>
+      </p:bgRef>
+    </p:bg>
+    <p:spTree>
+      <p:nvGrpSpPr>
+        <p:cNvPr id="1" name=""/>
+        <p:cNvGrpSpPr/>
+        <p:nvPr/>
+      </p:nvGrpSpPr>
+      <p:grpSpPr>
+        <a:xfrm xmlns:a="http://schemas.openxmlformats.org/drawingml/2006/main"/>
+      </p:grpSpPr>
+      <p:sp>
+        <p:nvSpPr>
+          <p:cNvPr id="2" name="Header Placeholder"/>
+          <p:cNvSpPr/>
+          <p:nvPr>
+            <p:ph type="hdr" sz="quarter"/>
+          </p:nvPr>
+        </p:nvSpPr>
+        <p:spPr>
+          <a:prstGeom xmlns:a="http://schemas.openxmlformats.org/drawingml/2006/main" prst="rect">
+            <a:avLst/>
+          </a:prstGeom>
+        </p:spPr>
+        <p:txBody>
+          <a:bodyPr xmlns:a="http://schemas.openxmlformats.org/drawingml/2006/main"/>
+          <a:lstStyle xmlns:a="http://schemas.openxmlformats.org/drawingml/2006/main"/>
+          <a:p xmlns:a="http://schemas.openxmlformats.org/drawingml/2006/main"/>
+        </p:txBody>
+      </p:sp>
+      <p:sp>
+        <p:nvSpPr>
+          <p:cNvPr id="3" name="Date Placeholder"/>
+          <p:cNvSpPr/>
+          <p:nvPr>
+            <p:ph type="dt" sz="quarter" idx="1"/>
+          </p:nvPr>
+        </p:nvSpPr>
+        <p:spPr>
+          <a:prstGeom xmlns:a="http://schemas.openxmlformats.org/drawingml/2006/main" prst="rect">
+            <a:avLst/>
+          </a:prstGeom>
+        </p:spPr>
+        <p:txBody>
+          <a:bodyPr xmlns:a="http://schemas.openxmlformats.org/drawingml/2006/main"/>
+          <a:lstStyle xmlns:a="http://schemas.openxmlformats.org/drawingml/2006/main"/>
+          <a:p xmlns:a="http://schemas.openxmlformats.org/drawingml/2006/main"/>
+        </p:txBody>
+      </p:sp>
+      <p:sp>
+        <p:nvSpPr>
+          <p:cNvPr id="4" name="Slide Image Placeholder"/>
+          <p:cNvSpPr/>
+          <p:nvPr>
+            <p:ph type="sldImg" idx="2"/>
+          </p:nvPr>
+        </p:nvSpPr>
+        <p:spPr>
+          <a:prstGeom xmlns:a="http://schemas.openxmlformats.org/drawingml/2006/main" prst="rect">
+            <a:avLst/>
+          </a:prstGeom>
+        </p:spPr>
+        <p:txBody>
+          <a:bodyPr xmlns:a="http://schemas.openxmlformats.org/drawingml/2006/main"/>
+          <a:lstStyle xmlns:a="http://schemas.openxmlformats.org/drawingml/2006/main"/>
+          <a:p xmlns:a="http://schemas.openxmlformats.org/drawingml/2006/main"/>
+        </p:txBody>
+      </p:sp>
+      <p:sp>
+        <p:nvSpPr>
+          <p:cNvPr id="5" name="Notes Placeholder"/>
+          <p:cNvSpPr/>
+          <p:nvPr>
+            <p:ph type="body" sz="quarter" idx="3"/>
+          </p:nvPr>
+        </p:nvSpPr>
+        <p:spPr>
+          <a:prstGeom xmlns:a="http://schemas.openxmlformats.org/drawingml/2006/main" prst="rect">
+            <a:avLst/>
+          </a:prstGeom>
+        </p:spPr>
+        <p:txBody>
+          <a:bodyPr xmlns:a="http://schemas.openxmlformats.org/drawingml/2006/main"/>
+          <a:lstStyle xmlns:a="http://schemas.openxmlformats.org/drawingml/2006/main"/>
+          <a:p xmlns:a="http://schemas.openxmlformats.org/drawingml/2006/main"/>
+        </p:txBody>
+      </p:sp>
+      <p:sp>
+        <p:nvSpPr>
+          <p:cNvPr id="6" name="Footer Placeholder"/>
+          <p:cNvSpPr/>
+          <p:nvPr>
+            <p:ph type="ftr" sz="quarter" idx="4"/>
+          </p:nvPr>
+        </p:nvSpPr>
+        <p:spPr>
+          <a:prstGeom xmlns:a="http://schemas.openxmlformats.org/drawingml/2006/main" prst="rect">
+            <a:avLst/>
+          </a:prstGeom>
+        </p:spPr>
+        <p:txBody>
+          <a:bodyPr xmlns:a="http://schemas.openxmlformats.org/drawingml/2006/main"/>
+          <a:lstStyle xmlns:a="http://schemas.openxmlformats.org/drawingml/2006/main"/>
+          <a:p xmlns:a="http://schemas.openxmlformats.org/drawingml/2006/main"/>
+        </p:txBody>
+      </p:sp>
+      <p:sp>
+        <p:nvSpPr>
+          <p:cNvPr id="7" name="Slide Number Placeholder"/>
+          <p:cNvSpPr/>
+          <p:nvPr>
+            <p:ph type="sldNum" sz="quarter" idx="5"/>
+          </p:nvPr>
+        </p:nvSpPr>
+        <p:spPr>
+          <a:prstGeom xmlns:a="http://schemas.openxmlformats.org/drawingml/2006/main" prst="rect">
+            <a:avLst/>
+          </a:prstGeom>
+        </p:spPr>
+        <p:txBody>
+          <a:bodyPr xmlns:a="http://schemas.openxmlformats.org/drawingml/2006/main"/>
+          <a:lstStyle xmlns:a="http://schemas.openxmlformats.org/drawingml/2006/main"/>
+          <a:p xmlns:a="http://schemas.openxmlformats.org/drawingml/2006/main"/>
+        </p:txBody>
+      </p:sp>
+    </p:spTree>
+  </p:cSld>
+  <p:clrMap bg1="lt1" tx1="dk1" bg2="lt2" tx2="dk2" accent1="accent1" accent2="accent2" accent3="accent3" accent4="accent4" accent5="accent5" accent6="accent6" hlink="hlink" folHlink="folHlink"/>
+  <p:notesStyle>
+    <a:lvl1pPr xmlns:a="http://schemas.openxmlformats.org/drawingml/2006/main" marL="0" algn="l" defTabSz="914400" rtl="0" eaLnBrk="1" latinLnBrk="0" hangingPunct="1">
+      <a:defRPr sz="1200" kern="1200"/>
+    </a:lvl1pPr>
+  </p:notesStyle>
+</p:notesMaster>
+</file>
+
+<file path=ppt/notesMasters/theme/theme3.xml><?xml version="1.0" encoding="utf-8"?>
+<a:theme xmlns:a="http://schemas.openxmlformats.org/drawingml/2006/main" name="课程设计主题">
+  <a:themeElements>
+    <a:clrScheme name="课程设计主题">
+      <a:dk1>
+        <a:srgbClr val="000000"/>
+      </a:dk1>
+      <a:lt1>
+        <a:srgbClr val="FFFFFF"/>
+      </a:lt1>
+      <a:dk2>
+        <a:srgbClr val="0E2841"/>
+      </a:dk2>
+      <a:lt2>
+        <a:srgbClr val="E8E8E8"/>
+      </a:lt2>
+      <a:accent1>
+        <a:srgbClr val="156082"/>
+      </a:accent1>
+      <a:accent2>
+        <a:srgbClr val="E97132"/>
+      </a:accent2>
+      <a:accent3>
+        <a:srgbClr val="196B24"/>
+      </a:accent3>
+      <a:accent4>
+        <a:srgbClr val="0F9ED5"/>
+      </a:accent4>
+      <a:accent5>
+        <a:srgbClr val="A02B93"/>
+      </a:accent5>
+      <a:accent6>
+        <a:srgbClr val="4EA72E"/>
+      </a:accent6>
+      <a:hlink>
+        <a:srgbClr val="467886"/>
+      </a:hlink>
+      <a:folHlink>
+        <a:srgbClr val="96607D"/>
+      </a:folHlink>
+    </a:clrScheme>
+    <a:fontScheme name="Office">
+      <a:majorFont>
+        <a:latin typeface="Calibri Light"/>
+        <a:ea typeface="Calibri Light"/>
+        <a:cs typeface="Calibri Light"/>
+      </a:majorFont>
+      <a:minorFont>
+        <a:latin typeface="Calibri"/>
+        <a:ea typeface="Calibri"/>
+        <a:cs typeface="Calibri"/>
+      </a:minorFont>
+    </a:fontScheme>
+    <a:fmtScheme name="课程设计主题">
+      <a:fillStyleLst>
+        <a:solidFill>
+          <a:schemeClr val="phClr"/>
+        </a:solidFill>
+        <a:gradFill>
+          <a:gsLst>
+            <a:gs pos="0">
+              <a:schemeClr val="phClr">
+                <a:tint val="67000"/>
+                <a:lumMod val="110000"/>
+                <a:satMod val="105000"/>
+              </a:schemeClr>
+            </a:gs>
+            <a:gs pos="50000">
+              <a:schemeClr val="phClr">
+                <a:tint val="73000"/>
+                <a:lumMod val="105000"/>
+                <a:satMod val="103000"/>
+              </a:schemeClr>
+            </a:gs>
+            <a:gs pos="100000">
+              <a:schemeClr val="phClr">
+                <a:tint val="81000"/>
+                <a:lumMod val="105000"/>
+                <a:satMod val="109000"/>
+              </a:schemeClr>
+            </a:gs>
+          </a:gsLst>
+          <a:lin ang="5400000" scaled="0"/>
+        </a:gradFill>
+        <a:gradFill>
+          <a:gsLst>
+            <a:gs pos="0">
+              <a:schemeClr val="phClr">
+                <a:tint val="94000"/>
+                <a:lumMod val="102000"/>
+                <a:satMod val="103000"/>
+              </a:schemeClr>
+            </a:gs>
+            <a:gs pos="50000">
+              <a:schemeClr val="phClr">
+                <a:shade val="100000"/>
+                <a:lumMod val="100000"/>
+                <a:satMod val="110000"/>
+              </a:schemeClr>
+            </a:gs>
+            <a:gs pos="100000">
+              <a:schemeClr val="phClr">
+                <a:shade val="78000"/>
+                <a:lumMod val="99000"/>
+                <a:satMod val="120000"/>
+              </a:schemeClr>
+            </a:gs>
+          </a:gsLst>
+          <a:lin ang="5400000" scaled="0"/>
+        </a:gradFill>
+      </a:fillStyleLst>
+      <a:lnStyleLst>
+        <a:ln w="12700">
+          <a:solidFill>
+            <a:schemeClr val="phClr"/>
+          </a:solidFill>
+          <a:prstDash val="solid"/>
+        </a:ln>
+        <a:ln w="19050">
+          <a:solidFill>
+            <a:schemeClr val="phClr"/>
+          </a:solidFill>
+          <a:prstDash val="solid"/>
+        </a:ln>
+        <a:ln w="25400">
+          <a:solidFill>
+            <a:schemeClr val="phClr"/>
+          </a:solidFill>
+          <a:prstDash val="solid"/>
+        </a:ln>
+      </a:lnStyleLst>
+      <a:effectStyleLst>
+        <a:effectStyle>
+          <a:effectLst/>
+        </a:effectStyle>
+        <a:effectStyle>
+          <a:effectLst/>
+        </a:effectStyle>
+        <a:effectStyle>
+          <a:effectLst>
+            <a:outerShdw blurRad="57150" dist="19050" dir="5400000">
+              <a:srgbClr val="000000">
+                <a:alpha val="16000"/>
+              </a:srgbClr>
+            </a:outerShdw>
+          </a:effectLst>
+        </a:effectStyle>
+        <a:effectStyle>
+          <a:effectLst>
+            <a:outerShdw blurRad="19050" dist="9525" dir="5400000">
+              <a:srgbClr val="000000">
+                <a:alpha val="6000"/>
+              </a:srgbClr>
+            </a:outerShdw>
+          </a:effectLst>
+        </a:effectStyle>
+        <a:effectStyle>
+          <a:effectLst>
+            <a:outerShdw blurRad="28575" dist="9525" dir="5400000">
+              <a:srgbClr val="000000">
+                <a:alpha val="8000"/>
+              </a:srgbClr>
+            </a:outerShdw>
+          </a:effectLst>
+        </a:effectStyle>
+        <a:effectStyle>
+          <a:effectLst>
+            <a:outerShdw blurRad="57150" dist="19050" dir="5400000">
+              <a:srgbClr val="000000">
+                <a:alpha val="10000"/>
+              </a:srgbClr>
+            </a:outerShdw>
+          </a:effectLst>
+        </a:effectStyle>
+        <a:effectStyle>
+          <a:effectLst>
+            <a:outerShdw blurRad="114300" dist="38100" dir="5400000">
+              <a:srgbClr val="000000">
+                <a:alpha val="12000"/>
+              </a:srgbClr>
+            </a:outerShdw>
+          </a:effectLst>
+        </a:effectStyle>
+        <a:effectStyle>
+          <a:effectLst>
+            <a:outerShdw blurRad="171450" dist="57150" dir="5400000">
+              <a:srgbClr val="000000">
+                <a:alpha val="16000"/>
+              </a:srgbClr>
+            </a:outerShdw>
+          </a:effectLst>
+        </a:effectStyle>
+        <a:effectStyle>
+          <a:effectLst>
+            <a:outerShdw blurRad="266700" dist="95250" dir="5400000">
+              <a:srgbClr val="000000">
+                <a:alpha val="24000"/>
+              </a:srgbClr>
+            </a:outerShdw>
+          </a:effectLst>
+        </a:effectStyle>
+      </a:effectStyleLst>
+      <a:bgFillStyleLst>
+        <a:solidFill>
+          <a:schemeClr val="phClr"/>
+        </a:solidFill>
+        <a:solidFill>
+          <a:schemeClr val="phClr">
+            <a:tint val="95000"/>
+            <a:satMod val="170000"/>
+          </a:schemeClr>
+        </a:solidFill>
+        <a:gradFill>
+          <a:gsLst>
+            <a:gs pos="0">
+              <a:schemeClr val="phClr">
+                <a:tint val="93000"/>
+                <a:shade val="98000"/>
+                <a:lumMod val="102000"/>
+                <a:satMod val="150000"/>
+              </a:schemeClr>
+            </a:gs>
+            <a:gs pos="50000">
+              <a:schemeClr val="phClr">
+                <a:tint val="98000"/>
+                <a:shade val="90000"/>
+                <a:lumMod val="103000"/>
+                <a:satMod val="130000"/>
+              </a:schemeClr>
+            </a:gs>
+            <a:gs pos="100000">
+              <a:schemeClr val="phClr">
+                <a:shade val="63000"/>
+                <a:satMod val="120000"/>
+              </a:schemeClr>
+            </a:gs>
+          </a:gsLst>
+          <a:lin ang="5400000" scaled="0"/>
+        </a:gradFill>
+      </a:bgFillStyleLst>
+    </a:fmtScheme>
+  </a:themeElements>
+</a:theme>
+</file>
+
+<file path=ppt/notesSlides/notesSlide1.xml><?xml version="1.0" encoding="utf-8"?>
+<p:notes xmlns:p="http://schemas.openxmlformats.org/presentationml/2006/main">
+  <p:cSld>
+    <p:spTree>
+      <p:nvGrpSpPr>
+        <p:cNvPr id="1" name=""/>
+        <p:cNvGrpSpPr/>
+        <p:nvPr/>
+      </p:nvGrpSpPr>
+      <p:grpSpPr>
+        <a:xfrm xmlns:a="http://schemas.openxmlformats.org/drawingml/2006/main"/>
+      </p:grpSpPr>
+      <p:sp>
+        <p:nvSpPr>
+          <p:cNvPr id="2" name="Slide Image Placeholder 1"/>
+          <p:cNvSpPr>
+            <a:spLocks xmlns:a="http://schemas.openxmlformats.org/drawingml/2006/main" noGrp="1"/>
+          </p:cNvSpPr>
+          <p:nvPr>
+            <p:ph type="sldImg" idx="0"/>
+          </p:nvPr>
+        </p:nvSpPr>
+        <p:spPr/>
+      </p:sp>
+      <p:sp>
+        <p:nvSpPr>
+          <p:cNvPr id="3" name="Notes Placeholder 2"/>
+          <p:cNvSpPr>
+            <a:spLocks xmlns:a="http://schemas.openxmlformats.org/drawingml/2006/main" noGrp="1"/>
+          </p:cNvSpPr>
+          <p:nvPr>
+            <p:ph type="body" idx="1"/>
+          </p:nvPr>
+        </p:nvSpPr>
+        <p:spPr/>
+        <p:txBody>
+          <a:bodyPr xmlns:a="http://schemas.openxmlformats.org/drawingml/2006/main"/>
+          <a:lstStyle xmlns:a="http://schemas.openxmlformats.org/drawingml/2006/main"/>
+          <a:p xmlns:a="http://schemas.openxmlformats.org/drawingml/2006/main"/>
+        </p:txBody>
+      </p:sp>
+      <p:sp>
+        <p:nvSpPr>
+          <p:cNvPr id="4" name="Slide Number Placeholder 3"/>
+          <p:cNvSpPr>
+            <a:spLocks xmlns:a="http://schemas.openxmlformats.org/drawingml/2006/main" noGrp="1"/>
+          </p:cNvSpPr>
+          <p:nvPr>
+            <p:ph type="sldNum" idx="5"/>
+          </p:nvPr>
+        </p:nvSpPr>
+        <p:spPr/>
+        <p:txBody>
+          <a:bodyPr xmlns:a="http://schemas.openxmlformats.org/drawingml/2006/main"/>
+          <a:lstStyle xmlns:a="http://schemas.openxmlformats.org/drawingml/2006/main"/>
+          <a:p xmlns:a="http://schemas.openxmlformats.org/drawingml/2006/main"/>
+        </p:txBody>
+      </p:sp>
+    </p:spTree>
+  </p:cSld>
+  <p:clrMapOvr>
+    <a:masterClrMapping xmlns:a="http://schemas.openxmlformats.org/drawingml/2006/main"/>
+  </p:clrMapOvr>
+</p:notes>
+</file>
+
+<file path=ppt/notesSlides/notesSlide10.xml><?xml version="1.0" encoding="utf-8"?>
+<p:notes xmlns:p="http://schemas.openxmlformats.org/presentationml/2006/main">
+  <p:cSld>
+    <p:spTree>
+      <p:nvGrpSpPr>
+        <p:cNvPr id="1" name=""/>
+        <p:cNvGrpSpPr/>
+        <p:nvPr/>
+      </p:nvGrpSpPr>
+      <p:grpSpPr>
+        <a:xfrm xmlns:a="http://schemas.openxmlformats.org/drawingml/2006/main"/>
+      </p:grpSpPr>
+      <p:sp>
+        <p:nvSpPr>
+          <p:cNvPr id="2" name="Slide Image Placeholder 1"/>
+          <p:cNvSpPr>
+            <a:spLocks xmlns:a="http://schemas.openxmlformats.org/drawingml/2006/main" noGrp="1"/>
+          </p:cNvSpPr>
+          <p:nvPr>
+            <p:ph type="sldImg" idx="0"/>
+          </p:nvPr>
+        </p:nvSpPr>
+        <p:spPr/>
+      </p:sp>
+      <p:sp>
+        <p:nvSpPr>
+          <p:cNvPr id="3" name="Notes Placeholder 2"/>
+          <p:cNvSpPr>
+            <a:spLocks xmlns:a="http://schemas.openxmlformats.org/drawingml/2006/main" noGrp="1"/>
+          </p:cNvSpPr>
+          <p:nvPr>
+            <p:ph type="body" idx="1"/>
+          </p:nvPr>
+        </p:nvSpPr>
+        <p:spPr/>
+        <p:txBody>
+          <a:bodyPr xmlns:a="http://schemas.openxmlformats.org/drawingml/2006/main"/>
+          <a:lstStyle xmlns:a="http://schemas.openxmlformats.org/drawingml/2006/main"/>
+          <a:p xmlns:a="http://schemas.openxmlformats.org/drawingml/2006/main"/>
+        </p:txBody>
+      </p:sp>
+      <p:sp>
+        <p:nvSpPr>
+          <p:cNvPr id="4" name="Slide Number Placeholder 3"/>
+          <p:cNvSpPr>
+            <a:spLocks xmlns:a="http://schemas.openxmlformats.org/drawingml/2006/main" noGrp="1"/>
+          </p:cNvSpPr>
+          <p:nvPr>
+            <p:ph type="sldNum" idx="5"/>
+          </p:nvPr>
+        </p:nvSpPr>
+        <p:spPr/>
+        <p:txBody>
+          <a:bodyPr xmlns:a="http://schemas.openxmlformats.org/drawingml/2006/main"/>
+          <a:lstStyle xmlns:a="http://schemas.openxmlformats.org/drawingml/2006/main"/>
+          <a:p xmlns:a="http://schemas.openxmlformats.org/drawingml/2006/main"/>
+        </p:txBody>
+      </p:sp>
+    </p:spTree>
+  </p:cSld>
+  <p:clrMapOvr>
+    <a:masterClrMapping xmlns:a="http://schemas.openxmlformats.org/drawingml/2006/main"/>
+  </p:clrMapOvr>
+</p:notes>
+</file>
+
+<file path=ppt/notesSlides/notesSlide11.xml><?xml version="1.0" encoding="utf-8"?>
+<p:notes xmlns:p="http://schemas.openxmlformats.org/presentationml/2006/main">
+  <p:cSld>
+    <p:spTree>
+      <p:nvGrpSpPr>
+        <p:cNvPr id="1" name=""/>
+        <p:cNvGrpSpPr/>
+        <p:nvPr/>
+      </p:nvGrpSpPr>
+      <p:grpSpPr>
+        <a:xfrm xmlns:a="http://schemas.openxmlformats.org/drawingml/2006/main"/>
+      </p:grpSpPr>
+      <p:sp>
+        <p:nvSpPr>
+          <p:cNvPr id="2" name="Slide Image Placeholder 1"/>
+          <p:cNvSpPr>
+            <a:spLocks xmlns:a="http://schemas.openxmlformats.org/drawingml/2006/main" noGrp="1"/>
+          </p:cNvSpPr>
+          <p:nvPr>
+            <p:ph type="sldImg" idx="0"/>
+          </p:nvPr>
+        </p:nvSpPr>
+        <p:spPr/>
+      </p:sp>
+      <p:sp>
+        <p:nvSpPr>
+          <p:cNvPr id="3" name="Notes Placeholder 2"/>
+          <p:cNvSpPr>
+            <a:spLocks xmlns:a="http://schemas.openxmlformats.org/drawingml/2006/main" noGrp="1"/>
+          </p:cNvSpPr>
+          <p:nvPr>
+            <p:ph type="body" idx="1"/>
+          </p:nvPr>
+        </p:nvSpPr>
+        <p:spPr/>
+        <p:txBody>
+          <a:bodyPr xmlns:a="http://schemas.openxmlformats.org/drawingml/2006/main"/>
+          <a:lstStyle xmlns:a="http://schemas.openxmlformats.org/drawingml/2006/main"/>
+          <a:p xmlns:a="http://schemas.openxmlformats.org/drawingml/2006/main"/>
+        </p:txBody>
+      </p:sp>
+      <p:sp>
+        <p:nvSpPr>
+          <p:cNvPr id="4" name="Slide Number Placeholder 3"/>
+          <p:cNvSpPr>
+            <a:spLocks xmlns:a="http://schemas.openxmlformats.org/drawingml/2006/main" noGrp="1"/>
+          </p:cNvSpPr>
+          <p:nvPr>
+            <p:ph type="sldNum" idx="5"/>
+          </p:nvPr>
+        </p:nvSpPr>
+        <p:spPr/>
+        <p:txBody>
+          <a:bodyPr xmlns:a="http://schemas.openxmlformats.org/drawingml/2006/main"/>
+          <a:lstStyle xmlns:a="http://schemas.openxmlformats.org/drawingml/2006/main"/>
+          <a:p xmlns:a="http://schemas.openxmlformats.org/drawingml/2006/main"/>
+        </p:txBody>
+      </p:sp>
+    </p:spTree>
+  </p:cSld>
+  <p:clrMapOvr>
+    <a:masterClrMapping xmlns:a="http://schemas.openxmlformats.org/drawingml/2006/main"/>
+  </p:clrMapOvr>
+</p:notes>
+</file>
+
+<file path=ppt/notesSlides/notesSlide2.xml><?xml version="1.0" encoding="utf-8"?>
+<p:notes xmlns:p="http://schemas.openxmlformats.org/presentationml/2006/main">
+  <p:cSld>
+    <p:spTree>
+      <p:nvGrpSpPr>
+        <p:cNvPr id="1" name=""/>
+        <p:cNvGrpSpPr/>
+        <p:nvPr/>
+      </p:nvGrpSpPr>
+      <p:grpSpPr>
+        <a:xfrm xmlns:a="http://schemas.openxmlformats.org/drawingml/2006/main"/>
+      </p:grpSpPr>
+      <p:sp>
+        <p:nvSpPr>
+          <p:cNvPr id="2" name="Slide Image Placeholder 1"/>
+          <p:cNvSpPr>
+            <a:spLocks xmlns:a="http://schemas.openxmlformats.org/drawingml/2006/main" noGrp="1"/>
+          </p:cNvSpPr>
+          <p:nvPr>
+            <p:ph type="sldImg" idx="0"/>
+          </p:nvPr>
+        </p:nvSpPr>
+        <p:spPr/>
+      </p:sp>
+      <p:sp>
+        <p:nvSpPr>
+          <p:cNvPr id="3" name="Notes Placeholder 2"/>
+          <p:cNvSpPr>
+            <a:spLocks xmlns:a="http://schemas.openxmlformats.org/drawingml/2006/main" noGrp="1"/>
+          </p:cNvSpPr>
+          <p:nvPr>
+            <p:ph type="body" idx="1"/>
+          </p:nvPr>
+        </p:nvSpPr>
+        <p:spPr/>
+        <p:txBody>
+          <a:bodyPr xmlns:a="http://schemas.openxmlformats.org/drawingml/2006/main"/>
+          <a:lstStyle xmlns:a="http://schemas.openxmlformats.org/drawingml/2006/main"/>
+          <a:p xmlns:a="http://schemas.openxmlformats.org/drawingml/2006/main"/>
+        </p:txBody>
+      </p:sp>
+      <p:sp>
+        <p:nvSpPr>
+          <p:cNvPr id="4" name="Slide Number Placeholder 3"/>
+          <p:cNvSpPr>
+            <a:spLocks xmlns:a="http://schemas.openxmlformats.org/drawingml/2006/main" noGrp="1"/>
+          </p:cNvSpPr>
+          <p:nvPr>
+            <p:ph type="sldNum" idx="5"/>
+          </p:nvPr>
+        </p:nvSpPr>
+        <p:spPr/>
+        <p:txBody>
+          <a:bodyPr xmlns:a="http://schemas.openxmlformats.org/drawingml/2006/main"/>
+          <a:lstStyle xmlns:a="http://schemas.openxmlformats.org/drawingml/2006/main"/>
+          <a:p xmlns:a="http://schemas.openxmlformats.org/drawingml/2006/main"/>
+        </p:txBody>
+      </p:sp>
+    </p:spTree>
+  </p:cSld>
+  <p:clrMapOvr>
+    <a:masterClrMapping xmlns:a="http://schemas.openxmlformats.org/drawingml/2006/main"/>
+  </p:clrMapOvr>
+</p:notes>
+</file>
+
+<file path=ppt/notesSlides/notesSlide3.xml><?xml version="1.0" encoding="utf-8"?>
+<p:notes xmlns:p="http://schemas.openxmlformats.org/presentationml/2006/main">
+  <p:cSld>
+    <p:spTree>
+      <p:nvGrpSpPr>
+        <p:cNvPr id="1" name=""/>
+        <p:cNvGrpSpPr/>
+        <p:nvPr/>
+      </p:nvGrpSpPr>
+      <p:grpSpPr>
+        <a:xfrm xmlns:a="http://schemas.openxmlformats.org/drawingml/2006/main"/>
+      </p:grpSpPr>
+      <p:sp>
+        <p:nvSpPr>
+          <p:cNvPr id="2" name="Slide Image Placeholder 1"/>
+          <p:cNvSpPr>
+            <a:spLocks xmlns:a="http://schemas.openxmlformats.org/drawingml/2006/main" noGrp="1"/>
+          </p:cNvSpPr>
+          <p:nvPr>
+            <p:ph type="sldImg" idx="0"/>
+          </p:nvPr>
+        </p:nvSpPr>
+        <p:spPr/>
+      </p:sp>
+      <p:sp>
+        <p:nvSpPr>
+          <p:cNvPr id="3" name="Notes Placeholder 2"/>
+          <p:cNvSpPr>
+            <a:spLocks xmlns:a="http://schemas.openxmlformats.org/drawingml/2006/main" noGrp="1"/>
+          </p:cNvSpPr>
+          <p:nvPr>
+            <p:ph type="body" idx="1"/>
+          </p:nvPr>
+        </p:nvSpPr>
+        <p:spPr/>
+        <p:txBody>
+          <a:bodyPr xmlns:a="http://schemas.openxmlformats.org/drawingml/2006/main"/>
+          <a:lstStyle xmlns:a="http://schemas.openxmlformats.org/drawingml/2006/main"/>
+          <a:p xmlns:a="http://schemas.openxmlformats.org/drawingml/2006/main"/>
+        </p:txBody>
+      </p:sp>
+      <p:sp>
+        <p:nvSpPr>
+          <p:cNvPr id="4" name="Slide Number Placeholder 3"/>
+          <p:cNvSpPr>
+            <a:spLocks xmlns:a="http://schemas.openxmlformats.org/drawingml/2006/main" noGrp="1"/>
+          </p:cNvSpPr>
+          <p:nvPr>
+            <p:ph type="sldNum" idx="5"/>
+          </p:nvPr>
+        </p:nvSpPr>
+        <p:spPr/>
+        <p:txBody>
+          <a:bodyPr xmlns:a="http://schemas.openxmlformats.org/drawingml/2006/main"/>
+          <a:lstStyle xmlns:a="http://schemas.openxmlformats.org/drawingml/2006/main"/>
+          <a:p xmlns:a="http://schemas.openxmlformats.org/drawingml/2006/main"/>
+        </p:txBody>
+      </p:sp>
+    </p:spTree>
+  </p:cSld>
+  <p:clrMapOvr>
+    <a:masterClrMapping xmlns:a="http://schemas.openxmlformats.org/drawingml/2006/main"/>
+  </p:clrMapOvr>
+</p:notes>
+</file>
+
+<file path=ppt/notesSlides/notesSlide4.xml><?xml version="1.0" encoding="utf-8"?>
+<p:notes xmlns:p="http://schemas.openxmlformats.org/presentationml/2006/main">
+  <p:cSld>
+    <p:spTree>
+      <p:nvGrpSpPr>
+        <p:cNvPr id="1" name=""/>
+        <p:cNvGrpSpPr/>
+        <p:nvPr/>
+      </p:nvGrpSpPr>
+      <p:grpSpPr>
+        <a:xfrm xmlns:a="http://schemas.openxmlformats.org/drawingml/2006/main"/>
+      </p:grpSpPr>
+      <p:sp>
+        <p:nvSpPr>
+          <p:cNvPr id="2" name="Slide Image Placeholder 1"/>
+          <p:cNvSpPr>
+            <a:spLocks xmlns:a="http://schemas.openxmlformats.org/drawingml/2006/main" noGrp="1"/>
+          </p:cNvSpPr>
+          <p:nvPr>
+            <p:ph type="sldImg" idx="0"/>
+          </p:nvPr>
+        </p:nvSpPr>
+        <p:spPr/>
+      </p:sp>
+      <p:sp>
+        <p:nvSpPr>
+          <p:cNvPr id="3" name="Notes Placeholder 2"/>
+          <p:cNvSpPr>
+            <a:spLocks xmlns:a="http://schemas.openxmlformats.org/drawingml/2006/main" noGrp="1"/>
+          </p:cNvSpPr>
+          <p:nvPr>
+            <p:ph type="body" idx="1"/>
+          </p:nvPr>
+        </p:nvSpPr>
+        <p:spPr/>
+        <p:txBody>
+          <a:bodyPr xmlns:a="http://schemas.openxmlformats.org/drawingml/2006/main"/>
+          <a:lstStyle xmlns:a="http://schemas.openxmlformats.org/drawingml/2006/main"/>
+          <a:p xmlns:a="http://schemas.openxmlformats.org/drawingml/2006/main"/>
+        </p:txBody>
+      </p:sp>
+      <p:sp>
+        <p:nvSpPr>
+          <p:cNvPr id="4" name="Slide Number Placeholder 3"/>
+          <p:cNvSpPr>
+            <a:spLocks xmlns:a="http://schemas.openxmlformats.org/drawingml/2006/main" noGrp="1"/>
+          </p:cNvSpPr>
+          <p:nvPr>
+            <p:ph type="sldNum" idx="5"/>
+          </p:nvPr>
+        </p:nvSpPr>
+        <p:spPr/>
+        <p:txBody>
+          <a:bodyPr xmlns:a="http://schemas.openxmlformats.org/drawingml/2006/main"/>
+          <a:lstStyle xmlns:a="http://schemas.openxmlformats.org/drawingml/2006/main"/>
+          <a:p xmlns:a="http://schemas.openxmlformats.org/drawingml/2006/main"/>
+        </p:txBody>
+      </p:sp>
+    </p:spTree>
+  </p:cSld>
+  <p:clrMapOvr>
+    <a:masterClrMapping xmlns:a="http://schemas.openxmlformats.org/drawingml/2006/main"/>
+  </p:clrMapOvr>
+</p:notes>
+</file>
+
+<file path=ppt/notesSlides/notesSlide5.xml><?xml version="1.0" encoding="utf-8"?>
+<p:notes xmlns:p="http://schemas.openxmlformats.org/presentationml/2006/main">
+  <p:cSld>
+    <p:spTree>
+      <p:nvGrpSpPr>
+        <p:cNvPr id="1" name=""/>
+        <p:cNvGrpSpPr/>
+        <p:nvPr/>
+      </p:nvGrpSpPr>
+      <p:grpSpPr>
+        <a:xfrm xmlns:a="http://schemas.openxmlformats.org/drawingml/2006/main"/>
+      </p:grpSpPr>
+      <p:sp>
+        <p:nvSpPr>
+          <p:cNvPr id="2" name="Slide Image Placeholder 1"/>
+          <p:cNvSpPr>
+            <a:spLocks xmlns:a="http://schemas.openxmlformats.org/drawingml/2006/main" noGrp="1"/>
+          </p:cNvSpPr>
+          <p:nvPr>
+            <p:ph type="sldImg" idx="0"/>
+          </p:nvPr>
+        </p:nvSpPr>
+        <p:spPr/>
+      </p:sp>
+      <p:sp>
+        <p:nvSpPr>
+          <p:cNvPr id="3" name="Notes Placeholder 2"/>
+          <p:cNvSpPr>
+            <a:spLocks xmlns:a="http://schemas.openxmlformats.org/drawingml/2006/main" noGrp="1"/>
+          </p:cNvSpPr>
+          <p:nvPr>
+            <p:ph type="body" idx="1"/>
+          </p:nvPr>
+        </p:nvSpPr>
+        <p:spPr/>
+        <p:txBody>
+          <a:bodyPr xmlns:a="http://schemas.openxmlformats.org/drawingml/2006/main"/>
+          <a:lstStyle xmlns:a="http://schemas.openxmlformats.org/drawingml/2006/main"/>
+          <a:p xmlns:a="http://schemas.openxmlformats.org/drawingml/2006/main"/>
+        </p:txBody>
+      </p:sp>
+      <p:sp>
+        <p:nvSpPr>
+          <p:cNvPr id="4" name="Slide Number Placeholder 3"/>
+          <p:cNvSpPr>
+            <a:spLocks xmlns:a="http://schemas.openxmlformats.org/drawingml/2006/main" noGrp="1"/>
+          </p:cNvSpPr>
+          <p:nvPr>
+            <p:ph type="sldNum" idx="5"/>
+          </p:nvPr>
+        </p:nvSpPr>
+        <p:spPr/>
+        <p:txBody>
+          <a:bodyPr xmlns:a="http://schemas.openxmlformats.org/drawingml/2006/main"/>
+          <a:lstStyle xmlns:a="http://schemas.openxmlformats.org/drawingml/2006/main"/>
+          <a:p xmlns:a="http://schemas.openxmlformats.org/drawingml/2006/main"/>
+        </p:txBody>
+      </p:sp>
+    </p:spTree>
+  </p:cSld>
+  <p:clrMapOvr>
+    <a:masterClrMapping xmlns:a="http://schemas.openxmlformats.org/drawingml/2006/main"/>
+  </p:clrMapOvr>
+</p:notes>
+</file>
+
+<file path=ppt/notesSlides/notesSlide6.xml><?xml version="1.0" encoding="utf-8"?>
+<p:notes xmlns:p="http://schemas.openxmlformats.org/presentationml/2006/main">
+  <p:cSld>
+    <p:spTree>
+      <p:nvGrpSpPr>
+        <p:cNvPr id="1" name=""/>
+        <p:cNvGrpSpPr/>
+        <p:nvPr/>
+      </p:nvGrpSpPr>
+      <p:grpSpPr>
+        <a:xfrm xmlns:a="http://schemas.openxmlformats.org/drawingml/2006/main"/>
+      </p:grpSpPr>
+      <p:sp>
+        <p:nvSpPr>
+          <p:cNvPr id="2" name="Slide Image Placeholder 1"/>
+          <p:cNvSpPr>
+            <a:spLocks xmlns:a="http://schemas.openxmlformats.org/drawingml/2006/main" noGrp="1"/>
+          </p:cNvSpPr>
+          <p:nvPr>
+            <p:ph type="sldImg" idx="0"/>
+          </p:nvPr>
+        </p:nvSpPr>
+        <p:spPr/>
+      </p:sp>
+      <p:sp>
+        <p:nvSpPr>
+          <p:cNvPr id="3" name="Notes Placeholder 2"/>
+          <p:cNvSpPr>
+            <a:spLocks xmlns:a="http://schemas.openxmlformats.org/drawingml/2006/main" noGrp="1"/>
+          </p:cNvSpPr>
+          <p:nvPr>
+            <p:ph type="body" idx="1"/>
+          </p:nvPr>
+        </p:nvSpPr>
+        <p:spPr/>
+        <p:txBody>
+          <a:bodyPr xmlns:a="http://schemas.openxmlformats.org/drawingml/2006/main"/>
+          <a:lstStyle xmlns:a="http://schemas.openxmlformats.org/drawingml/2006/main"/>
+          <a:p xmlns:a="http://schemas.openxmlformats.org/drawingml/2006/main"/>
+        </p:txBody>
+      </p:sp>
+      <p:sp>
+        <p:nvSpPr>
+          <p:cNvPr id="4" name="Slide Number Placeholder 3"/>
+          <p:cNvSpPr>
+            <a:spLocks xmlns:a="http://schemas.openxmlformats.org/drawingml/2006/main" noGrp="1"/>
+          </p:cNvSpPr>
+          <p:nvPr>
+            <p:ph type="sldNum" idx="5"/>
+          </p:nvPr>
+        </p:nvSpPr>
+        <p:spPr/>
+        <p:txBody>
+          <a:bodyPr xmlns:a="http://schemas.openxmlformats.org/drawingml/2006/main"/>
+          <a:lstStyle xmlns:a="http://schemas.openxmlformats.org/drawingml/2006/main"/>
+          <a:p xmlns:a="http://schemas.openxmlformats.org/drawingml/2006/main"/>
+        </p:txBody>
+      </p:sp>
+    </p:spTree>
+  </p:cSld>
+  <p:clrMapOvr>
+    <a:masterClrMapping xmlns:a="http://schemas.openxmlformats.org/drawingml/2006/main"/>
+  </p:clrMapOvr>
+</p:notes>
+</file>
+
+<file path=ppt/notesSlides/notesSlide7.xml><?xml version="1.0" encoding="utf-8"?>
+<p:notes xmlns:p="http://schemas.openxmlformats.org/presentationml/2006/main">
+  <p:cSld>
+    <p:spTree>
+      <p:nvGrpSpPr>
+        <p:cNvPr id="1" name=""/>
+        <p:cNvGrpSpPr/>
+        <p:nvPr/>
+      </p:nvGrpSpPr>
+      <p:grpSpPr>
+        <a:xfrm xmlns:a="http://schemas.openxmlformats.org/drawingml/2006/main"/>
+      </p:grpSpPr>
+      <p:sp>
+        <p:nvSpPr>
+          <p:cNvPr id="2" name="Slide Image Placeholder 1"/>
+          <p:cNvSpPr>
+            <a:spLocks xmlns:a="http://schemas.openxmlformats.org/drawingml/2006/main" noGrp="1"/>
+          </p:cNvSpPr>
+          <p:nvPr>
+            <p:ph type="sldImg" idx="0"/>
+          </p:nvPr>
+        </p:nvSpPr>
+        <p:spPr/>
+      </p:sp>
+      <p:sp>
+        <p:nvSpPr>
+          <p:cNvPr id="3" name="Notes Placeholder 2"/>
+          <p:cNvSpPr>
+            <a:spLocks xmlns:a="http://schemas.openxmlformats.org/drawingml/2006/main" noGrp="1"/>
+          </p:cNvSpPr>
+          <p:nvPr>
+            <p:ph type="body" idx="1"/>
+          </p:nvPr>
+        </p:nvSpPr>
+        <p:spPr/>
+        <p:txBody>
+          <a:bodyPr xmlns:a="http://schemas.openxmlformats.org/drawingml/2006/main"/>
+          <a:lstStyle xmlns:a="http://schemas.openxmlformats.org/drawingml/2006/main"/>
+          <a:p xmlns:a="http://schemas.openxmlformats.org/drawingml/2006/main"/>
+        </p:txBody>
+      </p:sp>
+      <p:sp>
+        <p:nvSpPr>
+          <p:cNvPr id="4" name="Slide Number Placeholder 3"/>
+          <p:cNvSpPr>
+            <a:spLocks xmlns:a="http://schemas.openxmlformats.org/drawingml/2006/main" noGrp="1"/>
+          </p:cNvSpPr>
+          <p:nvPr>
+            <p:ph type="sldNum" idx="5"/>
+          </p:nvPr>
+        </p:nvSpPr>
+        <p:spPr/>
+        <p:txBody>
+          <a:bodyPr xmlns:a="http://schemas.openxmlformats.org/drawingml/2006/main"/>
+          <a:lstStyle xmlns:a="http://schemas.openxmlformats.org/drawingml/2006/main"/>
+          <a:p xmlns:a="http://schemas.openxmlformats.org/drawingml/2006/main"/>
+        </p:txBody>
+      </p:sp>
+    </p:spTree>
+  </p:cSld>
+  <p:clrMapOvr>
+    <a:masterClrMapping xmlns:a="http://schemas.openxmlformats.org/drawingml/2006/main"/>
+  </p:clrMapOvr>
+</p:notes>
+</file>
+
+<file path=ppt/notesSlides/notesSlide8.xml><?xml version="1.0" encoding="utf-8"?>
+<p:notes xmlns:p="http://schemas.openxmlformats.org/presentationml/2006/main">
+  <p:cSld>
+    <p:spTree>
+      <p:nvGrpSpPr>
+        <p:cNvPr id="1" name=""/>
+        <p:cNvGrpSpPr/>
+        <p:nvPr/>
+      </p:nvGrpSpPr>
+      <p:grpSpPr>
+        <a:xfrm xmlns:a="http://schemas.openxmlformats.org/drawingml/2006/main"/>
+      </p:grpSpPr>
+      <p:sp>
+        <p:nvSpPr>
+          <p:cNvPr id="2" name="Slide Image Placeholder 1"/>
+          <p:cNvSpPr>
+            <a:spLocks xmlns:a="http://schemas.openxmlformats.org/drawingml/2006/main" noGrp="1"/>
+          </p:cNvSpPr>
+          <p:nvPr>
+            <p:ph type="sldImg" idx="0"/>
+          </p:nvPr>
+        </p:nvSpPr>
+        <p:spPr/>
+      </p:sp>
+      <p:sp>
+        <p:nvSpPr>
+          <p:cNvPr id="3" name="Notes Placeholder 2"/>
+          <p:cNvSpPr>
+            <a:spLocks xmlns:a="http://schemas.openxmlformats.org/drawingml/2006/main" noGrp="1"/>
+          </p:cNvSpPr>
+          <p:nvPr>
+            <p:ph type="body" idx="1"/>
+          </p:nvPr>
+        </p:nvSpPr>
+        <p:spPr/>
+        <p:txBody>
+          <a:bodyPr xmlns:a="http://schemas.openxmlformats.org/drawingml/2006/main"/>
+          <a:lstStyle xmlns:a="http://schemas.openxmlformats.org/drawingml/2006/main"/>
+          <a:p xmlns:a="http://schemas.openxmlformats.org/drawingml/2006/main"/>
+        </p:txBody>
+      </p:sp>
+      <p:sp>
+        <p:nvSpPr>
+          <p:cNvPr id="4" name="Slide Number Placeholder 3"/>
+          <p:cNvSpPr>
+            <a:spLocks xmlns:a="http://schemas.openxmlformats.org/drawingml/2006/main" noGrp="1"/>
+          </p:cNvSpPr>
+          <p:nvPr>
+            <p:ph type="sldNum" idx="5"/>
+          </p:nvPr>
+        </p:nvSpPr>
+        <p:spPr/>
+        <p:txBody>
+          <a:bodyPr xmlns:a="http://schemas.openxmlformats.org/drawingml/2006/main"/>
+          <a:lstStyle xmlns:a="http://schemas.openxmlformats.org/drawingml/2006/main"/>
+          <a:p xmlns:a="http://schemas.openxmlformats.org/drawingml/2006/main"/>
+        </p:txBody>
+      </p:sp>
+    </p:spTree>
+  </p:cSld>
+  <p:clrMapOvr>
+    <a:masterClrMapping xmlns:a="http://schemas.openxmlformats.org/drawingml/2006/main"/>
+  </p:clrMapOvr>
+</p:notes>
+</file>
+
+<file path=ppt/notesSlides/notesSlide9.xml><?xml version="1.0" encoding="utf-8"?>
+<p:notes xmlns:p="http://schemas.openxmlformats.org/presentationml/2006/main">
+  <p:cSld>
+    <p:spTree>
+      <p:nvGrpSpPr>
+        <p:cNvPr id="1" name=""/>
+        <p:cNvGrpSpPr/>
+        <p:nvPr/>
+      </p:nvGrpSpPr>
+      <p:grpSpPr>
+        <a:xfrm xmlns:a="http://schemas.openxmlformats.org/drawingml/2006/main"/>
+      </p:grpSpPr>
+      <p:sp>
+        <p:nvSpPr>
+          <p:cNvPr id="2" name="Slide Image Placeholder 1"/>
+          <p:cNvSpPr>
+            <a:spLocks xmlns:a="http://schemas.openxmlformats.org/drawingml/2006/main" noGrp="1"/>
+          </p:cNvSpPr>
+          <p:nvPr>
+            <p:ph type="sldImg" idx="0"/>
+          </p:nvPr>
+        </p:nvSpPr>
+        <p:spPr/>
+      </p:sp>
+      <p:sp>
+        <p:nvSpPr>
+          <p:cNvPr id="3" name="Notes Placeholder 2"/>
+          <p:cNvSpPr>
+            <a:spLocks xmlns:a="http://schemas.openxmlformats.org/drawingml/2006/main" noGrp="1"/>
+          </p:cNvSpPr>
+          <p:nvPr>
+            <p:ph type="body" idx="1"/>
+          </p:nvPr>
+        </p:nvSpPr>
+        <p:spPr/>
+        <p:txBody>
+          <a:bodyPr xmlns:a="http://schemas.openxmlformats.org/drawingml/2006/main"/>
+          <a:lstStyle xmlns:a="http://schemas.openxmlformats.org/drawingml/2006/main"/>
+          <a:p xmlns:a="http://schemas.openxmlformats.org/drawingml/2006/main"/>
+        </p:txBody>
+      </p:sp>
+      <p:sp>
+        <p:nvSpPr>
+          <p:cNvPr id="4" name="Slide Number Placeholder 3"/>
+          <p:cNvSpPr>
+            <a:spLocks xmlns:a="http://schemas.openxmlformats.org/drawingml/2006/main" noGrp="1"/>
+          </p:cNvSpPr>
+          <p:nvPr>
+            <p:ph type="sldNum" idx="5"/>
+          </p:nvPr>
+        </p:nvSpPr>
+        <p:spPr/>
+        <p:txBody>
+          <a:bodyPr xmlns:a="http://schemas.openxmlformats.org/drawingml/2006/main"/>
+          <a:lstStyle xmlns:a="http://schemas.openxmlformats.org/drawingml/2006/main"/>
+          <a:p xmlns:a="http://schemas.openxmlformats.org/drawingml/2006/main"/>
+        </p:txBody>
+      </p:sp>
+    </p:spTree>
+  </p:cSld>
+  <p:clrMapOvr>
+    <a:masterClrMapping xmlns:a="http://schemas.openxmlformats.org/drawingml/2006/main"/>
+  </p:clrMapOvr>
+</p:notes>
+</file>
+
+<file path=ppt/slideLayouts/slideLayout1.xml><?xml version="1.0" encoding="utf-8"?>
+<p:sldLayout xmlns:p="http://schemas.openxmlformats.org/presentationml/2006/main" type="title">
+  <p:cSld name="Title Slide">
+    <p:spTree>
+      <p:nvGrpSpPr>
+        <p:cNvPr id="1" name=""/>
+        <p:cNvGrpSpPr/>
+        <p:nvPr/>
+      </p:nvGrpSpPr>
+      <p:grpSpPr>
+        <a:xfrm xmlns:a="http://schemas.openxmlformats.org/drawingml/2006/main"/>
+      </p:grpSpPr>
+    </p:spTree>
+  </p:cSld>
+</p:sldLayout>
+</file>
+
+<file path=ppt/slideMasters/slideMaster1.xml><?xml version="1.0" encoding="utf-8"?>
+<p:sldMaster xmlns:p="http://schemas.openxmlformats.org/presentationml/2006/main">
+  <p:cSld name="Master">
+    <p:bg>
+      <p:bgRef idx="1001">
+        <a:schemeClr xmlns:a="http://schemas.openxmlformats.org/drawingml/2006/main" val="bg1"/>
+      </p:bgRef>
+    </p:bg>
+    <p:spTree>
+      <p:nvGrpSpPr>
+        <p:cNvPr id="1" name=""/>
+        <p:cNvGrpSpPr/>
+        <p:nvPr/>
+      </p:nvGrpSpPr>
+      <p:grpSpPr>
+        <a:xfrm xmlns:a="http://schemas.openxmlformats.org/drawingml/2006/main"/>
+      </p:grpSpPr>
+    </p:spTree>
+  </p:cSld>
+  <p:clrMap bg1="lt1" tx1="dk1" bg2="lt2" tx2="dk2" accent1="accent1" accent2="accent2" accent3="accent3" accent4="accent4" accent5="accent5" accent6="accent6" hlink="hlink" folHlink="folHlink"/>
+  <p:sldLayoutIdLst>
+    <p:sldLayoutId xmlns:r="http://schemas.openxmlformats.org/officeDocument/2006/relationships" id="2147483649" r:id="R07b9b3882ff14b06"/>
+  </p:sldLayoutIdLst>
+  <p:txStyles>
+    <p:titleStyle>
+      <a:lvl1pPr xmlns:a="http://schemas.openxmlformats.org/drawingml/2006/main" algn="l">
+        <a:lnSpc>
+          <a:spcPct val="90000"/>
+        </a:lnSpc>
+        <a:spcBef>
+          <a:spcPts val="0"/>
+        </a:spcBef>
+        <a:buNone/>
+        <a:defRPr sz="4400">
+          <a:solidFill>
+            <a:schemeClr val="tx1"/>
+          </a:solidFill>
+          <a:latin typeface="+mj-lt"/>
+          <a:ea typeface="+mj-lt"/>
+          <a:cs typeface="+mj-lt"/>
+        </a:defRPr>
+      </a:lvl1pPr>
+    </p:titleStyle>
+    <p:bodyStyle>
+      <a:lvl1pPr xmlns:a="http://schemas.openxmlformats.org/drawingml/2006/main" marL="228600" indent="-228600" algn="l">
+        <a:lnSpc>
+          <a:spcPct val="90000"/>
+        </a:lnSpc>
+        <a:spcBef>
+          <a:spcPts val="1000"/>
+        </a:spcBef>
+        <a:buChar char="•"/>
+        <a:defRPr sz="2800">
+          <a:solidFill>
+            <a:schemeClr val="tx1"/>
+          </a:solidFill>
+          <a:latin typeface="+mn-lt"/>
+          <a:ea typeface="+mn-lt"/>
+          <a:cs typeface="+mn-lt"/>
+        </a:defRPr>
+      </a:lvl1pPr>
+      <a:lvl2pPr xmlns:a="http://schemas.openxmlformats.org/drawingml/2006/main" marL="685800" indent="-228600" algn="l">
+        <a:lnSpc>
+          <a:spcPct val="90000"/>
+        </a:lnSpc>
+        <a:spcBef>
+          <a:spcPts val="500"/>
+        </a:spcBef>
+        <a:buChar char="•"/>
+        <a:defRPr sz="2400">
+          <a:solidFill>
+            <a:schemeClr val="tx1"/>
+          </a:solidFill>
+          <a:latin typeface="+mn-lt"/>
+          <a:ea typeface="+mn-lt"/>
+          <a:cs typeface="+mn-lt"/>
+        </a:defRPr>
+      </a:lvl2pPr>
+      <a:lvl3pPr xmlns:a="http://schemas.openxmlformats.org/drawingml/2006/main" marL="1143000" indent="-228600" algn="l">
+        <a:lnSpc>
+          <a:spcPct val="90000"/>
+        </a:lnSpc>
+        <a:spcBef>
+          <a:spcPts val="500"/>
+        </a:spcBef>
+        <a:buChar char="•"/>
+        <a:defRPr sz="2000">
+          <a:solidFill>
+            <a:schemeClr val="tx1"/>
+          </a:solidFill>
+          <a:latin typeface="+mn-lt"/>
+          <a:ea typeface="+mn-lt"/>
+          <a:cs typeface="+mn-lt"/>
+        </a:defRPr>
+      </a:lvl3pPr>
+      <a:lvl4pPr xmlns:a="http://schemas.openxmlformats.org/drawingml/2006/main" marL="1600200" indent="-228600" algn="l">
+        <a:lnSpc>
+          <a:spcPct val="90000"/>
+        </a:lnSpc>
+        <a:spcBef>
+          <a:spcPts val="500"/>
+        </a:spcBef>
+        <a:buChar char="•"/>
+        <a:defRPr sz="1800">
+          <a:solidFill>
+            <a:schemeClr val="tx1"/>
+          </a:solidFill>
+          <a:latin typeface="+mn-lt"/>
+          <a:ea typeface="+mn-lt"/>
+          <a:cs typeface="+mn-lt"/>
+        </a:defRPr>
+      </a:lvl4pPr>
+      <a:lvl5pPr xmlns:a="http://schemas.openxmlformats.org/drawingml/2006/main" marL="2057400" indent="-228600" algn="l">
+        <a:lnSpc>
+          <a:spcPct val="90000"/>
+        </a:lnSpc>
+        <a:spcBef>
+          <a:spcPts val="500"/>
+        </a:spcBef>
+        <a:buChar char="•"/>
+        <a:defRPr sz="1800">
+          <a:solidFill>
+            <a:schemeClr val="tx1"/>
+          </a:solidFill>
+          <a:latin typeface="+mn-lt"/>
+          <a:ea typeface="+mn-lt"/>
+          <a:cs typeface="+mn-lt"/>
+        </a:defRPr>
+      </a:lvl5pPr>
+      <a:lvl6pPr xmlns:a="http://schemas.openxmlformats.org/drawingml/2006/main" marL="2514600" indent="-228600" algn="l">
+        <a:lnSpc>
+          <a:spcPct val="90000"/>
+        </a:lnSpc>
+        <a:spcBef>
+          <a:spcPts val="500"/>
+        </a:spcBef>
+        <a:buChar char="•"/>
+        <a:defRPr sz="1800">
+          <a:solidFill>
+            <a:schemeClr val="tx1"/>
+          </a:solidFill>
+          <a:latin typeface="+mn-lt"/>
+          <a:ea typeface="+mn-lt"/>
+          <a:cs typeface="+mn-lt"/>
+        </a:defRPr>
+      </a:lvl6pPr>
+      <a:lvl7pPr xmlns:a="http://schemas.openxmlformats.org/drawingml/2006/main" marL="2971800" indent="-228600" algn="l">
+        <a:lnSpc>
+          <a:spcPct val="90000"/>
+        </a:lnSpc>
+        <a:spcBef>
+          <a:spcPts val="500"/>
+        </a:spcBef>
+        <a:buChar char="•"/>
+        <a:defRPr sz="1800">
+          <a:solidFill>
+            <a:schemeClr val="tx1"/>
+          </a:solidFill>
+          <a:latin typeface="+mn-lt"/>
+          <a:ea typeface="+mn-lt"/>
+          <a:cs typeface="+mn-lt"/>
+        </a:defRPr>
+      </a:lvl7pPr>
+      <a:lvl8pPr xmlns:a="http://schemas.openxmlformats.org/drawingml/2006/main" marL="3429000" indent="-228600" algn="l">
+        <a:lnSpc>
+          <a:spcPct val="90000"/>
+        </a:lnSpc>
+        <a:spcBef>
+          <a:spcPts val="500"/>
+        </a:spcBef>
+        <a:buChar char="•"/>
+        <a:defRPr sz="1800">
+          <a:solidFill>
+            <a:schemeClr val="tx1"/>
+          </a:solidFill>
+          <a:latin typeface="+mn-lt"/>
+          <a:ea typeface="+mn-lt"/>
+          <a:cs typeface="+mn-lt"/>
+        </a:defRPr>
+      </a:lvl8pPr>
+      <a:lvl9pPr xmlns:a="http://schemas.openxmlformats.org/drawingml/2006/main" marL="3886200" indent="-228600" algn="l">
+        <a:lnSpc>
+          <a:spcPct val="90000"/>
+        </a:lnSpc>
+        <a:spcBef>
+          <a:spcPts val="500"/>
+        </a:spcBef>
+        <a:buChar char="•"/>
+        <a:defRPr sz="1800">
+          <a:solidFill>
+            <a:schemeClr val="tx1"/>
+          </a:solidFill>
+          <a:latin typeface="+mn-lt"/>
+          <a:ea typeface="+mn-lt"/>
+          <a:cs typeface="+mn-lt"/>
+        </a:defRPr>
+      </a:lvl9pPr>
+    </p:bodyStyle>
+    <p:otherStyle>
+      <a:lvl1pPr xmlns:a="http://schemas.openxmlformats.org/drawingml/2006/main" marL="0" algn="l">
+        <a:buNone/>
+        <a:defRPr sz="1800">
+          <a:solidFill>
+            <a:schemeClr val="tx1"/>
+          </a:solidFill>
+          <a:latin typeface="+mn-lt"/>
+          <a:ea typeface="+mn-lt"/>
+          <a:cs typeface="+mn-lt"/>
+        </a:defRPr>
+      </a:lvl1pPr>
+      <a:lvl2pPr xmlns:a="http://schemas.openxmlformats.org/drawingml/2006/main" marL="457200" algn="l">
+        <a:buNone/>
+        <a:defRPr sz="1800">
+          <a:solidFill>
+            <a:schemeClr val="tx1"/>
+          </a:solidFill>
+          <a:latin typeface="+mn-lt"/>
+          <a:ea typeface="+mn-lt"/>
+          <a:cs typeface="+mn-lt"/>
+        </a:defRPr>
+      </a:lvl2pPr>
+      <a:lvl3pPr xmlns:a="http://schemas.openxmlformats.org/drawingml/2006/main" marL="914400" algn="l">
+        <a:buNone/>
+        <a:defRPr sz="1800">
+          <a:solidFill>
+            <a:schemeClr val="tx1"/>
+          </a:solidFill>
+          <a:latin typeface="+mn-lt"/>
+          <a:ea typeface="+mn-lt"/>
+          <a:cs typeface="+mn-lt"/>
+        </a:defRPr>
+      </a:lvl3pPr>
+      <a:lvl4pPr xmlns:a="http://schemas.openxmlformats.org/drawingml/2006/main" marL="1371600" algn="l">
+        <a:buNone/>
+        <a:defRPr sz="1800">
+          <a:solidFill>
+            <a:schemeClr val="tx1"/>
+          </a:solidFill>
+          <a:latin typeface="+mn-lt"/>
+          <a:ea typeface="+mn-lt"/>
+          <a:cs typeface="+mn-lt"/>
+        </a:defRPr>
+      </a:lvl4pPr>
+      <a:lvl5pPr xmlns:a="http://schemas.openxmlformats.org/drawingml/2006/main" marL="1828800" algn="l">
+        <a:buNone/>
+        <a:defRPr sz="1800">
+          <a:solidFill>
+            <a:schemeClr val="tx1"/>
+          </a:solidFill>
+          <a:latin typeface="+mn-lt"/>
+          <a:ea typeface="+mn-lt"/>
+          <a:cs typeface="+mn-lt"/>
+        </a:defRPr>
+      </a:lvl5pPr>
+      <a:lvl6pPr xmlns:a="http://schemas.openxmlformats.org/drawingml/2006/main" marL="2286000" algn="l">
+        <a:buNone/>
+        <a:defRPr sz="1800">
+          <a:solidFill>
+            <a:schemeClr val="tx1"/>
+          </a:solidFill>
+          <a:latin typeface="+mn-lt"/>
+          <a:ea typeface="+mn-lt"/>
+          <a:cs typeface="+mn-lt"/>
+        </a:defRPr>
+      </a:lvl6pPr>
+      <a:lvl7pPr xmlns:a="http://schemas.openxmlformats.org/drawingml/2006/main" marL="2743200" algn="l">
+        <a:buNone/>
+        <a:defRPr sz="1800">
+          <a:solidFill>
+            <a:schemeClr val="tx1"/>
+          </a:solidFill>
+          <a:latin typeface="+mn-lt"/>
+          <a:ea typeface="+mn-lt"/>
+          <a:cs typeface="+mn-lt"/>
+        </a:defRPr>
+      </a:lvl7pPr>
+      <a:lvl8pPr xmlns:a="http://schemas.openxmlformats.org/drawingml/2006/main" marL="3200400" algn="l">
+        <a:buNone/>
+        <a:defRPr sz="1800">
+          <a:solidFill>
+            <a:schemeClr val="tx1"/>
+          </a:solidFill>
+          <a:latin typeface="+mn-lt"/>
+          <a:ea typeface="+mn-lt"/>
+          <a:cs typeface="+mn-lt"/>
+        </a:defRPr>
+      </a:lvl8pPr>
+      <a:lvl9pPr xmlns:a="http://schemas.openxmlformats.org/drawingml/2006/main" marL="3657600" algn="l">
+        <a:buNone/>
+        <a:defRPr sz="1800">
+          <a:solidFill>
+            <a:schemeClr val="tx1"/>
+          </a:solidFill>
+          <a:latin typeface="+mn-lt"/>
+          <a:ea typeface="+mn-lt"/>
+          <a:cs typeface="+mn-lt"/>
+        </a:defRPr>
+      </a:lvl9pPr>
+    </p:otherStyle>
+  </p:txStyles>
+</p:sldMaster>
+</file>
+
+<file path=ppt/slideMasters/theme/theme2.xml><?xml version="1.0" encoding="utf-8"?>
+<a:theme xmlns:a="http://schemas.openxmlformats.org/drawingml/2006/main" name="课程设计主题">
+  <a:themeElements>
+    <a:clrScheme name="课程设计主题">
+      <a:dk1>
+        <a:srgbClr val="000000"/>
+      </a:dk1>
+      <a:lt1>
+        <a:srgbClr val="FFFFFF"/>
+      </a:lt1>
+      <a:dk2>
+        <a:srgbClr val="0E2841"/>
+      </a:dk2>
+      <a:lt2>
+        <a:srgbClr val="E8E8E8"/>
+      </a:lt2>
+      <a:accent1>
+        <a:srgbClr val="156082"/>
+      </a:accent1>
+      <a:accent2>
+        <a:srgbClr val="E97132"/>
+      </a:accent2>
+      <a:accent3>
+        <a:srgbClr val="196B24"/>
+      </a:accent3>
+      <a:accent4>
+        <a:srgbClr val="0F9ED5"/>
+      </a:accent4>
+      <a:accent5>
+        <a:srgbClr val="A02B93"/>
+      </a:accent5>
+      <a:accent6>
+        <a:srgbClr val="4EA72E"/>
+      </a:accent6>
+      <a:hlink>
+        <a:srgbClr val="467886"/>
+      </a:hlink>
+      <a:folHlink>
+        <a:srgbClr val="96607D"/>
+      </a:folHlink>
+    </a:clrScheme>
+    <a:fontScheme name="Office">
+      <a:majorFont>
+        <a:latin typeface="Calibri Light"/>
+        <a:ea typeface="Calibri Light"/>
+        <a:cs typeface="Calibri Light"/>
+      </a:majorFont>
+      <a:minorFont>
+        <a:latin typeface="Calibri"/>
+        <a:ea typeface="Calibri"/>
+        <a:cs typeface="Calibri"/>
+      </a:minorFont>
+    </a:fontScheme>
+    <a:fmtScheme name="课程设计主题">
+      <a:fillStyleLst>
+        <a:solidFill>
+          <a:schemeClr val="phClr"/>
+        </a:solidFill>
+        <a:gradFill>
+          <a:gsLst>
+            <a:gs pos="0">
+              <a:schemeClr val="phClr">
+                <a:tint val="67000"/>
+                <a:lumMod val="110000"/>
+                <a:satMod val="105000"/>
+              </a:schemeClr>
+            </a:gs>
+            <a:gs pos="50000">
+              <a:schemeClr val="phClr">
+                <a:tint val="73000"/>
+                <a:lumMod val="105000"/>
+                <a:satMod val="103000"/>
+              </a:schemeClr>
+            </a:gs>
+            <a:gs pos="100000">
+              <a:schemeClr val="phClr">
+                <a:tint val="81000"/>
+                <a:lumMod val="105000"/>
+                <a:satMod val="109000"/>
+              </a:schemeClr>
+            </a:gs>
+          </a:gsLst>
+          <a:lin ang="5400000" scaled="0"/>
+        </a:gradFill>
+        <a:gradFill>
+          <a:gsLst>
+            <a:gs pos="0">
+              <a:schemeClr val="phClr">
+                <a:tint val="94000"/>
+                <a:lumMod val="102000"/>
+                <a:satMod val="103000"/>
+              </a:schemeClr>
+            </a:gs>
+            <a:gs pos="50000">
+              <a:schemeClr val="phClr">
+                <a:shade val="100000"/>
+                <a:lumMod val="100000"/>
+                <a:satMod val="110000"/>
+              </a:schemeClr>
+            </a:gs>
+            <a:gs pos="100000">
+              <a:schemeClr val="phClr">
+                <a:shade val="78000"/>
+                <a:lumMod val="99000"/>
+                <a:satMod val="120000"/>
+              </a:schemeClr>
+            </a:gs>
+          </a:gsLst>
+          <a:lin ang="5400000" scaled="0"/>
+        </a:gradFill>
+      </a:fillStyleLst>
+      <a:lnStyleLst>
+        <a:ln w="12700">
+          <a:solidFill>
+            <a:schemeClr val="phClr"/>
+          </a:solidFill>
+          <a:prstDash val="solid"/>
+        </a:ln>
+        <a:ln w="19050">
+          <a:solidFill>
+            <a:schemeClr val="phClr"/>
+          </a:solidFill>
+          <a:prstDash val="solid"/>
+        </a:ln>
+        <a:ln w="25400">
+          <a:solidFill>
+            <a:schemeClr val="phClr"/>
+          </a:solidFill>
+          <a:prstDash val="solid"/>
+        </a:ln>
+      </a:lnStyleLst>
+      <a:effectStyleLst>
+        <a:effectStyle>
+          <a:effectLst/>
+        </a:effectStyle>
+        <a:effectStyle>
+          <a:effectLst/>
+        </a:effectStyle>
+        <a:effectStyle>
+          <a:effectLst>
+            <a:outerShdw blurRad="57150" dist="19050" dir="5400000">
+              <a:srgbClr val="000000">
+                <a:alpha val="16000"/>
+              </a:srgbClr>
+            </a:outerShdw>
+          </a:effectLst>
+        </a:effectStyle>
+        <a:effectStyle>
+          <a:effectLst>
+            <a:outerShdw blurRad="19050" dist="9525" dir="5400000">
+              <a:srgbClr val="000000">
+                <a:alpha val="6000"/>
+              </a:srgbClr>
+            </a:outerShdw>
+          </a:effectLst>
+        </a:effectStyle>
+        <a:effectStyle>
+          <a:effectLst>
+            <a:outerShdw blurRad="28575" dist="9525" dir="5400000">
+              <a:srgbClr val="000000">
+                <a:alpha val="8000"/>
+              </a:srgbClr>
+            </a:outerShdw>
+          </a:effectLst>
+        </a:effectStyle>
+        <a:effectStyle>
+          <a:effectLst>
+            <a:outerShdw blurRad="57150" dist="19050" dir="5400000">
+              <a:srgbClr val="000000">
+                <a:alpha val="10000"/>
+              </a:srgbClr>
+            </a:outerShdw>
+          </a:effectLst>
+        </a:effectStyle>
+        <a:effectStyle>
+          <a:effectLst>
+            <a:outerShdw blurRad="114300" dist="38100" dir="5400000">
+              <a:srgbClr val="000000">
+                <a:alpha val="12000"/>
+              </a:srgbClr>
+            </a:outerShdw>
+          </a:effectLst>
+        </a:effectStyle>
+        <a:effectStyle>
+          <a:effectLst>
+            <a:outerShdw blurRad="171450" dist="57150" dir="5400000">
+              <a:srgbClr val="000000">
+                <a:alpha val="16000"/>
+              </a:srgbClr>
+            </a:outerShdw>
+          </a:effectLst>
+        </a:effectStyle>
+        <a:effectStyle>
+          <a:effectLst>
+            <a:outerShdw blurRad="266700" dist="95250" dir="5400000">
+              <a:srgbClr val="000000">
+                <a:alpha val="24000"/>
+              </a:srgbClr>
+            </a:outerShdw>
+          </a:effectLst>
+        </a:effectStyle>
+      </a:effectStyleLst>
+      <a:bgFillStyleLst>
+        <a:solidFill>
+          <a:schemeClr val="phClr"/>
+        </a:solidFill>
+        <a:solidFill>
+          <a:schemeClr val="phClr">
+            <a:tint val="95000"/>
+            <a:satMod val="170000"/>
+          </a:schemeClr>
+        </a:solidFill>
+        <a:gradFill>
+          <a:gsLst>
+            <a:gs pos="0">
+              <a:schemeClr val="phClr">
+                <a:tint val="93000"/>
+                <a:shade val="98000"/>
+                <a:lumMod val="102000"/>
+                <a:satMod val="150000"/>
+              </a:schemeClr>
+            </a:gs>
+            <a:gs pos="50000">
+              <a:schemeClr val="phClr">
+                <a:tint val="98000"/>
+                <a:shade val="90000"/>
+                <a:lumMod val="103000"/>
+                <a:satMod val="130000"/>
+              </a:schemeClr>
+            </a:gs>
+            <a:gs pos="100000">
+              <a:schemeClr val="phClr">
+                <a:shade val="63000"/>
+                <a:satMod val="120000"/>
+              </a:schemeClr>
+            </a:gs>
+          </a:gsLst>
+          <a:lin ang="5400000" scaled="0"/>
+        </a:gradFill>
+      </a:bgFillStyleLst>
+    </a:fmtScheme>
+  </a:themeElements>
+</a:theme>
+</file>
+
+<file path=ppt/slides/charts/chart1.xml><?xml version="1.0" encoding="utf-8"?>
+<c:chartSpace xmlns:c="http://schemas.openxmlformats.org/drawingml/2006/chart">
+  <c:lang val="en-US"/>
   <c:roundedCorners val="1"/>
   <c:style val="2"/>
   <c:chart>
     <c:autoTitleDeleted val="1"/>
     <c:plotArea>
-      <c:layout/>
       <c:barChart>
         <c:barDir val="col"/>
         <c:grouping val="clustered"/>
@@ -141,23 +1817,21 @@
             <c:v>运行电流/A</c:v>
           </c:tx>
           <c:spPr>
-            <a:solidFill>
+            <a:solidFill xmlns:a="http://schemas.openxmlformats.org/drawingml/2006/main">
               <a:srgbClr val="3D8DFF"/>
             </a:solidFill>
           </c:spPr>
-          <c:invertIfNegative val="1"/>
           <c:dLbls>
             <c:spPr>
-              <a:noFill/>
-              <a:ln>
+              <a:noFill xmlns:a="http://schemas.openxmlformats.org/drawingml/2006/main"/>
+              <a:ln xmlns:a="http://schemas.openxmlformats.org/drawingml/2006/main">
                 <a:noFill/>
               </a:ln>
-              <a:effectLst/>
             </c:spPr>
             <c:txPr>
-              <a:bodyPr anchorCtr="1"/>
-              <a:lstStyle/>
-              <a:p>
+              <a:bodyPr xmlns:a="http://schemas.openxmlformats.org/drawingml/2006/main" anchorCtr="1"/>
+              <a:lstStyle xmlns:a="http://schemas.openxmlformats.org/drawingml/2006/main"/>
+              <a:p xmlns:a="http://schemas.openxmlformats.org/drawingml/2006/main">
                 <a:pPr>
                   <a:defRPr sz="975">
                     <a:solidFill>
@@ -165,7 +1839,6 @@
                     </a:solidFill>
                   </a:defRPr>
                 </a:pPr>
-                <a:endParaRPr lang="zh-CN"/>
               </a:p>
             </c:txPr>
             <c:dLblPos val="outEnd"/>
@@ -176,11 +1849,6 @@
             <c:showPercent val="0"/>
             <c:showBubbleSize val="0"/>
             <c:showLeaderLines val="0"/>
-            <c:extLst>
-              <c:ext xmlns:c15="http://schemas.microsoft.com/office/drawing/2012/chart" uri="{CE6537A1-D6FC-4f65-9D91-7224C49458BB}">
-                <c15:showLeaderLines val="0"/>
-              </c:ext>
-            </c:extLst>
           </c:dLbls>
           <c:cat>
             <c:strLit>
@@ -207,27 +1875,13 @@
                 <c:v>367.78</c:v>
               </c:pt>
               <c:pt idx="1">
-                <c:v>735.55899999999997</c:v>
+                <c:v>735.559</c:v>
               </c:pt>
               <c:pt idx="2">
-                <c:v>472.37700000000001</c:v>
+                <c:v>472.377</c:v>
               </c:pt>
             </c:numLit>
           </c:val>
-          <c:extLst>
-            <c:ext xmlns:c14="http://schemas.microsoft.com/office/drawing/2007/8/2/chart" uri="{6F2FDCE9-48DA-4B69-8628-5D25D57E5C99}">
-              <c14:invertSolidFillFmt>
-                <c14:spPr xmlns:c14="http://schemas.microsoft.com/office/drawing/2007/8/2/chart">
-                  <a:solidFill>
-                    <a:srgbClr val="FFFFFF"/>
-                  </a:solidFill>
-                </c14:spPr>
-              </c14:invertSolidFillFmt>
-            </c:ext>
-            <c:ext xmlns:c16="http://schemas.microsoft.com/office/drawing/2014/chart" uri="{C3380CC4-5D6E-409C-BE32-E72D297353CC}">
-              <c16:uniqueId val="{00000000-F669-491E-9537-90F767DEEEB8}"/>
-            </c:ext>
-          </c:extLst>
         </c:ser>
         <c:ser>
           <c:idx val="1"/>
@@ -236,23 +1890,21 @@
             <c:v>41℃课程载流量/A</c:v>
           </c:tx>
           <c:spPr>
-            <a:solidFill>
+            <a:solidFill xmlns:a="http://schemas.openxmlformats.org/drawingml/2006/main">
               <a:srgbClr val="D0EDFA"/>
             </a:solidFill>
           </c:spPr>
-          <c:invertIfNegative val="1"/>
           <c:dLbls>
             <c:spPr>
-              <a:noFill/>
-              <a:ln>
+              <a:noFill xmlns:a="http://schemas.openxmlformats.org/drawingml/2006/main"/>
+              <a:ln xmlns:a="http://schemas.openxmlformats.org/drawingml/2006/main">
                 <a:noFill/>
               </a:ln>
-              <a:effectLst/>
             </c:spPr>
             <c:txPr>
-              <a:bodyPr anchorCtr="1"/>
-              <a:lstStyle/>
-              <a:p>
+              <a:bodyPr xmlns:a="http://schemas.openxmlformats.org/drawingml/2006/main" anchorCtr="1"/>
+              <a:lstStyle xmlns:a="http://schemas.openxmlformats.org/drawingml/2006/main"/>
+              <a:p xmlns:a="http://schemas.openxmlformats.org/drawingml/2006/main">
                 <a:pPr>
                   <a:defRPr sz="975">
                     <a:solidFill>
@@ -260,7 +1912,6 @@
                     </a:solidFill>
                   </a:defRPr>
                 </a:pPr>
-                <a:endParaRPr lang="zh-CN"/>
               </a:p>
             </c:txPr>
             <c:dLblPos val="outEnd"/>
@@ -271,11 +1922,6 @@
             <c:showPercent val="0"/>
             <c:showBubbleSize val="0"/>
             <c:showLeaderLines val="0"/>
-            <c:extLst>
-              <c:ext xmlns:c15="http://schemas.microsoft.com/office/drawing/2012/chart" uri="{CE6537A1-D6FC-4f65-9D91-7224C49458BB}">
-                <c15:showLeaderLines val="0"/>
-              </c:ext>
-            </c:extLst>
           </c:dLbls>
           <c:cat>
             <c:strLit>
@@ -299,30 +1945,16 @@
               <c:formatCode>0.000</c:formatCode>
               <c:ptCount val="3"/>
               <c:pt idx="0">
-                <c:v>475.24200000000002</c:v>
+                <c:v>475.242</c:v>
               </c:pt>
               <c:pt idx="1">
-                <c:v>475.24200000000002</c:v>
+                <c:v>475.242</c:v>
               </c:pt>
               <c:pt idx="2">
-                <c:v>475.24200000000002</c:v>
+                <c:v>475.242</c:v>
               </c:pt>
             </c:numLit>
           </c:val>
-          <c:extLst>
-            <c:ext xmlns:c14="http://schemas.microsoft.com/office/drawing/2007/8/2/chart" uri="{6F2FDCE9-48DA-4B69-8628-5D25D57E5C99}">
-              <c14:invertSolidFillFmt>
-                <c14:spPr xmlns:c14="http://schemas.microsoft.com/office/drawing/2007/8/2/chart">
-                  <a:solidFill>
-                    <a:srgbClr val="FFFFFF"/>
-                  </a:solidFill>
-                </c14:spPr>
-              </c14:invertSolidFillFmt>
-            </c:ext>
-            <c:ext xmlns:c16="http://schemas.microsoft.com/office/drawing/2014/chart" uri="{C3380CC4-5D6E-409C-BE32-E72D297353CC}">
-              <c16:uniqueId val="{00000001-F669-491E-9537-90F767DEEEB8}"/>
-            </c:ext>
-          </c:extLst>
         </c:ser>
         <c:dLbls>
           <c:dLblPos val="outEnd"/>
@@ -349,7 +1981,7 @@
         <c:minorTickMark val="none"/>
         <c:tickLblPos val="nextTo"/>
         <c:spPr>
-          <a:ln w="9525">
+          <a:ln xmlns:a="http://schemas.openxmlformats.org/drawingml/2006/main" w="9525">
             <a:solidFill>
               <a:srgbClr val="B8BCC4"/>
             </a:solidFill>
@@ -357,9 +1989,9 @@
           </a:ln>
         </c:spPr>
         <c:txPr>
-          <a:bodyPr anchorCtr="1"/>
-          <a:lstStyle/>
-          <a:p>
+          <a:bodyPr xmlns:a="http://schemas.openxmlformats.org/drawingml/2006/main" anchorCtr="1"/>
+          <a:lstStyle xmlns:a="http://schemas.openxmlformats.org/drawingml/2006/main"/>
+          <a:p xmlns:a="http://schemas.openxmlformats.org/drawingml/2006/main">
             <a:pPr>
               <a:defRPr sz="1050">
                 <a:solidFill>
@@ -370,12 +2002,10 @@
                 <a:cs typeface="Microsoft YaHei"/>
               </a:defRPr>
             </a:pPr>
-            <a:endParaRPr lang="zh-CN"/>
           </a:p>
         </c:txPr>
         <c:crossAx val="48672768"/>
         <c:crosses val="autoZero"/>
-        <c:auto val="1"/>
         <c:lblAlgn val="ctr"/>
         <c:lblOffset val="100"/>
         <c:noMultiLvlLbl val="0"/>
@@ -391,7 +2021,7 @@
         <c:axPos val="l"/>
         <c:majorGridlines>
           <c:spPr>
-            <a:ln w="9525">
+            <a:ln xmlns:a="http://schemas.openxmlformats.org/drawingml/2006/main" w="9525">
               <a:solidFill>
                 <a:srgbClr val="EDEDED"/>
               </a:solidFill>
@@ -402,9 +2032,9 @@
         <c:title>
           <c:tx>
             <c:rich>
-              <a:bodyPr/>
-              <a:lstStyle/>
-              <a:p>
+              <a:bodyPr xmlns:a="http://schemas.openxmlformats.org/drawingml/2006/main"/>
+              <a:lstStyle xmlns:a="http://schemas.openxmlformats.org/drawingml/2006/main"/>
+              <a:p xmlns:a="http://schemas.openxmlformats.org/drawingml/2006/main">
                 <a:r>
                   <a:rPr sz="1050">
                     <a:solidFill>
@@ -416,14 +2046,26 @@
               </a:p>
             </c:rich>
           </c:tx>
-          <c:overlay val="1"/>
+          <c:txPr>
+            <a:bodyPr xmlns:a="http://schemas.openxmlformats.org/drawingml/2006/main" anchorCtr="1"/>
+            <a:lstStyle xmlns:a="http://schemas.openxmlformats.org/drawingml/2006/main"/>
+            <a:p xmlns:a="http://schemas.openxmlformats.org/drawingml/2006/main">
+              <a:pPr>
+                <a:defRPr sz="1050">
+                  <a:solidFill>
+                    <a:srgbClr val="000000"/>
+                  </a:solidFill>
+                </a:defRPr>
+              </a:pPr>
+            </a:p>
+          </c:txPr>
         </c:title>
         <c:numFmt formatCode="0" sourceLinked="0"/>
         <c:majorTickMark val="none"/>
         <c:minorTickMark val="none"/>
         <c:tickLblPos val="nextTo"/>
         <c:spPr>
-          <a:ln w="0">
+          <a:ln xmlns:a="http://schemas.openxmlformats.org/drawingml/2006/main" w="0">
             <a:solidFill>
               <a:srgbClr val="FFFFFF"/>
             </a:solidFill>
@@ -431,9 +2073,9 @@
           </a:ln>
         </c:spPr>
         <c:txPr>
-          <a:bodyPr anchorCtr="1"/>
-          <a:lstStyle/>
-          <a:p>
+          <a:bodyPr xmlns:a="http://schemas.openxmlformats.org/drawingml/2006/main" anchorCtr="1"/>
+          <a:lstStyle xmlns:a="http://schemas.openxmlformats.org/drawingml/2006/main"/>
+          <a:p xmlns:a="http://schemas.openxmlformats.org/drawingml/2006/main">
             <a:pPr>
               <a:defRPr sz="975">
                 <a:solidFill>
@@ -444,7 +2086,6 @@
                 <a:cs typeface="Arial"/>
               </a:defRPr>
             </a:pPr>
-            <a:endParaRPr lang="zh-CN"/>
           </a:p>
         </c:txPr>
         <c:crossAx val="48650112"/>
@@ -453,8 +2094,8 @@
         <c:majorUnit val="200"/>
       </c:valAx>
       <c:spPr>
-        <a:noFill/>
-        <a:ln w="0">
+        <a:noFill xmlns:a="http://schemas.openxmlformats.org/drawingml/2006/main"/>
+        <a:ln xmlns:a="http://schemas.openxmlformats.org/drawingml/2006/main" w="0">
           <a:solidFill>
             <a:srgbClr val="FFFFFF"/>
           </a:solidFill>
@@ -466,9 +2107,9 @@
       <c:legendPos val="b"/>
       <c:overlay val="0"/>
       <c:txPr>
-        <a:bodyPr anchorCtr="1"/>
-        <a:lstStyle/>
-        <a:p>
+        <a:bodyPr xmlns:a="http://schemas.openxmlformats.org/drawingml/2006/main" anchorCtr="1"/>
+        <a:lstStyle xmlns:a="http://schemas.openxmlformats.org/drawingml/2006/main"/>
+        <a:p xmlns:a="http://schemas.openxmlformats.org/drawingml/2006/main">
           <a:pPr>
             <a:defRPr sz="1050">
               <a:solidFill>
@@ -476,19 +2117,16 @@
               </a:solidFill>
             </a:defRPr>
           </a:pPr>
-          <a:endParaRPr lang="zh-CN"/>
         </a:p>
       </c:txPr>
     </c:legend>
     <c:plotVisOnly val="1"/>
-    <c:dispBlanksAs val="zero"/>
-    <c:showDLblsOverMax val="1"/>
   </c:chart>
   <c:spPr>
-    <a:solidFill>
+    <a:solidFill xmlns:a="http://schemas.openxmlformats.org/drawingml/2006/main">
       <a:srgbClr val="FFFFFF"/>
     </a:solidFill>
-    <a:ln w="0">
+    <a:ln xmlns:a="http://schemas.openxmlformats.org/drawingml/2006/main" w="0">
       <a:solidFill>
         <a:srgbClr val="FFFFFF"/>
       </a:solidFill>
@@ -498,1344 +2136,14 @@
 </c:chartSpace>
 </file>
 
-<file path=ppt/notesMasters/notesMaster1.xml><?xml version="1.0" encoding="utf-8"?>
-<p:notesMaster xmlns:a="http://schemas.openxmlformats.org/drawingml/2006/main" xmlns:r="http://schemas.openxmlformats.org/officeDocument/2006/relationships" xmlns:p="http://schemas.openxmlformats.org/presentationml/2006/main">
-  <p:cSld>
-    <p:bg>
-      <p:bgRef idx="1001">
-        <a:schemeClr val="bg1"/>
-      </p:bgRef>
-    </p:bg>
-    <p:spTree>
-      <p:nvGrpSpPr>
-        <p:cNvPr id="1" name=""/>
-        <p:cNvGrpSpPr/>
-        <p:nvPr/>
-      </p:nvGrpSpPr>
-      <p:grpSpPr>
-        <a:xfrm>
-          <a:off x="0" y="0"/>
-          <a:ext cx="0" cy="0"/>
-          <a:chOff x="0" y="0"/>
-          <a:chExt cx="0" cy="0"/>
-        </a:xfrm>
-      </p:grpSpPr>
-      <p:sp>
-        <p:nvSpPr>
-          <p:cNvPr id="2" name="Header Placeholder"/>
-          <p:cNvSpPr>
-            <a:spLocks noGrp="1"/>
-          </p:cNvSpPr>
-          <p:nvPr>
-            <p:ph type="hdr" sz="quarter"/>
-          </p:nvPr>
-        </p:nvSpPr>
-        <p:spPr>
-          <a:prstGeom prst="rect">
-            <a:avLst/>
-          </a:prstGeom>
-        </p:spPr>
-        <p:txBody>
-          <a:bodyPr/>
-          <a:lstStyle/>
-          <a:p>
-            <a:endParaRPr/>
-          </a:p>
-        </p:txBody>
-      </p:sp>
-      <p:sp>
-        <p:nvSpPr>
-          <p:cNvPr id="3" name="Date Placeholder"/>
-          <p:cNvSpPr>
-            <a:spLocks noGrp="1"/>
-          </p:cNvSpPr>
-          <p:nvPr>
-            <p:ph type="dt" sz="quarter" idx="1"/>
-          </p:nvPr>
-        </p:nvSpPr>
-        <p:spPr>
-          <a:prstGeom prst="rect">
-            <a:avLst/>
-          </a:prstGeom>
-        </p:spPr>
-        <p:txBody>
-          <a:bodyPr/>
-          <a:lstStyle/>
-          <a:p>
-            <a:endParaRPr/>
-          </a:p>
-        </p:txBody>
-      </p:sp>
-      <p:sp>
-        <p:nvSpPr>
-          <p:cNvPr id="4" name="Slide Image Placeholder"/>
-          <p:cNvSpPr>
-            <a:spLocks noGrp="1" noRot="1" noChangeAspect="1"/>
-          </p:cNvSpPr>
-          <p:nvPr>
-            <p:ph type="sldImg" idx="2"/>
-          </p:nvPr>
-        </p:nvSpPr>
-        <p:spPr>
-          <a:prstGeom prst="rect">
-            <a:avLst/>
-          </a:prstGeom>
-        </p:spPr>
-        <p:txBody>
-          <a:bodyPr/>
-          <a:lstStyle/>
-          <a:p>
-            <a:endParaRPr/>
-          </a:p>
-        </p:txBody>
-      </p:sp>
-      <p:sp>
-        <p:nvSpPr>
-          <p:cNvPr id="5" name="Notes Placeholder"/>
-          <p:cNvSpPr>
-            <a:spLocks noGrp="1"/>
-          </p:cNvSpPr>
-          <p:nvPr>
-            <p:ph type="body" sz="quarter" idx="3"/>
-          </p:nvPr>
-        </p:nvSpPr>
-        <p:spPr>
-          <a:prstGeom prst="rect">
-            <a:avLst/>
-          </a:prstGeom>
-        </p:spPr>
-        <p:txBody>
-          <a:bodyPr/>
-          <a:lstStyle/>
-          <a:p>
-            <a:endParaRPr/>
-          </a:p>
-        </p:txBody>
-      </p:sp>
-      <p:sp>
-        <p:nvSpPr>
-          <p:cNvPr id="6" name="Footer Placeholder"/>
-          <p:cNvSpPr>
-            <a:spLocks noGrp="1"/>
-          </p:cNvSpPr>
-          <p:nvPr>
-            <p:ph type="ftr" sz="quarter" idx="4"/>
-          </p:nvPr>
-        </p:nvSpPr>
-        <p:spPr>
-          <a:prstGeom prst="rect">
-            <a:avLst/>
-          </a:prstGeom>
-        </p:spPr>
-        <p:txBody>
-          <a:bodyPr/>
-          <a:lstStyle/>
-          <a:p>
-            <a:endParaRPr/>
-          </a:p>
-        </p:txBody>
-      </p:sp>
-      <p:sp>
-        <p:nvSpPr>
-          <p:cNvPr id="7" name="Slide Number Placeholder"/>
-          <p:cNvSpPr>
-            <a:spLocks noGrp="1"/>
-          </p:cNvSpPr>
-          <p:nvPr>
-            <p:ph type="sldNum" sz="quarter" idx="5"/>
-          </p:nvPr>
-        </p:nvSpPr>
-        <p:spPr>
-          <a:prstGeom prst="rect">
-            <a:avLst/>
-          </a:prstGeom>
-        </p:spPr>
-        <p:txBody>
-          <a:bodyPr/>
-          <a:lstStyle/>
-          <a:p>
-            <a:endParaRPr/>
-          </a:p>
-        </p:txBody>
-      </p:sp>
-    </p:spTree>
-  </p:cSld>
-  <p:clrMap bg1="lt1" tx1="dk1" bg2="lt2" tx2="dk2" accent1="accent1" accent2="accent2" accent3="accent3" accent4="accent4" accent5="accent5" accent6="accent6" hlink="hlink" folHlink="folHlink"/>
-  <p:notesStyle>
-    <a:lvl1pPr marL="0" algn="l" defTabSz="914400" rtl="0" eaLnBrk="1" latinLnBrk="0" hangingPunct="1">
-      <a:defRPr sz="1200" kern="1200"/>
-    </a:lvl1pPr>
-  </p:notesStyle>
-</p:notesMaster>
-</file>
-
-<file path=ppt/notesSlides/notesSlide1.xml><?xml version="1.0" encoding="utf-8"?>
-<p:notes xmlns:a="http://schemas.openxmlformats.org/drawingml/2006/main" xmlns:r="http://schemas.openxmlformats.org/officeDocument/2006/relationships" xmlns:p="http://schemas.openxmlformats.org/presentationml/2006/main">
-  <p:cSld>
-    <p:spTree>
-      <p:nvGrpSpPr>
-        <p:cNvPr id="1" name=""/>
-        <p:cNvGrpSpPr/>
-        <p:nvPr/>
-      </p:nvGrpSpPr>
-      <p:grpSpPr>
-        <a:xfrm>
-          <a:off x="0" y="0"/>
-          <a:ext cx="0" cy="0"/>
-          <a:chOff x="0" y="0"/>
-          <a:chExt cx="0" cy="0"/>
-        </a:xfrm>
-      </p:grpSpPr>
-      <p:sp>
-        <p:nvSpPr>
-          <p:cNvPr id="2" name="Slide Image Placeholder 1"/>
-          <p:cNvSpPr>
-            <a:spLocks noGrp="1" noRot="1" noChangeAspect="1"/>
-          </p:cNvSpPr>
-          <p:nvPr>
-            <p:ph type="sldImg"/>
-          </p:nvPr>
-        </p:nvSpPr>
-        <p:spPr/>
-      </p:sp>
-      <p:sp>
-        <p:nvSpPr>
-          <p:cNvPr id="3" name="Notes Placeholder 2"/>
-          <p:cNvSpPr>
-            <a:spLocks noGrp="1"/>
-          </p:cNvSpPr>
-          <p:nvPr>
-            <p:ph type="body" idx="1"/>
-          </p:nvPr>
-        </p:nvSpPr>
-        <p:spPr/>
-        <p:txBody>
-          <a:bodyPr/>
-          <a:lstStyle/>
-          <a:p>
-            <a:endParaRPr/>
-          </a:p>
-        </p:txBody>
-      </p:sp>
-      <p:sp>
-        <p:nvSpPr>
-          <p:cNvPr id="4" name="Slide Number Placeholder 3"/>
-          <p:cNvSpPr>
-            <a:spLocks noGrp="1"/>
-          </p:cNvSpPr>
-          <p:nvPr>
-            <p:ph type="sldNum" idx="5"/>
-          </p:nvPr>
-        </p:nvSpPr>
-        <p:spPr/>
-        <p:txBody>
-          <a:bodyPr/>
-          <a:lstStyle/>
-          <a:p>
-            <a:endParaRPr/>
-          </a:p>
-        </p:txBody>
-      </p:sp>
-    </p:spTree>
-  </p:cSld>
-  <p:clrMapOvr>
-    <a:masterClrMapping/>
-  </p:clrMapOvr>
-</p:notes>
-</file>
-
-<file path=ppt/notesSlides/notesSlide10.xml><?xml version="1.0" encoding="utf-8"?>
-<p:notes xmlns:a="http://schemas.openxmlformats.org/drawingml/2006/main" xmlns:r="http://schemas.openxmlformats.org/officeDocument/2006/relationships" xmlns:p="http://schemas.openxmlformats.org/presentationml/2006/main">
-  <p:cSld>
-    <p:spTree>
-      <p:nvGrpSpPr>
-        <p:cNvPr id="1" name=""/>
-        <p:cNvGrpSpPr/>
-        <p:nvPr/>
-      </p:nvGrpSpPr>
-      <p:grpSpPr>
-        <a:xfrm>
-          <a:off x="0" y="0"/>
-          <a:ext cx="0" cy="0"/>
-          <a:chOff x="0" y="0"/>
-          <a:chExt cx="0" cy="0"/>
-        </a:xfrm>
-      </p:grpSpPr>
-      <p:sp>
-        <p:nvSpPr>
-          <p:cNvPr id="2" name="Slide Image Placeholder 1"/>
-          <p:cNvSpPr>
-            <a:spLocks noGrp="1" noRot="1" noChangeAspect="1"/>
-          </p:cNvSpPr>
-          <p:nvPr>
-            <p:ph type="sldImg"/>
-          </p:nvPr>
-        </p:nvSpPr>
-        <p:spPr/>
-      </p:sp>
-      <p:sp>
-        <p:nvSpPr>
-          <p:cNvPr id="3" name="Notes Placeholder 2"/>
-          <p:cNvSpPr>
-            <a:spLocks noGrp="1"/>
-          </p:cNvSpPr>
-          <p:nvPr>
-            <p:ph type="body" idx="1"/>
-          </p:nvPr>
-        </p:nvSpPr>
-        <p:spPr/>
-        <p:txBody>
-          <a:bodyPr/>
-          <a:lstStyle/>
-          <a:p>
-            <a:endParaRPr/>
-          </a:p>
-        </p:txBody>
-      </p:sp>
-      <p:sp>
-        <p:nvSpPr>
-          <p:cNvPr id="4" name="Slide Number Placeholder 3"/>
-          <p:cNvSpPr>
-            <a:spLocks noGrp="1"/>
-          </p:cNvSpPr>
-          <p:nvPr>
-            <p:ph type="sldNum" idx="5"/>
-          </p:nvPr>
-        </p:nvSpPr>
-        <p:spPr/>
-        <p:txBody>
-          <a:bodyPr/>
-          <a:lstStyle/>
-          <a:p>
-            <a:endParaRPr/>
-          </a:p>
-        </p:txBody>
-      </p:sp>
-    </p:spTree>
-  </p:cSld>
-  <p:clrMapOvr>
-    <a:masterClrMapping/>
-  </p:clrMapOvr>
-</p:notes>
-</file>
-
-<file path=ppt/notesSlides/notesSlide11.xml><?xml version="1.0" encoding="utf-8"?>
-<p:notes xmlns:a="http://schemas.openxmlformats.org/drawingml/2006/main" xmlns:r="http://schemas.openxmlformats.org/officeDocument/2006/relationships" xmlns:p="http://schemas.openxmlformats.org/presentationml/2006/main">
-  <p:cSld>
-    <p:spTree>
-      <p:nvGrpSpPr>
-        <p:cNvPr id="1" name=""/>
-        <p:cNvGrpSpPr/>
-        <p:nvPr/>
-      </p:nvGrpSpPr>
-      <p:grpSpPr>
-        <a:xfrm>
-          <a:off x="0" y="0"/>
-          <a:ext cx="0" cy="0"/>
-          <a:chOff x="0" y="0"/>
-          <a:chExt cx="0" cy="0"/>
-        </a:xfrm>
-      </p:grpSpPr>
-      <p:sp>
-        <p:nvSpPr>
-          <p:cNvPr id="2" name="Slide Image Placeholder 1"/>
-          <p:cNvSpPr>
-            <a:spLocks noGrp="1" noRot="1" noChangeAspect="1"/>
-          </p:cNvSpPr>
-          <p:nvPr>
-            <p:ph type="sldImg"/>
-          </p:nvPr>
-        </p:nvSpPr>
-        <p:spPr/>
-      </p:sp>
-      <p:sp>
-        <p:nvSpPr>
-          <p:cNvPr id="3" name="Notes Placeholder 2"/>
-          <p:cNvSpPr>
-            <a:spLocks noGrp="1"/>
-          </p:cNvSpPr>
-          <p:nvPr>
-            <p:ph type="body" idx="1"/>
-          </p:nvPr>
-        </p:nvSpPr>
-        <p:spPr/>
-        <p:txBody>
-          <a:bodyPr/>
-          <a:lstStyle/>
-          <a:p>
-            <a:endParaRPr/>
-          </a:p>
-        </p:txBody>
-      </p:sp>
-      <p:sp>
-        <p:nvSpPr>
-          <p:cNvPr id="4" name="Slide Number Placeholder 3"/>
-          <p:cNvSpPr>
-            <a:spLocks noGrp="1"/>
-          </p:cNvSpPr>
-          <p:nvPr>
-            <p:ph type="sldNum" idx="5"/>
-          </p:nvPr>
-        </p:nvSpPr>
-        <p:spPr/>
-        <p:txBody>
-          <a:bodyPr/>
-          <a:lstStyle/>
-          <a:p>
-            <a:endParaRPr/>
-          </a:p>
-        </p:txBody>
-      </p:sp>
-    </p:spTree>
-  </p:cSld>
-  <p:clrMapOvr>
-    <a:masterClrMapping/>
-  </p:clrMapOvr>
-</p:notes>
-</file>
-
-<file path=ppt/notesSlides/notesSlide2.xml><?xml version="1.0" encoding="utf-8"?>
-<p:notes xmlns:a="http://schemas.openxmlformats.org/drawingml/2006/main" xmlns:r="http://schemas.openxmlformats.org/officeDocument/2006/relationships" xmlns:p="http://schemas.openxmlformats.org/presentationml/2006/main">
-  <p:cSld>
-    <p:spTree>
-      <p:nvGrpSpPr>
-        <p:cNvPr id="1" name=""/>
-        <p:cNvGrpSpPr/>
-        <p:nvPr/>
-      </p:nvGrpSpPr>
-      <p:grpSpPr>
-        <a:xfrm>
-          <a:off x="0" y="0"/>
-          <a:ext cx="0" cy="0"/>
-          <a:chOff x="0" y="0"/>
-          <a:chExt cx="0" cy="0"/>
-        </a:xfrm>
-      </p:grpSpPr>
-      <p:sp>
-        <p:nvSpPr>
-          <p:cNvPr id="2" name="Slide Image Placeholder 1"/>
-          <p:cNvSpPr>
-            <a:spLocks noGrp="1" noRot="1" noChangeAspect="1"/>
-          </p:cNvSpPr>
-          <p:nvPr>
-            <p:ph type="sldImg"/>
-          </p:nvPr>
-        </p:nvSpPr>
-        <p:spPr/>
-      </p:sp>
-      <p:sp>
-        <p:nvSpPr>
-          <p:cNvPr id="3" name="Notes Placeholder 2"/>
-          <p:cNvSpPr>
-            <a:spLocks noGrp="1"/>
-          </p:cNvSpPr>
-          <p:nvPr>
-            <p:ph type="body" idx="1"/>
-          </p:nvPr>
-        </p:nvSpPr>
-        <p:spPr/>
-        <p:txBody>
-          <a:bodyPr/>
-          <a:lstStyle/>
-          <a:p>
-            <a:endParaRPr/>
-          </a:p>
-        </p:txBody>
-      </p:sp>
-      <p:sp>
-        <p:nvSpPr>
-          <p:cNvPr id="4" name="Slide Number Placeholder 3"/>
-          <p:cNvSpPr>
-            <a:spLocks noGrp="1"/>
-          </p:cNvSpPr>
-          <p:nvPr>
-            <p:ph type="sldNum" idx="5"/>
-          </p:nvPr>
-        </p:nvSpPr>
-        <p:spPr/>
-        <p:txBody>
-          <a:bodyPr/>
-          <a:lstStyle/>
-          <a:p>
-            <a:endParaRPr/>
-          </a:p>
-        </p:txBody>
-      </p:sp>
-    </p:spTree>
-  </p:cSld>
-  <p:clrMapOvr>
-    <a:masterClrMapping/>
-  </p:clrMapOvr>
-</p:notes>
-</file>
-
-<file path=ppt/notesSlides/notesSlide3.xml><?xml version="1.0" encoding="utf-8"?>
-<p:notes xmlns:a="http://schemas.openxmlformats.org/drawingml/2006/main" xmlns:r="http://schemas.openxmlformats.org/officeDocument/2006/relationships" xmlns:p="http://schemas.openxmlformats.org/presentationml/2006/main">
-  <p:cSld>
-    <p:spTree>
-      <p:nvGrpSpPr>
-        <p:cNvPr id="1" name=""/>
-        <p:cNvGrpSpPr/>
-        <p:nvPr/>
-      </p:nvGrpSpPr>
-      <p:grpSpPr>
-        <a:xfrm>
-          <a:off x="0" y="0"/>
-          <a:ext cx="0" cy="0"/>
-          <a:chOff x="0" y="0"/>
-          <a:chExt cx="0" cy="0"/>
-        </a:xfrm>
-      </p:grpSpPr>
-      <p:sp>
-        <p:nvSpPr>
-          <p:cNvPr id="2" name="Slide Image Placeholder 1"/>
-          <p:cNvSpPr>
-            <a:spLocks noGrp="1" noRot="1" noChangeAspect="1"/>
-          </p:cNvSpPr>
-          <p:nvPr>
-            <p:ph type="sldImg"/>
-          </p:nvPr>
-        </p:nvSpPr>
-        <p:spPr/>
-      </p:sp>
-      <p:sp>
-        <p:nvSpPr>
-          <p:cNvPr id="3" name="Notes Placeholder 2"/>
-          <p:cNvSpPr>
-            <a:spLocks noGrp="1"/>
-          </p:cNvSpPr>
-          <p:nvPr>
-            <p:ph type="body" idx="1"/>
-          </p:nvPr>
-        </p:nvSpPr>
-        <p:spPr/>
-        <p:txBody>
-          <a:bodyPr/>
-          <a:lstStyle/>
-          <a:p>
-            <a:endParaRPr/>
-          </a:p>
-        </p:txBody>
-      </p:sp>
-      <p:sp>
-        <p:nvSpPr>
-          <p:cNvPr id="4" name="Slide Number Placeholder 3"/>
-          <p:cNvSpPr>
-            <a:spLocks noGrp="1"/>
-          </p:cNvSpPr>
-          <p:nvPr>
-            <p:ph type="sldNum" idx="5"/>
-          </p:nvPr>
-        </p:nvSpPr>
-        <p:spPr/>
-        <p:txBody>
-          <a:bodyPr/>
-          <a:lstStyle/>
-          <a:p>
-            <a:endParaRPr/>
-          </a:p>
-        </p:txBody>
-      </p:sp>
-    </p:spTree>
-  </p:cSld>
-  <p:clrMapOvr>
-    <a:masterClrMapping/>
-  </p:clrMapOvr>
-</p:notes>
-</file>
-
-<file path=ppt/notesSlides/notesSlide4.xml><?xml version="1.0" encoding="utf-8"?>
-<p:notes xmlns:a="http://schemas.openxmlformats.org/drawingml/2006/main" xmlns:r="http://schemas.openxmlformats.org/officeDocument/2006/relationships" xmlns:p="http://schemas.openxmlformats.org/presentationml/2006/main">
-  <p:cSld>
-    <p:spTree>
-      <p:nvGrpSpPr>
-        <p:cNvPr id="1" name=""/>
-        <p:cNvGrpSpPr/>
-        <p:nvPr/>
-      </p:nvGrpSpPr>
-      <p:grpSpPr>
-        <a:xfrm>
-          <a:off x="0" y="0"/>
-          <a:ext cx="0" cy="0"/>
-          <a:chOff x="0" y="0"/>
-          <a:chExt cx="0" cy="0"/>
-        </a:xfrm>
-      </p:grpSpPr>
-      <p:sp>
-        <p:nvSpPr>
-          <p:cNvPr id="2" name="Slide Image Placeholder 1"/>
-          <p:cNvSpPr>
-            <a:spLocks noGrp="1" noRot="1" noChangeAspect="1"/>
-          </p:cNvSpPr>
-          <p:nvPr>
-            <p:ph type="sldImg"/>
-          </p:nvPr>
-        </p:nvSpPr>
-        <p:spPr/>
-      </p:sp>
-      <p:sp>
-        <p:nvSpPr>
-          <p:cNvPr id="3" name="Notes Placeholder 2"/>
-          <p:cNvSpPr>
-            <a:spLocks noGrp="1"/>
-          </p:cNvSpPr>
-          <p:nvPr>
-            <p:ph type="body" idx="1"/>
-          </p:nvPr>
-        </p:nvSpPr>
-        <p:spPr/>
-        <p:txBody>
-          <a:bodyPr/>
-          <a:lstStyle/>
-          <a:p>
-            <a:endParaRPr/>
-          </a:p>
-        </p:txBody>
-      </p:sp>
-      <p:sp>
-        <p:nvSpPr>
-          <p:cNvPr id="4" name="Slide Number Placeholder 3"/>
-          <p:cNvSpPr>
-            <a:spLocks noGrp="1"/>
-          </p:cNvSpPr>
-          <p:nvPr>
-            <p:ph type="sldNum" idx="5"/>
-          </p:nvPr>
-        </p:nvSpPr>
-        <p:spPr/>
-        <p:txBody>
-          <a:bodyPr/>
-          <a:lstStyle/>
-          <a:p>
-            <a:endParaRPr/>
-          </a:p>
-        </p:txBody>
-      </p:sp>
-    </p:spTree>
-  </p:cSld>
-  <p:clrMapOvr>
-    <a:masterClrMapping/>
-  </p:clrMapOvr>
-</p:notes>
-</file>
-
-<file path=ppt/notesSlides/notesSlide5.xml><?xml version="1.0" encoding="utf-8"?>
-<p:notes xmlns:a="http://schemas.openxmlformats.org/drawingml/2006/main" xmlns:r="http://schemas.openxmlformats.org/officeDocument/2006/relationships" xmlns:p="http://schemas.openxmlformats.org/presentationml/2006/main">
-  <p:cSld>
-    <p:spTree>
-      <p:nvGrpSpPr>
-        <p:cNvPr id="1" name=""/>
-        <p:cNvGrpSpPr/>
-        <p:nvPr/>
-      </p:nvGrpSpPr>
-      <p:grpSpPr>
-        <a:xfrm>
-          <a:off x="0" y="0"/>
-          <a:ext cx="0" cy="0"/>
-          <a:chOff x="0" y="0"/>
-          <a:chExt cx="0" cy="0"/>
-        </a:xfrm>
-      </p:grpSpPr>
-      <p:sp>
-        <p:nvSpPr>
-          <p:cNvPr id="2" name="Slide Image Placeholder 1"/>
-          <p:cNvSpPr>
-            <a:spLocks noGrp="1" noRot="1" noChangeAspect="1"/>
-          </p:cNvSpPr>
-          <p:nvPr>
-            <p:ph type="sldImg"/>
-          </p:nvPr>
-        </p:nvSpPr>
-        <p:spPr/>
-      </p:sp>
-      <p:sp>
-        <p:nvSpPr>
-          <p:cNvPr id="3" name="Notes Placeholder 2"/>
-          <p:cNvSpPr>
-            <a:spLocks noGrp="1"/>
-          </p:cNvSpPr>
-          <p:nvPr>
-            <p:ph type="body" idx="1"/>
-          </p:nvPr>
-        </p:nvSpPr>
-        <p:spPr/>
-        <p:txBody>
-          <a:bodyPr/>
-          <a:lstStyle/>
-          <a:p>
-            <a:endParaRPr/>
-          </a:p>
-        </p:txBody>
-      </p:sp>
-      <p:sp>
-        <p:nvSpPr>
-          <p:cNvPr id="4" name="Slide Number Placeholder 3"/>
-          <p:cNvSpPr>
-            <a:spLocks noGrp="1"/>
-          </p:cNvSpPr>
-          <p:nvPr>
-            <p:ph type="sldNum" idx="5"/>
-          </p:nvPr>
-        </p:nvSpPr>
-        <p:spPr/>
-        <p:txBody>
-          <a:bodyPr/>
-          <a:lstStyle/>
-          <a:p>
-            <a:endParaRPr/>
-          </a:p>
-        </p:txBody>
-      </p:sp>
-    </p:spTree>
-  </p:cSld>
-  <p:clrMapOvr>
-    <a:masterClrMapping/>
-  </p:clrMapOvr>
-</p:notes>
-</file>
-
-<file path=ppt/notesSlides/notesSlide6.xml><?xml version="1.0" encoding="utf-8"?>
-<p:notes xmlns:a="http://schemas.openxmlformats.org/drawingml/2006/main" xmlns:r="http://schemas.openxmlformats.org/officeDocument/2006/relationships" xmlns:p="http://schemas.openxmlformats.org/presentationml/2006/main">
-  <p:cSld>
-    <p:spTree>
-      <p:nvGrpSpPr>
-        <p:cNvPr id="1" name=""/>
-        <p:cNvGrpSpPr/>
-        <p:nvPr/>
-      </p:nvGrpSpPr>
-      <p:grpSpPr>
-        <a:xfrm>
-          <a:off x="0" y="0"/>
-          <a:ext cx="0" cy="0"/>
-          <a:chOff x="0" y="0"/>
-          <a:chExt cx="0" cy="0"/>
-        </a:xfrm>
-      </p:grpSpPr>
-      <p:sp>
-        <p:nvSpPr>
-          <p:cNvPr id="2" name="Slide Image Placeholder 1"/>
-          <p:cNvSpPr>
-            <a:spLocks noGrp="1" noRot="1" noChangeAspect="1"/>
-          </p:cNvSpPr>
-          <p:nvPr>
-            <p:ph type="sldImg"/>
-          </p:nvPr>
-        </p:nvSpPr>
-        <p:spPr/>
-      </p:sp>
-      <p:sp>
-        <p:nvSpPr>
-          <p:cNvPr id="3" name="Notes Placeholder 2"/>
-          <p:cNvSpPr>
-            <a:spLocks noGrp="1"/>
-          </p:cNvSpPr>
-          <p:nvPr>
-            <p:ph type="body" idx="1"/>
-          </p:nvPr>
-        </p:nvSpPr>
-        <p:spPr/>
-        <p:txBody>
-          <a:bodyPr/>
-          <a:lstStyle/>
-          <a:p>
-            <a:endParaRPr/>
-          </a:p>
-        </p:txBody>
-      </p:sp>
-      <p:sp>
-        <p:nvSpPr>
-          <p:cNvPr id="4" name="Slide Number Placeholder 3"/>
-          <p:cNvSpPr>
-            <a:spLocks noGrp="1"/>
-          </p:cNvSpPr>
-          <p:nvPr>
-            <p:ph type="sldNum" idx="5"/>
-          </p:nvPr>
-        </p:nvSpPr>
-        <p:spPr/>
-        <p:txBody>
-          <a:bodyPr/>
-          <a:lstStyle/>
-          <a:p>
-            <a:endParaRPr/>
-          </a:p>
-        </p:txBody>
-      </p:sp>
-    </p:spTree>
-  </p:cSld>
-  <p:clrMapOvr>
-    <a:masterClrMapping/>
-  </p:clrMapOvr>
-</p:notes>
-</file>
-
-<file path=ppt/notesSlides/notesSlide7.xml><?xml version="1.0" encoding="utf-8"?>
-<p:notes xmlns:a="http://schemas.openxmlformats.org/drawingml/2006/main" xmlns:r="http://schemas.openxmlformats.org/officeDocument/2006/relationships" xmlns:p="http://schemas.openxmlformats.org/presentationml/2006/main">
-  <p:cSld>
-    <p:spTree>
-      <p:nvGrpSpPr>
-        <p:cNvPr id="1" name=""/>
-        <p:cNvGrpSpPr/>
-        <p:nvPr/>
-      </p:nvGrpSpPr>
-      <p:grpSpPr>
-        <a:xfrm>
-          <a:off x="0" y="0"/>
-          <a:ext cx="0" cy="0"/>
-          <a:chOff x="0" y="0"/>
-          <a:chExt cx="0" cy="0"/>
-        </a:xfrm>
-      </p:grpSpPr>
-      <p:sp>
-        <p:nvSpPr>
-          <p:cNvPr id="2" name="Slide Image Placeholder 1"/>
-          <p:cNvSpPr>
-            <a:spLocks noGrp="1" noRot="1" noChangeAspect="1"/>
-          </p:cNvSpPr>
-          <p:nvPr>
-            <p:ph type="sldImg"/>
-          </p:nvPr>
-        </p:nvSpPr>
-        <p:spPr/>
-      </p:sp>
-      <p:sp>
-        <p:nvSpPr>
-          <p:cNvPr id="3" name="Notes Placeholder 2"/>
-          <p:cNvSpPr>
-            <a:spLocks noGrp="1"/>
-          </p:cNvSpPr>
-          <p:nvPr>
-            <p:ph type="body" idx="1"/>
-          </p:nvPr>
-        </p:nvSpPr>
-        <p:spPr/>
-        <p:txBody>
-          <a:bodyPr/>
-          <a:lstStyle/>
-          <a:p>
-            <a:endParaRPr/>
-          </a:p>
-        </p:txBody>
-      </p:sp>
-      <p:sp>
-        <p:nvSpPr>
-          <p:cNvPr id="4" name="Slide Number Placeholder 3"/>
-          <p:cNvSpPr>
-            <a:spLocks noGrp="1"/>
-          </p:cNvSpPr>
-          <p:nvPr>
-            <p:ph type="sldNum" idx="5"/>
-          </p:nvPr>
-        </p:nvSpPr>
-        <p:spPr/>
-        <p:txBody>
-          <a:bodyPr/>
-          <a:lstStyle/>
-          <a:p>
-            <a:endParaRPr/>
-          </a:p>
-        </p:txBody>
-      </p:sp>
-    </p:spTree>
-  </p:cSld>
-  <p:clrMapOvr>
-    <a:masterClrMapping/>
-  </p:clrMapOvr>
-</p:notes>
-</file>
-
-<file path=ppt/notesSlides/notesSlide8.xml><?xml version="1.0" encoding="utf-8"?>
-<p:notes xmlns:a="http://schemas.openxmlformats.org/drawingml/2006/main" xmlns:r="http://schemas.openxmlformats.org/officeDocument/2006/relationships" xmlns:p="http://schemas.openxmlformats.org/presentationml/2006/main">
-  <p:cSld>
-    <p:spTree>
-      <p:nvGrpSpPr>
-        <p:cNvPr id="1" name=""/>
-        <p:cNvGrpSpPr/>
-        <p:nvPr/>
-      </p:nvGrpSpPr>
-      <p:grpSpPr>
-        <a:xfrm>
-          <a:off x="0" y="0"/>
-          <a:ext cx="0" cy="0"/>
-          <a:chOff x="0" y="0"/>
-          <a:chExt cx="0" cy="0"/>
-        </a:xfrm>
-      </p:grpSpPr>
-      <p:sp>
-        <p:nvSpPr>
-          <p:cNvPr id="2" name="Slide Image Placeholder 1"/>
-          <p:cNvSpPr>
-            <a:spLocks noGrp="1" noRot="1" noChangeAspect="1"/>
-          </p:cNvSpPr>
-          <p:nvPr>
-            <p:ph type="sldImg"/>
-          </p:nvPr>
-        </p:nvSpPr>
-        <p:spPr/>
-      </p:sp>
-      <p:sp>
-        <p:nvSpPr>
-          <p:cNvPr id="3" name="Notes Placeholder 2"/>
-          <p:cNvSpPr>
-            <a:spLocks noGrp="1"/>
-          </p:cNvSpPr>
-          <p:nvPr>
-            <p:ph type="body" idx="1"/>
-          </p:nvPr>
-        </p:nvSpPr>
-        <p:spPr/>
-        <p:txBody>
-          <a:bodyPr/>
-          <a:lstStyle/>
-          <a:p>
-            <a:endParaRPr/>
-          </a:p>
-        </p:txBody>
-      </p:sp>
-      <p:sp>
-        <p:nvSpPr>
-          <p:cNvPr id="4" name="Slide Number Placeholder 3"/>
-          <p:cNvSpPr>
-            <a:spLocks noGrp="1"/>
-          </p:cNvSpPr>
-          <p:nvPr>
-            <p:ph type="sldNum" idx="5"/>
-          </p:nvPr>
-        </p:nvSpPr>
-        <p:spPr/>
-        <p:txBody>
-          <a:bodyPr/>
-          <a:lstStyle/>
-          <a:p>
-            <a:endParaRPr/>
-          </a:p>
-        </p:txBody>
-      </p:sp>
-    </p:spTree>
-  </p:cSld>
-  <p:clrMapOvr>
-    <a:masterClrMapping/>
-  </p:clrMapOvr>
-</p:notes>
-</file>
-
-<file path=ppt/notesSlides/notesSlide9.xml><?xml version="1.0" encoding="utf-8"?>
-<p:notes xmlns:a="http://schemas.openxmlformats.org/drawingml/2006/main" xmlns:r="http://schemas.openxmlformats.org/officeDocument/2006/relationships" xmlns:p="http://schemas.openxmlformats.org/presentationml/2006/main">
-  <p:cSld>
-    <p:spTree>
-      <p:nvGrpSpPr>
-        <p:cNvPr id="1" name=""/>
-        <p:cNvGrpSpPr/>
-        <p:nvPr/>
-      </p:nvGrpSpPr>
-      <p:grpSpPr>
-        <a:xfrm>
-          <a:off x="0" y="0"/>
-          <a:ext cx="0" cy="0"/>
-          <a:chOff x="0" y="0"/>
-          <a:chExt cx="0" cy="0"/>
-        </a:xfrm>
-      </p:grpSpPr>
-      <p:sp>
-        <p:nvSpPr>
-          <p:cNvPr id="2" name="Slide Image Placeholder 1"/>
-          <p:cNvSpPr>
-            <a:spLocks noGrp="1" noRot="1" noChangeAspect="1"/>
-          </p:cNvSpPr>
-          <p:nvPr>
-            <p:ph type="sldImg"/>
-          </p:nvPr>
-        </p:nvSpPr>
-        <p:spPr/>
-      </p:sp>
-      <p:sp>
-        <p:nvSpPr>
-          <p:cNvPr id="3" name="Notes Placeholder 2"/>
-          <p:cNvSpPr>
-            <a:spLocks noGrp="1"/>
-          </p:cNvSpPr>
-          <p:nvPr>
-            <p:ph type="body" idx="1"/>
-          </p:nvPr>
-        </p:nvSpPr>
-        <p:spPr/>
-        <p:txBody>
-          <a:bodyPr/>
-          <a:lstStyle/>
-          <a:p>
-            <a:endParaRPr/>
-          </a:p>
-        </p:txBody>
-      </p:sp>
-      <p:sp>
-        <p:nvSpPr>
-          <p:cNvPr id="4" name="Slide Number Placeholder 3"/>
-          <p:cNvSpPr>
-            <a:spLocks noGrp="1"/>
-          </p:cNvSpPr>
-          <p:nvPr>
-            <p:ph type="sldNum" idx="5"/>
-          </p:nvPr>
-        </p:nvSpPr>
-        <p:spPr/>
-        <p:txBody>
-          <a:bodyPr/>
-          <a:lstStyle/>
-          <a:p>
-            <a:endParaRPr/>
-          </a:p>
-        </p:txBody>
-      </p:sp>
-    </p:spTree>
-  </p:cSld>
-  <p:clrMapOvr>
-    <a:masterClrMapping/>
-  </p:clrMapOvr>
-</p:notes>
-</file>
-
-<file path=ppt/slideLayouts/slideLayout1.xml><?xml version="1.0" encoding="utf-8"?>
-<p:sldLayout xmlns:a="http://schemas.openxmlformats.org/drawingml/2006/main" xmlns:r="http://schemas.openxmlformats.org/officeDocument/2006/relationships" xmlns:p="http://schemas.openxmlformats.org/presentationml/2006/main" type="title">
-  <p:cSld name="Title Slide">
-    <p:spTree>
-      <p:nvGrpSpPr>
-        <p:cNvPr id="1" name=""/>
-        <p:cNvGrpSpPr/>
-        <p:nvPr/>
-      </p:nvGrpSpPr>
-      <p:grpSpPr>
-        <a:xfrm>
-          <a:off x="0" y="0"/>
-          <a:ext cx="0" cy="0"/>
-          <a:chOff x="0" y="0"/>
-          <a:chExt cx="0" cy="0"/>
-        </a:xfrm>
-      </p:grpSpPr>
-    </p:spTree>
-  </p:cSld>
-  <p:clrMapOvr>
-    <a:masterClrMapping/>
-  </p:clrMapOvr>
-</p:sldLayout>
-</file>
-
-<file path=ppt/slideMasters/slideMaster1.xml><?xml version="1.0" encoding="utf-8"?>
-<p:sldMaster xmlns:a="http://schemas.openxmlformats.org/drawingml/2006/main" xmlns:r="http://schemas.openxmlformats.org/officeDocument/2006/relationships" xmlns:p="http://schemas.openxmlformats.org/presentationml/2006/main">
-  <p:cSld name="Master">
-    <p:bg>
-      <p:bgRef idx="1001">
-        <a:schemeClr val="bg1"/>
-      </p:bgRef>
-    </p:bg>
-    <p:spTree>
-      <p:nvGrpSpPr>
-        <p:cNvPr id="1" name=""/>
-        <p:cNvGrpSpPr/>
-        <p:nvPr/>
-      </p:nvGrpSpPr>
-      <p:grpSpPr>
-        <a:xfrm>
-          <a:off x="0" y="0"/>
-          <a:ext cx="0" cy="0"/>
-          <a:chOff x="0" y="0"/>
-          <a:chExt cx="0" cy="0"/>
-        </a:xfrm>
-      </p:grpSpPr>
-    </p:spTree>
-  </p:cSld>
-  <p:clrMap bg1="lt1" tx1="dk1" bg2="lt2" tx2="dk2" accent1="accent1" accent2="accent2" accent3="accent3" accent4="accent4" accent5="accent5" accent6="accent6" hlink="hlink" folHlink="folHlink"/>
-  <p:sldLayoutIdLst>
-    <p:sldLayoutId id="2147483649" r:id="rId1"/>
-  </p:sldLayoutIdLst>
-  <p:txStyles>
-    <p:titleStyle>
-      <a:lvl1pPr algn="l">
-        <a:lnSpc>
-          <a:spcPct val="90000"/>
-        </a:lnSpc>
-        <a:spcBef>
-          <a:spcPts val="0"/>
-        </a:spcBef>
-        <a:buNone/>
-        <a:defRPr sz="4400">
-          <a:solidFill>
-            <a:schemeClr val="tx1"/>
-          </a:solidFill>
-          <a:latin typeface="+mj-lt"/>
-          <a:ea typeface="+mj-lt"/>
-          <a:cs typeface="+mj-lt"/>
-        </a:defRPr>
-      </a:lvl1pPr>
-    </p:titleStyle>
-    <p:bodyStyle>
-      <a:lvl1pPr marL="228600" indent="-228600" algn="l">
-        <a:lnSpc>
-          <a:spcPct val="90000"/>
-        </a:lnSpc>
-        <a:spcBef>
-          <a:spcPts val="1000"/>
-        </a:spcBef>
-        <a:buChar char="•"/>
-        <a:defRPr sz="2800">
-          <a:solidFill>
-            <a:schemeClr val="tx1"/>
-          </a:solidFill>
-          <a:latin typeface="+mn-lt"/>
-          <a:ea typeface="+mn-lt"/>
-          <a:cs typeface="+mn-lt"/>
-        </a:defRPr>
-      </a:lvl1pPr>
-      <a:lvl2pPr marL="685800" indent="-228600" algn="l">
-        <a:lnSpc>
-          <a:spcPct val="90000"/>
-        </a:lnSpc>
-        <a:spcBef>
-          <a:spcPts val="500"/>
-        </a:spcBef>
-        <a:buChar char="•"/>
-        <a:defRPr sz="2400">
-          <a:solidFill>
-            <a:schemeClr val="tx1"/>
-          </a:solidFill>
-          <a:latin typeface="+mn-lt"/>
-          <a:ea typeface="+mn-lt"/>
-          <a:cs typeface="+mn-lt"/>
-        </a:defRPr>
-      </a:lvl2pPr>
-      <a:lvl3pPr marL="1143000" indent="-228600" algn="l">
-        <a:lnSpc>
-          <a:spcPct val="90000"/>
-        </a:lnSpc>
-        <a:spcBef>
-          <a:spcPts val="500"/>
-        </a:spcBef>
-        <a:buChar char="•"/>
-        <a:defRPr sz="2000">
-          <a:solidFill>
-            <a:schemeClr val="tx1"/>
-          </a:solidFill>
-          <a:latin typeface="+mn-lt"/>
-          <a:ea typeface="+mn-lt"/>
-          <a:cs typeface="+mn-lt"/>
-        </a:defRPr>
-      </a:lvl3pPr>
-      <a:lvl4pPr marL="1600200" indent="-228600" algn="l">
-        <a:lnSpc>
-          <a:spcPct val="90000"/>
-        </a:lnSpc>
-        <a:spcBef>
-          <a:spcPts val="500"/>
-        </a:spcBef>
-        <a:buChar char="•"/>
-        <a:defRPr sz="1800">
-          <a:solidFill>
-            <a:schemeClr val="tx1"/>
-          </a:solidFill>
-          <a:latin typeface="+mn-lt"/>
-          <a:ea typeface="+mn-lt"/>
-          <a:cs typeface="+mn-lt"/>
-        </a:defRPr>
-      </a:lvl4pPr>
-      <a:lvl5pPr marL="2057400" indent="-228600" algn="l">
-        <a:lnSpc>
-          <a:spcPct val="90000"/>
-        </a:lnSpc>
-        <a:spcBef>
-          <a:spcPts val="500"/>
-        </a:spcBef>
-        <a:buChar char="•"/>
-        <a:defRPr sz="1800">
-          <a:solidFill>
-            <a:schemeClr val="tx1"/>
-          </a:solidFill>
-          <a:latin typeface="+mn-lt"/>
-          <a:ea typeface="+mn-lt"/>
-          <a:cs typeface="+mn-lt"/>
-        </a:defRPr>
-      </a:lvl5pPr>
-      <a:lvl6pPr marL="2514600" indent="-228600" algn="l">
-        <a:lnSpc>
-          <a:spcPct val="90000"/>
-        </a:lnSpc>
-        <a:spcBef>
-          <a:spcPts val="500"/>
-        </a:spcBef>
-        <a:buChar char="•"/>
-        <a:defRPr sz="1800">
-          <a:solidFill>
-            <a:schemeClr val="tx1"/>
-          </a:solidFill>
-          <a:latin typeface="+mn-lt"/>
-          <a:ea typeface="+mn-lt"/>
-          <a:cs typeface="+mn-lt"/>
-        </a:defRPr>
-      </a:lvl6pPr>
-      <a:lvl7pPr marL="2971800" indent="-228600" algn="l">
-        <a:lnSpc>
-          <a:spcPct val="90000"/>
-        </a:lnSpc>
-        <a:spcBef>
-          <a:spcPts val="500"/>
-        </a:spcBef>
-        <a:buChar char="•"/>
-        <a:defRPr sz="1800">
-          <a:solidFill>
-            <a:schemeClr val="tx1"/>
-          </a:solidFill>
-          <a:latin typeface="+mn-lt"/>
-          <a:ea typeface="+mn-lt"/>
-          <a:cs typeface="+mn-lt"/>
-        </a:defRPr>
-      </a:lvl7pPr>
-      <a:lvl8pPr marL="3429000" indent="-228600" algn="l">
-        <a:lnSpc>
-          <a:spcPct val="90000"/>
-        </a:lnSpc>
-        <a:spcBef>
-          <a:spcPts val="500"/>
-        </a:spcBef>
-        <a:buChar char="•"/>
-        <a:defRPr sz="1800">
-          <a:solidFill>
-            <a:schemeClr val="tx1"/>
-          </a:solidFill>
-          <a:latin typeface="+mn-lt"/>
-          <a:ea typeface="+mn-lt"/>
-          <a:cs typeface="+mn-lt"/>
-        </a:defRPr>
-      </a:lvl8pPr>
-      <a:lvl9pPr marL="3886200" indent="-228600" algn="l">
-        <a:lnSpc>
-          <a:spcPct val="90000"/>
-        </a:lnSpc>
-        <a:spcBef>
-          <a:spcPts val="500"/>
-        </a:spcBef>
-        <a:buChar char="•"/>
-        <a:defRPr sz="1800">
-          <a:solidFill>
-            <a:schemeClr val="tx1"/>
-          </a:solidFill>
-          <a:latin typeface="+mn-lt"/>
-          <a:ea typeface="+mn-lt"/>
-          <a:cs typeface="+mn-lt"/>
-        </a:defRPr>
-      </a:lvl9pPr>
-    </p:bodyStyle>
-    <p:otherStyle>
-      <a:lvl1pPr marL="0" algn="l">
-        <a:buNone/>
-        <a:defRPr sz="1800">
-          <a:solidFill>
-            <a:schemeClr val="tx1"/>
-          </a:solidFill>
-          <a:latin typeface="+mn-lt"/>
-          <a:ea typeface="+mn-lt"/>
-          <a:cs typeface="+mn-lt"/>
-        </a:defRPr>
-      </a:lvl1pPr>
-      <a:lvl2pPr marL="457200" algn="l">
-        <a:buNone/>
-        <a:defRPr sz="1800">
-          <a:solidFill>
-            <a:schemeClr val="tx1"/>
-          </a:solidFill>
-          <a:latin typeface="+mn-lt"/>
-          <a:ea typeface="+mn-lt"/>
-          <a:cs typeface="+mn-lt"/>
-        </a:defRPr>
-      </a:lvl2pPr>
-      <a:lvl3pPr marL="914400" algn="l">
-        <a:buNone/>
-        <a:defRPr sz="1800">
-          <a:solidFill>
-            <a:schemeClr val="tx1"/>
-          </a:solidFill>
-          <a:latin typeface="+mn-lt"/>
-          <a:ea typeface="+mn-lt"/>
-          <a:cs typeface="+mn-lt"/>
-        </a:defRPr>
-      </a:lvl3pPr>
-      <a:lvl4pPr marL="1371600" algn="l">
-        <a:buNone/>
-        <a:defRPr sz="1800">
-          <a:solidFill>
-            <a:schemeClr val="tx1"/>
-          </a:solidFill>
-          <a:latin typeface="+mn-lt"/>
-          <a:ea typeface="+mn-lt"/>
-          <a:cs typeface="+mn-lt"/>
-        </a:defRPr>
-      </a:lvl4pPr>
-      <a:lvl5pPr marL="1828800" algn="l">
-        <a:buNone/>
-        <a:defRPr sz="1800">
-          <a:solidFill>
-            <a:schemeClr val="tx1"/>
-          </a:solidFill>
-          <a:latin typeface="+mn-lt"/>
-          <a:ea typeface="+mn-lt"/>
-          <a:cs typeface="+mn-lt"/>
-        </a:defRPr>
-      </a:lvl5pPr>
-      <a:lvl6pPr marL="2286000" algn="l">
-        <a:buNone/>
-        <a:defRPr sz="1800">
-          <a:solidFill>
-            <a:schemeClr val="tx1"/>
-          </a:solidFill>
-          <a:latin typeface="+mn-lt"/>
-          <a:ea typeface="+mn-lt"/>
-          <a:cs typeface="+mn-lt"/>
-        </a:defRPr>
-      </a:lvl6pPr>
-      <a:lvl7pPr marL="2743200" algn="l">
-        <a:buNone/>
-        <a:defRPr sz="1800">
-          <a:solidFill>
-            <a:schemeClr val="tx1"/>
-          </a:solidFill>
-          <a:latin typeface="+mn-lt"/>
-          <a:ea typeface="+mn-lt"/>
-          <a:cs typeface="+mn-lt"/>
-        </a:defRPr>
-      </a:lvl7pPr>
-      <a:lvl8pPr marL="3200400" algn="l">
-        <a:buNone/>
-        <a:defRPr sz="1800">
-          <a:solidFill>
-            <a:schemeClr val="tx1"/>
-          </a:solidFill>
-          <a:latin typeface="+mn-lt"/>
-          <a:ea typeface="+mn-lt"/>
-          <a:cs typeface="+mn-lt"/>
-        </a:defRPr>
-      </a:lvl8pPr>
-      <a:lvl9pPr marL="3657600" algn="l">
-        <a:buNone/>
-        <a:defRPr sz="1800">
-          <a:solidFill>
-            <a:schemeClr val="tx1"/>
-          </a:solidFill>
-          <a:latin typeface="+mn-lt"/>
-          <a:ea typeface="+mn-lt"/>
-          <a:cs typeface="+mn-lt"/>
-        </a:defRPr>
-      </a:lvl9pPr>
-    </p:otherStyle>
-  </p:txStyles>
-</p:sldMaster>
-</file>
-
 <file path=ppt/slides/slide1.xml><?xml version="1.0" encoding="utf-8"?>
-<p:sld xmlns:a="http://schemas.openxmlformats.org/drawingml/2006/main" xmlns:r="http://schemas.openxmlformats.org/officeDocument/2006/relationships" xmlns:p="http://schemas.openxmlformats.org/presentationml/2006/main">
+<p:sld xmlns:p="http://schemas.openxmlformats.org/presentationml/2006/main">
   <p:cSld>
     <p:bg>
       <p:bgPr>
-        <a:solidFill>
+        <a:solidFill xmlns:a="http://schemas.openxmlformats.org/drawingml/2006/main">
           <a:srgbClr val="FFFFFF"/>
         </a:solidFill>
-        <a:effectLst/>
       </p:bgPr>
     </p:bg>
     <p:spTree>
@@ -1845,43 +2153,39 @@
         <p:nvPr/>
       </p:nvGrpSpPr>
       <p:grpSpPr>
-        <a:xfrm>
-          <a:off x="0" y="0"/>
-          <a:ext cx="0" cy="0"/>
-          <a:chOff x="0" y="0"/>
-          <a:chExt cx="0" cy="0"/>
-        </a:xfrm>
+        <a:xfrm xmlns:a="http://schemas.openxmlformats.org/drawingml/2006/main"/>
       </p:grpSpPr>
       <p:sp>
         <p:nvSpPr>
           <p:cNvPr id="5" name="cover-eyebrow">
-            <a:extLst>
+            <a:extLst xmlns:a="http://schemas.openxmlformats.org/drawingml/2006/main">
               <a:ext uri="{FF2B5EF4-FFF2-40B4-BE49-F238E27FC236}">
                 <a16:creationId xmlns:a16="http://schemas.microsoft.com/office/drawing/2014/main" id="{7AFB5632-A63A-4516-B70F-6AF7AD89B682}"/>
               </a:ext>
             </a:extLst>
           </p:cNvPr>
           <p:cNvSpPr>
-            <a:spLocks noGrp="1"/>
-          </p:cNvSpPr>
-          <p:nvPr/>
-        </p:nvSpPr>
-        <p:spPr>
-          <a:xfrm>
+            <a:spLocks xmlns:a="http://schemas.openxmlformats.org/drawingml/2006/main" noGrp="1"/>
+          </p:cNvSpPr>
+          <p:nvPr/>
+        </p:nvSpPr>
+        <p:spPr>
+          <a:xfrm xmlns:a="http://schemas.openxmlformats.org/drawingml/2006/main">
             <a:off x="400050" y="381000"/>
             <a:ext cx="8096250" cy="400050"/>
           </a:xfrm>
-          <a:prstGeom prst="rect">
-            <a:avLst/>
-          </a:prstGeom>
-        </p:spPr>
-        <p:txBody>
-          <a:bodyPr wrap="square" lIns="0" tIns="0" rIns="0" bIns="0" anchor="t">
+          <a:prstGeom xmlns:a="http://schemas.openxmlformats.org/drawingml/2006/main" prst="rect">
+            <a:avLst/>
+          </a:prstGeom>
+        </p:spPr>
+        <p:txBody>
+          <a:bodyPr xmlns:a="http://schemas.openxmlformats.org/drawingml/2006/main" wrap="square" lIns="0" tIns="0" rIns="0" bIns="0" anchor="t">
             <a:noAutofit/>
           </a:bodyPr>
-          <a:lstStyle/>
-          <a:p>
+          <a:lstStyle xmlns:a="http://schemas.openxmlformats.org/drawingml/2006/main"/>
+          <a:p xmlns:a="http://schemas.openxmlformats.org/drawingml/2006/main">
             <a:pPr algn="l">
+              <a:buNone/>
               <a:defRPr sz="1950" b="1">
                 <a:solidFill>
                   <a:srgbClr val="000000"/>
@@ -1900,33 +2204,34 @@
       <p:sp>
         <p:nvSpPr>
           <p:cNvPr id="2" name="cover-title">
-            <a:extLst>
+            <a:extLst xmlns:a="http://schemas.openxmlformats.org/drawingml/2006/main">
               <a:ext uri="{FF2B5EF4-FFF2-40B4-BE49-F238E27FC236}">
                 <a16:creationId xmlns:a16="http://schemas.microsoft.com/office/drawing/2014/main" id="{91029E56-C98D-48B2-895A-B5EA2B731256}"/>
               </a:ext>
             </a:extLst>
           </p:cNvPr>
           <p:cNvSpPr>
-            <a:spLocks noGrp="1"/>
-          </p:cNvSpPr>
-          <p:nvPr/>
-        </p:nvSpPr>
-        <p:spPr>
-          <a:xfrm>
+            <a:spLocks xmlns:a="http://schemas.openxmlformats.org/drawingml/2006/main" noGrp="1"/>
+          </p:cNvSpPr>
+          <p:nvPr/>
+        </p:nvSpPr>
+        <p:spPr>
+          <a:xfrm xmlns:a="http://schemas.openxmlformats.org/drawingml/2006/main">
             <a:off x="400050" y="1676400"/>
             <a:ext cx="10668000" cy="2667000"/>
           </a:xfrm>
-          <a:prstGeom prst="rect">
-            <a:avLst/>
-          </a:prstGeom>
-        </p:spPr>
-        <p:txBody>
-          <a:bodyPr wrap="square" lIns="0" tIns="0" rIns="0" bIns="0" anchor="b">
+          <a:prstGeom xmlns:a="http://schemas.openxmlformats.org/drawingml/2006/main" prst="rect">
+            <a:avLst/>
+          </a:prstGeom>
+        </p:spPr>
+        <p:txBody>
+          <a:bodyPr xmlns:a="http://schemas.openxmlformats.org/drawingml/2006/main" wrap="square" lIns="0" tIns="0" rIns="0" bIns="0" anchor="b">
             <a:normAutofit/>
           </a:bodyPr>
-          <a:lstStyle/>
-          <a:p>
+          <a:lstStyle xmlns:a="http://schemas.openxmlformats.org/drawingml/2006/main"/>
+          <a:p xmlns:a="http://schemas.openxmlformats.org/drawingml/2006/main">
             <a:pPr algn="l">
+              <a:buNone/>
               <a:defRPr sz="5100" b="1">
                 <a:solidFill>
                   <a:srgbClr val="000000"/>
@@ -1946,33 +2251,34 @@
       <p:sp>
         <p:nvSpPr>
           <p:cNvPr id="3" name="cover-subtitle">
-            <a:extLst>
+            <a:extLst xmlns:a="http://schemas.openxmlformats.org/drawingml/2006/main">
               <a:ext uri="{FF2B5EF4-FFF2-40B4-BE49-F238E27FC236}">
                 <a16:creationId xmlns:a16="http://schemas.microsoft.com/office/drawing/2014/main" id="{1F2DEB35-5309-4D8F-B520-5839BBADFBE6}"/>
               </a:ext>
             </a:extLst>
           </p:cNvPr>
           <p:cNvSpPr>
-            <a:spLocks noGrp="1"/>
-          </p:cNvSpPr>
-          <p:nvPr/>
-        </p:nvSpPr>
-        <p:spPr>
-          <a:xfrm>
+            <a:spLocks xmlns:a="http://schemas.openxmlformats.org/drawingml/2006/main" noGrp="1"/>
+          </p:cNvSpPr>
+          <p:nvPr/>
+        </p:nvSpPr>
+        <p:spPr>
+          <a:xfrm xmlns:a="http://schemas.openxmlformats.org/drawingml/2006/main">
             <a:off x="400050" y="4895850"/>
             <a:ext cx="9906000" cy="723900"/>
           </a:xfrm>
-          <a:prstGeom prst="rect">
-            <a:avLst/>
-          </a:prstGeom>
-        </p:spPr>
-        <p:txBody>
-          <a:bodyPr wrap="square" lIns="0" tIns="0" rIns="0" bIns="0" anchor="t">
-            <a:normAutofit/>
+          <a:prstGeom xmlns:a="http://schemas.openxmlformats.org/drawingml/2006/main" prst="rect">
+            <a:avLst/>
+          </a:prstGeom>
+        </p:spPr>
+        <p:txBody>
+          <a:bodyPr xmlns:a="http://schemas.openxmlformats.org/drawingml/2006/main" wrap="square" lIns="0" tIns="0" rIns="0" bIns="0" anchor="t">
+            <a:normAutofit fontScale="100000"/>
           </a:bodyPr>
-          <a:lstStyle/>
-          <a:p>
+          <a:lstStyle xmlns:a="http://schemas.openxmlformats.org/drawingml/2006/main"/>
+          <a:p xmlns:a="http://schemas.openxmlformats.org/drawingml/2006/main">
             <a:pPr algn="l">
+              <a:buNone/>
               <a:defRPr sz="2100" b="0">
                 <a:solidFill>
                   <a:srgbClr val="000000"/>
@@ -1983,7 +2289,7 @@
               </a:defRPr>
             </a:pPr>
             <a:r>
-              <a:t>主接线 · 负荷与短路计算 · 设备预筛 · 220kV AIS平断面</a:t>
+              <a:t>主接线 · 容量与短路 · 设备及防雷接地预筛 · AIS平断面与L1详图</a:t>
             </a:r>
           </a:p>
         </p:txBody>
@@ -1991,33 +2297,34 @@
       <p:sp>
         <p:nvSpPr>
           <p:cNvPr id="4" name="cover-note">
-            <a:extLst>
+            <a:extLst xmlns:a="http://schemas.openxmlformats.org/drawingml/2006/main">
               <a:ext uri="{FF2B5EF4-FFF2-40B4-BE49-F238E27FC236}">
                 <a16:creationId xmlns:a16="http://schemas.microsoft.com/office/drawing/2014/main" id="{FE13D2A4-80EB-48CD-A2DD-D9022A4F7AB2}"/>
               </a:ext>
             </a:extLst>
           </p:cNvPr>
           <p:cNvSpPr>
-            <a:spLocks noGrp="1"/>
-          </p:cNvSpPr>
-          <p:nvPr/>
-        </p:nvSpPr>
-        <p:spPr>
-          <a:xfrm>
+            <a:spLocks xmlns:a="http://schemas.openxmlformats.org/drawingml/2006/main" noGrp="1"/>
+          </p:cNvSpPr>
+          <p:nvPr/>
+        </p:nvSpPr>
+        <p:spPr>
+          <a:xfrm xmlns:a="http://schemas.openxmlformats.org/drawingml/2006/main">
             <a:off x="400050" y="5953125"/>
             <a:ext cx="5905500" cy="323850"/>
           </a:xfrm>
-          <a:prstGeom prst="rect">
-            <a:avLst/>
-          </a:prstGeom>
-        </p:spPr>
-        <p:txBody>
-          <a:bodyPr wrap="square" lIns="0" tIns="0" rIns="0" bIns="0" anchor="t">
+          <a:prstGeom xmlns:a="http://schemas.openxmlformats.org/drawingml/2006/main" prst="rect">
+            <a:avLst/>
+          </a:prstGeom>
+        </p:spPr>
+        <p:txBody>
+          <a:bodyPr xmlns:a="http://schemas.openxmlformats.org/drawingml/2006/main" wrap="square" lIns="0" tIns="0" rIns="0" bIns="0" anchor="t">
             <a:noAutofit/>
           </a:bodyPr>
-          <a:lstStyle/>
-          <a:p>
+          <a:lstStyle xmlns:a="http://schemas.openxmlformats.org/drawingml/2006/main"/>
+          <a:p xmlns:a="http://schemas.openxmlformats.org/drawingml/2006/main">
             <a:pPr algn="l">
+              <a:buNone/>
               <a:defRPr sz="1350" b="0">
                 <a:solidFill>
                   <a:srgbClr val="555555"/>
@@ -2040,21 +2347,17 @@
       </p:ext>
     </p:extLst>
   </p:cSld>
-  <p:clrMapOvr>
-    <a:masterClrMapping/>
-  </p:clrMapOvr>
 </p:sld>
 </file>
 
 <file path=ppt/slides/slide10.xml><?xml version="1.0" encoding="utf-8"?>
-<p:sld xmlns:a="http://schemas.openxmlformats.org/drawingml/2006/main" xmlns:r="http://schemas.openxmlformats.org/officeDocument/2006/relationships" xmlns:p="http://schemas.openxmlformats.org/presentationml/2006/main">
+<p:sld xmlns:p="http://schemas.openxmlformats.org/presentationml/2006/main">
   <p:cSld>
     <p:bg>
       <p:bgPr>
-        <a:solidFill>
+        <a:solidFill xmlns:a="http://schemas.openxmlformats.org/drawingml/2006/main">
           <a:srgbClr val="FFFFFF"/>
         </a:solidFill>
-        <a:effectLst/>
       </p:bgPr>
     </p:bg>
     <p:spTree>
@@ -2064,43 +2367,39 @@
         <p:nvPr/>
       </p:nvGrpSpPr>
       <p:grpSpPr>
-        <a:xfrm>
-          <a:off x="0" y="0"/>
-          <a:ext cx="0" cy="0"/>
-          <a:chOff x="0" y="0"/>
-          <a:chExt cx="0" cy="0"/>
-        </a:xfrm>
+        <a:xfrm xmlns:a="http://schemas.openxmlformats.org/drawingml/2006/main"/>
       </p:grpSpPr>
       <p:sp>
         <p:nvSpPr>
           <p:cNvPr id="12" name="slide-10-title">
-            <a:extLst>
+            <a:extLst xmlns:a="http://schemas.openxmlformats.org/drawingml/2006/main">
               <a:ext uri="{FF2B5EF4-FFF2-40B4-BE49-F238E27FC236}">
                 <a16:creationId xmlns:a16="http://schemas.microsoft.com/office/drawing/2014/main" id="{B4889614-EA5A-403E-8855-7B0E30464281}"/>
               </a:ext>
             </a:extLst>
           </p:cNvPr>
           <p:cNvSpPr>
-            <a:spLocks noGrp="1"/>
-          </p:cNvSpPr>
-          <p:nvPr/>
-        </p:nvSpPr>
-        <p:spPr>
-          <a:xfrm>
+            <a:spLocks xmlns:a="http://schemas.openxmlformats.org/drawingml/2006/main" noGrp="1"/>
+          </p:cNvSpPr>
+          <p:nvPr/>
+        </p:nvSpPr>
+        <p:spPr>
+          <a:xfrm xmlns:a="http://schemas.openxmlformats.org/drawingml/2006/main">
             <a:off x="400050" y="323850"/>
             <a:ext cx="11391900" cy="781050"/>
           </a:xfrm>
-          <a:prstGeom prst="rect">
-            <a:avLst/>
-          </a:prstGeom>
-        </p:spPr>
-        <p:txBody>
-          <a:bodyPr wrap="square" lIns="0" tIns="0" rIns="0" bIns="0" anchor="t">
-            <a:normAutofit/>
+          <a:prstGeom xmlns:a="http://schemas.openxmlformats.org/drawingml/2006/main" prst="rect">
+            <a:avLst/>
+          </a:prstGeom>
+        </p:spPr>
+        <p:txBody>
+          <a:bodyPr xmlns:a="http://schemas.openxmlformats.org/drawingml/2006/main" wrap="square" lIns="0" tIns="0" rIns="0" bIns="0" anchor="t">
+            <a:normAutofit fontScale="100000"/>
           </a:bodyPr>
-          <a:lstStyle/>
-          <a:p>
+          <a:lstStyle xmlns:a="http://schemas.openxmlformats.org/drawingml/2006/main"/>
+          <a:p xmlns:a="http://schemas.openxmlformats.org/drawingml/2006/main">
             <a:pPr algn="l">
+              <a:buNone/>
               <a:defRPr sz="3000" b="1">
                 <a:solidFill>
                   <a:srgbClr val="000000"/>
@@ -2111,7 +2410,7 @@
               </a:defRPr>
             </a:pPr>
             <a:r>
-              <a:t>正常方式坚持三处母联断开，一处母联闭合</a:t>
+              <a:t>220kV分段及35/10kV母联断开</a:t>
             </a:r>
           </a:p>
         </p:txBody>
@@ -2119,33 +2418,34 @@
       <p:sp>
         <p:nvSpPr>
           <p:cNvPr id="2" name="page-10">
-            <a:extLst>
+            <a:extLst xmlns:a="http://schemas.openxmlformats.org/drawingml/2006/main">
               <a:ext uri="{FF2B5EF4-FFF2-40B4-BE49-F238E27FC236}">
                 <a16:creationId xmlns:a16="http://schemas.microsoft.com/office/drawing/2014/main" id="{972ADB7C-097F-4169-84A7-1E695C2E8254}"/>
               </a:ext>
             </a:extLst>
           </p:cNvPr>
           <p:cNvSpPr>
-            <a:spLocks noGrp="1"/>
-          </p:cNvSpPr>
-          <p:nvPr/>
-        </p:nvSpPr>
-        <p:spPr>
-          <a:xfrm>
+            <a:spLocks xmlns:a="http://schemas.openxmlformats.org/drawingml/2006/main" noGrp="1"/>
+          </p:cNvSpPr>
+          <p:nvPr/>
+        </p:nvSpPr>
+        <p:spPr>
+          <a:xfrm xmlns:a="http://schemas.openxmlformats.org/drawingml/2006/main">
             <a:off x="11277600" y="6276975"/>
             <a:ext cx="514350" cy="238125"/>
           </a:xfrm>
-          <a:prstGeom prst="rect">
-            <a:avLst/>
-          </a:prstGeom>
-        </p:spPr>
-        <p:txBody>
-          <a:bodyPr wrap="square" lIns="0" tIns="0" rIns="0" bIns="0" anchor="b">
+          <a:prstGeom xmlns:a="http://schemas.openxmlformats.org/drawingml/2006/main" prst="rect">
+            <a:avLst/>
+          </a:prstGeom>
+        </p:spPr>
+        <p:txBody>
+          <a:bodyPr xmlns:a="http://schemas.openxmlformats.org/drawingml/2006/main" wrap="square" lIns="0" tIns="0" rIns="0" bIns="0" anchor="b">
             <a:noAutofit/>
           </a:bodyPr>
-          <a:lstStyle/>
-          <a:p>
+          <a:lstStyle xmlns:a="http://schemas.openxmlformats.org/drawingml/2006/main"/>
+          <a:p xmlns:a="http://schemas.openxmlformats.org/drawingml/2006/main">
             <a:pPr algn="r">
+              <a:buNone/>
               <a:defRPr sz="1050" b="0">
                 <a:solidFill>
                   <a:srgbClr val="000000"/>
@@ -2164,33 +2464,34 @@
       <p:sp>
         <p:nvSpPr>
           <p:cNvPr id="3" name="operation-intro">
-            <a:extLst>
+            <a:extLst xmlns:a="http://schemas.openxmlformats.org/drawingml/2006/main">
               <a:ext uri="{FF2B5EF4-FFF2-40B4-BE49-F238E27FC236}">
                 <a16:creationId xmlns:a16="http://schemas.microsoft.com/office/drawing/2014/main" id="{C1541F10-5064-4E2C-8210-F2859DA20850}"/>
               </a:ext>
             </a:extLst>
           </p:cNvPr>
           <p:cNvSpPr>
-            <a:spLocks noGrp="1"/>
-          </p:cNvSpPr>
-          <p:nvPr/>
-        </p:nvSpPr>
-        <p:spPr>
-          <a:xfrm>
+            <a:spLocks xmlns:a="http://schemas.openxmlformats.org/drawingml/2006/main" noGrp="1"/>
+          </p:cNvSpPr>
+          <p:nvPr/>
+        </p:nvSpPr>
+        <p:spPr>
+          <a:xfrm xmlns:a="http://schemas.openxmlformats.org/drawingml/2006/main">
             <a:off x="400050" y="1200150"/>
             <a:ext cx="11391900" cy="952500"/>
           </a:xfrm>
-          <a:prstGeom prst="rect">
-            <a:avLst/>
-          </a:prstGeom>
-        </p:spPr>
-        <p:txBody>
-          <a:bodyPr wrap="square" lIns="0" tIns="0" rIns="0" bIns="0" anchor="t">
+          <a:prstGeom xmlns:a="http://schemas.openxmlformats.org/drawingml/2006/main" prst="rect">
+            <a:avLst/>
+          </a:prstGeom>
+        </p:spPr>
+        <p:txBody>
+          <a:bodyPr xmlns:a="http://schemas.openxmlformats.org/drawingml/2006/main" wrap="square" lIns="0" tIns="0" rIns="0" bIns="0" anchor="t">
             <a:normAutofit/>
           </a:bodyPr>
-          <a:lstStyle/>
-          <a:p>
+          <a:lstStyle xmlns:a="http://schemas.openxmlformats.org/drawingml/2006/main"/>
+          <a:p xmlns:a="http://schemas.openxmlformats.org/drawingml/2006/main">
             <a:pPr algn="l">
+              <a:buNone/>
               <a:defRPr sz="1875" b="0">
                 <a:solidFill>
                   <a:srgbClr val="000000"/>
@@ -2209,31 +2510,31 @@
       <p:sp>
         <p:nvSpPr>
           <p:cNvPr id="4" name="operation-left">
-            <a:extLst>
+            <a:extLst xmlns:a="http://schemas.openxmlformats.org/drawingml/2006/main">
               <a:ext uri="{FF2B5EF4-FFF2-40B4-BE49-F238E27FC236}">
                 <a16:creationId xmlns:a16="http://schemas.microsoft.com/office/drawing/2014/main" id="{A3EA6A77-DD6F-47BF-9C9B-C98217D75E69}"/>
               </a:ext>
             </a:extLst>
           </p:cNvPr>
           <p:cNvSpPr>
-            <a:spLocks noGrp="1"/>
-          </p:cNvSpPr>
-          <p:nvPr/>
-        </p:nvSpPr>
-        <p:spPr>
-          <a:xfrm>
+            <a:spLocks xmlns:a="http://schemas.openxmlformats.org/drawingml/2006/main" noGrp="1"/>
+          </p:cNvSpPr>
+          <p:nvPr/>
+        </p:nvSpPr>
+        <p:spPr>
+          <a:xfrm xmlns:a="http://schemas.openxmlformats.org/drawingml/2006/main">
             <a:off x="400050" y="2857500"/>
             <a:ext cx="5524500" cy="1485900"/>
           </a:xfrm>
-          <a:prstGeom prst="roundRect">
+          <a:prstGeom xmlns:a="http://schemas.openxmlformats.org/drawingml/2006/main" prst="roundRect">
             <a:avLst>
               <a:gd name="adj" fmla="val 5128"/>
             </a:avLst>
           </a:prstGeom>
-          <a:solidFill>
+          <a:solidFill xmlns:a="http://schemas.openxmlformats.org/drawingml/2006/main">
             <a:srgbClr val="F2F2F2"/>
           </a:solidFill>
-          <a:ln w="0">
+          <a:ln xmlns:a="http://schemas.openxmlformats.org/drawingml/2006/main" w="0">
             <a:solidFill>
               <a:srgbClr val="F2F2F2"/>
             </a:solidFill>
@@ -2244,33 +2545,34 @@
       <p:sp>
         <p:nvSpPr>
           <p:cNvPr id="5" name="operation-left-title">
-            <a:extLst>
+            <a:extLst xmlns:a="http://schemas.openxmlformats.org/drawingml/2006/main">
               <a:ext uri="{FF2B5EF4-FFF2-40B4-BE49-F238E27FC236}">
                 <a16:creationId xmlns:a16="http://schemas.microsoft.com/office/drawing/2014/main" id="{41F216C5-37DD-46D1-864A-6761F794F651}"/>
               </a:ext>
             </a:extLst>
           </p:cNvPr>
           <p:cNvSpPr>
-            <a:spLocks noGrp="1"/>
-          </p:cNvSpPr>
-          <p:nvPr/>
-        </p:nvSpPr>
-        <p:spPr>
-          <a:xfrm>
+            <a:spLocks xmlns:a="http://schemas.openxmlformats.org/drawingml/2006/main" noGrp="1"/>
+          </p:cNvSpPr>
+          <p:nvPr/>
+        </p:nvSpPr>
+        <p:spPr>
+          <a:xfrm xmlns:a="http://schemas.openxmlformats.org/drawingml/2006/main">
             <a:off x="704850" y="3162300"/>
             <a:ext cx="4914900" cy="419100"/>
           </a:xfrm>
-          <a:prstGeom prst="rect">
-            <a:avLst/>
-          </a:prstGeom>
-        </p:spPr>
-        <p:txBody>
-          <a:bodyPr wrap="square" lIns="0" tIns="0" rIns="0" bIns="0" anchor="t">
+          <a:prstGeom xmlns:a="http://schemas.openxmlformats.org/drawingml/2006/main" prst="rect">
+            <a:avLst/>
+          </a:prstGeom>
+        </p:spPr>
+        <p:txBody>
+          <a:bodyPr xmlns:a="http://schemas.openxmlformats.org/drawingml/2006/main" wrap="square" lIns="0" tIns="0" rIns="0" bIns="0" anchor="t">
             <a:noAutofit/>
           </a:bodyPr>
-          <a:lstStyle/>
-          <a:p>
+          <a:lstStyle xmlns:a="http://schemas.openxmlformats.org/drawingml/2006/main"/>
+          <a:p xmlns:a="http://schemas.openxmlformats.org/drawingml/2006/main">
             <a:pPr algn="l">
+              <a:buNone/>
               <a:defRPr sz="2325" b="1">
                 <a:solidFill>
                   <a:srgbClr val="000000"/>
@@ -2289,33 +2591,34 @@
       <p:sp>
         <p:nvSpPr>
           <p:cNvPr id="6" name="operation-left-card">
-            <a:extLst>
+            <a:extLst xmlns:a="http://schemas.openxmlformats.org/drawingml/2006/main">
               <a:ext uri="{FF2B5EF4-FFF2-40B4-BE49-F238E27FC236}">
                 <a16:creationId xmlns:a16="http://schemas.microsoft.com/office/drawing/2014/main" id="{411B4837-0C9B-4844-A022-419E6F6E50E2}"/>
               </a:ext>
             </a:extLst>
           </p:cNvPr>
           <p:cNvSpPr>
-            <a:spLocks noGrp="1"/>
-          </p:cNvSpPr>
-          <p:nvPr/>
-        </p:nvSpPr>
-        <p:spPr>
-          <a:xfrm>
+            <a:spLocks xmlns:a="http://schemas.openxmlformats.org/drawingml/2006/main" noGrp="1"/>
+          </p:cNvSpPr>
+          <p:nvPr/>
+        </p:nvSpPr>
+        <p:spPr>
+          <a:xfrm xmlns:a="http://schemas.openxmlformats.org/drawingml/2006/main">
             <a:off x="704850" y="3695700"/>
             <a:ext cx="4914900" cy="552450"/>
           </a:xfrm>
-          <a:prstGeom prst="rect">
-            <a:avLst/>
-          </a:prstGeom>
-        </p:spPr>
-        <p:txBody>
-          <a:bodyPr wrap="square" lIns="0" tIns="0" rIns="0" bIns="0" anchor="t">
+          <a:prstGeom xmlns:a="http://schemas.openxmlformats.org/drawingml/2006/main" prst="rect">
+            <a:avLst/>
+          </a:prstGeom>
+        </p:spPr>
+        <p:txBody>
+          <a:bodyPr xmlns:a="http://schemas.openxmlformats.org/drawingml/2006/main" wrap="square" lIns="0" tIns="0" rIns="0" bIns="0" anchor="t">
             <a:normAutofit fontScale="70048"/>
           </a:bodyPr>
-          <a:lstStyle/>
-          <a:p>
+          <a:lstStyle xmlns:a="http://schemas.openxmlformats.org/drawingml/2006/main"/>
+          <a:p xmlns:a="http://schemas.openxmlformats.org/drawingml/2006/main">
             <a:pPr algn="l">
+              <a:buNone/>
               <a:defRPr sz="1725" b="0">
                 <a:solidFill>
                   <a:srgbClr val="000000"/>
@@ -2336,31 +2639,31 @@
       <p:sp>
         <p:nvSpPr>
           <p:cNvPr id="7" name="operation-right">
-            <a:extLst>
+            <a:extLst xmlns:a="http://schemas.openxmlformats.org/drawingml/2006/main">
               <a:ext uri="{FF2B5EF4-FFF2-40B4-BE49-F238E27FC236}">
                 <a16:creationId xmlns:a16="http://schemas.microsoft.com/office/drawing/2014/main" id="{FD899AB5-9B24-41DE-85EB-1C884DA35189}"/>
               </a:ext>
             </a:extLst>
           </p:cNvPr>
           <p:cNvSpPr>
-            <a:spLocks noGrp="1"/>
-          </p:cNvSpPr>
-          <p:nvPr/>
-        </p:nvSpPr>
-        <p:spPr>
-          <a:xfrm>
+            <a:spLocks xmlns:a="http://schemas.openxmlformats.org/drawingml/2006/main" noGrp="1"/>
+          </p:cNvSpPr>
+          <p:nvPr/>
+        </p:nvSpPr>
+        <p:spPr>
+          <a:xfrm xmlns:a="http://schemas.openxmlformats.org/drawingml/2006/main">
             <a:off x="6267450" y="2857500"/>
             <a:ext cx="5524500" cy="1485900"/>
           </a:xfrm>
-          <a:prstGeom prst="roundRect">
+          <a:prstGeom xmlns:a="http://schemas.openxmlformats.org/drawingml/2006/main" prst="roundRect">
             <a:avLst>
               <a:gd name="adj" fmla="val 5128"/>
             </a:avLst>
           </a:prstGeom>
-          <a:solidFill>
+          <a:solidFill xmlns:a="http://schemas.openxmlformats.org/drawingml/2006/main">
             <a:srgbClr val="EAF5FB"/>
           </a:solidFill>
-          <a:ln w="0">
+          <a:ln xmlns:a="http://schemas.openxmlformats.org/drawingml/2006/main" w="0">
             <a:solidFill>
               <a:srgbClr val="EAF5FB"/>
             </a:solidFill>
@@ -2371,33 +2674,34 @@
       <p:sp>
         <p:nvSpPr>
           <p:cNvPr id="8" name="operation-right-title">
-            <a:extLst>
+            <a:extLst xmlns:a="http://schemas.openxmlformats.org/drawingml/2006/main">
               <a:ext uri="{FF2B5EF4-FFF2-40B4-BE49-F238E27FC236}">
                 <a16:creationId xmlns:a16="http://schemas.microsoft.com/office/drawing/2014/main" id="{68EB9ABB-EFB1-47A5-9459-9AE89FA054EE}"/>
               </a:ext>
             </a:extLst>
           </p:cNvPr>
           <p:cNvSpPr>
-            <a:spLocks noGrp="1"/>
-          </p:cNvSpPr>
-          <p:nvPr/>
-        </p:nvSpPr>
-        <p:spPr>
-          <a:xfrm>
+            <a:spLocks xmlns:a="http://schemas.openxmlformats.org/drawingml/2006/main" noGrp="1"/>
+          </p:cNvSpPr>
+          <p:nvPr/>
+        </p:nvSpPr>
+        <p:spPr>
+          <a:xfrm xmlns:a="http://schemas.openxmlformats.org/drawingml/2006/main">
             <a:off x="6572250" y="3162300"/>
             <a:ext cx="4914900" cy="419100"/>
           </a:xfrm>
-          <a:prstGeom prst="rect">
-            <a:avLst/>
-          </a:prstGeom>
-        </p:spPr>
-        <p:txBody>
-          <a:bodyPr wrap="square" lIns="0" tIns="0" rIns="0" bIns="0" anchor="t">
+          <a:prstGeom xmlns:a="http://schemas.openxmlformats.org/drawingml/2006/main" prst="rect">
+            <a:avLst/>
+          </a:prstGeom>
+        </p:spPr>
+        <p:txBody>
+          <a:bodyPr xmlns:a="http://schemas.openxmlformats.org/drawingml/2006/main" wrap="square" lIns="0" tIns="0" rIns="0" bIns="0" anchor="t">
             <a:noAutofit/>
           </a:bodyPr>
-          <a:lstStyle/>
-          <a:p>
+          <a:lstStyle xmlns:a="http://schemas.openxmlformats.org/drawingml/2006/main"/>
+          <a:p xmlns:a="http://schemas.openxmlformats.org/drawingml/2006/main">
             <a:pPr algn="l">
+              <a:buNone/>
               <a:defRPr sz="2325" b="1">
                 <a:solidFill>
                   <a:srgbClr val="000000"/>
@@ -2416,33 +2720,34 @@
       <p:sp>
         <p:nvSpPr>
           <p:cNvPr id="9" name="operation-right-card">
-            <a:extLst>
+            <a:extLst xmlns:a="http://schemas.openxmlformats.org/drawingml/2006/main">
               <a:ext uri="{FF2B5EF4-FFF2-40B4-BE49-F238E27FC236}">
                 <a16:creationId xmlns:a16="http://schemas.microsoft.com/office/drawing/2014/main" id="{8EE528E7-DFF7-4938-8E93-4F94C78B41A0}"/>
               </a:ext>
             </a:extLst>
           </p:cNvPr>
           <p:cNvSpPr>
-            <a:spLocks noGrp="1"/>
-          </p:cNvSpPr>
-          <p:nvPr/>
-        </p:nvSpPr>
-        <p:spPr>
-          <a:xfrm>
+            <a:spLocks xmlns:a="http://schemas.openxmlformats.org/drawingml/2006/main" noGrp="1"/>
+          </p:cNvSpPr>
+          <p:nvPr/>
+        </p:nvSpPr>
+        <p:spPr>
+          <a:xfrm xmlns:a="http://schemas.openxmlformats.org/drawingml/2006/main">
             <a:off x="6572250" y="3695700"/>
             <a:ext cx="4914900" cy="552450"/>
           </a:xfrm>
-          <a:prstGeom prst="rect">
-            <a:avLst/>
-          </a:prstGeom>
-        </p:spPr>
-        <p:txBody>
-          <a:bodyPr wrap="square" lIns="0" tIns="0" rIns="0" bIns="0" anchor="t">
+          <a:prstGeom xmlns:a="http://schemas.openxmlformats.org/drawingml/2006/main" prst="rect">
+            <a:avLst/>
+          </a:prstGeom>
+        </p:spPr>
+        <p:txBody>
+          <a:bodyPr xmlns:a="http://schemas.openxmlformats.org/drawingml/2006/main" wrap="square" lIns="0" tIns="0" rIns="0" bIns="0" anchor="t">
             <a:normAutofit fontScale="70048"/>
           </a:bodyPr>
-          <a:lstStyle/>
-          <a:p>
+          <a:lstStyle xmlns:a="http://schemas.openxmlformats.org/drawingml/2006/main"/>
+          <a:p xmlns:a="http://schemas.openxmlformats.org/drawingml/2006/main">
             <a:pPr algn="l">
+              <a:buNone/>
               <a:defRPr sz="1725" b="0">
                 <a:solidFill>
                   <a:srgbClr val="000000"/>
@@ -2463,33 +2768,34 @@
       <p:sp>
         <p:nvSpPr>
           <p:cNvPr id="10" name="operation-left-detail">
-            <a:extLst>
+            <a:extLst xmlns:a="http://schemas.openxmlformats.org/drawingml/2006/main">
               <a:ext uri="{FF2B5EF4-FFF2-40B4-BE49-F238E27FC236}">
                 <a16:creationId xmlns:a16="http://schemas.microsoft.com/office/drawing/2014/main" id="{B0759554-BA3B-48F7-989C-20BBD1AF13E7}"/>
               </a:ext>
             </a:extLst>
           </p:cNvPr>
           <p:cNvSpPr>
-            <a:spLocks noGrp="1"/>
-          </p:cNvSpPr>
-          <p:nvPr/>
-        </p:nvSpPr>
-        <p:spPr>
-          <a:xfrm>
+            <a:spLocks xmlns:a="http://schemas.openxmlformats.org/drawingml/2006/main" noGrp="1"/>
+          </p:cNvSpPr>
+          <p:nvPr/>
+        </p:nvSpPr>
+        <p:spPr>
+          <a:xfrm xmlns:a="http://schemas.openxmlformats.org/drawingml/2006/main">
             <a:off x="704850" y="4762500"/>
             <a:ext cx="4914900" cy="1066800"/>
           </a:xfrm>
-          <a:prstGeom prst="rect">
-            <a:avLst/>
-          </a:prstGeom>
-        </p:spPr>
-        <p:txBody>
-          <a:bodyPr wrap="square" lIns="0" tIns="0" rIns="0" bIns="0" anchor="t">
+          <a:prstGeom xmlns:a="http://schemas.openxmlformats.org/drawingml/2006/main" prst="rect">
+            <a:avLst/>
+          </a:prstGeom>
+        </p:spPr>
+        <p:txBody>
+          <a:bodyPr xmlns:a="http://schemas.openxmlformats.org/drawingml/2006/main" wrap="square" lIns="0" tIns="0" rIns="0" bIns="0" anchor="t">
             <a:normAutofit/>
           </a:bodyPr>
-          <a:lstStyle/>
-          <a:p>
+          <a:lstStyle xmlns:a="http://schemas.openxmlformats.org/drawingml/2006/main"/>
+          <a:p xmlns:a="http://schemas.openxmlformats.org/drawingml/2006/main">
             <a:pPr algn="l">
+              <a:buNone/>
               <a:defRPr sz="1575" b="0">
                 <a:solidFill>
                   <a:srgbClr val="000000"/>
@@ -2510,33 +2816,34 @@
       <p:sp>
         <p:nvSpPr>
           <p:cNvPr id="11" name="operation-right-detail">
-            <a:extLst>
+            <a:extLst xmlns:a="http://schemas.openxmlformats.org/drawingml/2006/main">
               <a:ext uri="{FF2B5EF4-FFF2-40B4-BE49-F238E27FC236}">
                 <a16:creationId xmlns:a16="http://schemas.microsoft.com/office/drawing/2014/main" id="{ED37527D-D4B5-401F-A1B6-E778D8EFE0CD}"/>
               </a:ext>
             </a:extLst>
           </p:cNvPr>
           <p:cNvSpPr>
-            <a:spLocks noGrp="1"/>
-          </p:cNvSpPr>
-          <p:nvPr/>
-        </p:nvSpPr>
-        <p:spPr>
-          <a:xfrm>
+            <a:spLocks xmlns:a="http://schemas.openxmlformats.org/drawingml/2006/main" noGrp="1"/>
+          </p:cNvSpPr>
+          <p:nvPr/>
+        </p:nvSpPr>
+        <p:spPr>
+          <a:xfrm xmlns:a="http://schemas.openxmlformats.org/drawingml/2006/main">
             <a:off x="6572250" y="4762500"/>
             <a:ext cx="4914900" cy="1066800"/>
           </a:xfrm>
-          <a:prstGeom prst="rect">
-            <a:avLst/>
-          </a:prstGeom>
-        </p:spPr>
-        <p:txBody>
-          <a:bodyPr wrap="square" lIns="0" tIns="0" rIns="0" bIns="0" anchor="t">
-            <a:normAutofit/>
+          <a:prstGeom xmlns:a="http://schemas.openxmlformats.org/drawingml/2006/main" prst="rect">
+            <a:avLst/>
+          </a:prstGeom>
+        </p:spPr>
+        <p:txBody>
+          <a:bodyPr xmlns:a="http://schemas.openxmlformats.org/drawingml/2006/main" wrap="square" lIns="0" tIns="0" rIns="0" bIns="0" anchor="t">
+            <a:normAutofit fontScale="100000"/>
           </a:bodyPr>
-          <a:lstStyle/>
-          <a:p>
+          <a:lstStyle xmlns:a="http://schemas.openxmlformats.org/drawingml/2006/main"/>
+          <a:p xmlns:a="http://schemas.openxmlformats.org/drawingml/2006/main">
             <a:pPr algn="l">
+              <a:buNone/>
               <a:defRPr sz="1575" b="0">
                 <a:solidFill>
                   <a:srgbClr val="000000"/>
@@ -2547,9 +2854,9 @@
               </a:defRPr>
             </a:pPr>
             <a:r>
-              <a:t>220kV分段闭合需调度许可与同期检查
-N-1转供前先落实限发边界
-保护定值随运行方式复核</a:t>
+              <a:t>母联合闸前退出受电/故障段接地源
+仅保留健康侧1套低电阻接地源
+禁止两套低电阻接地源并联</a:t>
             </a:r>
           </a:p>
         </p:txBody>
@@ -2561,21 +2868,17 @@
       </p:ext>
     </p:extLst>
   </p:cSld>
-  <p:clrMapOvr>
-    <a:masterClrMapping/>
-  </p:clrMapOvr>
 </p:sld>
 </file>
 
 <file path=ppt/slides/slide11.xml><?xml version="1.0" encoding="utf-8"?>
-<p:sld xmlns:a="http://schemas.openxmlformats.org/drawingml/2006/main" xmlns:r="http://schemas.openxmlformats.org/officeDocument/2006/relationships" xmlns:p="http://schemas.openxmlformats.org/presentationml/2006/main">
+<p:sld xmlns:p="http://schemas.openxmlformats.org/presentationml/2006/main">
   <p:cSld>
     <p:bg>
       <p:bgPr>
-        <a:solidFill>
+        <a:solidFill xmlns:a="http://schemas.openxmlformats.org/drawingml/2006/main">
           <a:srgbClr val="FFFFFF"/>
         </a:solidFill>
-        <a:effectLst/>
       </p:bgPr>
     </p:bg>
     <p:spTree>
@@ -2585,43 +2888,39 @@
         <p:nvPr/>
       </p:nvGrpSpPr>
       <p:grpSpPr>
-        <a:xfrm>
-          <a:off x="0" y="0"/>
-          <a:ext cx="0" cy="0"/>
-          <a:chOff x="0" y="0"/>
-          <a:chExt cx="0" cy="0"/>
-        </a:xfrm>
+        <a:xfrm xmlns:a="http://schemas.openxmlformats.org/drawingml/2006/main"/>
       </p:grpSpPr>
       <p:sp>
         <p:nvSpPr>
           <p:cNvPr id="5" name="conclusion-eyebrow">
-            <a:extLst>
+            <a:extLst xmlns:a="http://schemas.openxmlformats.org/drawingml/2006/main">
               <a:ext uri="{FF2B5EF4-FFF2-40B4-BE49-F238E27FC236}">
                 <a16:creationId xmlns:a16="http://schemas.microsoft.com/office/drawing/2014/main" id="{DC968EF7-3B3F-45CB-A6CB-F72ADE32E2DD}"/>
               </a:ext>
             </a:extLst>
           </p:cNvPr>
           <p:cNvSpPr>
-            <a:spLocks noGrp="1"/>
-          </p:cNvSpPr>
-          <p:nvPr/>
-        </p:nvSpPr>
-        <p:spPr>
-          <a:xfrm>
+            <a:spLocks xmlns:a="http://schemas.openxmlformats.org/drawingml/2006/main" noGrp="1"/>
+          </p:cNvSpPr>
+          <p:nvPr/>
+        </p:nvSpPr>
+        <p:spPr>
+          <a:xfrm xmlns:a="http://schemas.openxmlformats.org/drawingml/2006/main">
             <a:off x="400050" y="381000"/>
             <a:ext cx="2857500" cy="381000"/>
           </a:xfrm>
-          <a:prstGeom prst="rect">
-            <a:avLst/>
-          </a:prstGeom>
-        </p:spPr>
-        <p:txBody>
-          <a:bodyPr wrap="square" lIns="0" tIns="0" rIns="0" bIns="0" anchor="t">
+          <a:prstGeom xmlns:a="http://schemas.openxmlformats.org/drawingml/2006/main" prst="rect">
+            <a:avLst/>
+          </a:prstGeom>
+        </p:spPr>
+        <p:txBody>
+          <a:bodyPr xmlns:a="http://schemas.openxmlformats.org/drawingml/2006/main" wrap="square" lIns="0" tIns="0" rIns="0" bIns="0" anchor="t">
             <a:noAutofit/>
           </a:bodyPr>
-          <a:lstStyle/>
-          <a:p>
+          <a:lstStyle xmlns:a="http://schemas.openxmlformats.org/drawingml/2006/main"/>
+          <a:p xmlns:a="http://schemas.openxmlformats.org/drawingml/2006/main">
             <a:pPr algn="l">
+              <a:buNone/>
               <a:defRPr sz="1950" b="1">
                 <a:solidFill>
                   <a:srgbClr val="000000"/>
@@ -2640,33 +2939,34 @@
       <p:sp>
         <p:nvSpPr>
           <p:cNvPr id="2" name="conclusion-title">
-            <a:extLst>
+            <a:extLst xmlns:a="http://schemas.openxmlformats.org/drawingml/2006/main">
               <a:ext uri="{FF2B5EF4-FFF2-40B4-BE49-F238E27FC236}">
                 <a16:creationId xmlns:a16="http://schemas.microsoft.com/office/drawing/2014/main" id="{776D1969-BD2F-453B-947D-F503B4D8F0E8}"/>
               </a:ext>
             </a:extLst>
           </p:cNvPr>
           <p:cNvSpPr>
-            <a:spLocks noGrp="1"/>
-          </p:cNvSpPr>
-          <p:nvPr/>
-        </p:nvSpPr>
-        <p:spPr>
-          <a:xfrm>
+            <a:spLocks xmlns:a="http://schemas.openxmlformats.org/drawingml/2006/main" noGrp="1"/>
+          </p:cNvSpPr>
+          <p:nvPr/>
+        </p:nvSpPr>
+        <p:spPr>
+          <a:xfrm xmlns:a="http://schemas.openxmlformats.org/drawingml/2006/main">
             <a:off x="400050" y="1695450"/>
             <a:ext cx="9810750" cy="2781300"/>
           </a:xfrm>
-          <a:prstGeom prst="rect">
-            <a:avLst/>
-          </a:prstGeom>
-        </p:spPr>
-        <p:txBody>
-          <a:bodyPr wrap="square" lIns="0" tIns="0" rIns="0" bIns="0" anchor="b">
-            <a:normAutofit/>
+          <a:prstGeom xmlns:a="http://schemas.openxmlformats.org/drawingml/2006/main" prst="rect">
+            <a:avLst/>
+          </a:prstGeom>
+        </p:spPr>
+        <p:txBody>
+          <a:bodyPr xmlns:a="http://schemas.openxmlformats.org/drawingml/2006/main" wrap="square" lIns="0" tIns="0" rIns="0" bIns="0" anchor="b">
+            <a:normAutofit fontScale="100000"/>
           </a:bodyPr>
-          <a:lstStyle/>
-          <a:p>
+          <a:lstStyle xmlns:a="http://schemas.openxmlformats.org/drawingml/2006/main"/>
+          <a:p xmlns:a="http://schemas.openxmlformats.org/drawingml/2006/main">
             <a:pPr algn="l">
+              <a:buNone/>
               <a:defRPr sz="5400" b="1">
                 <a:solidFill>
                   <a:srgbClr val="000000"/>
@@ -2678,7 +2978,7 @@
             </a:pPr>
             <a:r>
               <a:t>方案完整，边界清晰，
-图纸可直接临摹</a:t>
+四张A1图可直接临摹</a:t>
             </a:r>
           </a:p>
         </p:txBody>
@@ -2686,33 +2986,34 @@
       <p:sp>
         <p:nvSpPr>
           <p:cNvPr id="3" name="conclusion-details">
-            <a:extLst>
+            <a:extLst xmlns:a="http://schemas.openxmlformats.org/drawingml/2006/main">
               <a:ext uri="{FF2B5EF4-FFF2-40B4-BE49-F238E27FC236}">
                 <a16:creationId xmlns:a16="http://schemas.microsoft.com/office/drawing/2014/main" id="{AEB6781F-01E8-492F-A2F5-3DDF331DA8D5}"/>
               </a:ext>
             </a:extLst>
           </p:cNvPr>
           <p:cNvSpPr>
-            <a:spLocks noGrp="1"/>
-          </p:cNvSpPr>
-          <p:nvPr/>
-        </p:nvSpPr>
-        <p:spPr>
-          <a:xfrm>
+            <a:spLocks xmlns:a="http://schemas.openxmlformats.org/drawingml/2006/main" noGrp="1"/>
+          </p:cNvSpPr>
+          <p:nvPr/>
+        </p:nvSpPr>
+        <p:spPr>
+          <a:xfrm xmlns:a="http://schemas.openxmlformats.org/drawingml/2006/main">
             <a:off x="400050" y="5029200"/>
             <a:ext cx="7239000" cy="1066800"/>
           </a:xfrm>
-          <a:prstGeom prst="rect">
-            <a:avLst/>
-          </a:prstGeom>
-        </p:spPr>
-        <p:txBody>
-          <a:bodyPr wrap="square" lIns="0" tIns="0" rIns="0" bIns="0" anchor="t">
-            <a:normAutofit/>
+          <a:prstGeom xmlns:a="http://schemas.openxmlformats.org/drawingml/2006/main" prst="rect">
+            <a:avLst/>
+          </a:prstGeom>
+        </p:spPr>
+        <p:txBody>
+          <a:bodyPr xmlns:a="http://schemas.openxmlformats.org/drawingml/2006/main" wrap="square" lIns="0" tIns="0" rIns="0" bIns="0" anchor="t">
+            <a:normAutofit fontScale="86420"/>
           </a:bodyPr>
-          <a:lstStyle/>
-          <a:p>
+          <a:lstStyle xmlns:a="http://schemas.openxmlformats.org/drawingml/2006/main"/>
+          <a:p xmlns:a="http://schemas.openxmlformats.org/drawingml/2006/main">
             <a:pPr algn="l">
+              <a:buNone/>
               <a:defRPr sz="2025" b="0">
                 <a:solidFill>
                   <a:srgbClr val="000000"/>
@@ -2725,7 +3026,8 @@
             <a:r>
               <a:t>2×180MVA主变 + 2×31.5MVA T10
 2×±12Mvar SVG + 2×200kVA所用变
-SLD-01 / LAY-220-01 / SEC-220-01 已完成</a:t>
+SLD-01 / LAY-220-01 / SEC-220-01
+SEC-220-L1-01：四张A1图已完成</a:t>
             </a:r>
           </a:p>
         </p:txBody>
@@ -2733,33 +3035,34 @@
       <p:sp>
         <p:nvSpPr>
           <p:cNvPr id="4" name="conclusion-boundary">
-            <a:extLst>
+            <a:extLst xmlns:a="http://schemas.openxmlformats.org/drawingml/2006/main">
               <a:ext uri="{FF2B5EF4-FFF2-40B4-BE49-F238E27FC236}">
                 <a16:creationId xmlns:a16="http://schemas.microsoft.com/office/drawing/2014/main" id="{63078093-9D3D-40F3-A922-4430E870E87A}"/>
               </a:ext>
             </a:extLst>
           </p:cNvPr>
           <p:cNvSpPr>
-            <a:spLocks noGrp="1"/>
-          </p:cNvSpPr>
-          <p:nvPr/>
-        </p:nvSpPr>
-        <p:spPr>
-          <a:xfrm>
+            <a:spLocks xmlns:a="http://schemas.openxmlformats.org/drawingml/2006/main" noGrp="1"/>
+          </p:cNvSpPr>
+          <p:nvPr/>
+        </p:nvSpPr>
+        <p:spPr>
+          <a:xfrm xmlns:a="http://schemas.openxmlformats.org/drawingml/2006/main">
             <a:off x="7953375" y="5476875"/>
             <a:ext cx="3838575" cy="628650"/>
           </a:xfrm>
-          <a:prstGeom prst="rect">
-            <a:avLst/>
-          </a:prstGeom>
-        </p:spPr>
-        <p:txBody>
-          <a:bodyPr wrap="square" lIns="0" tIns="0" rIns="0" bIns="0" anchor="t">
+          <a:prstGeom xmlns:a="http://schemas.openxmlformats.org/drawingml/2006/main" prst="rect">
+            <a:avLst/>
+          </a:prstGeom>
+        </p:spPr>
+        <p:txBody>
+          <a:bodyPr xmlns:a="http://schemas.openxmlformats.org/drawingml/2006/main" wrap="square" lIns="0" tIns="0" rIns="0" bIns="0" anchor="t">
             <a:normAutofit/>
           </a:bodyPr>
-          <a:lstStyle/>
-          <a:p>
+          <a:lstStyle xmlns:a="http://schemas.openxmlformats.org/drawingml/2006/main"/>
+          <a:p xmlns:a="http://schemas.openxmlformats.org/drawingml/2006/main">
             <a:pPr algn="r">
+              <a:buNone/>
               <a:defRPr sz="1350" b="0">
                 <a:solidFill>
                   <a:srgbClr val="555555"/>
@@ -2782,21 +3085,17 @@
       </p:ext>
     </p:extLst>
   </p:cSld>
-  <p:clrMapOvr>
-    <a:masterClrMapping/>
-  </p:clrMapOvr>
 </p:sld>
 </file>
 
 <file path=ppt/slides/slide2.xml><?xml version="1.0" encoding="utf-8"?>
-<p:sld xmlns:a="http://schemas.openxmlformats.org/drawingml/2006/main" xmlns:r="http://schemas.openxmlformats.org/officeDocument/2006/relationships" xmlns:p="http://schemas.openxmlformats.org/presentationml/2006/main">
+<p:sld xmlns:p="http://schemas.openxmlformats.org/presentationml/2006/main">
   <p:cSld>
     <p:bg>
       <p:bgPr>
-        <a:solidFill>
+        <a:solidFill xmlns:a="http://schemas.openxmlformats.org/drawingml/2006/main">
           <a:srgbClr val="FFFFFF"/>
         </a:solidFill>
-        <a:effectLst/>
       </p:bgPr>
     </p:bg>
     <p:spTree>
@@ -2806,43 +3105,39 @@
         <p:nvPr/>
       </p:nvGrpSpPr>
       <p:grpSpPr>
-        <a:xfrm>
-          <a:off x="0" y="0"/>
-          <a:ext cx="0" cy="0"/>
-          <a:chOff x="0" y="0"/>
-          <a:chExt cx="0" cy="0"/>
-        </a:xfrm>
+        <a:xfrm xmlns:a="http://schemas.openxmlformats.org/drawingml/2006/main"/>
       </p:grpSpPr>
       <p:sp>
         <p:nvSpPr>
           <p:cNvPr id="8" name="slide-2-title">
-            <a:extLst>
+            <a:extLst xmlns:a="http://schemas.openxmlformats.org/drawingml/2006/main">
               <a:ext uri="{FF2B5EF4-FFF2-40B4-BE49-F238E27FC236}">
                 <a16:creationId xmlns:a16="http://schemas.microsoft.com/office/drawing/2014/main" id="{4E721D93-7A37-4BA3-9063-68AC51566C2D}"/>
               </a:ext>
             </a:extLst>
           </p:cNvPr>
           <p:cNvSpPr>
-            <a:spLocks noGrp="1"/>
-          </p:cNvSpPr>
-          <p:nvPr/>
-        </p:nvSpPr>
-        <p:spPr>
-          <a:xfrm>
+            <a:spLocks xmlns:a="http://schemas.openxmlformats.org/drawingml/2006/main" noGrp="1"/>
+          </p:cNvSpPr>
+          <p:nvPr/>
+        </p:nvSpPr>
+        <p:spPr>
+          <a:xfrm xmlns:a="http://schemas.openxmlformats.org/drawingml/2006/main">
             <a:off x="400050" y="323850"/>
             <a:ext cx="11391900" cy="781050"/>
           </a:xfrm>
-          <a:prstGeom prst="rect">
-            <a:avLst/>
-          </a:prstGeom>
-        </p:spPr>
-        <p:txBody>
-          <a:bodyPr wrap="square" lIns="0" tIns="0" rIns="0" bIns="0" anchor="t">
+          <a:prstGeom xmlns:a="http://schemas.openxmlformats.org/drawingml/2006/main" prst="rect">
+            <a:avLst/>
+          </a:prstGeom>
+        </p:spPr>
+        <p:txBody>
+          <a:bodyPr xmlns:a="http://schemas.openxmlformats.org/drawingml/2006/main" wrap="square" lIns="0" tIns="0" rIns="0" bIns="0" anchor="t">
             <a:normAutofit/>
           </a:bodyPr>
-          <a:lstStyle/>
-          <a:p>
+          <a:lstStyle xmlns:a="http://schemas.openxmlformats.org/drawingml/2006/main"/>
+          <a:p xmlns:a="http://schemas.openxmlformats.org/drawingml/2006/main">
             <a:pPr algn="l">
+              <a:buNone/>
               <a:defRPr sz="3000" b="1">
                 <a:solidFill>
                   <a:srgbClr val="000000"/>
@@ -2861,33 +3156,34 @@
       <p:sp>
         <p:nvSpPr>
           <p:cNvPr id="2" name="page-2">
-            <a:extLst>
+            <a:extLst xmlns:a="http://schemas.openxmlformats.org/drawingml/2006/main">
               <a:ext uri="{FF2B5EF4-FFF2-40B4-BE49-F238E27FC236}">
                 <a16:creationId xmlns:a16="http://schemas.microsoft.com/office/drawing/2014/main" id="{17BFD13C-AE77-4CB7-80D8-C2C71ADE4DBD}"/>
               </a:ext>
             </a:extLst>
           </p:cNvPr>
           <p:cNvSpPr>
-            <a:spLocks noGrp="1"/>
-          </p:cNvSpPr>
-          <p:nvPr/>
-        </p:nvSpPr>
-        <p:spPr>
-          <a:xfrm>
+            <a:spLocks xmlns:a="http://schemas.openxmlformats.org/drawingml/2006/main" noGrp="1"/>
+          </p:cNvSpPr>
+          <p:nvPr/>
+        </p:nvSpPr>
+        <p:spPr>
+          <a:xfrm xmlns:a="http://schemas.openxmlformats.org/drawingml/2006/main">
             <a:off x="11277600" y="6276975"/>
             <a:ext cx="514350" cy="238125"/>
           </a:xfrm>
-          <a:prstGeom prst="rect">
-            <a:avLst/>
-          </a:prstGeom>
-        </p:spPr>
-        <p:txBody>
-          <a:bodyPr wrap="square" lIns="0" tIns="0" rIns="0" bIns="0" anchor="b">
+          <a:prstGeom xmlns:a="http://schemas.openxmlformats.org/drawingml/2006/main" prst="rect">
+            <a:avLst/>
+          </a:prstGeom>
+        </p:spPr>
+        <p:txBody>
+          <a:bodyPr xmlns:a="http://schemas.openxmlformats.org/drawingml/2006/main" wrap="square" lIns="0" tIns="0" rIns="0" bIns="0" anchor="b">
             <a:noAutofit/>
           </a:bodyPr>
-          <a:lstStyle/>
-          <a:p>
+          <a:lstStyle xmlns:a="http://schemas.openxmlformats.org/drawingml/2006/main"/>
+          <a:p xmlns:a="http://schemas.openxmlformats.org/drawingml/2006/main">
             <a:pPr algn="r">
+              <a:buNone/>
               <a:defRPr sz="1050" b="0">
                 <a:solidFill>
                   <a:srgbClr val="000000"/>
@@ -2906,29 +3202,29 @@
       <p:sp>
         <p:nvSpPr>
           <p:cNvPr id="3" name="scope-rule">
-            <a:extLst>
+            <a:extLst xmlns:a="http://schemas.openxmlformats.org/drawingml/2006/main">
               <a:ext uri="{FF2B5EF4-FFF2-40B4-BE49-F238E27FC236}">
                 <a16:creationId xmlns:a16="http://schemas.microsoft.com/office/drawing/2014/main" id="{343C149A-0FCC-4FCC-A9F0-4DBFF2F8E7CA}"/>
               </a:ext>
             </a:extLst>
           </p:cNvPr>
           <p:cNvSpPr>
-            <a:spLocks noGrp="1"/>
-          </p:cNvSpPr>
-          <p:nvPr/>
-        </p:nvSpPr>
-        <p:spPr>
-          <a:xfrm>
+            <a:spLocks xmlns:a="http://schemas.openxmlformats.org/drawingml/2006/main" noGrp="1"/>
+          </p:cNvSpPr>
+          <p:nvPr/>
+        </p:nvSpPr>
+        <p:spPr>
+          <a:xfrm xmlns:a="http://schemas.openxmlformats.org/drawingml/2006/main">
             <a:off x="6086475" y="1752600"/>
             <a:ext cx="14288" cy="4000500"/>
           </a:xfrm>
-          <a:prstGeom prst="rect">
-            <a:avLst/>
-          </a:prstGeom>
-          <a:solidFill>
+          <a:prstGeom xmlns:a="http://schemas.openxmlformats.org/drawingml/2006/main" prst="rect">
+            <a:avLst/>
+          </a:prstGeom>
+          <a:solidFill xmlns:a="http://schemas.openxmlformats.org/drawingml/2006/main">
             <a:srgbClr val="B8BCC4"/>
           </a:solidFill>
-          <a:ln w="0">
+          <a:ln xmlns:a="http://schemas.openxmlformats.org/drawingml/2006/main" w="0">
             <a:solidFill>
               <a:srgbClr val="B8BCC4"/>
             </a:solidFill>
@@ -2939,33 +3235,34 @@
       <p:sp>
         <p:nvSpPr>
           <p:cNvPr id="4" name="scope-left-heading">
-            <a:extLst>
+            <a:extLst xmlns:a="http://schemas.openxmlformats.org/drawingml/2006/main">
               <a:ext uri="{FF2B5EF4-FFF2-40B4-BE49-F238E27FC236}">
                 <a16:creationId xmlns:a16="http://schemas.microsoft.com/office/drawing/2014/main" id="{3713B0E0-CDF8-45FE-A182-2093ABF2A865}"/>
               </a:ext>
             </a:extLst>
           </p:cNvPr>
           <p:cNvSpPr>
-            <a:spLocks noGrp="1"/>
-          </p:cNvSpPr>
-          <p:nvPr/>
-        </p:nvSpPr>
-        <p:spPr>
-          <a:xfrm>
+            <a:spLocks xmlns:a="http://schemas.openxmlformats.org/drawingml/2006/main" noGrp="1"/>
+          </p:cNvSpPr>
+          <p:nvPr/>
+        </p:nvSpPr>
+        <p:spPr>
+          <a:xfrm xmlns:a="http://schemas.openxmlformats.org/drawingml/2006/main">
             <a:off x="400050" y="1924050"/>
             <a:ext cx="4953000" cy="438150"/>
           </a:xfrm>
-          <a:prstGeom prst="rect">
-            <a:avLst/>
-          </a:prstGeom>
-        </p:spPr>
-        <p:txBody>
-          <a:bodyPr wrap="square" lIns="0" tIns="0" rIns="0" bIns="0" anchor="t">
+          <a:prstGeom xmlns:a="http://schemas.openxmlformats.org/drawingml/2006/main" prst="rect">
+            <a:avLst/>
+          </a:prstGeom>
+        </p:spPr>
+        <p:txBody>
+          <a:bodyPr xmlns:a="http://schemas.openxmlformats.org/drawingml/2006/main" wrap="square" lIns="0" tIns="0" rIns="0" bIns="0" anchor="t">
             <a:noAutofit/>
           </a:bodyPr>
-          <a:lstStyle/>
-          <a:p>
+          <a:lstStyle xmlns:a="http://schemas.openxmlformats.org/drawingml/2006/main"/>
+          <a:p xmlns:a="http://schemas.openxmlformats.org/drawingml/2006/main">
             <a:pPr algn="l">
+              <a:buNone/>
               <a:defRPr sz="2400" b="1">
                 <a:solidFill>
                   <a:srgbClr val="000000"/>
@@ -2984,33 +3281,34 @@
       <p:sp>
         <p:nvSpPr>
           <p:cNvPr id="5" name="scope-left-body">
-            <a:extLst>
+            <a:extLst xmlns:a="http://schemas.openxmlformats.org/drawingml/2006/main">
               <a:ext uri="{FF2B5EF4-FFF2-40B4-BE49-F238E27FC236}">
                 <a16:creationId xmlns:a16="http://schemas.microsoft.com/office/drawing/2014/main" id="{28DAECE4-0D0E-4A59-85AA-4B784C4CBC42}"/>
               </a:ext>
             </a:extLst>
           </p:cNvPr>
           <p:cNvSpPr>
-            <a:spLocks noGrp="1"/>
-          </p:cNvSpPr>
-          <p:nvPr/>
-        </p:nvSpPr>
-        <p:spPr>
-          <a:xfrm>
+            <a:spLocks xmlns:a="http://schemas.openxmlformats.org/drawingml/2006/main" noGrp="1"/>
+          </p:cNvSpPr>
+          <p:nvPr/>
+        </p:nvSpPr>
+        <p:spPr>
+          <a:xfrm xmlns:a="http://schemas.openxmlformats.org/drawingml/2006/main">
             <a:off x="400050" y="2647950"/>
             <a:ext cx="4953000" cy="2857500"/>
           </a:xfrm>
-          <a:prstGeom prst="rect">
-            <a:avLst/>
-          </a:prstGeom>
-        </p:spPr>
-        <p:txBody>
-          <a:bodyPr wrap="square" lIns="0" tIns="0" rIns="0" bIns="0" anchor="t">
+          <a:prstGeom xmlns:a="http://schemas.openxmlformats.org/drawingml/2006/main" prst="rect">
+            <a:avLst/>
+          </a:prstGeom>
+        </p:spPr>
+        <p:txBody>
+          <a:bodyPr xmlns:a="http://schemas.openxmlformats.org/drawingml/2006/main" wrap="square" lIns="0" tIns="0" rIns="0" bIns="0" anchor="t">
             <a:normAutofit/>
           </a:bodyPr>
-          <a:lstStyle/>
-          <a:p>
+          <a:lstStyle xmlns:a="http://schemas.openxmlformats.org/drawingml/2006/main"/>
+          <a:p xmlns:a="http://schemas.openxmlformats.org/drawingml/2006/main">
             <a:pPr algn="l">
+              <a:buNone/>
               <a:defRPr sz="2100" b="0">
                 <a:solidFill>
                   <a:srgbClr val="000000"/>
@@ -3031,33 +3329,34 @@
       <p:sp>
         <p:nvSpPr>
           <p:cNvPr id="6" name="scope-right-heading">
-            <a:extLst>
+            <a:extLst xmlns:a="http://schemas.openxmlformats.org/drawingml/2006/main">
               <a:ext uri="{FF2B5EF4-FFF2-40B4-BE49-F238E27FC236}">
                 <a16:creationId xmlns:a16="http://schemas.microsoft.com/office/drawing/2014/main" id="{B013B5D0-F358-4E32-B7C9-7D28688A6FC4}"/>
               </a:ext>
             </a:extLst>
           </p:cNvPr>
           <p:cNvSpPr>
-            <a:spLocks noGrp="1"/>
-          </p:cNvSpPr>
-          <p:nvPr/>
-        </p:nvSpPr>
-        <p:spPr>
-          <a:xfrm>
+            <a:spLocks xmlns:a="http://schemas.openxmlformats.org/drawingml/2006/main" noGrp="1"/>
+          </p:cNvSpPr>
+          <p:nvPr/>
+        </p:nvSpPr>
+        <p:spPr>
+          <a:xfrm xmlns:a="http://schemas.openxmlformats.org/drawingml/2006/main">
             <a:off x="6610350" y="1924050"/>
             <a:ext cx="4953000" cy="438150"/>
           </a:xfrm>
-          <a:prstGeom prst="rect">
-            <a:avLst/>
-          </a:prstGeom>
-        </p:spPr>
-        <p:txBody>
-          <a:bodyPr wrap="square" lIns="0" tIns="0" rIns="0" bIns="0" anchor="t">
+          <a:prstGeom xmlns:a="http://schemas.openxmlformats.org/drawingml/2006/main" prst="rect">
+            <a:avLst/>
+          </a:prstGeom>
+        </p:spPr>
+        <p:txBody>
+          <a:bodyPr xmlns:a="http://schemas.openxmlformats.org/drawingml/2006/main" wrap="square" lIns="0" tIns="0" rIns="0" bIns="0" anchor="t">
             <a:noAutofit/>
           </a:bodyPr>
-          <a:lstStyle/>
-          <a:p>
+          <a:lstStyle xmlns:a="http://schemas.openxmlformats.org/drawingml/2006/main"/>
+          <a:p xmlns:a="http://schemas.openxmlformats.org/drawingml/2006/main">
             <a:pPr algn="l">
+              <a:buNone/>
               <a:defRPr sz="2400" b="1">
                 <a:solidFill>
                   <a:srgbClr val="000000"/>
@@ -3076,33 +3375,34 @@
       <p:sp>
         <p:nvSpPr>
           <p:cNvPr id="7" name="scope-right-body">
-            <a:extLst>
+            <a:extLst xmlns:a="http://schemas.openxmlformats.org/drawingml/2006/main">
               <a:ext uri="{FF2B5EF4-FFF2-40B4-BE49-F238E27FC236}">
                 <a16:creationId xmlns:a16="http://schemas.microsoft.com/office/drawing/2014/main" id="{1BF28EA1-DC47-489D-A03B-142F43D2428C}"/>
               </a:ext>
             </a:extLst>
           </p:cNvPr>
           <p:cNvSpPr>
-            <a:spLocks noGrp="1"/>
-          </p:cNvSpPr>
-          <p:nvPr/>
-        </p:nvSpPr>
-        <p:spPr>
-          <a:xfrm>
+            <a:spLocks xmlns:a="http://schemas.openxmlformats.org/drawingml/2006/main" noGrp="1"/>
+          </p:cNvSpPr>
+          <p:nvPr/>
+        </p:nvSpPr>
+        <p:spPr>
+          <a:xfrm xmlns:a="http://schemas.openxmlformats.org/drawingml/2006/main">
             <a:off x="6610350" y="2647950"/>
             <a:ext cx="4953000" cy="3048000"/>
           </a:xfrm>
-          <a:prstGeom prst="rect">
-            <a:avLst/>
-          </a:prstGeom>
-        </p:spPr>
-        <p:txBody>
-          <a:bodyPr wrap="square" lIns="0" tIns="0" rIns="0" bIns="0" anchor="t">
-            <a:normAutofit/>
+          <a:prstGeom xmlns:a="http://schemas.openxmlformats.org/drawingml/2006/main" prst="rect">
+            <a:avLst/>
+          </a:prstGeom>
+        </p:spPr>
+        <p:txBody>
+          <a:bodyPr xmlns:a="http://schemas.openxmlformats.org/drawingml/2006/main" wrap="square" lIns="0" tIns="0" rIns="0" bIns="0" anchor="t">
+            <a:normAutofit fontScale="100000"/>
           </a:bodyPr>
-          <a:lstStyle/>
-          <a:p>
+          <a:lstStyle xmlns:a="http://schemas.openxmlformats.org/drawingml/2006/main"/>
+          <a:p xmlns:a="http://schemas.openxmlformats.org/drawingml/2006/main">
             <a:pPr algn="l">
+              <a:buNone/>
               <a:defRPr sz="2025" b="0">
                 <a:solidFill>
                   <a:srgbClr val="000000"/>
@@ -3116,7 +3416,8 @@
               <a:t>技术设计说明书 + 计算书
 SLD-01 主接线图
 LAY-220-01 平面图
-SEC-220-01 断面图
+SEC-220-01 典型断面图
+SEC-220-L1-01 L1线路间隔详图
 答辩清单与可追溯计算脚本</a:t>
             </a:r>
           </a:p>
@@ -3129,21 +3430,17 @@
       </p:ext>
     </p:extLst>
   </p:cSld>
-  <p:clrMapOvr>
-    <a:masterClrMapping/>
-  </p:clrMapOvr>
 </p:sld>
 </file>
 
 <file path=ppt/slides/slide3.xml><?xml version="1.0" encoding="utf-8"?>
-<p:sld xmlns:a="http://schemas.openxmlformats.org/drawingml/2006/main" xmlns:r="http://schemas.openxmlformats.org/officeDocument/2006/relationships" xmlns:p="http://schemas.openxmlformats.org/presentationml/2006/main">
+<p:sld xmlns:p="http://schemas.openxmlformats.org/presentationml/2006/main">
   <p:cSld>
     <p:bg>
       <p:bgPr>
-        <a:solidFill>
+        <a:solidFill xmlns:a="http://schemas.openxmlformats.org/drawingml/2006/main">
           <a:srgbClr val="FFFFFF"/>
         </a:solidFill>
-        <a:effectLst/>
       </p:bgPr>
     </p:bg>
     <p:spTree>
@@ -3153,43 +3450,39 @@
         <p:nvPr/>
       </p:nvGrpSpPr>
       <p:grpSpPr>
-        <a:xfrm>
-          <a:off x="0" y="0"/>
-          <a:ext cx="0" cy="0"/>
-          <a:chOff x="0" y="0"/>
-          <a:chExt cx="0" cy="0"/>
-        </a:xfrm>
+        <a:xfrm xmlns:a="http://schemas.openxmlformats.org/drawingml/2006/main"/>
       </p:grpSpPr>
       <p:sp>
         <p:nvSpPr>
           <p:cNvPr id="6" name="slide-3-title">
-            <a:extLst>
+            <a:extLst xmlns:a="http://schemas.openxmlformats.org/drawingml/2006/main">
               <a:ext uri="{FF2B5EF4-FFF2-40B4-BE49-F238E27FC236}">
                 <a16:creationId xmlns:a16="http://schemas.microsoft.com/office/drawing/2014/main" id="{4B1D6989-E119-41F3-8EB8-0AFA431CE7B8}"/>
               </a:ext>
             </a:extLst>
           </p:cNvPr>
           <p:cNvSpPr>
-            <a:spLocks noGrp="1"/>
-          </p:cNvSpPr>
-          <p:nvPr/>
-        </p:nvSpPr>
-        <p:spPr>
-          <a:xfrm>
+            <a:spLocks xmlns:a="http://schemas.openxmlformats.org/drawingml/2006/main" noGrp="1"/>
+          </p:cNvSpPr>
+          <p:nvPr/>
+        </p:nvSpPr>
+        <p:spPr>
+          <a:xfrm xmlns:a="http://schemas.openxmlformats.org/drawingml/2006/main">
             <a:off x="400050" y="323850"/>
             <a:ext cx="11391900" cy="781050"/>
           </a:xfrm>
-          <a:prstGeom prst="rect">
-            <a:avLst/>
-          </a:prstGeom>
-        </p:spPr>
-        <p:txBody>
-          <a:bodyPr wrap="square" lIns="0" tIns="0" rIns="0" bIns="0" anchor="t">
+          <a:prstGeom xmlns:a="http://schemas.openxmlformats.org/drawingml/2006/main" prst="rect">
+            <a:avLst/>
+          </a:prstGeom>
+        </p:spPr>
+        <p:txBody>
+          <a:bodyPr xmlns:a="http://schemas.openxmlformats.org/drawingml/2006/main" wrap="square" lIns="0" tIns="0" rIns="0" bIns="0" anchor="t">
             <a:normAutofit/>
           </a:bodyPr>
-          <a:lstStyle/>
-          <a:p>
+          <a:lstStyle xmlns:a="http://schemas.openxmlformats.org/drawingml/2006/main"/>
+          <a:p xmlns:a="http://schemas.openxmlformats.org/drawingml/2006/main">
             <a:pPr algn="l">
+              <a:buNone/>
               <a:defRPr sz="3000" b="1">
                 <a:solidFill>
                   <a:srgbClr val="000000"/>
@@ -3208,33 +3501,34 @@
       <p:sp>
         <p:nvSpPr>
           <p:cNvPr id="2" name="page-3">
-            <a:extLst>
+            <a:extLst xmlns:a="http://schemas.openxmlformats.org/drawingml/2006/main">
               <a:ext uri="{FF2B5EF4-FFF2-40B4-BE49-F238E27FC236}">
                 <a16:creationId xmlns:a16="http://schemas.microsoft.com/office/drawing/2014/main" id="{16E0B328-A67E-4140-9C1F-6F3CB6913D92}"/>
               </a:ext>
             </a:extLst>
           </p:cNvPr>
           <p:cNvSpPr>
-            <a:spLocks noGrp="1"/>
-          </p:cNvSpPr>
-          <p:nvPr/>
-        </p:nvSpPr>
-        <p:spPr>
-          <a:xfrm>
+            <a:spLocks xmlns:a="http://schemas.openxmlformats.org/drawingml/2006/main" noGrp="1"/>
+          </p:cNvSpPr>
+          <p:nvPr/>
+        </p:nvSpPr>
+        <p:spPr>
+          <a:xfrm xmlns:a="http://schemas.openxmlformats.org/drawingml/2006/main">
             <a:off x="11277600" y="6276975"/>
             <a:ext cx="514350" cy="238125"/>
           </a:xfrm>
-          <a:prstGeom prst="rect">
-            <a:avLst/>
-          </a:prstGeom>
-        </p:spPr>
-        <p:txBody>
-          <a:bodyPr wrap="square" lIns="0" tIns="0" rIns="0" bIns="0" anchor="b">
+          <a:prstGeom xmlns:a="http://schemas.openxmlformats.org/drawingml/2006/main" prst="rect">
+            <a:avLst/>
+          </a:prstGeom>
+        </p:spPr>
+        <p:txBody>
+          <a:bodyPr xmlns:a="http://schemas.openxmlformats.org/drawingml/2006/main" wrap="square" lIns="0" tIns="0" rIns="0" bIns="0" anchor="b">
             <a:noAutofit/>
           </a:bodyPr>
-          <a:lstStyle/>
-          <a:p>
+          <a:lstStyle xmlns:a="http://schemas.openxmlformats.org/drawingml/2006/main"/>
+          <a:p xmlns:a="http://schemas.openxmlformats.org/drawingml/2006/main">
             <a:pPr algn="r">
+              <a:buNone/>
               <a:defRPr sz="1050" b="0">
                 <a:solidFill>
                   <a:srgbClr val="000000"/>
@@ -3253,33 +3547,34 @@
       <p:sp>
         <p:nvSpPr>
           <p:cNvPr id="3" name="scheme-label">
-            <a:extLst>
+            <a:extLst xmlns:a="http://schemas.openxmlformats.org/drawingml/2006/main">
               <a:ext uri="{FF2B5EF4-FFF2-40B4-BE49-F238E27FC236}">
                 <a16:creationId xmlns:a16="http://schemas.microsoft.com/office/drawing/2014/main" id="{28183C1B-A516-4426-9ED0-A9DF5AEDE7AF}"/>
               </a:ext>
             </a:extLst>
           </p:cNvPr>
           <p:cNvSpPr>
-            <a:spLocks noGrp="1"/>
-          </p:cNvSpPr>
-          <p:nvPr/>
-        </p:nvSpPr>
-        <p:spPr>
-          <a:xfrm>
+            <a:spLocks xmlns:a="http://schemas.openxmlformats.org/drawingml/2006/main" noGrp="1"/>
+          </p:cNvSpPr>
+          <p:nvPr/>
+        </p:nvSpPr>
+        <p:spPr>
+          <a:xfrm xmlns:a="http://schemas.openxmlformats.org/drawingml/2006/main">
             <a:off x="400050" y="1428750"/>
             <a:ext cx="4000500" cy="400050"/>
           </a:xfrm>
-          <a:prstGeom prst="rect">
-            <a:avLst/>
-          </a:prstGeom>
-        </p:spPr>
-        <p:txBody>
-          <a:bodyPr wrap="square" lIns="0" tIns="0" rIns="0" bIns="0" anchor="t">
+          <a:prstGeom xmlns:a="http://schemas.openxmlformats.org/drawingml/2006/main" prst="rect">
+            <a:avLst/>
+          </a:prstGeom>
+        </p:spPr>
+        <p:txBody>
+          <a:bodyPr xmlns:a="http://schemas.openxmlformats.org/drawingml/2006/main" wrap="square" lIns="0" tIns="0" rIns="0" bIns="0" anchor="t">
             <a:noAutofit/>
           </a:bodyPr>
-          <a:lstStyle/>
-          <a:p>
+          <a:lstStyle xmlns:a="http://schemas.openxmlformats.org/drawingml/2006/main"/>
+          <a:p xmlns:a="http://schemas.openxmlformats.org/drawingml/2006/main">
             <a:pPr algn="l">
+              <a:buNone/>
               <a:defRPr sz="2100" b="1">
                 <a:solidFill>
                   <a:srgbClr val="000000"/>
@@ -3298,33 +3593,34 @@
       <p:sp>
         <p:nvSpPr>
           <p:cNvPr id="4" name="scheme-copy">
-            <a:extLst>
+            <a:extLst xmlns:a="http://schemas.openxmlformats.org/drawingml/2006/main">
               <a:ext uri="{FF2B5EF4-FFF2-40B4-BE49-F238E27FC236}">
                 <a16:creationId xmlns:a16="http://schemas.microsoft.com/office/drawing/2014/main" id="{56A249CA-12AC-46CB-8387-6930584B561A}"/>
               </a:ext>
             </a:extLst>
           </p:cNvPr>
           <p:cNvSpPr>
-            <a:spLocks noGrp="1"/>
-          </p:cNvSpPr>
-          <p:nvPr/>
-        </p:nvSpPr>
-        <p:spPr>
-          <a:xfrm>
+            <a:spLocks xmlns:a="http://schemas.openxmlformats.org/drawingml/2006/main" noGrp="1"/>
+          </p:cNvSpPr>
+          <p:nvPr/>
+        </p:nvSpPr>
+        <p:spPr>
+          <a:xfrm xmlns:a="http://schemas.openxmlformats.org/drawingml/2006/main">
             <a:off x="400050" y="2095500"/>
             <a:ext cx="4114800" cy="3714750"/>
           </a:xfrm>
-          <a:prstGeom prst="rect">
-            <a:avLst/>
-          </a:prstGeom>
-        </p:spPr>
-        <p:txBody>
-          <a:bodyPr wrap="square" lIns="0" tIns="0" rIns="0" bIns="0" anchor="t">
-            <a:normAutofit/>
+          <a:prstGeom xmlns:a="http://schemas.openxmlformats.org/drawingml/2006/main" prst="rect">
+            <a:avLst/>
+          </a:prstGeom>
+        </p:spPr>
+        <p:txBody>
+          <a:bodyPr xmlns:a="http://schemas.openxmlformats.org/drawingml/2006/main" wrap="square" lIns="0" tIns="0" rIns="0" bIns="0" anchor="t">
+            <a:normAutofit fontScale="100000"/>
           </a:bodyPr>
-          <a:lstStyle/>
-          <a:p>
+          <a:lstStyle xmlns:a="http://schemas.openxmlformats.org/drawingml/2006/main"/>
+          <a:p xmlns:a="http://schemas.openxmlformats.org/drawingml/2006/main">
             <a:pPr algn="l">
+              <a:buNone/>
               <a:defRPr sz="1875" b="0">
                 <a:solidFill>
                   <a:srgbClr val="000000"/>
@@ -3336,7 +3632,8 @@
             </a:pPr>
             <a:r>
               <a:t>220kV采用单母线分段；35kV和10kV均采用单母线两分段；0.4kV采用单母线分段。
-正常运行时，220/35/10kV母联断开，0.4kV母联闭合。
+正常运行：220kV分段断路器断开；
+35/10kV母联断开；0.4kV母联闭合。
 T1、T2分别带35kV I/II段，T10与SVG按段配置。</a:t>
             </a:r>
           </a:p>
@@ -3345,29 +3642,29 @@
       <p:sp>
         <p:nvSpPr>
           <p:cNvPr id="5" name="scheme-image-frame">
-            <a:extLst>
+            <a:extLst xmlns:a="http://schemas.openxmlformats.org/drawingml/2006/main">
               <a:ext uri="{FF2B5EF4-FFF2-40B4-BE49-F238E27FC236}">
                 <a16:creationId xmlns:a16="http://schemas.microsoft.com/office/drawing/2014/main" id="{3AD9653A-1C2D-42C1-8CCE-DEA3C47B57B1}"/>
               </a:ext>
             </a:extLst>
           </p:cNvPr>
           <p:cNvSpPr>
-            <a:spLocks noGrp="1"/>
-          </p:cNvSpPr>
-          <p:nvPr/>
-        </p:nvSpPr>
-        <p:spPr>
-          <a:xfrm>
+            <a:spLocks xmlns:a="http://schemas.openxmlformats.org/drawingml/2006/main" noGrp="1"/>
+          </p:cNvSpPr>
+          <p:nvPr/>
+        </p:nvSpPr>
+        <p:spPr>
+          <a:xfrm xmlns:a="http://schemas.openxmlformats.org/drawingml/2006/main">
             <a:off x="4876800" y="1352550"/>
             <a:ext cx="6648450" cy="4695825"/>
           </a:xfrm>
-          <a:prstGeom prst="rect">
-            <a:avLst/>
-          </a:prstGeom>
-          <a:solidFill>
+          <a:prstGeom xmlns:a="http://schemas.openxmlformats.org/drawingml/2006/main" prst="rect">
+            <a:avLst/>
+          </a:prstGeom>
+          <a:solidFill xmlns:a="http://schemas.openxmlformats.org/drawingml/2006/main">
             <a:srgbClr val="FFFFFF"/>
           </a:solidFill>
-          <a:ln w="9525">
+          <a:ln xmlns:a="http://schemas.openxmlformats.org/drawingml/2006/main" w="9525">
             <a:solidFill>
               <a:srgbClr val="B8BCC4"/>
             </a:solidFill>
@@ -3377,22 +3674,22 @@
       </p:sp>
       <p:pic>
         <p:nvPicPr>
-          <p:cNvPr id="12" name="scheme-image"/>
+          <p:cNvPr id="13" name="scheme-image"/>
           <p:cNvPicPr>
-            <a:picLocks noChangeAspect="1"/>
+            <a:picLocks xmlns:a="http://schemas.openxmlformats.org/drawingml/2006/main" noChangeAspect="1"/>
           </p:cNvPicPr>
           <p:nvPr/>
         </p:nvPicPr>
         <p:blipFill>
-          <a:blip r:embed="rId3"/>
-          <a:stretch/>
+          <a:blip xmlns:r="http://schemas.openxmlformats.org/officeDocument/2006/relationships" xmlns:a="http://schemas.openxmlformats.org/drawingml/2006/main" r:embed="R8228df822c284d52"/>
+          <a:stretch xmlns:a="http://schemas.openxmlformats.org/drawingml/2006/main"/>
         </p:blipFill>
         <p:spPr>
-          <a:xfrm>
+          <a:xfrm xmlns:a="http://schemas.openxmlformats.org/drawingml/2006/main" flipH="0" flipV="0">
             <a:off x="4985409" y="1428750"/>
             <a:ext cx="6431232" cy="4543425"/>
           </a:xfrm>
-          <a:prstGeom prst="rect">
+          <a:prstGeom xmlns:a="http://schemas.openxmlformats.org/drawingml/2006/main" prst="rect">
             <a:avLst/>
           </a:prstGeom>
         </p:spPr>
@@ -3404,21 +3701,17 @@
       </p:ext>
     </p:extLst>
   </p:cSld>
-  <p:clrMapOvr>
-    <a:masterClrMapping/>
-  </p:clrMapOvr>
 </p:sld>
 </file>
 
 <file path=ppt/slides/slide4.xml><?xml version="1.0" encoding="utf-8"?>
-<p:sld xmlns:a="http://schemas.openxmlformats.org/drawingml/2006/main" xmlns:r="http://schemas.openxmlformats.org/officeDocument/2006/relationships" xmlns:p="http://schemas.openxmlformats.org/presentationml/2006/main">
+<p:sld xmlns:p="http://schemas.openxmlformats.org/presentationml/2006/main">
   <p:cSld>
     <p:bg>
       <p:bgPr>
-        <a:solidFill>
+        <a:solidFill xmlns:a="http://schemas.openxmlformats.org/drawingml/2006/main">
           <a:srgbClr val="FFFFFF"/>
         </a:solidFill>
-        <a:effectLst/>
       </p:bgPr>
     </p:bg>
     <p:spTree>
@@ -3428,43 +3721,39 @@
         <p:nvPr/>
       </p:nvGrpSpPr>
       <p:grpSpPr>
-        <a:xfrm>
-          <a:off x="0" y="0"/>
-          <a:ext cx="0" cy="0"/>
-          <a:chOff x="0" y="0"/>
-          <a:chExt cx="0" cy="0"/>
-        </a:xfrm>
+        <a:xfrm xmlns:a="http://schemas.openxmlformats.org/drawingml/2006/main"/>
       </p:grpSpPr>
       <p:sp>
         <p:nvSpPr>
           <p:cNvPr id="13" name="slide-4-title">
-            <a:extLst>
+            <a:extLst xmlns:a="http://schemas.openxmlformats.org/drawingml/2006/main">
               <a:ext uri="{FF2B5EF4-FFF2-40B4-BE49-F238E27FC236}">
                 <a16:creationId xmlns:a16="http://schemas.microsoft.com/office/drawing/2014/main" id="{B9E25054-EAEE-438C-9E23-399004624357}"/>
               </a:ext>
             </a:extLst>
           </p:cNvPr>
           <p:cNvSpPr>
-            <a:spLocks noGrp="1"/>
-          </p:cNvSpPr>
-          <p:nvPr/>
-        </p:nvSpPr>
-        <p:spPr>
-          <a:xfrm>
+            <a:spLocks xmlns:a="http://schemas.openxmlformats.org/drawingml/2006/main" noGrp="1"/>
+          </p:cNvSpPr>
+          <p:nvPr/>
+        </p:nvSpPr>
+        <p:spPr>
+          <a:xfrm xmlns:a="http://schemas.openxmlformats.org/drawingml/2006/main">
             <a:off x="400050" y="323850"/>
             <a:ext cx="11391900" cy="781050"/>
           </a:xfrm>
-          <a:prstGeom prst="rect">
-            <a:avLst/>
-          </a:prstGeom>
-        </p:spPr>
-        <p:txBody>
-          <a:bodyPr wrap="square" lIns="0" tIns="0" rIns="0" bIns="0" anchor="t">
+          <a:prstGeom xmlns:a="http://schemas.openxmlformats.org/drawingml/2006/main" prst="rect">
+            <a:avLst/>
+          </a:prstGeom>
+        </p:spPr>
+        <p:txBody>
+          <a:bodyPr xmlns:a="http://schemas.openxmlformats.org/drawingml/2006/main" wrap="square" lIns="0" tIns="0" rIns="0" bIns="0" anchor="t">
             <a:normAutofit/>
           </a:bodyPr>
-          <a:lstStyle/>
-          <a:p>
+          <a:lstStyle xmlns:a="http://schemas.openxmlformats.org/drawingml/2006/main"/>
+          <a:p xmlns:a="http://schemas.openxmlformats.org/drawingml/2006/main">
             <a:pPr algn="l">
+              <a:buNone/>
               <a:defRPr sz="3000" b="1">
                 <a:solidFill>
                   <a:srgbClr val="000000"/>
@@ -3483,33 +3772,34 @@
       <p:sp>
         <p:nvSpPr>
           <p:cNvPr id="2" name="page-4">
-            <a:extLst>
+            <a:extLst xmlns:a="http://schemas.openxmlformats.org/drawingml/2006/main">
               <a:ext uri="{FF2B5EF4-FFF2-40B4-BE49-F238E27FC236}">
                 <a16:creationId xmlns:a16="http://schemas.microsoft.com/office/drawing/2014/main" id="{180BE2F2-14AA-4B3C-83FB-A13A941DFD91}"/>
               </a:ext>
             </a:extLst>
           </p:cNvPr>
           <p:cNvSpPr>
-            <a:spLocks noGrp="1"/>
-          </p:cNvSpPr>
-          <p:nvPr/>
-        </p:nvSpPr>
-        <p:spPr>
-          <a:xfrm>
+            <a:spLocks xmlns:a="http://schemas.openxmlformats.org/drawingml/2006/main" noGrp="1"/>
+          </p:cNvSpPr>
+          <p:nvPr/>
+        </p:nvSpPr>
+        <p:spPr>
+          <a:xfrm xmlns:a="http://schemas.openxmlformats.org/drawingml/2006/main">
             <a:off x="11277600" y="6276975"/>
             <a:ext cx="514350" cy="238125"/>
           </a:xfrm>
-          <a:prstGeom prst="rect">
-            <a:avLst/>
-          </a:prstGeom>
-        </p:spPr>
-        <p:txBody>
-          <a:bodyPr wrap="square" lIns="0" tIns="0" rIns="0" bIns="0" anchor="b">
+          <a:prstGeom xmlns:a="http://schemas.openxmlformats.org/drawingml/2006/main" prst="rect">
+            <a:avLst/>
+          </a:prstGeom>
+        </p:spPr>
+        <p:txBody>
+          <a:bodyPr xmlns:a="http://schemas.openxmlformats.org/drawingml/2006/main" wrap="square" lIns="0" tIns="0" rIns="0" bIns="0" anchor="b">
             <a:noAutofit/>
           </a:bodyPr>
-          <a:lstStyle/>
-          <a:p>
+          <a:lstStyle xmlns:a="http://schemas.openxmlformats.org/drawingml/2006/main"/>
+          <a:p xmlns:a="http://schemas.openxmlformats.org/drawingml/2006/main">
             <a:pPr algn="r">
+              <a:buNone/>
               <a:defRPr sz="1050" b="0">
                 <a:solidFill>
                   <a:srgbClr val="000000"/>
@@ -3528,33 +3818,34 @@
       <p:sp>
         <p:nvSpPr>
           <p:cNvPr id="3" name="main-t-intro">
-            <a:extLst>
+            <a:extLst xmlns:a="http://schemas.openxmlformats.org/drawingml/2006/main">
               <a:ext uri="{FF2B5EF4-FFF2-40B4-BE49-F238E27FC236}">
                 <a16:creationId xmlns:a16="http://schemas.microsoft.com/office/drawing/2014/main" id="{9F88B77E-50EB-4261-A5D6-1A6C28B0CC99}"/>
               </a:ext>
             </a:extLst>
           </p:cNvPr>
           <p:cNvSpPr>
-            <a:spLocks noGrp="1"/>
-          </p:cNvSpPr>
-          <p:nvPr/>
-        </p:nvSpPr>
-        <p:spPr>
-          <a:xfrm>
+            <a:spLocks xmlns:a="http://schemas.openxmlformats.org/drawingml/2006/main" noGrp="1"/>
+          </p:cNvSpPr>
+          <p:nvPr/>
+        </p:nvSpPr>
+        <p:spPr>
+          <a:xfrm xmlns:a="http://schemas.openxmlformats.org/drawingml/2006/main">
             <a:off x="400050" y="1200150"/>
             <a:ext cx="11391900" cy="1238250"/>
           </a:xfrm>
-          <a:prstGeom prst="rect">
-            <a:avLst/>
-          </a:prstGeom>
-        </p:spPr>
-        <p:txBody>
-          <a:bodyPr wrap="square" lIns="0" tIns="0" rIns="0" bIns="0" anchor="t">
-            <a:normAutofit/>
+          <a:prstGeom xmlns:a="http://schemas.openxmlformats.org/drawingml/2006/main" prst="rect">
+            <a:avLst/>
+          </a:prstGeom>
+        </p:spPr>
+        <p:txBody>
+          <a:bodyPr xmlns:a="http://schemas.openxmlformats.org/drawingml/2006/main" wrap="square" lIns="0" tIns="0" rIns="0" bIns="0" anchor="t">
+            <a:normAutofit fontScale="100000"/>
           </a:bodyPr>
-          <a:lstStyle/>
-          <a:p>
+          <a:lstStyle xmlns:a="http://schemas.openxmlformats.org/drawingml/2006/main"/>
+          <a:p xmlns:a="http://schemas.openxmlformats.org/drawingml/2006/main">
             <a:pPr algn="l">
+              <a:buNone/>
               <a:defRPr sz="1875" b="0">
                 <a:solidFill>
                   <a:srgbClr val="000000"/>
@@ -3565,7 +3856,7 @@
               </a:defRPr>
             </a:pPr>
             <a:r>
-              <a:t>35kV折算负荷为280.285714MVA，主变总装机360MVA。正常双机平均分担；任一台退出后，剩余主变无法覆盖全部汇集容量。</a:t>
+              <a:t>主变采用2×180MVA、220/35kV油浸有载调压、YNd11、uk=14%。35kV计算容量280.286MVA，正常负载率77.857%；N-1需限发35.780%。</a:t>
             </a:r>
           </a:p>
         </p:txBody>
@@ -3573,31 +3864,31 @@
       <p:sp>
         <p:nvSpPr>
           <p:cNvPr id="4" name="main-t-card-1">
-            <a:extLst>
+            <a:extLst xmlns:a="http://schemas.openxmlformats.org/drawingml/2006/main">
               <a:ext uri="{FF2B5EF4-FFF2-40B4-BE49-F238E27FC236}">
                 <a16:creationId xmlns:a16="http://schemas.microsoft.com/office/drawing/2014/main" id="{00EE80C4-4F64-4618-A9E7-2F05B6A7F0CD}"/>
               </a:ext>
             </a:extLst>
           </p:cNvPr>
           <p:cNvSpPr>
-            <a:spLocks noGrp="1"/>
-          </p:cNvSpPr>
-          <p:nvPr/>
-        </p:nvSpPr>
-        <p:spPr>
-          <a:xfrm>
+            <a:spLocks xmlns:a="http://schemas.openxmlformats.org/drawingml/2006/main" noGrp="1"/>
+          </p:cNvSpPr>
+          <p:nvPr/>
+        </p:nvSpPr>
+        <p:spPr>
+          <a:xfrm xmlns:a="http://schemas.openxmlformats.org/drawingml/2006/main">
             <a:off x="400050" y="3048000"/>
             <a:ext cx="3562350" cy="2952750"/>
           </a:xfrm>
-          <a:prstGeom prst="roundRect">
+          <a:prstGeom xmlns:a="http://schemas.openxmlformats.org/drawingml/2006/main" prst="roundRect">
             <a:avLst>
               <a:gd name="adj" fmla="val 2581"/>
             </a:avLst>
           </a:prstGeom>
-          <a:solidFill>
+          <a:solidFill xmlns:a="http://schemas.openxmlformats.org/drawingml/2006/main">
             <a:srgbClr val="F2F2F2"/>
           </a:solidFill>
-          <a:ln w="0">
+          <a:ln xmlns:a="http://schemas.openxmlformats.org/drawingml/2006/main" w="0">
             <a:solidFill>
               <a:srgbClr val="F2F2F2"/>
             </a:solidFill>
@@ -3608,33 +3899,34 @@
       <p:sp>
         <p:nvSpPr>
           <p:cNvPr id="5" name="main-t-stat-1">
-            <a:extLst>
+            <a:extLst xmlns:a="http://schemas.openxmlformats.org/drawingml/2006/main">
               <a:ext uri="{FF2B5EF4-FFF2-40B4-BE49-F238E27FC236}">
                 <a16:creationId xmlns:a16="http://schemas.microsoft.com/office/drawing/2014/main" id="{DE6CBDCF-D37E-48C9-94BB-23A614758E6F}"/>
               </a:ext>
             </a:extLst>
           </p:cNvPr>
           <p:cNvSpPr>
-            <a:spLocks noGrp="1"/>
-          </p:cNvSpPr>
-          <p:nvPr/>
-        </p:nvSpPr>
-        <p:spPr>
-          <a:xfrm>
+            <a:spLocks xmlns:a="http://schemas.openxmlformats.org/drawingml/2006/main" noGrp="1"/>
+          </p:cNvSpPr>
+          <p:nvPr/>
+        </p:nvSpPr>
+        <p:spPr>
+          <a:xfrm xmlns:a="http://schemas.openxmlformats.org/drawingml/2006/main">
             <a:off x="704850" y="3638550"/>
             <a:ext cx="2952750" cy="952500"/>
           </a:xfrm>
-          <a:prstGeom prst="rect">
-            <a:avLst/>
-          </a:prstGeom>
-        </p:spPr>
-        <p:txBody>
-          <a:bodyPr wrap="square" lIns="0" tIns="0" rIns="0" bIns="0" anchor="b">
+          <a:prstGeom xmlns:a="http://schemas.openxmlformats.org/drawingml/2006/main" prst="rect">
+            <a:avLst/>
+          </a:prstGeom>
+        </p:spPr>
+        <p:txBody>
+          <a:bodyPr xmlns:a="http://schemas.openxmlformats.org/drawingml/2006/main" wrap="square" lIns="0" tIns="0" rIns="0" bIns="0" anchor="b">
             <a:normAutofit/>
           </a:bodyPr>
-          <a:lstStyle/>
-          <a:p>
+          <a:lstStyle xmlns:a="http://schemas.openxmlformats.org/drawingml/2006/main"/>
+          <a:p xmlns:a="http://schemas.openxmlformats.org/drawingml/2006/main">
             <a:pPr algn="l">
+              <a:buNone/>
               <a:defRPr sz="4500" b="1">
                 <a:solidFill>
                   <a:srgbClr val="000000"/>
@@ -3653,33 +3945,34 @@
       <p:sp>
         <p:nvSpPr>
           <p:cNvPr id="6" name="main-t-label-1">
-            <a:extLst>
+            <a:extLst xmlns:a="http://schemas.openxmlformats.org/drawingml/2006/main">
               <a:ext uri="{FF2B5EF4-FFF2-40B4-BE49-F238E27FC236}">
                 <a16:creationId xmlns:a16="http://schemas.microsoft.com/office/drawing/2014/main" id="{22C3A147-49CD-4D34-8D82-9656357FA4FB}"/>
               </a:ext>
             </a:extLst>
           </p:cNvPr>
           <p:cNvSpPr>
-            <a:spLocks noGrp="1"/>
-          </p:cNvSpPr>
-          <p:nvPr/>
-        </p:nvSpPr>
-        <p:spPr>
-          <a:xfrm>
+            <a:spLocks xmlns:a="http://schemas.openxmlformats.org/drawingml/2006/main" noGrp="1"/>
+          </p:cNvSpPr>
+          <p:nvPr/>
+        </p:nvSpPr>
+        <p:spPr>
+          <a:xfrm xmlns:a="http://schemas.openxmlformats.org/drawingml/2006/main">
             <a:off x="704850" y="5000625"/>
             <a:ext cx="2952750" cy="628650"/>
           </a:xfrm>
-          <a:prstGeom prst="rect">
-            <a:avLst/>
-          </a:prstGeom>
-        </p:spPr>
-        <p:txBody>
-          <a:bodyPr wrap="square" lIns="0" tIns="0" rIns="0" bIns="0" anchor="t">
+          <a:prstGeom xmlns:a="http://schemas.openxmlformats.org/drawingml/2006/main" prst="rect">
+            <a:avLst/>
+          </a:prstGeom>
+        </p:spPr>
+        <p:txBody>
+          <a:bodyPr xmlns:a="http://schemas.openxmlformats.org/drawingml/2006/main" wrap="square" lIns="0" tIns="0" rIns="0" bIns="0" anchor="t">
             <a:normAutofit/>
           </a:bodyPr>
-          <a:lstStyle/>
-          <a:p>
+          <a:lstStyle xmlns:a="http://schemas.openxmlformats.org/drawingml/2006/main"/>
+          <a:p xmlns:a="http://schemas.openxmlformats.org/drawingml/2006/main">
             <a:pPr algn="l">
+              <a:buNone/>
               <a:defRPr sz="1800" b="0">
                 <a:solidFill>
                   <a:srgbClr val="000000"/>
@@ -3698,31 +3991,31 @@
       <p:sp>
         <p:nvSpPr>
           <p:cNvPr id="7" name="main-t-card-2">
-            <a:extLst>
+            <a:extLst xmlns:a="http://schemas.openxmlformats.org/drawingml/2006/main">
               <a:ext uri="{FF2B5EF4-FFF2-40B4-BE49-F238E27FC236}">
                 <a16:creationId xmlns:a16="http://schemas.microsoft.com/office/drawing/2014/main" id="{4F6656AA-578E-446F-B81B-0A59F5C12783}"/>
               </a:ext>
             </a:extLst>
           </p:cNvPr>
           <p:cNvSpPr>
-            <a:spLocks noGrp="1"/>
-          </p:cNvSpPr>
-          <p:nvPr/>
-        </p:nvSpPr>
-        <p:spPr>
-          <a:xfrm>
+            <a:spLocks xmlns:a="http://schemas.openxmlformats.org/drawingml/2006/main" noGrp="1"/>
+          </p:cNvSpPr>
+          <p:nvPr/>
+        </p:nvSpPr>
+        <p:spPr>
+          <a:xfrm xmlns:a="http://schemas.openxmlformats.org/drawingml/2006/main">
             <a:off x="4314825" y="3048000"/>
             <a:ext cx="3562350" cy="2952750"/>
           </a:xfrm>
-          <a:prstGeom prst="roundRect">
+          <a:prstGeom xmlns:a="http://schemas.openxmlformats.org/drawingml/2006/main" prst="roundRect">
             <a:avLst>
               <a:gd name="adj" fmla="val 2581"/>
             </a:avLst>
           </a:prstGeom>
-          <a:solidFill>
+          <a:solidFill xmlns:a="http://schemas.openxmlformats.org/drawingml/2006/main">
             <a:srgbClr val="EAF5FB"/>
           </a:solidFill>
-          <a:ln w="0">
+          <a:ln xmlns:a="http://schemas.openxmlformats.org/drawingml/2006/main" w="0">
             <a:solidFill>
               <a:srgbClr val="EAF5FB"/>
             </a:solidFill>
@@ -3733,33 +4026,34 @@
       <p:sp>
         <p:nvSpPr>
           <p:cNvPr id="8" name="main-t-stat-2">
-            <a:extLst>
+            <a:extLst xmlns:a="http://schemas.openxmlformats.org/drawingml/2006/main">
               <a:ext uri="{FF2B5EF4-FFF2-40B4-BE49-F238E27FC236}">
                 <a16:creationId xmlns:a16="http://schemas.microsoft.com/office/drawing/2014/main" id="{1761479B-0C74-4A7B-AC6C-A3505B481CF6}"/>
               </a:ext>
             </a:extLst>
           </p:cNvPr>
           <p:cNvSpPr>
-            <a:spLocks noGrp="1"/>
-          </p:cNvSpPr>
-          <p:nvPr/>
-        </p:nvSpPr>
-        <p:spPr>
-          <a:xfrm>
+            <a:spLocks xmlns:a="http://schemas.openxmlformats.org/drawingml/2006/main" noGrp="1"/>
+          </p:cNvSpPr>
+          <p:nvPr/>
+        </p:nvSpPr>
+        <p:spPr>
+          <a:xfrm xmlns:a="http://schemas.openxmlformats.org/drawingml/2006/main">
             <a:off x="4619625" y="3638550"/>
             <a:ext cx="2952750" cy="952500"/>
           </a:xfrm>
-          <a:prstGeom prst="rect">
-            <a:avLst/>
-          </a:prstGeom>
-        </p:spPr>
-        <p:txBody>
-          <a:bodyPr wrap="square" lIns="0" tIns="0" rIns="0" bIns="0" anchor="b">
-            <a:normAutofit/>
+          <a:prstGeom xmlns:a="http://schemas.openxmlformats.org/drawingml/2006/main" prst="rect">
+            <a:avLst/>
+          </a:prstGeom>
+        </p:spPr>
+        <p:txBody>
+          <a:bodyPr xmlns:a="http://schemas.openxmlformats.org/drawingml/2006/main" wrap="square" lIns="0" tIns="0" rIns="0" bIns="0" anchor="b">
+            <a:normAutofit fontScale="100000"/>
           </a:bodyPr>
-          <a:lstStyle/>
-          <a:p>
+          <a:lstStyle xmlns:a="http://schemas.openxmlformats.org/drawingml/2006/main"/>
+          <a:p xmlns:a="http://schemas.openxmlformats.org/drawingml/2006/main">
             <a:pPr algn="l">
+              <a:buNone/>
               <a:defRPr sz="4500" b="1">
                 <a:solidFill>
                   <a:srgbClr val="000000"/>
@@ -3770,7 +4064,7 @@
               </a:defRPr>
             </a:pPr>
             <a:r>
-              <a:t>35.7798%</a:t>
+              <a:t>35.780%</a:t>
             </a:r>
           </a:p>
         </p:txBody>
@@ -3778,33 +4072,34 @@
       <p:sp>
         <p:nvSpPr>
           <p:cNvPr id="9" name="main-t-label-2">
-            <a:extLst>
+            <a:extLst xmlns:a="http://schemas.openxmlformats.org/drawingml/2006/main">
               <a:ext uri="{FF2B5EF4-FFF2-40B4-BE49-F238E27FC236}">
                 <a16:creationId xmlns:a16="http://schemas.microsoft.com/office/drawing/2014/main" id="{17963DF6-9414-4B8A-A9AA-77CF05901377}"/>
               </a:ext>
             </a:extLst>
           </p:cNvPr>
           <p:cNvSpPr>
-            <a:spLocks noGrp="1"/>
-          </p:cNvSpPr>
-          <p:nvPr/>
-        </p:nvSpPr>
-        <p:spPr>
-          <a:xfrm>
+            <a:spLocks xmlns:a="http://schemas.openxmlformats.org/drawingml/2006/main" noGrp="1"/>
+          </p:cNvSpPr>
+          <p:nvPr/>
+        </p:nvSpPr>
+        <p:spPr>
+          <a:xfrm xmlns:a="http://schemas.openxmlformats.org/drawingml/2006/main">
             <a:off x="4619625" y="5000625"/>
             <a:ext cx="2952750" cy="628650"/>
           </a:xfrm>
-          <a:prstGeom prst="rect">
-            <a:avLst/>
-          </a:prstGeom>
-        </p:spPr>
-        <p:txBody>
-          <a:bodyPr wrap="square" lIns="0" tIns="0" rIns="0" bIns="0" anchor="t">
+          <a:prstGeom xmlns:a="http://schemas.openxmlformats.org/drawingml/2006/main" prst="rect">
+            <a:avLst/>
+          </a:prstGeom>
+        </p:spPr>
+        <p:txBody>
+          <a:bodyPr xmlns:a="http://schemas.openxmlformats.org/drawingml/2006/main" wrap="square" lIns="0" tIns="0" rIns="0" bIns="0" anchor="t">
             <a:normAutofit/>
           </a:bodyPr>
-          <a:lstStyle/>
-          <a:p>
+          <a:lstStyle xmlns:a="http://schemas.openxmlformats.org/drawingml/2006/main"/>
+          <a:p xmlns:a="http://schemas.openxmlformats.org/drawingml/2006/main">
             <a:pPr algn="l">
+              <a:buNone/>
               <a:defRPr sz="1800" b="0">
                 <a:solidFill>
                   <a:srgbClr val="000000"/>
@@ -3823,31 +4118,31 @@
       <p:sp>
         <p:nvSpPr>
           <p:cNvPr id="10" name="main-t-card-3">
-            <a:extLst>
+            <a:extLst xmlns:a="http://schemas.openxmlformats.org/drawingml/2006/main">
               <a:ext uri="{FF2B5EF4-FFF2-40B4-BE49-F238E27FC236}">
                 <a16:creationId xmlns:a16="http://schemas.microsoft.com/office/drawing/2014/main" id="{C442BE61-D5E3-4298-AE33-3DC3A9A9364C}"/>
               </a:ext>
             </a:extLst>
           </p:cNvPr>
           <p:cNvSpPr>
-            <a:spLocks noGrp="1"/>
-          </p:cNvSpPr>
-          <p:nvPr/>
-        </p:nvSpPr>
-        <p:spPr>
-          <a:xfrm>
+            <a:spLocks xmlns:a="http://schemas.openxmlformats.org/drawingml/2006/main" noGrp="1"/>
+          </p:cNvSpPr>
+          <p:nvPr/>
+        </p:nvSpPr>
+        <p:spPr>
+          <a:xfrm xmlns:a="http://schemas.openxmlformats.org/drawingml/2006/main">
             <a:off x="8229600" y="3048000"/>
             <a:ext cx="3562350" cy="2952750"/>
           </a:xfrm>
-          <a:prstGeom prst="roundRect">
+          <a:prstGeom xmlns:a="http://schemas.openxmlformats.org/drawingml/2006/main" prst="roundRect">
             <a:avLst>
               <a:gd name="adj" fmla="val 2581"/>
             </a:avLst>
           </a:prstGeom>
-          <a:solidFill>
+          <a:solidFill xmlns:a="http://schemas.openxmlformats.org/drawingml/2006/main">
             <a:srgbClr val="F2F2F2"/>
           </a:solidFill>
-          <a:ln w="0">
+          <a:ln xmlns:a="http://schemas.openxmlformats.org/drawingml/2006/main" w="0">
             <a:solidFill>
               <a:srgbClr val="F2F2F2"/>
             </a:solidFill>
@@ -3858,33 +4153,34 @@
       <p:sp>
         <p:nvSpPr>
           <p:cNvPr id="11" name="main-t-stat-3">
-            <a:extLst>
+            <a:extLst xmlns:a="http://schemas.openxmlformats.org/drawingml/2006/main">
               <a:ext uri="{FF2B5EF4-FFF2-40B4-BE49-F238E27FC236}">
                 <a16:creationId xmlns:a16="http://schemas.microsoft.com/office/drawing/2014/main" id="{86BF1A6B-378E-4C08-B8FC-EE870D6945BA}"/>
               </a:ext>
             </a:extLst>
           </p:cNvPr>
           <p:cNvSpPr>
-            <a:spLocks noGrp="1"/>
-          </p:cNvSpPr>
-          <p:nvPr/>
-        </p:nvSpPr>
-        <p:spPr>
-          <a:xfrm>
+            <a:spLocks xmlns:a="http://schemas.openxmlformats.org/drawingml/2006/main" noGrp="1"/>
+          </p:cNvSpPr>
+          <p:nvPr/>
+        </p:nvSpPr>
+        <p:spPr>
+          <a:xfrm xmlns:a="http://schemas.openxmlformats.org/drawingml/2006/main">
             <a:off x="8534400" y="3638550"/>
             <a:ext cx="2952750" cy="952500"/>
           </a:xfrm>
-          <a:prstGeom prst="rect">
-            <a:avLst/>
-          </a:prstGeom>
-        </p:spPr>
-        <p:txBody>
-          <a:bodyPr wrap="square" lIns="0" tIns="0" rIns="0" bIns="0" anchor="b">
-            <a:normAutofit fontScale="92237"/>
+          <a:prstGeom xmlns:a="http://schemas.openxmlformats.org/drawingml/2006/main" prst="rect">
+            <a:avLst/>
+          </a:prstGeom>
+        </p:spPr>
+        <p:txBody>
+          <a:bodyPr xmlns:a="http://schemas.openxmlformats.org/drawingml/2006/main" wrap="square" lIns="0" tIns="0" rIns="0" bIns="0" anchor="b">
+            <a:normAutofit fontScale="100000"/>
           </a:bodyPr>
-          <a:lstStyle/>
-          <a:p>
+          <a:lstStyle xmlns:a="http://schemas.openxmlformats.org/drawingml/2006/main"/>
+          <a:p xmlns:a="http://schemas.openxmlformats.org/drawingml/2006/main">
             <a:pPr algn="l">
+              <a:buNone/>
               <a:defRPr sz="3750" b="1">
                 <a:solidFill>
                   <a:srgbClr val="000000"/>
@@ -3895,7 +4191,7 @@
               </a:defRPr>
             </a:pPr>
             <a:r>
-              <a:t>100.286 MVA</a:t>
+              <a:t>100.286</a:t>
             </a:r>
           </a:p>
         </p:txBody>
@@ -3903,33 +4199,34 @@
       <p:sp>
         <p:nvSpPr>
           <p:cNvPr id="12" name="main-t-label-3">
-            <a:extLst>
+            <a:extLst xmlns:a="http://schemas.openxmlformats.org/drawingml/2006/main">
               <a:ext uri="{FF2B5EF4-FFF2-40B4-BE49-F238E27FC236}">
                 <a16:creationId xmlns:a16="http://schemas.microsoft.com/office/drawing/2014/main" id="{D757AE0D-DA59-4AB8-B4F1-F74D1EECCE2A}"/>
               </a:ext>
             </a:extLst>
           </p:cNvPr>
           <p:cNvSpPr>
-            <a:spLocks noGrp="1"/>
-          </p:cNvSpPr>
-          <p:nvPr/>
-        </p:nvSpPr>
-        <p:spPr>
-          <a:xfrm>
+            <a:spLocks xmlns:a="http://schemas.openxmlformats.org/drawingml/2006/main" noGrp="1"/>
+          </p:cNvSpPr>
+          <p:nvPr/>
+        </p:nvSpPr>
+        <p:spPr>
+          <a:xfrm xmlns:a="http://schemas.openxmlformats.org/drawingml/2006/main">
             <a:off x="8534400" y="5000625"/>
             <a:ext cx="2952750" cy="628650"/>
           </a:xfrm>
-          <a:prstGeom prst="rect">
-            <a:avLst/>
-          </a:prstGeom>
-        </p:spPr>
-        <p:txBody>
-          <a:bodyPr wrap="square" lIns="0" tIns="0" rIns="0" bIns="0" anchor="t">
-            <a:normAutofit/>
+          <a:prstGeom xmlns:a="http://schemas.openxmlformats.org/drawingml/2006/main" prst="rect">
+            <a:avLst/>
+          </a:prstGeom>
+        </p:spPr>
+        <p:txBody>
+          <a:bodyPr xmlns:a="http://schemas.openxmlformats.org/drawingml/2006/main" wrap="square" lIns="0" tIns="0" rIns="0" bIns="0" anchor="t">
+            <a:normAutofit fontScale="100000"/>
           </a:bodyPr>
-          <a:lstStyle/>
-          <a:p>
+          <a:lstStyle xmlns:a="http://schemas.openxmlformats.org/drawingml/2006/main"/>
+          <a:p xmlns:a="http://schemas.openxmlformats.org/drawingml/2006/main">
             <a:pPr algn="l">
+              <a:buNone/>
               <a:defRPr sz="1800" b="0">
                 <a:solidFill>
                   <a:srgbClr val="000000"/>
@@ -3940,7 +4237,7 @@
               </a:defRPr>
             </a:pPr>
             <a:r>
-              <a:t>单台运行容量缺口</a:t>
+              <a:t>单台容量缺口 / MVA</a:t>
             </a:r>
           </a:p>
         </p:txBody>
@@ -3952,21 +4249,17 @@
       </p:ext>
     </p:extLst>
   </p:cSld>
-  <p:clrMapOvr>
-    <a:masterClrMapping/>
-  </p:clrMapOvr>
 </p:sld>
 </file>
 
 <file path=ppt/slides/slide5.xml><?xml version="1.0" encoding="utf-8"?>
-<p:sld xmlns:a="http://schemas.openxmlformats.org/drawingml/2006/main" xmlns:r="http://schemas.openxmlformats.org/officeDocument/2006/relationships" xmlns:p="http://schemas.openxmlformats.org/presentationml/2006/main">
+<p:sld xmlns:p="http://schemas.openxmlformats.org/presentationml/2006/main">
   <p:cSld>
     <p:bg>
       <p:bgPr>
-        <a:solidFill>
+        <a:solidFill xmlns:a="http://schemas.openxmlformats.org/drawingml/2006/main">
           <a:srgbClr val="FFFFFF"/>
         </a:solidFill>
-        <a:effectLst/>
       </p:bgPr>
     </p:bg>
     <p:spTree>
@@ -3976,43 +4269,39 @@
         <p:nvPr/>
       </p:nvGrpSpPr>
       <p:grpSpPr>
-        <a:xfrm>
-          <a:off x="0" y="0"/>
-          <a:ext cx="0" cy="0"/>
-          <a:chOff x="0" y="0"/>
-          <a:chExt cx="0" cy="0"/>
-        </a:xfrm>
+        <a:xfrm xmlns:a="http://schemas.openxmlformats.org/drawingml/2006/main"/>
       </p:grpSpPr>
       <p:sp>
         <p:nvSpPr>
           <p:cNvPr id="13" name="slide-5-title">
-            <a:extLst>
+            <a:extLst xmlns:a="http://schemas.openxmlformats.org/drawingml/2006/main">
               <a:ext uri="{FF2B5EF4-FFF2-40B4-BE49-F238E27FC236}">
                 <a16:creationId xmlns:a16="http://schemas.microsoft.com/office/drawing/2014/main" id="{995F7D8D-9BE6-4FF0-9A79-9A553198D882}"/>
               </a:ext>
             </a:extLst>
           </p:cNvPr>
           <p:cNvSpPr>
-            <a:spLocks noGrp="1"/>
-          </p:cNvSpPr>
-          <p:nvPr/>
-        </p:nvSpPr>
-        <p:spPr>
-          <a:xfrm>
+            <a:spLocks xmlns:a="http://schemas.openxmlformats.org/drawingml/2006/main" noGrp="1"/>
+          </p:cNvSpPr>
+          <p:nvPr/>
+        </p:nvSpPr>
+        <p:spPr>
+          <a:xfrm xmlns:a="http://schemas.openxmlformats.org/drawingml/2006/main">
             <a:off x="400050" y="323850"/>
             <a:ext cx="11391900" cy="781050"/>
           </a:xfrm>
-          <a:prstGeom prst="rect">
-            <a:avLst/>
-          </a:prstGeom>
-        </p:spPr>
-        <p:txBody>
-          <a:bodyPr wrap="square" lIns="0" tIns="0" rIns="0" bIns="0" anchor="t">
+          <a:prstGeom xmlns:a="http://schemas.openxmlformats.org/drawingml/2006/main" prst="rect">
+            <a:avLst/>
+          </a:prstGeom>
+        </p:spPr>
+        <p:txBody>
+          <a:bodyPr xmlns:a="http://schemas.openxmlformats.org/drawingml/2006/main" wrap="square" lIns="0" tIns="0" rIns="0" bIns="0" anchor="t">
             <a:normAutofit/>
           </a:bodyPr>
-          <a:lstStyle/>
-          <a:p>
+          <a:lstStyle xmlns:a="http://schemas.openxmlformats.org/drawingml/2006/main"/>
+          <a:p xmlns:a="http://schemas.openxmlformats.org/drawingml/2006/main">
             <a:pPr algn="l">
+              <a:buNone/>
               <a:defRPr sz="3000" b="1">
                 <a:solidFill>
                   <a:srgbClr val="000000"/>
@@ -4031,33 +4320,34 @@
       <p:sp>
         <p:nvSpPr>
           <p:cNvPr id="2" name="page-5">
-            <a:extLst>
+            <a:extLst xmlns:a="http://schemas.openxmlformats.org/drawingml/2006/main">
               <a:ext uri="{FF2B5EF4-FFF2-40B4-BE49-F238E27FC236}">
                 <a16:creationId xmlns:a16="http://schemas.microsoft.com/office/drawing/2014/main" id="{E4BF8B3C-C93F-4866-9E1C-1C0976A307FC}"/>
               </a:ext>
             </a:extLst>
           </p:cNvPr>
           <p:cNvSpPr>
-            <a:spLocks noGrp="1"/>
-          </p:cNvSpPr>
-          <p:nvPr/>
-        </p:nvSpPr>
-        <p:spPr>
-          <a:xfrm>
+            <a:spLocks xmlns:a="http://schemas.openxmlformats.org/drawingml/2006/main" noGrp="1"/>
+          </p:cNvSpPr>
+          <p:nvPr/>
+        </p:nvSpPr>
+        <p:spPr>
+          <a:xfrm xmlns:a="http://schemas.openxmlformats.org/drawingml/2006/main">
             <a:off x="11277600" y="6276975"/>
             <a:ext cx="514350" cy="238125"/>
           </a:xfrm>
-          <a:prstGeom prst="rect">
-            <a:avLst/>
-          </a:prstGeom>
-        </p:spPr>
-        <p:txBody>
-          <a:bodyPr wrap="square" lIns="0" tIns="0" rIns="0" bIns="0" anchor="b">
+          <a:prstGeom xmlns:a="http://schemas.openxmlformats.org/drawingml/2006/main" prst="rect">
+            <a:avLst/>
+          </a:prstGeom>
+        </p:spPr>
+        <p:txBody>
+          <a:bodyPr xmlns:a="http://schemas.openxmlformats.org/drawingml/2006/main" wrap="square" lIns="0" tIns="0" rIns="0" bIns="0" anchor="b">
             <a:noAutofit/>
           </a:bodyPr>
-          <a:lstStyle/>
-          <a:p>
+          <a:lstStyle xmlns:a="http://schemas.openxmlformats.org/drawingml/2006/main"/>
+          <a:p xmlns:a="http://schemas.openxmlformats.org/drawingml/2006/main">
             <a:pPr algn="r">
+              <a:buNone/>
               <a:defRPr sz="1050" b="0">
                 <a:solidFill>
                   <a:srgbClr val="000000"/>
@@ -4076,33 +4366,34 @@
       <p:sp>
         <p:nvSpPr>
           <p:cNvPr id="3" name="aux-intro">
-            <a:extLst>
+            <a:extLst xmlns:a="http://schemas.openxmlformats.org/drawingml/2006/main">
               <a:ext uri="{FF2B5EF4-FFF2-40B4-BE49-F238E27FC236}">
                 <a16:creationId xmlns:a16="http://schemas.microsoft.com/office/drawing/2014/main" id="{DD51C7C7-3C78-4A6E-816C-0098E3C43630}"/>
               </a:ext>
             </a:extLst>
           </p:cNvPr>
           <p:cNvSpPr>
-            <a:spLocks noGrp="1"/>
-          </p:cNvSpPr>
-          <p:nvPr/>
-        </p:nvSpPr>
-        <p:spPr>
-          <a:xfrm>
+            <a:spLocks xmlns:a="http://schemas.openxmlformats.org/drawingml/2006/main" noGrp="1"/>
+          </p:cNvSpPr>
+          <p:nvPr/>
+        </p:nvSpPr>
+        <p:spPr>
+          <a:xfrm xmlns:a="http://schemas.openxmlformats.org/drawingml/2006/main">
             <a:off x="400050" y="1200150"/>
             <a:ext cx="11391900" cy="704850"/>
           </a:xfrm>
-          <a:prstGeom prst="rect">
-            <a:avLst/>
-          </a:prstGeom>
-        </p:spPr>
-        <p:txBody>
-          <a:bodyPr wrap="square" lIns="0" tIns="0" rIns="0" bIns="0" anchor="t">
+          <a:prstGeom xmlns:a="http://schemas.openxmlformats.org/drawingml/2006/main" prst="rect">
+            <a:avLst/>
+          </a:prstGeom>
+        </p:spPr>
+        <p:txBody>
+          <a:bodyPr xmlns:a="http://schemas.openxmlformats.org/drawingml/2006/main" wrap="square" lIns="0" tIns="0" rIns="0" bIns="0" anchor="t">
             <a:noAutofit/>
           </a:bodyPr>
-          <a:lstStyle/>
-          <a:p>
+          <a:lstStyle xmlns:a="http://schemas.openxmlformats.org/drawingml/2006/main"/>
+          <a:p xmlns:a="http://schemas.openxmlformats.org/drawingml/2006/main">
             <a:pPr algn="l">
+              <a:buNone/>
               <a:defRPr sz="1875" b="0">
                 <a:solidFill>
                   <a:srgbClr val="000000"/>
@@ -4121,29 +4412,29 @@
       <p:sp>
         <p:nvSpPr>
           <p:cNvPr id="4" name="aux-accent-1">
-            <a:extLst>
+            <a:extLst xmlns:a="http://schemas.openxmlformats.org/drawingml/2006/main">
               <a:ext uri="{FF2B5EF4-FFF2-40B4-BE49-F238E27FC236}">
                 <a16:creationId xmlns:a16="http://schemas.microsoft.com/office/drawing/2014/main" id="{0F9A62F9-9896-43DC-8E49-C63A395F37A2}"/>
               </a:ext>
             </a:extLst>
           </p:cNvPr>
           <p:cNvSpPr>
-            <a:spLocks noGrp="1"/>
-          </p:cNvSpPr>
-          <p:nvPr/>
-        </p:nvSpPr>
-        <p:spPr>
-          <a:xfrm>
+            <a:spLocks xmlns:a="http://schemas.openxmlformats.org/drawingml/2006/main" noGrp="1"/>
+          </p:cNvSpPr>
+          <p:nvPr/>
+        </p:nvSpPr>
+        <p:spPr>
+          <a:xfrm xmlns:a="http://schemas.openxmlformats.org/drawingml/2006/main">
             <a:off x="400050" y="2514600"/>
             <a:ext cx="3562350" cy="57150"/>
           </a:xfrm>
-          <a:prstGeom prst="rect">
-            <a:avLst/>
-          </a:prstGeom>
-          <a:solidFill>
+          <a:prstGeom xmlns:a="http://schemas.openxmlformats.org/drawingml/2006/main" prst="rect">
+            <a:avLst/>
+          </a:prstGeom>
+          <a:solidFill xmlns:a="http://schemas.openxmlformats.org/drawingml/2006/main">
             <a:srgbClr val="6DCBF4"/>
           </a:solidFill>
-          <a:ln w="0">
+          <a:ln xmlns:a="http://schemas.openxmlformats.org/drawingml/2006/main" w="0">
             <a:solidFill>
               <a:srgbClr val="6DCBF4"/>
             </a:solidFill>
@@ -4154,33 +4445,34 @@
       <p:sp>
         <p:nvSpPr>
           <p:cNvPr id="5" name="aux-title-1">
-            <a:extLst>
+            <a:extLst xmlns:a="http://schemas.openxmlformats.org/drawingml/2006/main">
               <a:ext uri="{FF2B5EF4-FFF2-40B4-BE49-F238E27FC236}">
                 <a16:creationId xmlns:a16="http://schemas.microsoft.com/office/drawing/2014/main" id="{349541FF-586E-49D7-AA08-75FBC26EBD36}"/>
               </a:ext>
             </a:extLst>
           </p:cNvPr>
           <p:cNvSpPr>
-            <a:spLocks noGrp="1"/>
-          </p:cNvSpPr>
-          <p:nvPr/>
-        </p:nvSpPr>
-        <p:spPr>
-          <a:xfrm>
+            <a:spLocks xmlns:a="http://schemas.openxmlformats.org/drawingml/2006/main" noGrp="1"/>
+          </p:cNvSpPr>
+          <p:nvPr/>
+        </p:nvSpPr>
+        <p:spPr>
+          <a:xfrm xmlns:a="http://schemas.openxmlformats.org/drawingml/2006/main">
             <a:off x="400050" y="2895600"/>
             <a:ext cx="3562350" cy="609600"/>
           </a:xfrm>
-          <a:prstGeom prst="rect">
-            <a:avLst/>
-          </a:prstGeom>
-        </p:spPr>
-        <p:txBody>
-          <a:bodyPr wrap="square" lIns="0" tIns="0" rIns="0" bIns="0" anchor="t">
+          <a:prstGeom xmlns:a="http://schemas.openxmlformats.org/drawingml/2006/main" prst="rect">
+            <a:avLst/>
+          </a:prstGeom>
+        </p:spPr>
+        <p:txBody>
+          <a:bodyPr xmlns:a="http://schemas.openxmlformats.org/drawingml/2006/main" wrap="square" lIns="0" tIns="0" rIns="0" bIns="0" anchor="t">
             <a:normAutofit/>
           </a:bodyPr>
-          <a:lstStyle/>
-          <a:p>
+          <a:lstStyle xmlns:a="http://schemas.openxmlformats.org/drawingml/2006/main"/>
+          <a:p xmlns:a="http://schemas.openxmlformats.org/drawingml/2006/main">
             <a:pPr algn="l">
+              <a:buNone/>
               <a:defRPr sz="2325" b="1">
                 <a:solidFill>
                   <a:srgbClr val="000000"/>
@@ -4199,33 +4491,34 @@
       <p:sp>
         <p:nvSpPr>
           <p:cNvPr id="6" name="aux-body-1">
-            <a:extLst>
+            <a:extLst xmlns:a="http://schemas.openxmlformats.org/drawingml/2006/main">
               <a:ext uri="{FF2B5EF4-FFF2-40B4-BE49-F238E27FC236}">
                 <a16:creationId xmlns:a16="http://schemas.microsoft.com/office/drawing/2014/main" id="{EE01B406-FAD2-4306-8C28-E3A91BA43296}"/>
               </a:ext>
             </a:extLst>
           </p:cNvPr>
           <p:cNvSpPr>
-            <a:spLocks noGrp="1"/>
-          </p:cNvSpPr>
-          <p:nvPr/>
-        </p:nvSpPr>
-        <p:spPr>
-          <a:xfrm>
+            <a:spLocks xmlns:a="http://schemas.openxmlformats.org/drawingml/2006/main" noGrp="1"/>
+          </p:cNvSpPr>
+          <p:nvPr/>
+        </p:nvSpPr>
+        <p:spPr>
+          <a:xfrm xmlns:a="http://schemas.openxmlformats.org/drawingml/2006/main">
             <a:off x="400050" y="3857625"/>
             <a:ext cx="3562350" cy="2000250"/>
           </a:xfrm>
-          <a:prstGeom prst="rect">
-            <a:avLst/>
-          </a:prstGeom>
-        </p:spPr>
-        <p:txBody>
-          <a:bodyPr wrap="square" lIns="0" tIns="0" rIns="0" bIns="0" anchor="t">
-            <a:normAutofit/>
+          <a:prstGeom xmlns:a="http://schemas.openxmlformats.org/drawingml/2006/main" prst="rect">
+            <a:avLst/>
+          </a:prstGeom>
+        </p:spPr>
+        <p:txBody>
+          <a:bodyPr xmlns:a="http://schemas.openxmlformats.org/drawingml/2006/main" wrap="square" lIns="0" tIns="0" rIns="0" bIns="0" anchor="t">
+            <a:normAutofit fontScale="100000"/>
           </a:bodyPr>
-          <a:lstStyle/>
-          <a:p>
+          <a:lstStyle xmlns:a="http://schemas.openxmlformats.org/drawingml/2006/main"/>
+          <a:p xmlns:a="http://schemas.openxmlformats.org/drawingml/2006/main">
             <a:pPr algn="l">
+              <a:buNone/>
               <a:defRPr sz="1875" b="0">
                 <a:solidFill>
                   <a:srgbClr val="000000"/>
@@ -4236,7 +4529,7 @@
               </a:defRPr>
             </a:pPr>
             <a:r>
-              <a:t>35/10.5kV，uk=8%
+              <a:t>35/10.5kV，YNd11，uk=8%
 正常均衡负载率39.58%
 N-1最严负载率79.17%</a:t>
             </a:r>
@@ -4246,29 +4539,29 @@
       <p:sp>
         <p:nvSpPr>
           <p:cNvPr id="7" name="aux-accent-2">
-            <a:extLst>
+            <a:extLst xmlns:a="http://schemas.openxmlformats.org/drawingml/2006/main">
               <a:ext uri="{FF2B5EF4-FFF2-40B4-BE49-F238E27FC236}">
                 <a16:creationId xmlns:a16="http://schemas.microsoft.com/office/drawing/2014/main" id="{86F6679C-E351-4708-B335-BCFD38FD79F4}"/>
               </a:ext>
             </a:extLst>
           </p:cNvPr>
           <p:cNvSpPr>
-            <a:spLocks noGrp="1"/>
-          </p:cNvSpPr>
-          <p:nvPr/>
-        </p:nvSpPr>
-        <p:spPr>
-          <a:xfrm>
+            <a:spLocks xmlns:a="http://schemas.openxmlformats.org/drawingml/2006/main" noGrp="1"/>
+          </p:cNvSpPr>
+          <p:nvPr/>
+        </p:nvSpPr>
+        <p:spPr>
+          <a:xfrm xmlns:a="http://schemas.openxmlformats.org/drawingml/2006/main">
             <a:off x="4314825" y="2514600"/>
             <a:ext cx="3562350" cy="57150"/>
           </a:xfrm>
-          <a:prstGeom prst="rect">
-            <a:avLst/>
-          </a:prstGeom>
-          <a:solidFill>
+          <a:prstGeom xmlns:a="http://schemas.openxmlformats.org/drawingml/2006/main" prst="rect">
+            <a:avLst/>
+          </a:prstGeom>
+          <a:solidFill xmlns:a="http://schemas.openxmlformats.org/drawingml/2006/main">
             <a:srgbClr val="3D8DFF"/>
           </a:solidFill>
-          <a:ln w="0">
+          <a:ln xmlns:a="http://schemas.openxmlformats.org/drawingml/2006/main" w="0">
             <a:solidFill>
               <a:srgbClr val="3D8DFF"/>
             </a:solidFill>
@@ -4279,33 +4572,34 @@
       <p:sp>
         <p:nvSpPr>
           <p:cNvPr id="8" name="aux-title-2">
-            <a:extLst>
+            <a:extLst xmlns:a="http://schemas.openxmlformats.org/drawingml/2006/main">
               <a:ext uri="{FF2B5EF4-FFF2-40B4-BE49-F238E27FC236}">
                 <a16:creationId xmlns:a16="http://schemas.microsoft.com/office/drawing/2014/main" id="{3C612C7C-49DF-4915-BDC8-0E1246F320B4}"/>
               </a:ext>
             </a:extLst>
           </p:cNvPr>
           <p:cNvSpPr>
-            <a:spLocks noGrp="1"/>
-          </p:cNvSpPr>
-          <p:nvPr/>
-        </p:nvSpPr>
-        <p:spPr>
-          <a:xfrm>
+            <a:spLocks xmlns:a="http://schemas.openxmlformats.org/drawingml/2006/main" noGrp="1"/>
+          </p:cNvSpPr>
+          <p:nvPr/>
+        </p:nvSpPr>
+        <p:spPr>
+          <a:xfrm xmlns:a="http://schemas.openxmlformats.org/drawingml/2006/main">
             <a:off x="4314825" y="2895600"/>
             <a:ext cx="3562350" cy="609600"/>
           </a:xfrm>
-          <a:prstGeom prst="rect">
-            <a:avLst/>
-          </a:prstGeom>
-        </p:spPr>
-        <p:txBody>
-          <a:bodyPr wrap="square" lIns="0" tIns="0" rIns="0" bIns="0" anchor="t">
+          <a:prstGeom xmlns:a="http://schemas.openxmlformats.org/drawingml/2006/main" prst="rect">
+            <a:avLst/>
+          </a:prstGeom>
+        </p:spPr>
+        <p:txBody>
+          <a:bodyPr xmlns:a="http://schemas.openxmlformats.org/drawingml/2006/main" wrap="square" lIns="0" tIns="0" rIns="0" bIns="0" anchor="t">
             <a:normAutofit/>
           </a:bodyPr>
-          <a:lstStyle/>
-          <a:p>
+          <a:lstStyle xmlns:a="http://schemas.openxmlformats.org/drawingml/2006/main"/>
+          <a:p xmlns:a="http://schemas.openxmlformats.org/drawingml/2006/main">
             <a:pPr algn="l">
+              <a:buNone/>
               <a:defRPr sz="2325" b="1">
                 <a:solidFill>
                   <a:srgbClr val="000000"/>
@@ -4324,33 +4618,34 @@
       <p:sp>
         <p:nvSpPr>
           <p:cNvPr id="9" name="aux-body-2">
-            <a:extLst>
+            <a:extLst xmlns:a="http://schemas.openxmlformats.org/drawingml/2006/main">
               <a:ext uri="{FF2B5EF4-FFF2-40B4-BE49-F238E27FC236}">
                 <a16:creationId xmlns:a16="http://schemas.microsoft.com/office/drawing/2014/main" id="{3CF0252A-955B-4F0B-9960-BF8583DC4CAE}"/>
               </a:ext>
             </a:extLst>
           </p:cNvPr>
           <p:cNvSpPr>
-            <a:spLocks noGrp="1"/>
-          </p:cNvSpPr>
-          <p:nvPr/>
-        </p:nvSpPr>
-        <p:spPr>
-          <a:xfrm>
+            <a:spLocks xmlns:a="http://schemas.openxmlformats.org/drawingml/2006/main" noGrp="1"/>
+          </p:cNvSpPr>
+          <p:nvPr/>
+        </p:nvSpPr>
+        <p:spPr>
+          <a:xfrm xmlns:a="http://schemas.openxmlformats.org/drawingml/2006/main">
             <a:off x="4314825" y="3857625"/>
             <a:ext cx="3562350" cy="2000250"/>
           </a:xfrm>
-          <a:prstGeom prst="rect">
-            <a:avLst/>
-          </a:prstGeom>
-        </p:spPr>
-        <p:txBody>
-          <a:bodyPr wrap="square" lIns="0" tIns="0" rIns="0" bIns="0" anchor="t">
+          <a:prstGeom xmlns:a="http://schemas.openxmlformats.org/drawingml/2006/main" prst="rect">
+            <a:avLst/>
+          </a:prstGeom>
+        </p:spPr>
+        <p:txBody>
+          <a:bodyPr xmlns:a="http://schemas.openxmlformats.org/drawingml/2006/main" wrap="square" lIns="0" tIns="0" rIns="0" bIns="0" anchor="t">
             <a:normAutofit/>
           </a:bodyPr>
-          <a:lstStyle/>
-          <a:p>
+          <a:lstStyle xmlns:a="http://schemas.openxmlformats.org/drawingml/2006/main"/>
+          <a:p xmlns:a="http://schemas.openxmlformats.org/drawingml/2006/main">
             <a:pPr algn="l">
+              <a:buNone/>
               <a:defRPr sz="1875" b="0">
                 <a:solidFill>
                   <a:srgbClr val="000000"/>
@@ -4371,29 +4666,29 @@
       <p:sp>
         <p:nvSpPr>
           <p:cNvPr id="10" name="aux-accent-3">
-            <a:extLst>
+            <a:extLst xmlns:a="http://schemas.openxmlformats.org/drawingml/2006/main">
               <a:ext uri="{FF2B5EF4-FFF2-40B4-BE49-F238E27FC236}">
                 <a16:creationId xmlns:a16="http://schemas.microsoft.com/office/drawing/2014/main" id="{7287D2D5-AA9A-486F-93C9-D7135D7C7589}"/>
               </a:ext>
             </a:extLst>
           </p:cNvPr>
           <p:cNvSpPr>
-            <a:spLocks noGrp="1"/>
-          </p:cNvSpPr>
-          <p:nvPr/>
-        </p:nvSpPr>
-        <p:spPr>
-          <a:xfrm>
+            <a:spLocks xmlns:a="http://schemas.openxmlformats.org/drawingml/2006/main" noGrp="1"/>
+          </p:cNvSpPr>
+          <p:nvPr/>
+        </p:nvSpPr>
+        <p:spPr>
+          <a:xfrm xmlns:a="http://schemas.openxmlformats.org/drawingml/2006/main">
             <a:off x="8229600" y="2514600"/>
             <a:ext cx="3562350" cy="57150"/>
           </a:xfrm>
-          <a:prstGeom prst="rect">
-            <a:avLst/>
-          </a:prstGeom>
-          <a:solidFill>
+          <a:prstGeom xmlns:a="http://schemas.openxmlformats.org/drawingml/2006/main" prst="rect">
+            <a:avLst/>
+          </a:prstGeom>
+          <a:solidFill xmlns:a="http://schemas.openxmlformats.org/drawingml/2006/main">
             <a:srgbClr val="6DCBF4"/>
           </a:solidFill>
-          <a:ln w="0">
+          <a:ln xmlns:a="http://schemas.openxmlformats.org/drawingml/2006/main" w="0">
             <a:solidFill>
               <a:srgbClr val="6DCBF4"/>
             </a:solidFill>
@@ -4404,33 +4699,34 @@
       <p:sp>
         <p:nvSpPr>
           <p:cNvPr id="11" name="aux-title-3">
-            <a:extLst>
+            <a:extLst xmlns:a="http://schemas.openxmlformats.org/drawingml/2006/main">
               <a:ext uri="{FF2B5EF4-FFF2-40B4-BE49-F238E27FC236}">
                 <a16:creationId xmlns:a16="http://schemas.microsoft.com/office/drawing/2014/main" id="{A4622E3B-F484-4756-883D-ADF5C63E0081}"/>
               </a:ext>
             </a:extLst>
           </p:cNvPr>
           <p:cNvSpPr>
-            <a:spLocks noGrp="1"/>
-          </p:cNvSpPr>
-          <p:nvPr/>
-        </p:nvSpPr>
-        <p:spPr>
-          <a:xfrm>
+            <a:spLocks xmlns:a="http://schemas.openxmlformats.org/drawingml/2006/main" noGrp="1"/>
+          </p:cNvSpPr>
+          <p:nvPr/>
+        </p:nvSpPr>
+        <p:spPr>
+          <a:xfrm xmlns:a="http://schemas.openxmlformats.org/drawingml/2006/main">
             <a:off x="8229600" y="2895600"/>
             <a:ext cx="3562350" cy="609600"/>
           </a:xfrm>
-          <a:prstGeom prst="rect">
-            <a:avLst/>
-          </a:prstGeom>
-        </p:spPr>
-        <p:txBody>
-          <a:bodyPr wrap="square" lIns="0" tIns="0" rIns="0" bIns="0" anchor="t">
-            <a:normAutofit/>
+          <a:prstGeom xmlns:a="http://schemas.openxmlformats.org/drawingml/2006/main" prst="rect">
+            <a:avLst/>
+          </a:prstGeom>
+        </p:spPr>
+        <p:txBody>
+          <a:bodyPr xmlns:a="http://schemas.openxmlformats.org/drawingml/2006/main" wrap="square" lIns="0" tIns="0" rIns="0" bIns="0" anchor="t">
+            <a:normAutofit fontScale="100000"/>
           </a:bodyPr>
-          <a:lstStyle/>
-          <a:p>
+          <a:lstStyle xmlns:a="http://schemas.openxmlformats.org/drawingml/2006/main"/>
+          <a:p xmlns:a="http://schemas.openxmlformats.org/drawingml/2006/main">
             <a:pPr algn="l">
+              <a:buNone/>
               <a:defRPr sz="2325" b="1">
                 <a:solidFill>
                   <a:srgbClr val="000000"/>
@@ -4441,7 +4737,7 @@
               </a:defRPr>
             </a:pPr>
             <a:r>
-              <a:t>2×200kVA所用变</a:t>
+              <a:t>2×200kVA SCB14所用变</a:t>
             </a:r>
           </a:p>
         </p:txBody>
@@ -4449,33 +4745,34 @@
       <p:sp>
         <p:nvSpPr>
           <p:cNvPr id="12" name="aux-body-3">
-            <a:extLst>
+            <a:extLst xmlns:a="http://schemas.openxmlformats.org/drawingml/2006/main">
               <a:ext uri="{FF2B5EF4-FFF2-40B4-BE49-F238E27FC236}">
                 <a16:creationId xmlns:a16="http://schemas.microsoft.com/office/drawing/2014/main" id="{B031D8B6-122E-41D5-9DB4-4C58BAA63FD6}"/>
               </a:ext>
             </a:extLst>
           </p:cNvPr>
           <p:cNvSpPr>
-            <a:spLocks noGrp="1"/>
-          </p:cNvSpPr>
-          <p:nvPr/>
-        </p:nvSpPr>
-        <p:spPr>
-          <a:xfrm>
+            <a:spLocks xmlns:a="http://schemas.openxmlformats.org/drawingml/2006/main" noGrp="1"/>
+          </p:cNvSpPr>
+          <p:nvPr/>
+        </p:nvSpPr>
+        <p:spPr>
+          <a:xfrm xmlns:a="http://schemas.openxmlformats.org/drawingml/2006/main">
             <a:off x="8229600" y="3857625"/>
             <a:ext cx="3562350" cy="2000250"/>
           </a:xfrm>
-          <a:prstGeom prst="rect">
-            <a:avLst/>
-          </a:prstGeom>
-        </p:spPr>
-        <p:txBody>
-          <a:bodyPr wrap="square" lIns="0" tIns="0" rIns="0" bIns="0" anchor="t">
-            <a:normAutofit/>
+          <a:prstGeom xmlns:a="http://schemas.openxmlformats.org/drawingml/2006/main" prst="rect">
+            <a:avLst/>
+          </a:prstGeom>
+        </p:spPr>
+        <p:txBody>
+          <a:bodyPr xmlns:a="http://schemas.openxmlformats.org/drawingml/2006/main" wrap="square" lIns="0" tIns="0" rIns="0" bIns="0" anchor="t">
+            <a:normAutofit fontScale="100000"/>
           </a:bodyPr>
-          <a:lstStyle/>
-          <a:p>
+          <a:lstStyle xmlns:a="http://schemas.openxmlformats.org/drawingml/2006/main"/>
+          <a:p xmlns:a="http://schemas.openxmlformats.org/drawingml/2006/main">
             <a:pPr algn="l">
+              <a:buNone/>
               <a:defRPr sz="1875" b="0">
                 <a:solidFill>
                   <a:srgbClr val="000000"/>
@@ -4486,8 +4783,8 @@
               </a:defRPr>
             </a:pPr>
             <a:r>
-              <a:t>380/220V暗备用
-最严容量192.9125kVA
+              <a:t>10/0.4kV，干式，Dyn11
+uk=4%；最严192.913kVA
 一运一备，0.4kV母联闭合</a:t>
             </a:r>
           </a:p>
@@ -4500,21 +4797,17 @@
       </p:ext>
     </p:extLst>
   </p:cSld>
-  <p:clrMapOvr>
-    <a:masterClrMapping/>
-  </p:clrMapOvr>
 </p:sld>
 </file>
 
 <file path=ppt/slides/slide6.xml><?xml version="1.0" encoding="utf-8"?>
-<p:sld xmlns:a="http://schemas.openxmlformats.org/drawingml/2006/main" xmlns:r="http://schemas.openxmlformats.org/officeDocument/2006/relationships" xmlns:p="http://schemas.openxmlformats.org/presentationml/2006/main">
+<p:sld xmlns:p="http://schemas.openxmlformats.org/presentationml/2006/main">
   <p:cSld>
     <p:bg>
       <p:bgPr>
-        <a:solidFill>
+        <a:solidFill xmlns:a="http://schemas.openxmlformats.org/drawingml/2006/main">
           <a:srgbClr val="FFFFFF"/>
         </a:solidFill>
-        <a:effectLst/>
       </p:bgPr>
     </p:bg>
     <p:spTree>
@@ -4524,43 +4817,39 @@
         <p:nvPr/>
       </p:nvGrpSpPr>
       <p:grpSpPr>
-        <a:xfrm>
-          <a:off x="0" y="0"/>
-          <a:ext cx="0" cy="0"/>
-          <a:chOff x="0" y="0"/>
-          <a:chExt cx="0" cy="0"/>
-        </a:xfrm>
+        <a:xfrm xmlns:a="http://schemas.openxmlformats.org/drawingml/2006/main"/>
       </p:grpSpPr>
       <p:sp>
         <p:nvSpPr>
           <p:cNvPr id="12" name="slide-6-title">
-            <a:extLst>
+            <a:extLst xmlns:a="http://schemas.openxmlformats.org/drawingml/2006/main">
               <a:ext uri="{FF2B5EF4-FFF2-40B4-BE49-F238E27FC236}">
                 <a16:creationId xmlns:a16="http://schemas.microsoft.com/office/drawing/2014/main" id="{DE37EA4D-3B86-4E12-9D96-A0DBEB68B7F2}"/>
               </a:ext>
             </a:extLst>
           </p:cNvPr>
           <p:cNvSpPr>
-            <a:spLocks noGrp="1"/>
-          </p:cNvSpPr>
-          <p:nvPr/>
-        </p:nvSpPr>
-        <p:spPr>
-          <a:xfrm>
+            <a:spLocks xmlns:a="http://schemas.openxmlformats.org/drawingml/2006/main" noGrp="1"/>
+          </p:cNvSpPr>
+          <p:nvPr/>
+        </p:nvSpPr>
+        <p:spPr>
+          <a:xfrm xmlns:a="http://schemas.openxmlformats.org/drawingml/2006/main">
             <a:off x="400050" y="323850"/>
             <a:ext cx="11391900" cy="781050"/>
           </a:xfrm>
-          <a:prstGeom prst="rect">
-            <a:avLst/>
-          </a:prstGeom>
-        </p:spPr>
-        <p:txBody>
-          <a:bodyPr wrap="square" lIns="0" tIns="0" rIns="0" bIns="0" anchor="t">
+          <a:prstGeom xmlns:a="http://schemas.openxmlformats.org/drawingml/2006/main" prst="rect">
+            <a:avLst/>
+          </a:prstGeom>
+        </p:spPr>
+        <p:txBody>
+          <a:bodyPr xmlns:a="http://schemas.openxmlformats.org/drawingml/2006/main" wrap="square" lIns="0" tIns="0" rIns="0" bIns="0" anchor="t">
             <a:normAutofit/>
           </a:bodyPr>
-          <a:lstStyle/>
-          <a:p>
+          <a:lstStyle xmlns:a="http://schemas.openxmlformats.org/drawingml/2006/main"/>
+          <a:p xmlns:a="http://schemas.openxmlformats.org/drawingml/2006/main">
             <a:pPr algn="l">
+              <a:buNone/>
               <a:defRPr sz="3000" b="1">
                 <a:solidFill>
                   <a:srgbClr val="000000"/>
@@ -4579,33 +4868,34 @@
       <p:sp>
         <p:nvSpPr>
           <p:cNvPr id="2" name="page-6">
-            <a:extLst>
+            <a:extLst xmlns:a="http://schemas.openxmlformats.org/drawingml/2006/main">
               <a:ext uri="{FF2B5EF4-FFF2-40B4-BE49-F238E27FC236}">
                 <a16:creationId xmlns:a16="http://schemas.microsoft.com/office/drawing/2014/main" id="{3D489653-B791-49B3-9B6B-2C0B3D4697E1}"/>
               </a:ext>
             </a:extLst>
           </p:cNvPr>
           <p:cNvSpPr>
-            <a:spLocks noGrp="1"/>
-          </p:cNvSpPr>
-          <p:nvPr/>
-        </p:nvSpPr>
-        <p:spPr>
-          <a:xfrm>
+            <a:spLocks xmlns:a="http://schemas.openxmlformats.org/drawingml/2006/main" noGrp="1"/>
+          </p:cNvSpPr>
+          <p:nvPr/>
+        </p:nvSpPr>
+        <p:spPr>
+          <a:xfrm xmlns:a="http://schemas.openxmlformats.org/drawingml/2006/main">
             <a:off x="11277600" y="6276975"/>
             <a:ext cx="514350" cy="238125"/>
           </a:xfrm>
-          <a:prstGeom prst="rect">
-            <a:avLst/>
-          </a:prstGeom>
-        </p:spPr>
-        <p:txBody>
-          <a:bodyPr wrap="square" lIns="0" tIns="0" rIns="0" bIns="0" anchor="b">
+          <a:prstGeom xmlns:a="http://schemas.openxmlformats.org/drawingml/2006/main" prst="rect">
+            <a:avLst/>
+          </a:prstGeom>
+        </p:spPr>
+        <p:txBody>
+          <a:bodyPr xmlns:a="http://schemas.openxmlformats.org/drawingml/2006/main" wrap="square" lIns="0" tIns="0" rIns="0" bIns="0" anchor="b">
             <a:noAutofit/>
           </a:bodyPr>
-          <a:lstStyle/>
-          <a:p>
+          <a:lstStyle xmlns:a="http://schemas.openxmlformats.org/drawingml/2006/main"/>
+          <a:p xmlns:a="http://schemas.openxmlformats.org/drawingml/2006/main">
             <a:pPr algn="r">
+              <a:buNone/>
               <a:defRPr sz="1050" b="0">
                 <a:solidFill>
                   <a:srgbClr val="000000"/>
@@ -4624,31 +4914,31 @@
       <p:sp>
         <p:nvSpPr>
           <p:cNvPr id="3" name="n1-card-1">
-            <a:extLst>
+            <a:extLst xmlns:a="http://schemas.openxmlformats.org/drawingml/2006/main">
               <a:ext uri="{FF2B5EF4-FFF2-40B4-BE49-F238E27FC236}">
                 <a16:creationId xmlns:a16="http://schemas.microsoft.com/office/drawing/2014/main" id="{A37B87F7-959D-4834-9686-61F18737700C}"/>
               </a:ext>
             </a:extLst>
           </p:cNvPr>
           <p:cNvSpPr>
-            <a:spLocks noGrp="1"/>
-          </p:cNvSpPr>
-          <p:nvPr/>
-        </p:nvSpPr>
-        <p:spPr>
-          <a:xfrm>
+            <a:spLocks xmlns:a="http://schemas.openxmlformats.org/drawingml/2006/main" noGrp="1"/>
+          </p:cNvSpPr>
+          <p:nvPr/>
+        </p:nvSpPr>
+        <p:spPr>
+          <a:xfrm xmlns:a="http://schemas.openxmlformats.org/drawingml/2006/main">
             <a:off x="7648575" y="1257300"/>
             <a:ext cx="4143375" cy="1390650"/>
           </a:xfrm>
-          <a:prstGeom prst="roundRect">
+          <a:prstGeom xmlns:a="http://schemas.openxmlformats.org/drawingml/2006/main" prst="roundRect">
             <a:avLst>
               <a:gd name="adj" fmla="val 5479"/>
             </a:avLst>
           </a:prstGeom>
-          <a:solidFill>
+          <a:solidFill xmlns:a="http://schemas.openxmlformats.org/drawingml/2006/main">
             <a:srgbClr val="F2F2F2"/>
           </a:solidFill>
-          <a:ln w="0">
+          <a:ln xmlns:a="http://schemas.openxmlformats.org/drawingml/2006/main" w="0">
             <a:solidFill>
               <a:srgbClr val="F2F2F2"/>
             </a:solidFill>
@@ -4659,33 +4949,34 @@
       <p:sp>
         <p:nvSpPr>
           <p:cNvPr id="4" name="n1-card-title-1">
-            <a:extLst>
+            <a:extLst xmlns:a="http://schemas.openxmlformats.org/drawingml/2006/main">
               <a:ext uri="{FF2B5EF4-FFF2-40B4-BE49-F238E27FC236}">
                 <a16:creationId xmlns:a16="http://schemas.microsoft.com/office/drawing/2014/main" id="{1E51A5E6-5BCF-4131-BFCB-3B25FB902257}"/>
               </a:ext>
             </a:extLst>
           </p:cNvPr>
           <p:cNvSpPr>
-            <a:spLocks noGrp="1"/>
-          </p:cNvSpPr>
-          <p:nvPr/>
-        </p:nvSpPr>
-        <p:spPr>
-          <a:xfrm>
+            <a:spLocks xmlns:a="http://schemas.openxmlformats.org/drawingml/2006/main" noGrp="1"/>
+          </p:cNvSpPr>
+          <p:nvPr/>
+        </p:nvSpPr>
+        <p:spPr>
+          <a:xfrm xmlns:a="http://schemas.openxmlformats.org/drawingml/2006/main">
             <a:off x="7943850" y="1495425"/>
             <a:ext cx="3524250" cy="361950"/>
           </a:xfrm>
-          <a:prstGeom prst="rect">
-            <a:avLst/>
-          </a:prstGeom>
-        </p:spPr>
-        <p:txBody>
-          <a:bodyPr wrap="square" lIns="0" tIns="0" rIns="0" bIns="0" anchor="t">
+          <a:prstGeom xmlns:a="http://schemas.openxmlformats.org/drawingml/2006/main" prst="rect">
+            <a:avLst/>
+          </a:prstGeom>
+        </p:spPr>
+        <p:txBody>
+          <a:bodyPr xmlns:a="http://schemas.openxmlformats.org/drawingml/2006/main" wrap="square" lIns="0" tIns="0" rIns="0" bIns="0" anchor="t">
             <a:noAutofit/>
           </a:bodyPr>
-          <a:lstStyle/>
-          <a:p>
+          <a:lstStyle xmlns:a="http://schemas.openxmlformats.org/drawingml/2006/main"/>
+          <a:p xmlns:a="http://schemas.openxmlformats.org/drawingml/2006/main">
             <a:pPr algn="l">
+              <a:buNone/>
               <a:defRPr sz="2175" b="1">
                 <a:solidFill>
                   <a:srgbClr val="000000"/>
@@ -4704,33 +4995,34 @@
       <p:sp>
         <p:nvSpPr>
           <p:cNvPr id="5" name="n1-card-body-1">
-            <a:extLst>
+            <a:extLst xmlns:a="http://schemas.openxmlformats.org/drawingml/2006/main">
               <a:ext uri="{FF2B5EF4-FFF2-40B4-BE49-F238E27FC236}">
                 <a16:creationId xmlns:a16="http://schemas.microsoft.com/office/drawing/2014/main" id="{3454B400-74D9-4CD5-A2C5-9B770E8F0F28}"/>
               </a:ext>
             </a:extLst>
           </p:cNvPr>
           <p:cNvSpPr>
-            <a:spLocks noGrp="1"/>
-          </p:cNvSpPr>
-          <p:nvPr/>
-        </p:nvSpPr>
-        <p:spPr>
-          <a:xfrm>
+            <a:spLocks xmlns:a="http://schemas.openxmlformats.org/drawingml/2006/main" noGrp="1"/>
+          </p:cNvSpPr>
+          <p:nvPr/>
+        </p:nvSpPr>
+        <p:spPr>
+          <a:xfrm xmlns:a="http://schemas.openxmlformats.org/drawingml/2006/main">
             <a:off x="7943850" y="1981200"/>
             <a:ext cx="3524250" cy="533400"/>
           </a:xfrm>
-          <a:prstGeom prst="rect">
-            <a:avLst/>
-          </a:prstGeom>
-        </p:spPr>
-        <p:txBody>
-          <a:bodyPr wrap="square" lIns="0" tIns="0" rIns="0" bIns="0" anchor="t">
+          <a:prstGeom xmlns:a="http://schemas.openxmlformats.org/drawingml/2006/main" prst="rect">
+            <a:avLst/>
+          </a:prstGeom>
+        </p:spPr>
+        <p:txBody>
+          <a:bodyPr xmlns:a="http://schemas.openxmlformats.org/drawingml/2006/main" wrap="square" lIns="0" tIns="0" rIns="0" bIns="0" anchor="t">
             <a:normAutofit/>
           </a:bodyPr>
-          <a:lstStyle/>
-          <a:p>
+          <a:lstStyle xmlns:a="http://schemas.openxmlformats.org/drawingml/2006/main"/>
+          <a:p xmlns:a="http://schemas.openxmlformats.org/drawingml/2006/main">
             <a:pPr algn="l">
+              <a:buNone/>
               <a:defRPr sz="1650" b="0">
                 <a:solidFill>
                   <a:srgbClr val="000000"/>
@@ -4750,31 +5042,31 @@
       <p:sp>
         <p:nvSpPr>
           <p:cNvPr id="6" name="n1-card-2">
-            <a:extLst>
+            <a:extLst xmlns:a="http://schemas.openxmlformats.org/drawingml/2006/main">
               <a:ext uri="{FF2B5EF4-FFF2-40B4-BE49-F238E27FC236}">
                 <a16:creationId xmlns:a16="http://schemas.microsoft.com/office/drawing/2014/main" id="{687CEEAF-B6B7-4CE0-A997-A54029123144}"/>
               </a:ext>
             </a:extLst>
           </p:cNvPr>
           <p:cNvSpPr>
-            <a:spLocks noGrp="1"/>
-          </p:cNvSpPr>
-          <p:nvPr/>
-        </p:nvSpPr>
-        <p:spPr>
-          <a:xfrm>
+            <a:spLocks xmlns:a="http://schemas.openxmlformats.org/drawingml/2006/main" noGrp="1"/>
+          </p:cNvSpPr>
+          <p:nvPr/>
+        </p:nvSpPr>
+        <p:spPr>
+          <a:xfrm xmlns:a="http://schemas.openxmlformats.org/drawingml/2006/main">
             <a:off x="7648575" y="3009900"/>
             <a:ext cx="4143375" cy="1390650"/>
           </a:xfrm>
-          <a:prstGeom prst="roundRect">
+          <a:prstGeom xmlns:a="http://schemas.openxmlformats.org/drawingml/2006/main" prst="roundRect">
             <a:avLst>
               <a:gd name="adj" fmla="val 5479"/>
             </a:avLst>
           </a:prstGeom>
-          <a:solidFill>
+          <a:solidFill xmlns:a="http://schemas.openxmlformats.org/drawingml/2006/main">
             <a:srgbClr val="F2F2F2"/>
           </a:solidFill>
-          <a:ln w="0">
+          <a:ln xmlns:a="http://schemas.openxmlformats.org/drawingml/2006/main" w="0">
             <a:solidFill>
               <a:srgbClr val="F2F2F2"/>
             </a:solidFill>
@@ -4785,33 +5077,34 @@
       <p:sp>
         <p:nvSpPr>
           <p:cNvPr id="7" name="n1-card-title-2">
-            <a:extLst>
+            <a:extLst xmlns:a="http://schemas.openxmlformats.org/drawingml/2006/main">
               <a:ext uri="{FF2B5EF4-FFF2-40B4-BE49-F238E27FC236}">
                 <a16:creationId xmlns:a16="http://schemas.microsoft.com/office/drawing/2014/main" id="{A4330A6B-42A3-4DFC-BFE0-E6AF7EA166BF}"/>
               </a:ext>
             </a:extLst>
           </p:cNvPr>
           <p:cNvSpPr>
-            <a:spLocks noGrp="1"/>
-          </p:cNvSpPr>
-          <p:nvPr/>
-        </p:nvSpPr>
-        <p:spPr>
-          <a:xfrm>
+            <a:spLocks xmlns:a="http://schemas.openxmlformats.org/drawingml/2006/main" noGrp="1"/>
+          </p:cNvSpPr>
+          <p:nvPr/>
+        </p:nvSpPr>
+        <p:spPr>
+          <a:xfrm xmlns:a="http://schemas.openxmlformats.org/drawingml/2006/main">
             <a:off x="7943850" y="3248025"/>
             <a:ext cx="3524250" cy="361950"/>
           </a:xfrm>
-          <a:prstGeom prst="rect">
-            <a:avLst/>
-          </a:prstGeom>
-        </p:spPr>
-        <p:txBody>
-          <a:bodyPr wrap="square" lIns="0" tIns="0" rIns="0" bIns="0" anchor="t">
+          <a:prstGeom xmlns:a="http://schemas.openxmlformats.org/drawingml/2006/main" prst="rect">
+            <a:avLst/>
+          </a:prstGeom>
+        </p:spPr>
+        <p:txBody>
+          <a:bodyPr xmlns:a="http://schemas.openxmlformats.org/drawingml/2006/main" wrap="square" lIns="0" tIns="0" rIns="0" bIns="0" anchor="t">
             <a:noAutofit/>
           </a:bodyPr>
-          <a:lstStyle/>
-          <a:p>
+          <a:lstStyle xmlns:a="http://schemas.openxmlformats.org/drawingml/2006/main"/>
+          <a:p xmlns:a="http://schemas.openxmlformats.org/drawingml/2006/main">
             <a:pPr algn="l">
+              <a:buNone/>
               <a:defRPr sz="2175" b="1">
                 <a:solidFill>
                   <a:srgbClr val="000000"/>
@@ -4830,33 +5123,34 @@
       <p:sp>
         <p:nvSpPr>
           <p:cNvPr id="8" name="n1-card-body-2">
-            <a:extLst>
+            <a:extLst xmlns:a="http://schemas.openxmlformats.org/drawingml/2006/main">
               <a:ext uri="{FF2B5EF4-FFF2-40B4-BE49-F238E27FC236}">
                 <a16:creationId xmlns:a16="http://schemas.microsoft.com/office/drawing/2014/main" id="{7624BA6B-54F1-401C-9312-59857730E24C}"/>
               </a:ext>
             </a:extLst>
           </p:cNvPr>
           <p:cNvSpPr>
-            <a:spLocks noGrp="1"/>
-          </p:cNvSpPr>
-          <p:nvPr/>
-        </p:nvSpPr>
-        <p:spPr>
-          <a:xfrm>
+            <a:spLocks xmlns:a="http://schemas.openxmlformats.org/drawingml/2006/main" noGrp="1"/>
+          </p:cNvSpPr>
+          <p:nvPr/>
+        </p:nvSpPr>
+        <p:spPr>
+          <a:xfrm xmlns:a="http://schemas.openxmlformats.org/drawingml/2006/main">
             <a:off x="7943850" y="3733800"/>
             <a:ext cx="3524250" cy="533400"/>
           </a:xfrm>
-          <a:prstGeom prst="rect">
-            <a:avLst/>
-          </a:prstGeom>
-        </p:spPr>
-        <p:txBody>
-          <a:bodyPr wrap="square" lIns="0" tIns="0" rIns="0" bIns="0" anchor="t">
+          <a:prstGeom xmlns:a="http://schemas.openxmlformats.org/drawingml/2006/main" prst="rect">
+            <a:avLst/>
+          </a:prstGeom>
+        </p:spPr>
+        <p:txBody>
+          <a:bodyPr xmlns:a="http://schemas.openxmlformats.org/drawingml/2006/main" wrap="square" lIns="0" tIns="0" rIns="0" bIns="0" anchor="t">
             <a:normAutofit/>
           </a:bodyPr>
-          <a:lstStyle/>
-          <a:p>
+          <a:lstStyle xmlns:a="http://schemas.openxmlformats.org/drawingml/2006/main"/>
+          <a:p xmlns:a="http://schemas.openxmlformats.org/drawingml/2006/main">
             <a:pPr algn="l">
+              <a:buNone/>
               <a:defRPr sz="1650" b="0">
                 <a:solidFill>
                   <a:srgbClr val="000000"/>
@@ -4876,31 +5170,31 @@
       <p:sp>
         <p:nvSpPr>
           <p:cNvPr id="9" name="n1-card-3">
-            <a:extLst>
+            <a:extLst xmlns:a="http://schemas.openxmlformats.org/drawingml/2006/main">
               <a:ext uri="{FF2B5EF4-FFF2-40B4-BE49-F238E27FC236}">
                 <a16:creationId xmlns:a16="http://schemas.microsoft.com/office/drawing/2014/main" id="{BAE46CAC-F90C-4766-BEA4-B0B8C38819DD}"/>
               </a:ext>
             </a:extLst>
           </p:cNvPr>
           <p:cNvSpPr>
-            <a:spLocks noGrp="1"/>
-          </p:cNvSpPr>
-          <p:nvPr/>
-        </p:nvSpPr>
-        <p:spPr>
-          <a:xfrm>
+            <a:spLocks xmlns:a="http://schemas.openxmlformats.org/drawingml/2006/main" noGrp="1"/>
+          </p:cNvSpPr>
+          <p:nvPr/>
+        </p:nvSpPr>
+        <p:spPr>
+          <a:xfrm xmlns:a="http://schemas.openxmlformats.org/drawingml/2006/main">
             <a:off x="7648575" y="4762500"/>
             <a:ext cx="4143375" cy="1390650"/>
           </a:xfrm>
-          <a:prstGeom prst="roundRect">
+          <a:prstGeom xmlns:a="http://schemas.openxmlformats.org/drawingml/2006/main" prst="roundRect">
             <a:avLst>
               <a:gd name="adj" fmla="val 5479"/>
             </a:avLst>
           </a:prstGeom>
-          <a:solidFill>
+          <a:solidFill xmlns:a="http://schemas.openxmlformats.org/drawingml/2006/main">
             <a:srgbClr val="EAF5FB"/>
           </a:solidFill>
-          <a:ln w="0">
+          <a:ln xmlns:a="http://schemas.openxmlformats.org/drawingml/2006/main" w="0">
             <a:solidFill>
               <a:srgbClr val="EAF5FB"/>
             </a:solidFill>
@@ -4911,33 +5205,34 @@
       <p:sp>
         <p:nvSpPr>
           <p:cNvPr id="10" name="n1-card-title-3">
-            <a:extLst>
+            <a:extLst xmlns:a="http://schemas.openxmlformats.org/drawingml/2006/main">
               <a:ext uri="{FF2B5EF4-FFF2-40B4-BE49-F238E27FC236}">
                 <a16:creationId xmlns:a16="http://schemas.microsoft.com/office/drawing/2014/main" id="{575123A7-AC17-49E4-9396-A125768FBE41}"/>
               </a:ext>
             </a:extLst>
           </p:cNvPr>
           <p:cNvSpPr>
-            <a:spLocks noGrp="1"/>
-          </p:cNvSpPr>
-          <p:nvPr/>
-        </p:nvSpPr>
-        <p:spPr>
-          <a:xfrm>
+            <a:spLocks xmlns:a="http://schemas.openxmlformats.org/drawingml/2006/main" noGrp="1"/>
+          </p:cNvSpPr>
+          <p:nvPr/>
+        </p:nvSpPr>
+        <p:spPr>
+          <a:xfrm xmlns:a="http://schemas.openxmlformats.org/drawingml/2006/main">
             <a:off x="7943850" y="5000625"/>
             <a:ext cx="3524250" cy="361950"/>
           </a:xfrm>
-          <a:prstGeom prst="rect">
-            <a:avLst/>
-          </a:prstGeom>
-        </p:spPr>
-        <p:txBody>
-          <a:bodyPr wrap="square" lIns="0" tIns="0" rIns="0" bIns="0" anchor="t">
+          <a:prstGeom xmlns:a="http://schemas.openxmlformats.org/drawingml/2006/main" prst="rect">
+            <a:avLst/>
+          </a:prstGeom>
+        </p:spPr>
+        <p:txBody>
+          <a:bodyPr xmlns:a="http://schemas.openxmlformats.org/drawingml/2006/main" wrap="square" lIns="0" tIns="0" rIns="0" bIns="0" anchor="t">
             <a:noAutofit/>
           </a:bodyPr>
-          <a:lstStyle/>
-          <a:p>
+          <a:lstStyle xmlns:a="http://schemas.openxmlformats.org/drawingml/2006/main"/>
+          <a:p xmlns:a="http://schemas.openxmlformats.org/drawingml/2006/main">
             <a:pPr algn="l">
+              <a:buNone/>
               <a:defRPr sz="2175" b="1">
                 <a:solidFill>
                   <a:srgbClr val="000000"/>
@@ -4956,33 +5251,34 @@
       <p:sp>
         <p:nvSpPr>
           <p:cNvPr id="11" name="n1-card-body-3">
-            <a:extLst>
+            <a:extLst xmlns:a="http://schemas.openxmlformats.org/drawingml/2006/main">
               <a:ext uri="{FF2B5EF4-FFF2-40B4-BE49-F238E27FC236}">
                 <a16:creationId xmlns:a16="http://schemas.microsoft.com/office/drawing/2014/main" id="{1BE239F6-936D-4F3B-A869-8473E39DDC88}"/>
               </a:ext>
             </a:extLst>
           </p:cNvPr>
           <p:cNvSpPr>
-            <a:spLocks noGrp="1"/>
-          </p:cNvSpPr>
-          <p:nvPr/>
-        </p:nvSpPr>
-        <p:spPr>
-          <a:xfrm>
+            <a:spLocks xmlns:a="http://schemas.openxmlformats.org/drawingml/2006/main" noGrp="1"/>
+          </p:cNvSpPr>
+          <p:nvPr/>
+        </p:nvSpPr>
+        <p:spPr>
+          <a:xfrm xmlns:a="http://schemas.openxmlformats.org/drawingml/2006/main">
             <a:off x="7943850" y="5486400"/>
             <a:ext cx="3524250" cy="533400"/>
           </a:xfrm>
-          <a:prstGeom prst="rect">
-            <a:avLst/>
-          </a:prstGeom>
-        </p:spPr>
-        <p:txBody>
-          <a:bodyPr wrap="square" lIns="0" tIns="0" rIns="0" bIns="0" anchor="t">
+          <a:prstGeom xmlns:a="http://schemas.openxmlformats.org/drawingml/2006/main" prst="rect">
+            <a:avLst/>
+          </a:prstGeom>
+        </p:spPr>
+        <p:txBody>
+          <a:bodyPr xmlns:a="http://schemas.openxmlformats.org/drawingml/2006/main" wrap="square" lIns="0" tIns="0" rIns="0" bIns="0" anchor="t">
             <a:normAutofit/>
           </a:bodyPr>
-          <a:lstStyle/>
-          <a:p>
+          <a:lstStyle xmlns:a="http://schemas.openxmlformats.org/drawingml/2006/main"/>
+          <a:p xmlns:a="http://schemas.openxmlformats.org/drawingml/2006/main">
             <a:pPr algn="l">
+              <a:buNone/>
               <a:defRPr sz="1650" b="0">
                 <a:solidFill>
                   <a:srgbClr val="000000"/>
@@ -5001,17 +5297,17 @@
       </p:sp>
       <p:graphicFrame>
         <p:nvGraphicFramePr>
-          <p:cNvPr id="24" name="Chart"/>
+          <p:cNvPr id="25" name="Chart"/>
           <p:cNvGraphicFramePr/>
           <p:nvPr/>
         </p:nvGraphicFramePr>
         <p:xfrm>
-          <a:off x="400050" y="1295400"/>
-          <a:ext cx="6705600" cy="4953000"/>
+          <a:off xmlns:a="http://schemas.openxmlformats.org/drawingml/2006/main" x="400050" y="1295400"/>
+          <a:ext xmlns:a="http://schemas.openxmlformats.org/drawingml/2006/main" cx="6705600" cy="4953000"/>
         </p:xfrm>
-        <a:graphic>
+        <a:graphic xmlns:a="http://schemas.openxmlformats.org/drawingml/2006/main">
           <a:graphicData uri="http://schemas.openxmlformats.org/drawingml/2006/chart">
-            <c:chart xmlns:c="http://schemas.openxmlformats.org/drawingml/2006/chart" xmlns:r="http://schemas.openxmlformats.org/officeDocument/2006/relationships" r:id="rId3"/>
+            <c:chart xmlns:r="http://schemas.openxmlformats.org/officeDocument/2006/relationships" xmlns:c="http://schemas.openxmlformats.org/drawingml/2006/chart" r:id="R1be257f7325a44a2"/>
           </a:graphicData>
         </a:graphic>
       </p:graphicFrame>
@@ -5022,21 +5318,17 @@
       </p:ext>
     </p:extLst>
   </p:cSld>
-  <p:clrMapOvr>
-    <a:masterClrMapping/>
-  </p:clrMapOvr>
 </p:sld>
 </file>
 
 <file path=ppt/slides/slide7.xml><?xml version="1.0" encoding="utf-8"?>
-<p:sld xmlns:a="http://schemas.openxmlformats.org/drawingml/2006/main" xmlns:r="http://schemas.openxmlformats.org/officeDocument/2006/relationships" xmlns:p="http://schemas.openxmlformats.org/presentationml/2006/main">
+<p:sld xmlns:p="http://schemas.openxmlformats.org/presentationml/2006/main">
   <p:cSld>
     <p:bg>
       <p:bgPr>
-        <a:solidFill>
+        <a:solidFill xmlns:a="http://schemas.openxmlformats.org/drawingml/2006/main">
           <a:srgbClr val="FFFFFF"/>
         </a:solidFill>
-        <a:effectLst/>
       </p:bgPr>
     </p:bg>
     <p:spTree>
@@ -5046,43 +5338,39 @@
         <p:nvPr/>
       </p:nvGrpSpPr>
       <p:grpSpPr>
-        <a:xfrm>
-          <a:off x="0" y="0"/>
-          <a:ext cx="0" cy="0"/>
-          <a:chOff x="0" y="0"/>
-          <a:chExt cx="0" cy="0"/>
-        </a:xfrm>
+        <a:xfrm xmlns:a="http://schemas.openxmlformats.org/drawingml/2006/main"/>
       </p:grpSpPr>
       <p:sp>
         <p:nvSpPr>
           <p:cNvPr id="4" name="slide-7-title">
-            <a:extLst>
+            <a:extLst xmlns:a="http://schemas.openxmlformats.org/drawingml/2006/main">
               <a:ext uri="{FF2B5EF4-FFF2-40B4-BE49-F238E27FC236}">
                 <a16:creationId xmlns:a16="http://schemas.microsoft.com/office/drawing/2014/main" id="{D73DC51D-DAC4-4190-835C-DC3461E74ED2}"/>
               </a:ext>
             </a:extLst>
           </p:cNvPr>
           <p:cNvSpPr>
-            <a:spLocks noGrp="1"/>
-          </p:cNvSpPr>
-          <p:nvPr/>
-        </p:nvSpPr>
-        <p:spPr>
-          <a:xfrm>
+            <a:spLocks xmlns:a="http://schemas.openxmlformats.org/drawingml/2006/main" noGrp="1"/>
+          </p:cNvSpPr>
+          <p:nvPr/>
+        </p:nvSpPr>
+        <p:spPr>
+          <a:xfrm xmlns:a="http://schemas.openxmlformats.org/drawingml/2006/main">
             <a:off x="400050" y="323850"/>
             <a:ext cx="11391900" cy="781050"/>
           </a:xfrm>
-          <a:prstGeom prst="rect">
-            <a:avLst/>
-          </a:prstGeom>
-        </p:spPr>
-        <p:txBody>
-          <a:bodyPr wrap="square" lIns="0" tIns="0" rIns="0" bIns="0" anchor="t">
-            <a:normAutofit/>
+          <a:prstGeom xmlns:a="http://schemas.openxmlformats.org/drawingml/2006/main" prst="rect">
+            <a:avLst/>
+          </a:prstGeom>
+        </p:spPr>
+        <p:txBody>
+          <a:bodyPr xmlns:a="http://schemas.openxmlformats.org/drawingml/2006/main" wrap="square" lIns="0" tIns="0" rIns="0" bIns="0" anchor="t">
+            <a:normAutofit fontScale="100000"/>
           </a:bodyPr>
-          <a:lstStyle/>
-          <a:p>
+          <a:lstStyle xmlns:a="http://schemas.openxmlformats.org/drawingml/2006/main"/>
+          <a:p xmlns:a="http://schemas.openxmlformats.org/drawingml/2006/main">
             <a:pPr algn="l">
+              <a:buNone/>
               <a:defRPr sz="3000" b="1">
                 <a:solidFill>
                   <a:srgbClr val="000000"/>
@@ -5093,7 +5381,7 @@
               </a:defRPr>
             </a:pPr>
             <a:r>
-              <a:t>短路计算支持各级开关设备目标等级</a:t>
+              <a:t>短路职责支持设备等级，35/10kV无需限流电抗器</a:t>
             </a:r>
           </a:p>
         </p:txBody>
@@ -5101,33 +5389,34 @@
       <p:sp>
         <p:nvSpPr>
           <p:cNvPr id="2" name="page-7">
-            <a:extLst>
+            <a:extLst xmlns:a="http://schemas.openxmlformats.org/drawingml/2006/main">
               <a:ext uri="{FF2B5EF4-FFF2-40B4-BE49-F238E27FC236}">
                 <a16:creationId xmlns:a16="http://schemas.microsoft.com/office/drawing/2014/main" id="{79C42F9E-BF8B-41E1-966B-1C94D380E38F}"/>
               </a:ext>
             </a:extLst>
           </p:cNvPr>
           <p:cNvSpPr>
-            <a:spLocks noGrp="1"/>
-          </p:cNvSpPr>
-          <p:nvPr/>
-        </p:nvSpPr>
-        <p:spPr>
-          <a:xfrm>
+            <a:spLocks xmlns:a="http://schemas.openxmlformats.org/drawingml/2006/main" noGrp="1"/>
+          </p:cNvSpPr>
+          <p:nvPr/>
+        </p:nvSpPr>
+        <p:spPr>
+          <a:xfrm xmlns:a="http://schemas.openxmlformats.org/drawingml/2006/main">
             <a:off x="11277600" y="6276975"/>
             <a:ext cx="514350" cy="238125"/>
           </a:xfrm>
-          <a:prstGeom prst="rect">
-            <a:avLst/>
-          </a:prstGeom>
-        </p:spPr>
-        <p:txBody>
-          <a:bodyPr wrap="square" lIns="0" tIns="0" rIns="0" bIns="0" anchor="b">
+          <a:prstGeom xmlns:a="http://schemas.openxmlformats.org/drawingml/2006/main" prst="rect">
+            <a:avLst/>
+          </a:prstGeom>
+        </p:spPr>
+        <p:txBody>
+          <a:bodyPr xmlns:a="http://schemas.openxmlformats.org/drawingml/2006/main" wrap="square" lIns="0" tIns="0" rIns="0" bIns="0" anchor="b">
             <a:noAutofit/>
           </a:bodyPr>
-          <a:lstStyle/>
-          <a:p>
+          <a:lstStyle xmlns:a="http://schemas.openxmlformats.org/drawingml/2006/main"/>
+          <a:p xmlns:a="http://schemas.openxmlformats.org/drawingml/2006/main">
             <a:pPr algn="r">
+              <a:buNone/>
               <a:defRPr sz="1050" b="0">
                 <a:solidFill>
                   <a:srgbClr val="000000"/>
@@ -5146,33 +5435,34 @@
       <p:sp>
         <p:nvSpPr>
           <p:cNvPr id="3" name="sc-intro">
-            <a:extLst>
+            <a:extLst xmlns:a="http://schemas.openxmlformats.org/drawingml/2006/main">
               <a:ext uri="{FF2B5EF4-FFF2-40B4-BE49-F238E27FC236}">
                 <a16:creationId xmlns:a16="http://schemas.microsoft.com/office/drawing/2014/main" id="{B25A69B3-EB71-4A8B-A399-C0B0D4A996A7}"/>
               </a:ext>
             </a:extLst>
           </p:cNvPr>
           <p:cNvSpPr>
-            <a:spLocks noGrp="1"/>
-          </p:cNvSpPr>
-          <p:nvPr/>
-        </p:nvSpPr>
-        <p:spPr>
-          <a:xfrm>
+            <a:spLocks xmlns:a="http://schemas.openxmlformats.org/drawingml/2006/main" noGrp="1"/>
+          </p:cNvSpPr>
+          <p:nvPr/>
+        </p:nvSpPr>
+        <p:spPr>
+          <a:xfrm xmlns:a="http://schemas.openxmlformats.org/drawingml/2006/main">
             <a:off x="400050" y="1162050"/>
             <a:ext cx="11391900" cy="952500"/>
           </a:xfrm>
-          <a:prstGeom prst="rect">
-            <a:avLst/>
-          </a:prstGeom>
-        </p:spPr>
-        <p:txBody>
-          <a:bodyPr wrap="square" lIns="0" tIns="0" rIns="0" bIns="0" anchor="t">
-            <a:normAutofit/>
+          <a:prstGeom xmlns:a="http://schemas.openxmlformats.org/drawingml/2006/main" prst="rect">
+            <a:avLst/>
+          </a:prstGeom>
+        </p:spPr>
+        <p:txBody>
+          <a:bodyPr xmlns:a="http://schemas.openxmlformats.org/drawingml/2006/main" wrap="square" lIns="0" tIns="0" rIns="0" bIns="0" anchor="t">
+            <a:normAutofit fontScale="100000"/>
           </a:bodyPr>
-          <a:lstStyle/>
-          <a:p>
+          <a:lstStyle xmlns:a="http://schemas.openxmlformats.org/drawingml/2006/main"/>
+          <a:p xmlns:a="http://schemas.openxmlformats.org/drawingml/2006/main">
             <a:pPr algn="l">
+              <a:buNone/>
               <a:defRPr sz="1800" b="0">
                 <a:solidFill>
                   <a:srgbClr val="000000"/>
@@ -5183,68 +5473,32 @@
               </a:defRPr>
             </a:pPr>
             <a:r>
-              <a:t>基准容量100MVA；平均电压230/37/10.5kV；峰值系数课程取1.8。设备按条件性最大职责预筛，禁止并列方式仅作联锁敏感性提示。</a:t>
+              <a:t>基准100MVA，设备按条件性最大职责预筛；16.291/15.638kA低于31.5kA能力。高压熔断器不作主回路设备；阻波器仅在采用电力载波时配置。</a:t>
             </a:r>
           </a:p>
         </p:txBody>
       </p:sp>
       <p:graphicFrame>
         <p:nvGraphicFramePr>
-          <p:cNvPr id="8" name="表格 7"/>
+          <p:cNvPr id="9" name="表格 7"/>
           <p:cNvGraphicFramePr/>
           <p:nvPr/>
         </p:nvGraphicFramePr>
         <p:xfrm>
-          <a:off x="609600" y="2476500"/>
-          <a:ext cx="10972800" cy="2857500"/>
+          <a:off xmlns:a="http://schemas.openxmlformats.org/drawingml/2006/main" x="609600" y="2476500"/>
+          <a:ext xmlns:a="http://schemas.openxmlformats.org/drawingml/2006/main" cx="10972800" cy="2857500"/>
         </p:xfrm>
-        <a:graphic>
+        <a:graphic xmlns:a="http://schemas.openxmlformats.org/drawingml/2006/main">
           <a:graphicData uri="http://schemas.openxmlformats.org/drawingml/2006/table">
             <a:tbl>
               <a:tblPr/>
               <a:tblGrid>
-                <a:gridCol w="1428750">
-                  <a:extLst>
-                    <a:ext uri="{9D8B030D-6E8A-4147-A177-3AD203B41FA5}">
-                      <a16:colId xmlns:a16="http://schemas.microsoft.com/office/drawing/2014/main" val="20000"/>
-                    </a:ext>
-                  </a:extLst>
-                </a:gridCol>
-                <a:gridCol w="1809750">
-                  <a:extLst>
-                    <a:ext uri="{9D8B030D-6E8A-4147-A177-3AD203B41FA5}">
-                      <a16:colId xmlns:a16="http://schemas.microsoft.com/office/drawing/2014/main" val="20001"/>
-                    </a:ext>
-                  </a:extLst>
-                </a:gridCol>
-                <a:gridCol w="1809750">
-                  <a:extLst>
-                    <a:ext uri="{9D8B030D-6E8A-4147-A177-3AD203B41FA5}">
-                      <a16:colId xmlns:a16="http://schemas.microsoft.com/office/drawing/2014/main" val="20002"/>
-                    </a:ext>
-                  </a:extLst>
-                </a:gridCol>
-                <a:gridCol w="2000250">
-                  <a:extLst>
-                    <a:ext uri="{9D8B030D-6E8A-4147-A177-3AD203B41FA5}">
-                      <a16:colId xmlns:a16="http://schemas.microsoft.com/office/drawing/2014/main" val="20003"/>
-                    </a:ext>
-                  </a:extLst>
-                </a:gridCol>
-                <a:gridCol w="1809750">
-                  <a:extLst>
-                    <a:ext uri="{9D8B030D-6E8A-4147-A177-3AD203B41FA5}">
-                      <a16:colId xmlns:a16="http://schemas.microsoft.com/office/drawing/2014/main" val="20004"/>
-                    </a:ext>
-                  </a:extLst>
-                </a:gridCol>
-                <a:gridCol w="2114550">
-                  <a:extLst>
-                    <a:ext uri="{9D8B030D-6E8A-4147-A177-3AD203B41FA5}">
-                      <a16:colId xmlns:a16="http://schemas.microsoft.com/office/drawing/2014/main" val="20005"/>
-                    </a:ext>
-                  </a:extLst>
-                </a:gridCol>
+                <a:gridCol w="1428750"/>
+                <a:gridCol w="1809750"/>
+                <a:gridCol w="1809750"/>
+                <a:gridCol w="2000250"/>
+                <a:gridCol w="1809750"/>
+                <a:gridCol w="2114550"/>
               </a:tblGrid>
               <a:tr h="714375">
                 <a:tc>
@@ -5252,7 +5506,9 @@
                     <a:bodyPr/>
                     <a:lstStyle/>
                     <a:p>
-                      <a:pPr algn="ctr"/>
+                      <a:pPr algn="ctr">
+                        <a:buNone/>
+                      </a:pPr>
                       <a:r>
                         <a:rPr sz="1350" b="1">
                           <a:solidFill>
@@ -5263,7 +5519,7 @@
                       </a:r>
                     </a:p>
                   </a:txBody>
-                  <a:tcPr>
+                  <a:tcPr marL="91440" marR="91440" marT="45720" marB="45720">
                     <a:solidFill>
                       <a:srgbClr val="D9E2F3"/>
                     </a:solidFill>
@@ -5274,7 +5530,9 @@
                     <a:bodyPr/>
                     <a:lstStyle/>
                     <a:p>
-                      <a:pPr algn="ctr"/>
+                      <a:pPr algn="ctr">
+                        <a:buNone/>
+                      </a:pPr>
                       <a:r>
                         <a:rPr sz="1350" b="1">
                           <a:solidFill>
@@ -5285,7 +5543,7 @@
                       </a:r>
                     </a:p>
                   </a:txBody>
-                  <a:tcPr>
+                  <a:tcPr marL="91440" marR="91440" marT="45720" marB="45720">
                     <a:solidFill>
                       <a:srgbClr val="D9E2F3"/>
                     </a:solidFill>
@@ -5296,7 +5554,9 @@
                     <a:bodyPr/>
                     <a:lstStyle/>
                     <a:p>
-                      <a:pPr algn="ctr"/>
+                      <a:pPr algn="ctr">
+                        <a:buNone/>
+                      </a:pPr>
                       <a:r>
                         <a:rPr sz="1350" b="1">
                           <a:solidFill>
@@ -5307,7 +5567,7 @@
                       </a:r>
                     </a:p>
                   </a:txBody>
-                  <a:tcPr>
+                  <a:tcPr marL="91440" marR="91440" marT="45720" marB="45720">
                     <a:solidFill>
                       <a:srgbClr val="D9E2F3"/>
                     </a:solidFill>
@@ -5318,7 +5578,9 @@
                     <a:bodyPr/>
                     <a:lstStyle/>
                     <a:p>
-                      <a:pPr algn="ctr"/>
+                      <a:pPr algn="ctr">
+                        <a:buNone/>
+                      </a:pPr>
                       <a:r>
                         <a:rPr sz="1350" b="1">
                           <a:solidFill>
@@ -5329,7 +5591,7 @@
                       </a:r>
                     </a:p>
                   </a:txBody>
-                  <a:tcPr>
+                  <a:tcPr marL="91440" marR="91440" marT="45720" marB="45720">
                     <a:solidFill>
                       <a:srgbClr val="D9E2F3"/>
                     </a:solidFill>
@@ -5340,7 +5602,9 @@
                     <a:bodyPr/>
                     <a:lstStyle/>
                     <a:p>
-                      <a:pPr algn="ctr"/>
+                      <a:pPr algn="ctr">
+                        <a:buNone/>
+                      </a:pPr>
                       <a:r>
                         <a:rPr sz="1350" b="1">
                           <a:solidFill>
@@ -5351,7 +5615,7 @@
                       </a:r>
                     </a:p>
                   </a:txBody>
-                  <a:tcPr>
+                  <a:tcPr marL="91440" marR="91440" marT="45720" marB="45720">
                     <a:solidFill>
                       <a:srgbClr val="D9E2F3"/>
                     </a:solidFill>
@@ -5362,7 +5626,9 @@
                     <a:bodyPr/>
                     <a:lstStyle/>
                     <a:p>
-                      <a:pPr algn="ctr"/>
+                      <a:pPr algn="ctr">
+                        <a:buNone/>
+                      </a:pPr>
                       <a:r>
                         <a:rPr sz="1350" b="1">
                           <a:solidFill>
@@ -5373,17 +5639,12 @@
                       </a:r>
                     </a:p>
                   </a:txBody>
-                  <a:tcPr>
+                  <a:tcPr marL="91440" marR="91440" marT="45720" marB="45720">
                     <a:solidFill>
                       <a:srgbClr val="D9E2F3"/>
                     </a:solidFill>
                   </a:tcPr>
                 </a:tc>
-                <a:extLst>
-                  <a:ext uri="{0D108BD9-81ED-4DB2-BD59-A6C34878D82A}">
-                    <a16:rowId xmlns:a16="http://schemas.microsoft.com/office/drawing/2014/main" val="10000"/>
-                  </a:ext>
-                </a:extLst>
               </a:tr>
               <a:tr h="714375">
                 <a:tc>
@@ -5391,7 +5652,9 @@
                     <a:bodyPr/>
                     <a:lstStyle/>
                     <a:p>
-                      <a:pPr algn="ctr"/>
+                      <a:pPr algn="ctr">
+                        <a:buNone/>
+                      </a:pPr>
                       <a:r>
                         <a:rPr sz="1500">
                           <a:solidFill>
@@ -5402,14 +5665,16 @@
                       </a:r>
                     </a:p>
                   </a:txBody>
-                  <a:tcPr/>
+                  <a:tcPr marL="91440" marR="91440" marT="45720" marB="45720"/>
                 </a:tc>
                 <a:tc>
                   <a:txBody>
                     <a:bodyPr/>
                     <a:lstStyle/>
                     <a:p>
-                      <a:pPr algn="ctr"/>
+                      <a:pPr algn="ctr">
+                        <a:buNone/>
+                      </a:pPr>
                       <a:r>
                         <a:rPr sz="1500">
                           <a:solidFill>
@@ -5420,14 +5685,16 @@
                       </a:r>
                     </a:p>
                   </a:txBody>
-                  <a:tcPr/>
+                  <a:tcPr marL="91440" marR="91440" marT="45720" marB="45720"/>
                 </a:tc>
                 <a:tc>
                   <a:txBody>
                     <a:bodyPr/>
                     <a:lstStyle/>
                     <a:p>
-                      <a:pPr algn="ctr"/>
+                      <a:pPr algn="ctr">
+                        <a:buNone/>
+                      </a:pPr>
                       <a:r>
                         <a:rPr sz="1500">
                           <a:solidFill>
@@ -5438,14 +5705,16 @@
                       </a:r>
                     </a:p>
                   </a:txBody>
-                  <a:tcPr/>
+                  <a:tcPr marL="91440" marR="91440" marT="45720" marB="45720"/>
                 </a:tc>
                 <a:tc>
                   <a:txBody>
                     <a:bodyPr/>
                     <a:lstStyle/>
                     <a:p>
-                      <a:pPr algn="ctr"/>
+                      <a:pPr algn="ctr">
+                        <a:buNone/>
+                      </a:pPr>
                       <a:r>
                         <a:rPr sz="1500">
                           <a:solidFill>
@@ -5456,14 +5725,16 @@
                       </a:r>
                     </a:p>
                   </a:txBody>
-                  <a:tcPr/>
+                  <a:tcPr marL="91440" marR="91440" marT="45720" marB="45720"/>
                 </a:tc>
                 <a:tc>
                   <a:txBody>
                     <a:bodyPr/>
                     <a:lstStyle/>
                     <a:p>
-                      <a:pPr algn="ctr"/>
+                      <a:pPr algn="ctr">
+                        <a:buNone/>
+                      </a:pPr>
                       <a:r>
                         <a:rPr sz="1500">
                           <a:solidFill>
@@ -5474,14 +5745,16 @@
                       </a:r>
                     </a:p>
                   </a:txBody>
-                  <a:tcPr/>
+                  <a:tcPr marL="91440" marR="91440" marT="45720" marB="45720"/>
                 </a:tc>
                 <a:tc>
                   <a:txBody>
                     <a:bodyPr/>
                     <a:lstStyle/>
                     <a:p>
-                      <a:pPr algn="ctr"/>
+                      <a:pPr algn="ctr">
+                        <a:buNone/>
+                      </a:pPr>
                       <a:r>
                         <a:rPr sz="1500">
                           <a:solidFill>
@@ -5492,13 +5765,8 @@
                       </a:r>
                     </a:p>
                   </a:txBody>
-                  <a:tcPr/>
+                  <a:tcPr marL="91440" marR="91440" marT="45720" marB="45720"/>
                 </a:tc>
-                <a:extLst>
-                  <a:ext uri="{0D108BD9-81ED-4DB2-BD59-A6C34878D82A}">
-                    <a16:rowId xmlns:a16="http://schemas.microsoft.com/office/drawing/2014/main" val="10001"/>
-                  </a:ext>
-                </a:extLst>
               </a:tr>
               <a:tr h="714375">
                 <a:tc>
@@ -5506,7 +5774,9 @@
                     <a:bodyPr/>
                     <a:lstStyle/>
                     <a:p>
-                      <a:pPr algn="ctr"/>
+                      <a:pPr algn="ctr">
+                        <a:buNone/>
+                      </a:pPr>
                       <a:r>
                         <a:rPr sz="1500">
                           <a:solidFill>
@@ -5517,14 +5787,16 @@
                       </a:r>
                     </a:p>
                   </a:txBody>
-                  <a:tcPr/>
+                  <a:tcPr marL="91440" marR="91440" marT="45720" marB="45720"/>
                 </a:tc>
                 <a:tc>
                   <a:txBody>
                     <a:bodyPr/>
                     <a:lstStyle/>
                     <a:p>
-                      <a:pPr algn="ctr"/>
+                      <a:pPr algn="ctr">
+                        <a:buNone/>
+                      </a:pPr>
                       <a:r>
                         <a:rPr sz="1500">
                           <a:solidFill>
@@ -5535,14 +5807,16 @@
                       </a:r>
                     </a:p>
                   </a:txBody>
-                  <a:tcPr/>
+                  <a:tcPr marL="91440" marR="91440" marT="45720" marB="45720"/>
                 </a:tc>
                 <a:tc>
                   <a:txBody>
                     <a:bodyPr/>
                     <a:lstStyle/>
                     <a:p>
-                      <a:pPr algn="ctr"/>
+                      <a:pPr algn="ctr">
+                        <a:buNone/>
+                      </a:pPr>
                       <a:r>
                         <a:rPr sz="1500">
                           <a:solidFill>
@@ -5553,14 +5827,16 @@
                       </a:r>
                     </a:p>
                   </a:txBody>
-                  <a:tcPr/>
+                  <a:tcPr marL="91440" marR="91440" marT="45720" marB="45720"/>
                 </a:tc>
                 <a:tc>
                   <a:txBody>
                     <a:bodyPr/>
                     <a:lstStyle/>
                     <a:p>
-                      <a:pPr algn="ctr"/>
+                      <a:pPr algn="ctr">
+                        <a:buNone/>
+                      </a:pPr>
                       <a:r>
                         <a:rPr sz="1500">
                           <a:solidFill>
@@ -5571,14 +5847,16 @@
                       </a:r>
                     </a:p>
                   </a:txBody>
-                  <a:tcPr/>
+                  <a:tcPr marL="91440" marR="91440" marT="45720" marB="45720"/>
                 </a:tc>
                 <a:tc>
                   <a:txBody>
                     <a:bodyPr/>
                     <a:lstStyle/>
                     <a:p>
-                      <a:pPr algn="ctr"/>
+                      <a:pPr algn="ctr">
+                        <a:buNone/>
+                      </a:pPr>
                       <a:r>
                         <a:rPr sz="1500">
                           <a:solidFill>
@@ -5589,14 +5867,16 @@
                       </a:r>
                     </a:p>
                   </a:txBody>
-                  <a:tcPr/>
+                  <a:tcPr marL="91440" marR="91440" marT="45720" marB="45720"/>
                 </a:tc>
                 <a:tc>
                   <a:txBody>
                     <a:bodyPr/>
                     <a:lstStyle/>
                     <a:p>
-                      <a:pPr algn="ctr"/>
+                      <a:pPr algn="ctr">
+                        <a:buNone/>
+                      </a:pPr>
                       <a:r>
                         <a:rPr sz="1500">
                           <a:solidFill>
@@ -5607,13 +5887,8 @@
                       </a:r>
                     </a:p>
                   </a:txBody>
-                  <a:tcPr/>
+                  <a:tcPr marL="91440" marR="91440" marT="45720" marB="45720"/>
                 </a:tc>
-                <a:extLst>
-                  <a:ext uri="{0D108BD9-81ED-4DB2-BD59-A6C34878D82A}">
-                    <a16:rowId xmlns:a16="http://schemas.microsoft.com/office/drawing/2014/main" val="10002"/>
-                  </a:ext>
-                </a:extLst>
               </a:tr>
               <a:tr h="714375">
                 <a:tc>
@@ -5621,7 +5896,9 @@
                     <a:bodyPr/>
                     <a:lstStyle/>
                     <a:p>
-                      <a:pPr algn="ctr"/>
+                      <a:pPr algn="ctr">
+                        <a:buNone/>
+                      </a:pPr>
                       <a:r>
                         <a:rPr sz="1500">
                           <a:solidFill>
@@ -5632,14 +5909,16 @@
                       </a:r>
                     </a:p>
                   </a:txBody>
-                  <a:tcPr/>
+                  <a:tcPr marL="91440" marR="91440" marT="45720" marB="45720"/>
                 </a:tc>
                 <a:tc>
                   <a:txBody>
                     <a:bodyPr/>
                     <a:lstStyle/>
                     <a:p>
-                      <a:pPr algn="ctr"/>
+                      <a:pPr algn="ctr">
+                        <a:buNone/>
+                      </a:pPr>
                       <a:r>
                         <a:rPr sz="1500">
                           <a:solidFill>
@@ -5650,14 +5929,16 @@
                       </a:r>
                     </a:p>
                   </a:txBody>
-                  <a:tcPr/>
+                  <a:tcPr marL="91440" marR="91440" marT="45720" marB="45720"/>
                 </a:tc>
                 <a:tc>
                   <a:txBody>
                     <a:bodyPr/>
                     <a:lstStyle/>
                     <a:p>
-                      <a:pPr algn="ctr"/>
+                      <a:pPr algn="ctr">
+                        <a:buNone/>
+                      </a:pPr>
                       <a:r>
                         <a:rPr sz="1500">
                           <a:solidFill>
@@ -5668,14 +5949,16 @@
                       </a:r>
                     </a:p>
                   </a:txBody>
-                  <a:tcPr/>
+                  <a:tcPr marL="91440" marR="91440" marT="45720" marB="45720"/>
                 </a:tc>
                 <a:tc>
                   <a:txBody>
                     <a:bodyPr/>
                     <a:lstStyle/>
                     <a:p>
-                      <a:pPr algn="ctr"/>
+                      <a:pPr algn="ctr">
+                        <a:buNone/>
+                      </a:pPr>
                       <a:r>
                         <a:rPr sz="1500">
                           <a:solidFill>
@@ -5686,14 +5969,16 @@
                       </a:r>
                     </a:p>
                   </a:txBody>
-                  <a:tcPr/>
+                  <a:tcPr marL="91440" marR="91440" marT="45720" marB="45720"/>
                 </a:tc>
                 <a:tc>
                   <a:txBody>
                     <a:bodyPr/>
                     <a:lstStyle/>
                     <a:p>
-                      <a:pPr algn="ctr"/>
+                      <a:pPr algn="ctr">
+                        <a:buNone/>
+                      </a:pPr>
                       <a:r>
                         <a:rPr sz="1500">
                           <a:solidFill>
@@ -5704,14 +5989,16 @@
                       </a:r>
                     </a:p>
                   </a:txBody>
-                  <a:tcPr/>
+                  <a:tcPr marL="91440" marR="91440" marT="45720" marB="45720"/>
                 </a:tc>
                 <a:tc>
                   <a:txBody>
                     <a:bodyPr/>
                     <a:lstStyle/>
                     <a:p>
-                      <a:pPr algn="ctr"/>
+                      <a:pPr algn="ctr">
+                        <a:buNone/>
+                      </a:pPr>
                       <a:r>
                         <a:rPr sz="1500">
                           <a:solidFill>
@@ -5722,13 +6009,8 @@
                       </a:r>
                     </a:p>
                   </a:txBody>
-                  <a:tcPr/>
+                  <a:tcPr marL="91440" marR="91440" marT="45720" marB="45720"/>
                 </a:tc>
-                <a:extLst>
-                  <a:ext uri="{0D108BD9-81ED-4DB2-BD59-A6C34878D82A}">
-                    <a16:rowId xmlns:a16="http://schemas.microsoft.com/office/drawing/2014/main" val="10003"/>
-                  </a:ext>
-                </a:extLst>
               </a:tr>
             </a:tbl>
           </a:graphicData>
@@ -5741,21 +6023,17 @@
       </p:ext>
     </p:extLst>
   </p:cSld>
-  <p:clrMapOvr>
-    <a:masterClrMapping/>
-  </p:clrMapOvr>
 </p:sld>
 </file>
 
 <file path=ppt/slides/slide8.xml><?xml version="1.0" encoding="utf-8"?>
-<p:sld xmlns:a="http://schemas.openxmlformats.org/drawingml/2006/main" xmlns:r="http://schemas.openxmlformats.org/officeDocument/2006/relationships" xmlns:p="http://schemas.openxmlformats.org/presentationml/2006/main">
+<p:sld xmlns:p="http://schemas.openxmlformats.org/presentationml/2006/main">
   <p:cSld>
     <p:bg>
       <p:bgPr>
-        <a:solidFill>
+        <a:solidFill xmlns:a="http://schemas.openxmlformats.org/drawingml/2006/main">
           <a:srgbClr val="FFFFFF"/>
         </a:solidFill>
-        <a:effectLst/>
       </p:bgPr>
     </p:bg>
     <p:spTree>
@@ -5765,43 +6043,39 @@
         <p:nvPr/>
       </p:nvGrpSpPr>
       <p:grpSpPr>
-        <a:xfrm>
-          <a:off x="0" y="0"/>
-          <a:ext cx="0" cy="0"/>
-          <a:chOff x="0" y="0"/>
-          <a:chExt cx="0" cy="0"/>
-        </a:xfrm>
+        <a:xfrm xmlns:a="http://schemas.openxmlformats.org/drawingml/2006/main"/>
       </p:grpSpPr>
       <p:sp>
         <p:nvSpPr>
           <p:cNvPr id="4" name="slide-8-title">
-            <a:extLst>
+            <a:extLst xmlns:a="http://schemas.openxmlformats.org/drawingml/2006/main">
               <a:ext uri="{FF2B5EF4-FFF2-40B4-BE49-F238E27FC236}">
                 <a16:creationId xmlns:a16="http://schemas.microsoft.com/office/drawing/2014/main" id="{325E17BB-609F-431C-A4C1-2639FF2547EB}"/>
               </a:ext>
             </a:extLst>
           </p:cNvPr>
           <p:cNvSpPr>
-            <a:spLocks noGrp="1"/>
-          </p:cNvSpPr>
-          <p:nvPr/>
-        </p:nvSpPr>
-        <p:spPr>
-          <a:xfrm>
+            <a:spLocks xmlns:a="http://schemas.openxmlformats.org/drawingml/2006/main" noGrp="1"/>
+          </p:cNvSpPr>
+          <p:nvPr/>
+        </p:nvSpPr>
+        <p:spPr>
+          <a:xfrm xmlns:a="http://schemas.openxmlformats.org/drawingml/2006/main">
             <a:off x="400050" y="323850"/>
             <a:ext cx="11391900" cy="781050"/>
           </a:xfrm>
-          <a:prstGeom prst="rect">
-            <a:avLst/>
-          </a:prstGeom>
-        </p:spPr>
-        <p:txBody>
-          <a:bodyPr wrap="square" lIns="0" tIns="0" rIns="0" bIns="0" anchor="t">
+          <a:prstGeom xmlns:a="http://schemas.openxmlformats.org/drawingml/2006/main" prst="rect">
+            <a:avLst/>
+          </a:prstGeom>
+        </p:spPr>
+        <p:txBody>
+          <a:bodyPr xmlns:a="http://schemas.openxmlformats.org/drawingml/2006/main" wrap="square" lIns="0" tIns="0" rIns="0" bIns="0" anchor="t">
             <a:normAutofit/>
           </a:bodyPr>
-          <a:lstStyle/>
-          <a:p>
+          <a:lstStyle xmlns:a="http://schemas.openxmlformats.org/drawingml/2006/main"/>
+          <a:p xmlns:a="http://schemas.openxmlformats.org/drawingml/2006/main">
             <a:pPr algn="l">
+              <a:buNone/>
               <a:defRPr sz="3000" b="1">
                 <a:solidFill>
                   <a:srgbClr val="000000"/>
@@ -5820,33 +6094,34 @@
       <p:sp>
         <p:nvSpPr>
           <p:cNvPr id="2" name="page-8">
-            <a:extLst>
+            <a:extLst xmlns:a="http://schemas.openxmlformats.org/drawingml/2006/main">
               <a:ext uri="{FF2B5EF4-FFF2-40B4-BE49-F238E27FC236}">
                 <a16:creationId xmlns:a16="http://schemas.microsoft.com/office/drawing/2014/main" id="{5B9EB0E0-4B1A-4F9F-A955-A119F664A8F7}"/>
               </a:ext>
             </a:extLst>
           </p:cNvPr>
           <p:cNvSpPr>
-            <a:spLocks noGrp="1"/>
-          </p:cNvSpPr>
-          <p:nvPr/>
-        </p:nvSpPr>
-        <p:spPr>
-          <a:xfrm>
+            <a:spLocks xmlns:a="http://schemas.openxmlformats.org/drawingml/2006/main" noGrp="1"/>
+          </p:cNvSpPr>
+          <p:nvPr/>
+        </p:nvSpPr>
+        <p:spPr>
+          <a:xfrm xmlns:a="http://schemas.openxmlformats.org/drawingml/2006/main">
             <a:off x="11277600" y="6276975"/>
             <a:ext cx="514350" cy="238125"/>
           </a:xfrm>
-          <a:prstGeom prst="rect">
-            <a:avLst/>
-          </a:prstGeom>
-        </p:spPr>
-        <p:txBody>
-          <a:bodyPr wrap="square" lIns="0" tIns="0" rIns="0" bIns="0" anchor="b">
+          <a:prstGeom xmlns:a="http://schemas.openxmlformats.org/drawingml/2006/main" prst="rect">
+            <a:avLst/>
+          </a:prstGeom>
+        </p:spPr>
+        <p:txBody>
+          <a:bodyPr xmlns:a="http://schemas.openxmlformats.org/drawingml/2006/main" wrap="square" lIns="0" tIns="0" rIns="0" bIns="0" anchor="b">
             <a:noAutofit/>
           </a:bodyPr>
-          <a:lstStyle/>
-          <a:p>
+          <a:lstStyle xmlns:a="http://schemas.openxmlformats.org/drawingml/2006/main"/>
+          <a:p xmlns:a="http://schemas.openxmlformats.org/drawingml/2006/main">
             <a:pPr algn="r">
+              <a:buNone/>
               <a:defRPr sz="1050" b="0">
                 <a:solidFill>
                   <a:srgbClr val="000000"/>
@@ -5865,29 +6140,29 @@
       <p:sp>
         <p:nvSpPr>
           <p:cNvPr id="3" name="plan-image-frame">
-            <a:extLst>
+            <a:extLst xmlns:a="http://schemas.openxmlformats.org/drawingml/2006/main">
               <a:ext uri="{FF2B5EF4-FFF2-40B4-BE49-F238E27FC236}">
                 <a16:creationId xmlns:a16="http://schemas.microsoft.com/office/drawing/2014/main" id="{DB28F4CB-CC3E-4A9A-A308-052B76A28E8E}"/>
               </a:ext>
             </a:extLst>
           </p:cNvPr>
           <p:cNvSpPr>
-            <a:spLocks noGrp="1"/>
-          </p:cNvSpPr>
-          <p:nvPr/>
-        </p:nvSpPr>
-        <p:spPr>
-          <a:xfrm>
+            <a:spLocks xmlns:a="http://schemas.openxmlformats.org/drawingml/2006/main" noGrp="1"/>
+          </p:cNvSpPr>
+          <p:nvPr/>
+        </p:nvSpPr>
+        <p:spPr>
+          <a:xfrm xmlns:a="http://schemas.openxmlformats.org/drawingml/2006/main">
             <a:off x="400050" y="1257300"/>
             <a:ext cx="6858000" cy="4838700"/>
           </a:xfrm>
-          <a:prstGeom prst="rect">
-            <a:avLst/>
-          </a:prstGeom>
-          <a:solidFill>
+          <a:prstGeom xmlns:a="http://schemas.openxmlformats.org/drawingml/2006/main" prst="rect">
+            <a:avLst/>
+          </a:prstGeom>
+          <a:solidFill xmlns:a="http://schemas.openxmlformats.org/drawingml/2006/main">
             <a:srgbClr val="FFFFFF"/>
           </a:solidFill>
-          <a:ln w="9525">
+          <a:ln xmlns:a="http://schemas.openxmlformats.org/drawingml/2006/main" w="9525">
             <a:solidFill>
               <a:srgbClr val="B8BCC4"/>
             </a:solidFill>
@@ -5897,22 +6172,22 @@
       </p:sp>
       <p:pic>
         <p:nvPicPr>
-          <p:cNvPr id="17" name="plan-image"/>
+          <p:cNvPr id="18" name="plan-image"/>
           <p:cNvPicPr>
-            <a:picLocks noChangeAspect="1"/>
+            <a:picLocks xmlns:a="http://schemas.openxmlformats.org/drawingml/2006/main" noChangeAspect="1"/>
           </p:cNvPicPr>
           <p:nvPr/>
         </p:nvPicPr>
         <p:blipFill>
-          <a:blip r:embed="rId3"/>
-          <a:stretch/>
+          <a:blip xmlns:r="http://schemas.openxmlformats.org/officeDocument/2006/relationships" xmlns:a="http://schemas.openxmlformats.org/drawingml/2006/main" r:embed="R2bd1797267304b17"/>
+          <a:stretch xmlns:a="http://schemas.openxmlformats.org/drawingml/2006/main"/>
         </p:blipFill>
         <p:spPr>
-          <a:xfrm>
+          <a:xfrm xmlns:a="http://schemas.openxmlformats.org/drawingml/2006/main" flipH="0" flipV="0">
             <a:off x="512314" y="1333500"/>
             <a:ext cx="6633472" cy="4686300"/>
           </a:xfrm>
-          <a:prstGeom prst="rect">
+          <a:prstGeom xmlns:a="http://schemas.openxmlformats.org/drawingml/2006/main" prst="rect">
             <a:avLst/>
           </a:prstGeom>
         </p:spPr>
@@ -5920,31 +6195,31 @@
       <p:sp>
         <p:nvSpPr>
           <p:cNvPr id="5" name="plan-card-1">
-            <a:extLst>
+            <a:extLst xmlns:a="http://schemas.openxmlformats.org/drawingml/2006/main">
               <a:ext uri="{FF2B5EF4-FFF2-40B4-BE49-F238E27FC236}">
                 <a16:creationId xmlns:a16="http://schemas.microsoft.com/office/drawing/2014/main" id="{3CA612AC-177D-435A-9E34-C8187DFD80D0}"/>
               </a:ext>
             </a:extLst>
           </p:cNvPr>
           <p:cNvSpPr>
-            <a:spLocks noGrp="1"/>
-          </p:cNvSpPr>
-          <p:nvPr/>
-        </p:nvSpPr>
-        <p:spPr>
-          <a:xfrm>
+            <a:spLocks xmlns:a="http://schemas.openxmlformats.org/drawingml/2006/main" noGrp="1"/>
+          </p:cNvSpPr>
+          <p:nvPr/>
+        </p:nvSpPr>
+        <p:spPr>
+          <a:xfrm xmlns:a="http://schemas.openxmlformats.org/drawingml/2006/main">
             <a:off x="7620000" y="1257300"/>
             <a:ext cx="4171950" cy="1390650"/>
           </a:xfrm>
-          <a:prstGeom prst="roundRect">
+          <a:prstGeom xmlns:a="http://schemas.openxmlformats.org/drawingml/2006/main" prst="roundRect">
             <a:avLst>
               <a:gd name="adj" fmla="val 5479"/>
             </a:avLst>
           </a:prstGeom>
-          <a:solidFill>
+          <a:solidFill xmlns:a="http://schemas.openxmlformats.org/drawingml/2006/main">
             <a:srgbClr val="EAF5FB"/>
           </a:solidFill>
-          <a:ln w="0">
+          <a:ln xmlns:a="http://schemas.openxmlformats.org/drawingml/2006/main" w="0">
             <a:solidFill>
               <a:srgbClr val="EAF5FB"/>
             </a:solidFill>
@@ -5955,33 +6230,34 @@
       <p:sp>
         <p:nvSpPr>
           <p:cNvPr id="6" name="plan-card-title-1">
-            <a:extLst>
+            <a:extLst xmlns:a="http://schemas.openxmlformats.org/drawingml/2006/main">
               <a:ext uri="{FF2B5EF4-FFF2-40B4-BE49-F238E27FC236}">
                 <a16:creationId xmlns:a16="http://schemas.microsoft.com/office/drawing/2014/main" id="{4F8125C8-EE99-407B-86A9-537B08780F63}"/>
               </a:ext>
             </a:extLst>
           </p:cNvPr>
           <p:cNvSpPr>
-            <a:spLocks noGrp="1"/>
-          </p:cNvSpPr>
-          <p:nvPr/>
-        </p:nvSpPr>
-        <p:spPr>
-          <a:xfrm>
+            <a:spLocks xmlns:a="http://schemas.openxmlformats.org/drawingml/2006/main" noGrp="1"/>
+          </p:cNvSpPr>
+          <p:nvPr/>
+        </p:nvSpPr>
+        <p:spPr>
+          <a:xfrm xmlns:a="http://schemas.openxmlformats.org/drawingml/2006/main">
             <a:off x="7924800" y="1495425"/>
             <a:ext cx="3562350" cy="361950"/>
           </a:xfrm>
-          <a:prstGeom prst="rect">
-            <a:avLst/>
-          </a:prstGeom>
-        </p:spPr>
-        <p:txBody>
-          <a:bodyPr wrap="square" lIns="0" tIns="0" rIns="0" bIns="0" anchor="t">
+          <a:prstGeom xmlns:a="http://schemas.openxmlformats.org/drawingml/2006/main" prst="rect">
+            <a:avLst/>
+          </a:prstGeom>
+        </p:spPr>
+        <p:txBody>
+          <a:bodyPr xmlns:a="http://schemas.openxmlformats.org/drawingml/2006/main" wrap="square" lIns="0" tIns="0" rIns="0" bIns="0" anchor="t">
             <a:noAutofit/>
           </a:bodyPr>
-          <a:lstStyle/>
-          <a:p>
+          <a:lstStyle xmlns:a="http://schemas.openxmlformats.org/drawingml/2006/main"/>
+          <a:p xmlns:a="http://schemas.openxmlformats.org/drawingml/2006/main">
             <a:pPr algn="l">
+              <a:buNone/>
               <a:defRPr sz="2175" b="1">
                 <a:solidFill>
                   <a:srgbClr val="000000"/>
@@ -6000,33 +6276,34 @@
       <p:sp>
         <p:nvSpPr>
           <p:cNvPr id="7" name="plan-card-body-1">
-            <a:extLst>
+            <a:extLst xmlns:a="http://schemas.openxmlformats.org/drawingml/2006/main">
               <a:ext uri="{FF2B5EF4-FFF2-40B4-BE49-F238E27FC236}">
                 <a16:creationId xmlns:a16="http://schemas.microsoft.com/office/drawing/2014/main" id="{976CC31E-6800-4552-8072-72828A548113}"/>
               </a:ext>
             </a:extLst>
           </p:cNvPr>
           <p:cNvSpPr>
-            <a:spLocks noGrp="1"/>
-          </p:cNvSpPr>
-          <p:nvPr/>
-        </p:nvSpPr>
-        <p:spPr>
-          <a:xfrm>
+            <a:spLocks xmlns:a="http://schemas.openxmlformats.org/drawingml/2006/main" noGrp="1"/>
+          </p:cNvSpPr>
+          <p:nvPr/>
+        </p:nvSpPr>
+        <p:spPr>
+          <a:xfrm xmlns:a="http://schemas.openxmlformats.org/drawingml/2006/main">
             <a:off x="7924800" y="1971675"/>
             <a:ext cx="3562350" cy="552450"/>
           </a:xfrm>
-          <a:prstGeom prst="rect">
-            <a:avLst/>
-          </a:prstGeom>
-        </p:spPr>
-        <p:txBody>
-          <a:bodyPr wrap="square" lIns="0" tIns="0" rIns="0" bIns="0" anchor="t">
+          <a:prstGeom xmlns:a="http://schemas.openxmlformats.org/drawingml/2006/main" prst="rect">
+            <a:avLst/>
+          </a:prstGeom>
+        </p:spPr>
+        <p:txBody>
+          <a:bodyPr xmlns:a="http://schemas.openxmlformats.org/drawingml/2006/main" wrap="square" lIns="0" tIns="0" rIns="0" bIns="0" anchor="t">
             <a:normAutofit/>
           </a:bodyPr>
-          <a:lstStyle/>
-          <a:p>
+          <a:lstStyle xmlns:a="http://schemas.openxmlformats.org/drawingml/2006/main"/>
+          <a:p xmlns:a="http://schemas.openxmlformats.org/drawingml/2006/main">
             <a:pPr algn="l">
+              <a:buNone/>
               <a:defRPr sz="1650" b="0">
                 <a:solidFill>
                   <a:srgbClr val="000000"/>
@@ -6045,31 +6322,31 @@
       <p:sp>
         <p:nvSpPr>
           <p:cNvPr id="8" name="plan-card-2">
-            <a:extLst>
+            <a:extLst xmlns:a="http://schemas.openxmlformats.org/drawingml/2006/main">
               <a:ext uri="{FF2B5EF4-FFF2-40B4-BE49-F238E27FC236}">
                 <a16:creationId xmlns:a16="http://schemas.microsoft.com/office/drawing/2014/main" id="{D105EB76-3036-41CC-B42F-2784001E5EC4}"/>
               </a:ext>
             </a:extLst>
           </p:cNvPr>
           <p:cNvSpPr>
-            <a:spLocks noGrp="1"/>
-          </p:cNvSpPr>
-          <p:nvPr/>
-        </p:nvSpPr>
-        <p:spPr>
-          <a:xfrm>
+            <a:spLocks xmlns:a="http://schemas.openxmlformats.org/drawingml/2006/main" noGrp="1"/>
+          </p:cNvSpPr>
+          <p:nvPr/>
+        </p:nvSpPr>
+        <p:spPr>
+          <a:xfrm xmlns:a="http://schemas.openxmlformats.org/drawingml/2006/main">
             <a:off x="7620000" y="3009900"/>
             <a:ext cx="4171950" cy="1390650"/>
           </a:xfrm>
-          <a:prstGeom prst="roundRect">
+          <a:prstGeom xmlns:a="http://schemas.openxmlformats.org/drawingml/2006/main" prst="roundRect">
             <a:avLst>
               <a:gd name="adj" fmla="val 5479"/>
             </a:avLst>
           </a:prstGeom>
-          <a:solidFill>
+          <a:solidFill xmlns:a="http://schemas.openxmlformats.org/drawingml/2006/main">
             <a:srgbClr val="F2F2F2"/>
           </a:solidFill>
-          <a:ln w="0">
+          <a:ln xmlns:a="http://schemas.openxmlformats.org/drawingml/2006/main" w="0">
             <a:solidFill>
               <a:srgbClr val="F2F2F2"/>
             </a:solidFill>
@@ -6080,33 +6357,34 @@
       <p:sp>
         <p:nvSpPr>
           <p:cNvPr id="9" name="plan-card-title-2">
-            <a:extLst>
+            <a:extLst xmlns:a="http://schemas.openxmlformats.org/drawingml/2006/main">
               <a:ext uri="{FF2B5EF4-FFF2-40B4-BE49-F238E27FC236}">
                 <a16:creationId xmlns:a16="http://schemas.microsoft.com/office/drawing/2014/main" id="{CF950A1B-2587-4CC1-91C9-00B7060168F7}"/>
               </a:ext>
             </a:extLst>
           </p:cNvPr>
           <p:cNvSpPr>
-            <a:spLocks noGrp="1"/>
-          </p:cNvSpPr>
-          <p:nvPr/>
-        </p:nvSpPr>
-        <p:spPr>
-          <a:xfrm>
+            <a:spLocks xmlns:a="http://schemas.openxmlformats.org/drawingml/2006/main" noGrp="1"/>
+          </p:cNvSpPr>
+          <p:nvPr/>
+        </p:nvSpPr>
+        <p:spPr>
+          <a:xfrm xmlns:a="http://schemas.openxmlformats.org/drawingml/2006/main">
             <a:off x="7924800" y="3248025"/>
             <a:ext cx="3562350" cy="361950"/>
           </a:xfrm>
-          <a:prstGeom prst="rect">
-            <a:avLst/>
-          </a:prstGeom>
-        </p:spPr>
-        <p:txBody>
-          <a:bodyPr wrap="square" lIns="0" tIns="0" rIns="0" bIns="0" anchor="t">
+          <a:prstGeom xmlns:a="http://schemas.openxmlformats.org/drawingml/2006/main" prst="rect">
+            <a:avLst/>
+          </a:prstGeom>
+        </p:spPr>
+        <p:txBody>
+          <a:bodyPr xmlns:a="http://schemas.openxmlformats.org/drawingml/2006/main" wrap="square" lIns="0" tIns="0" rIns="0" bIns="0" anchor="t">
             <a:noAutofit/>
           </a:bodyPr>
-          <a:lstStyle/>
-          <a:p>
+          <a:lstStyle xmlns:a="http://schemas.openxmlformats.org/drawingml/2006/main"/>
+          <a:p xmlns:a="http://schemas.openxmlformats.org/drawingml/2006/main">
             <a:pPr algn="l">
+              <a:buNone/>
               <a:defRPr sz="2175" b="1">
                 <a:solidFill>
                   <a:srgbClr val="000000"/>
@@ -6125,33 +6403,34 @@
       <p:sp>
         <p:nvSpPr>
           <p:cNvPr id="10" name="plan-card-body-2">
-            <a:extLst>
+            <a:extLst xmlns:a="http://schemas.openxmlformats.org/drawingml/2006/main">
               <a:ext uri="{FF2B5EF4-FFF2-40B4-BE49-F238E27FC236}">
                 <a16:creationId xmlns:a16="http://schemas.microsoft.com/office/drawing/2014/main" id="{4553F2BA-64B8-48F4-9E3D-63845603AC2E}"/>
               </a:ext>
             </a:extLst>
           </p:cNvPr>
           <p:cNvSpPr>
-            <a:spLocks noGrp="1"/>
-          </p:cNvSpPr>
-          <p:nvPr/>
-        </p:nvSpPr>
-        <p:spPr>
-          <a:xfrm>
+            <a:spLocks xmlns:a="http://schemas.openxmlformats.org/drawingml/2006/main" noGrp="1"/>
+          </p:cNvSpPr>
+          <p:nvPr/>
+        </p:nvSpPr>
+        <p:spPr>
+          <a:xfrm xmlns:a="http://schemas.openxmlformats.org/drawingml/2006/main">
             <a:off x="7924800" y="3724275"/>
             <a:ext cx="3562350" cy="552450"/>
           </a:xfrm>
-          <a:prstGeom prst="rect">
-            <a:avLst/>
-          </a:prstGeom>
-        </p:spPr>
-        <p:txBody>
-          <a:bodyPr wrap="square" lIns="0" tIns="0" rIns="0" bIns="0" anchor="t">
+          <a:prstGeom xmlns:a="http://schemas.openxmlformats.org/drawingml/2006/main" prst="rect">
+            <a:avLst/>
+          </a:prstGeom>
+        </p:spPr>
+        <p:txBody>
+          <a:bodyPr xmlns:a="http://schemas.openxmlformats.org/drawingml/2006/main" wrap="square" lIns="0" tIns="0" rIns="0" bIns="0" anchor="t">
             <a:normAutofit/>
           </a:bodyPr>
-          <a:lstStyle/>
-          <a:p>
+          <a:lstStyle xmlns:a="http://schemas.openxmlformats.org/drawingml/2006/main"/>
+          <a:p xmlns:a="http://schemas.openxmlformats.org/drawingml/2006/main">
             <a:pPr algn="l">
+              <a:buNone/>
               <a:defRPr sz="1650" b="0">
                 <a:solidFill>
                   <a:srgbClr val="000000"/>
@@ -6170,31 +6449,31 @@
       <p:sp>
         <p:nvSpPr>
           <p:cNvPr id="11" name="plan-card-3">
-            <a:extLst>
+            <a:extLst xmlns:a="http://schemas.openxmlformats.org/drawingml/2006/main">
               <a:ext uri="{FF2B5EF4-FFF2-40B4-BE49-F238E27FC236}">
                 <a16:creationId xmlns:a16="http://schemas.microsoft.com/office/drawing/2014/main" id="{5CE2D0E3-65E4-458B-9A86-43C0D7FC3405}"/>
               </a:ext>
             </a:extLst>
           </p:cNvPr>
           <p:cNvSpPr>
-            <a:spLocks noGrp="1"/>
-          </p:cNvSpPr>
-          <p:nvPr/>
-        </p:nvSpPr>
-        <p:spPr>
-          <a:xfrm>
+            <a:spLocks xmlns:a="http://schemas.openxmlformats.org/drawingml/2006/main" noGrp="1"/>
+          </p:cNvSpPr>
+          <p:nvPr/>
+        </p:nvSpPr>
+        <p:spPr>
+          <a:xfrm xmlns:a="http://schemas.openxmlformats.org/drawingml/2006/main">
             <a:off x="7620000" y="4762500"/>
             <a:ext cx="4171950" cy="1390650"/>
           </a:xfrm>
-          <a:prstGeom prst="roundRect">
+          <a:prstGeom xmlns:a="http://schemas.openxmlformats.org/drawingml/2006/main" prst="roundRect">
             <a:avLst>
               <a:gd name="adj" fmla="val 5479"/>
             </a:avLst>
           </a:prstGeom>
-          <a:solidFill>
+          <a:solidFill xmlns:a="http://schemas.openxmlformats.org/drawingml/2006/main">
             <a:srgbClr val="F2F2F2"/>
           </a:solidFill>
-          <a:ln w="0">
+          <a:ln xmlns:a="http://schemas.openxmlformats.org/drawingml/2006/main" w="0">
             <a:solidFill>
               <a:srgbClr val="F2F2F2"/>
             </a:solidFill>
@@ -6205,33 +6484,34 @@
       <p:sp>
         <p:nvSpPr>
           <p:cNvPr id="12" name="plan-card-title-3">
-            <a:extLst>
+            <a:extLst xmlns:a="http://schemas.openxmlformats.org/drawingml/2006/main">
               <a:ext uri="{FF2B5EF4-FFF2-40B4-BE49-F238E27FC236}">
                 <a16:creationId xmlns:a16="http://schemas.microsoft.com/office/drawing/2014/main" id="{3AF9B593-3A27-4CD7-B141-B6C9EAB6478B}"/>
               </a:ext>
             </a:extLst>
           </p:cNvPr>
           <p:cNvSpPr>
-            <a:spLocks noGrp="1"/>
-          </p:cNvSpPr>
-          <p:nvPr/>
-        </p:nvSpPr>
-        <p:spPr>
-          <a:xfrm>
+            <a:spLocks xmlns:a="http://schemas.openxmlformats.org/drawingml/2006/main" noGrp="1"/>
+          </p:cNvSpPr>
+          <p:nvPr/>
+        </p:nvSpPr>
+        <p:spPr>
+          <a:xfrm xmlns:a="http://schemas.openxmlformats.org/drawingml/2006/main">
             <a:off x="7924800" y="5000625"/>
             <a:ext cx="3562350" cy="361950"/>
           </a:xfrm>
-          <a:prstGeom prst="rect">
-            <a:avLst/>
-          </a:prstGeom>
-        </p:spPr>
-        <p:txBody>
-          <a:bodyPr wrap="square" lIns="0" tIns="0" rIns="0" bIns="0" anchor="t">
+          <a:prstGeom xmlns:a="http://schemas.openxmlformats.org/drawingml/2006/main" prst="rect">
+            <a:avLst/>
+          </a:prstGeom>
+        </p:spPr>
+        <p:txBody>
+          <a:bodyPr xmlns:a="http://schemas.openxmlformats.org/drawingml/2006/main" wrap="square" lIns="0" tIns="0" rIns="0" bIns="0" anchor="t">
             <a:noAutofit/>
           </a:bodyPr>
-          <a:lstStyle/>
-          <a:p>
+          <a:lstStyle xmlns:a="http://schemas.openxmlformats.org/drawingml/2006/main"/>
+          <a:p xmlns:a="http://schemas.openxmlformats.org/drawingml/2006/main">
             <a:pPr algn="l">
+              <a:buNone/>
               <a:defRPr sz="2175" b="1">
                 <a:solidFill>
                   <a:srgbClr val="000000"/>
@@ -6250,33 +6530,34 @@
       <p:sp>
         <p:nvSpPr>
           <p:cNvPr id="13" name="plan-card-body-3">
-            <a:extLst>
+            <a:extLst xmlns:a="http://schemas.openxmlformats.org/drawingml/2006/main">
               <a:ext uri="{FF2B5EF4-FFF2-40B4-BE49-F238E27FC236}">
                 <a16:creationId xmlns:a16="http://schemas.microsoft.com/office/drawing/2014/main" id="{D2F85819-FD55-4615-B74C-125D0161F57B}"/>
               </a:ext>
             </a:extLst>
           </p:cNvPr>
           <p:cNvSpPr>
-            <a:spLocks noGrp="1"/>
-          </p:cNvSpPr>
-          <p:nvPr/>
-        </p:nvSpPr>
-        <p:spPr>
-          <a:xfrm>
+            <a:spLocks xmlns:a="http://schemas.openxmlformats.org/drawingml/2006/main" noGrp="1"/>
+          </p:cNvSpPr>
+          <p:nvPr/>
+        </p:nvSpPr>
+        <p:spPr>
+          <a:xfrm xmlns:a="http://schemas.openxmlformats.org/drawingml/2006/main">
             <a:off x="7924800" y="5476875"/>
             <a:ext cx="3562350" cy="552450"/>
           </a:xfrm>
-          <a:prstGeom prst="rect">
-            <a:avLst/>
-          </a:prstGeom>
-        </p:spPr>
-        <p:txBody>
-          <a:bodyPr wrap="square" lIns="0" tIns="0" rIns="0" bIns="0" anchor="t">
+          <a:prstGeom xmlns:a="http://schemas.openxmlformats.org/drawingml/2006/main" prst="rect">
+            <a:avLst/>
+          </a:prstGeom>
+        </p:spPr>
+        <p:txBody>
+          <a:bodyPr xmlns:a="http://schemas.openxmlformats.org/drawingml/2006/main" wrap="square" lIns="0" tIns="0" rIns="0" bIns="0" anchor="t">
             <a:normAutofit/>
           </a:bodyPr>
-          <a:lstStyle/>
-          <a:p>
+          <a:lstStyle xmlns:a="http://schemas.openxmlformats.org/drawingml/2006/main"/>
+          <a:p xmlns:a="http://schemas.openxmlformats.org/drawingml/2006/main">
             <a:pPr algn="l">
+              <a:buNone/>
               <a:defRPr sz="1650" b="0">
                 <a:solidFill>
                   <a:srgbClr val="000000"/>
@@ -6299,21 +6580,17 @@
       </p:ext>
     </p:extLst>
   </p:cSld>
-  <p:clrMapOvr>
-    <a:masterClrMapping/>
-  </p:clrMapOvr>
 </p:sld>
 </file>
 
 <file path=ppt/slides/slide9.xml><?xml version="1.0" encoding="utf-8"?>
-<p:sld xmlns:a="http://schemas.openxmlformats.org/drawingml/2006/main" xmlns:r="http://schemas.openxmlformats.org/officeDocument/2006/relationships" xmlns:p="http://schemas.openxmlformats.org/presentationml/2006/main">
+<p:sld xmlns:p="http://schemas.openxmlformats.org/presentationml/2006/main">
   <p:cSld>
     <p:bg>
       <p:bgPr>
-        <a:solidFill>
+        <a:solidFill xmlns:a="http://schemas.openxmlformats.org/drawingml/2006/main">
           <a:srgbClr val="FFFFFF"/>
         </a:solidFill>
-        <a:effectLst/>
       </p:bgPr>
     </p:bg>
     <p:spTree>
@@ -6323,43 +6600,39 @@
         <p:nvPr/>
       </p:nvGrpSpPr>
       <p:grpSpPr>
-        <a:xfrm>
-          <a:off x="0" y="0"/>
-          <a:ext cx="0" cy="0"/>
-          <a:chOff x="0" y="0"/>
-          <a:chExt cx="0" cy="0"/>
-        </a:xfrm>
+        <a:xfrm xmlns:a="http://schemas.openxmlformats.org/drawingml/2006/main"/>
       </p:grpSpPr>
       <p:sp>
         <p:nvSpPr>
           <p:cNvPr id="4" name="slide-9-title">
-            <a:extLst>
+            <a:extLst xmlns:a="http://schemas.openxmlformats.org/drawingml/2006/main">
               <a:ext uri="{FF2B5EF4-FFF2-40B4-BE49-F238E27FC236}">
                 <a16:creationId xmlns:a16="http://schemas.microsoft.com/office/drawing/2014/main" id="{661F2B12-D6BC-4C3F-A5EC-F8766A37ECD5}"/>
               </a:ext>
             </a:extLst>
           </p:cNvPr>
           <p:cNvSpPr>
-            <a:spLocks noGrp="1"/>
-          </p:cNvSpPr>
-          <p:nvPr/>
-        </p:nvSpPr>
-        <p:spPr>
-          <a:xfrm>
+            <a:spLocks xmlns:a="http://schemas.openxmlformats.org/drawingml/2006/main" noGrp="1"/>
+          </p:cNvSpPr>
+          <p:nvPr/>
+        </p:nvSpPr>
+        <p:spPr>
+          <a:xfrm xmlns:a="http://schemas.openxmlformats.org/drawingml/2006/main">
             <a:off x="400050" y="323850"/>
             <a:ext cx="11391900" cy="781050"/>
           </a:xfrm>
-          <a:prstGeom prst="rect">
-            <a:avLst/>
-          </a:prstGeom>
-        </p:spPr>
-        <p:txBody>
-          <a:bodyPr wrap="square" lIns="0" tIns="0" rIns="0" bIns="0" anchor="t">
-            <a:normAutofit/>
+          <a:prstGeom xmlns:a="http://schemas.openxmlformats.org/drawingml/2006/main" prst="rect">
+            <a:avLst/>
+          </a:prstGeom>
+        </p:spPr>
+        <p:txBody>
+          <a:bodyPr xmlns:a="http://schemas.openxmlformats.org/drawingml/2006/main" wrap="square" lIns="0" tIns="0" rIns="0" bIns="0" anchor="t">
+            <a:normAutofit fontScale="100000"/>
           </a:bodyPr>
-          <a:lstStyle/>
-          <a:p>
+          <a:lstStyle xmlns:a="http://schemas.openxmlformats.org/drawingml/2006/main"/>
+          <a:p xmlns:a="http://schemas.openxmlformats.org/drawingml/2006/main">
             <a:pPr algn="l">
+              <a:buNone/>
               <a:defRPr sz="3000" b="1">
                 <a:solidFill>
                   <a:srgbClr val="000000"/>
@@ -6370,7 +6643,7 @@
               </a:defRPr>
             </a:pPr>
             <a:r>
-              <a:t>典型断面满足课程净距，并保留工程复核边界</a:t>
+              <a:t>L1线路间隔详图补齐QS+ES、CVT与MOA设备链</a:t>
             </a:r>
           </a:p>
         </p:txBody>
@@ -6378,33 +6651,34 @@
       <p:sp>
         <p:nvSpPr>
           <p:cNvPr id="2" name="page-9">
-            <a:extLst>
+            <a:extLst xmlns:a="http://schemas.openxmlformats.org/drawingml/2006/main">
               <a:ext uri="{FF2B5EF4-FFF2-40B4-BE49-F238E27FC236}">
                 <a16:creationId xmlns:a16="http://schemas.microsoft.com/office/drawing/2014/main" id="{FF89310E-883C-4541-8A28-8C112F3BCAE4}"/>
               </a:ext>
             </a:extLst>
           </p:cNvPr>
           <p:cNvSpPr>
-            <a:spLocks noGrp="1"/>
-          </p:cNvSpPr>
-          <p:nvPr/>
-        </p:nvSpPr>
-        <p:spPr>
-          <a:xfrm>
+            <a:spLocks xmlns:a="http://schemas.openxmlformats.org/drawingml/2006/main" noGrp="1"/>
+          </p:cNvSpPr>
+          <p:nvPr/>
+        </p:nvSpPr>
+        <p:spPr>
+          <a:xfrm xmlns:a="http://schemas.openxmlformats.org/drawingml/2006/main">
             <a:off x="11277600" y="6276975"/>
             <a:ext cx="514350" cy="238125"/>
           </a:xfrm>
-          <a:prstGeom prst="rect">
-            <a:avLst/>
-          </a:prstGeom>
-        </p:spPr>
-        <p:txBody>
-          <a:bodyPr wrap="square" lIns="0" tIns="0" rIns="0" bIns="0" anchor="b">
+          <a:prstGeom xmlns:a="http://schemas.openxmlformats.org/drawingml/2006/main" prst="rect">
+            <a:avLst/>
+          </a:prstGeom>
+        </p:spPr>
+        <p:txBody>
+          <a:bodyPr xmlns:a="http://schemas.openxmlformats.org/drawingml/2006/main" wrap="square" lIns="0" tIns="0" rIns="0" bIns="0" anchor="b">
             <a:noAutofit/>
           </a:bodyPr>
-          <a:lstStyle/>
-          <a:p>
+          <a:lstStyle xmlns:a="http://schemas.openxmlformats.org/drawingml/2006/main"/>
+          <a:p xmlns:a="http://schemas.openxmlformats.org/drawingml/2006/main">
             <a:pPr algn="r">
+              <a:buNone/>
               <a:defRPr sz="1050" b="0">
                 <a:solidFill>
                   <a:srgbClr val="000000"/>
@@ -6423,29 +6697,29 @@
       <p:sp>
         <p:nvSpPr>
           <p:cNvPr id="3" name="section-image-frame">
-            <a:extLst>
+            <a:extLst xmlns:a="http://schemas.openxmlformats.org/drawingml/2006/main">
               <a:ext uri="{FF2B5EF4-FFF2-40B4-BE49-F238E27FC236}">
                 <a16:creationId xmlns:a16="http://schemas.microsoft.com/office/drawing/2014/main" id="{022EED74-2A45-4C30-8088-12E91D1BC048}"/>
               </a:ext>
             </a:extLst>
           </p:cNvPr>
           <p:cNvSpPr>
-            <a:spLocks noGrp="1"/>
-          </p:cNvSpPr>
-          <p:nvPr/>
-        </p:nvSpPr>
-        <p:spPr>
-          <a:xfrm>
+            <a:spLocks xmlns:a="http://schemas.openxmlformats.org/drawingml/2006/main" noGrp="1"/>
+          </p:cNvSpPr>
+          <p:nvPr/>
+        </p:nvSpPr>
+        <p:spPr>
+          <a:xfrm xmlns:a="http://schemas.openxmlformats.org/drawingml/2006/main">
             <a:off x="400050" y="1371600"/>
             <a:ext cx="6191250" cy="4371975"/>
           </a:xfrm>
-          <a:prstGeom prst="rect">
-            <a:avLst/>
-          </a:prstGeom>
-          <a:solidFill>
+          <a:prstGeom xmlns:a="http://schemas.openxmlformats.org/drawingml/2006/main" prst="rect">
+            <a:avLst/>
+          </a:prstGeom>
+          <a:solidFill xmlns:a="http://schemas.openxmlformats.org/drawingml/2006/main">
             <a:srgbClr val="FFFFFF"/>
           </a:solidFill>
-          <a:ln w="9525">
+          <a:ln xmlns:a="http://schemas.openxmlformats.org/drawingml/2006/main" w="9525">
             <a:solidFill>
               <a:srgbClr val="B8BCC4"/>
             </a:solidFill>
@@ -6455,22 +6729,22 @@
       </p:sp>
       <p:pic>
         <p:nvPicPr>
-          <p:cNvPr id="16" name="section-image"/>
+          <p:cNvPr id="17" name="section-image"/>
           <p:cNvPicPr>
-            <a:picLocks noChangeAspect="1"/>
+            <a:picLocks xmlns:a="http://schemas.openxmlformats.org/drawingml/2006/main" noChangeAspect="1"/>
           </p:cNvPicPr>
           <p:nvPr/>
         </p:nvPicPr>
         <p:blipFill>
-          <a:blip r:embed="rId3"/>
-          <a:stretch/>
+          <a:blip xmlns:r="http://schemas.openxmlformats.org/officeDocument/2006/relationships" xmlns:a="http://schemas.openxmlformats.org/drawingml/2006/main" r:embed="Rfc6009e09f624931"/>
+          <a:stretch xmlns:a="http://schemas.openxmlformats.org/drawingml/2006/main"/>
         </p:blipFill>
         <p:spPr>
-          <a:xfrm>
+          <a:xfrm xmlns:a="http://schemas.openxmlformats.org/drawingml/2006/main" flipH="0" flipV="0">
             <a:off x="509264" y="1447800"/>
             <a:ext cx="5972821" cy="4219575"/>
           </a:xfrm>
-          <a:prstGeom prst="rect">
+          <a:prstGeom xmlns:a="http://schemas.openxmlformats.org/drawingml/2006/main" prst="rect">
             <a:avLst/>
           </a:prstGeom>
         </p:spPr>
@@ -6478,33 +6752,34 @@
       <p:sp>
         <p:nvSpPr>
           <p:cNvPr id="5" name="section-intro">
-            <a:extLst>
+            <a:extLst xmlns:a="http://schemas.openxmlformats.org/drawingml/2006/main">
               <a:ext uri="{FF2B5EF4-FFF2-40B4-BE49-F238E27FC236}">
                 <a16:creationId xmlns:a16="http://schemas.microsoft.com/office/drawing/2014/main" id="{9A61C808-A00C-430C-9205-CBBD91B0A114}"/>
               </a:ext>
             </a:extLst>
           </p:cNvPr>
           <p:cNvSpPr>
-            <a:spLocks noGrp="1"/>
-          </p:cNvSpPr>
-          <p:nvPr/>
-        </p:nvSpPr>
-        <p:spPr>
-          <a:xfrm>
+            <a:spLocks xmlns:a="http://schemas.openxmlformats.org/drawingml/2006/main" noGrp="1"/>
+          </p:cNvSpPr>
+          <p:nvPr/>
+        </p:nvSpPr>
+        <p:spPr>
+          <a:xfrm xmlns:a="http://schemas.openxmlformats.org/drawingml/2006/main">
             <a:off x="6953250" y="1466850"/>
             <a:ext cx="4572000" cy="1543050"/>
           </a:xfrm>
-          <a:prstGeom prst="rect">
-            <a:avLst/>
-          </a:prstGeom>
-        </p:spPr>
-        <p:txBody>
-          <a:bodyPr wrap="square" lIns="0" tIns="0" rIns="0" bIns="0" anchor="t">
-            <a:normAutofit/>
+          <a:prstGeom xmlns:a="http://schemas.openxmlformats.org/drawingml/2006/main" prst="rect">
+            <a:avLst/>
+          </a:prstGeom>
+        </p:spPr>
+        <p:txBody>
+          <a:bodyPr xmlns:a="http://schemas.openxmlformats.org/drawingml/2006/main" wrap="square" lIns="0" tIns="0" rIns="0" bIns="0" anchor="t">
+            <a:normAutofit fontScale="100000"/>
           </a:bodyPr>
-          <a:lstStyle/>
-          <a:p>
+          <a:lstStyle xmlns:a="http://schemas.openxmlformats.org/drawingml/2006/main"/>
+          <a:p xmlns:a="http://schemas.openxmlformats.org/drawingml/2006/main">
             <a:pPr algn="l">
+              <a:buNone/>
               <a:defRPr sz="1800" b="0">
                 <a:solidFill>
                   <a:srgbClr val="000000"/>
@@ -6515,7 +6790,7 @@
               </a:defRPr>
             </a:pPr>
             <a:r>
-              <a:t>母线+9.0m、线路构架+14.5m、主变构架+11.5m。图纸用于课程复核和手绘临摹，设备轮廓、基础与端子方向仍以厂家资料覆盖。</a:t>
+              <a:t>SEC-220-L1-01（A1，1:50）按管母—QS1—QF—TA—QS2+ES—CVT—MOA—出线构架组织；ES常开。设备外形与端子方向由厂家图覆盖。</a:t>
             </a:r>
           </a:p>
         </p:txBody>
@@ -6523,31 +6798,31 @@
       <p:sp>
         <p:nvSpPr>
           <p:cNvPr id="6" name="section-card-1">
-            <a:extLst>
+            <a:extLst xmlns:a="http://schemas.openxmlformats.org/drawingml/2006/main">
               <a:ext uri="{FF2B5EF4-FFF2-40B4-BE49-F238E27FC236}">
                 <a16:creationId xmlns:a16="http://schemas.microsoft.com/office/drawing/2014/main" id="{533581AE-B2BB-4878-BD64-74109DA67542}"/>
               </a:ext>
             </a:extLst>
           </p:cNvPr>
           <p:cNvSpPr>
-            <a:spLocks noGrp="1"/>
-          </p:cNvSpPr>
-          <p:nvPr/>
-        </p:nvSpPr>
-        <p:spPr>
-          <a:xfrm>
+            <a:spLocks xmlns:a="http://schemas.openxmlformats.org/drawingml/2006/main" noGrp="1"/>
+          </p:cNvSpPr>
+          <p:nvPr/>
+        </p:nvSpPr>
+        <p:spPr>
+          <a:xfrm xmlns:a="http://schemas.openxmlformats.org/drawingml/2006/main">
             <a:off x="6953250" y="3371850"/>
             <a:ext cx="2095500" cy="2324100"/>
           </a:xfrm>
-          <a:prstGeom prst="roundRect">
+          <a:prstGeom xmlns:a="http://schemas.openxmlformats.org/drawingml/2006/main" prst="roundRect">
             <a:avLst>
               <a:gd name="adj" fmla="val 3636"/>
             </a:avLst>
           </a:prstGeom>
-          <a:solidFill>
+          <a:solidFill xmlns:a="http://schemas.openxmlformats.org/drawingml/2006/main">
             <a:srgbClr val="EAF5FB"/>
           </a:solidFill>
-          <a:ln w="0">
+          <a:ln xmlns:a="http://schemas.openxmlformats.org/drawingml/2006/main" w="0">
             <a:solidFill>
               <a:srgbClr val="EAF5FB"/>
             </a:solidFill>
@@ -6558,31 +6833,31 @@
       <p:sp>
         <p:nvSpPr>
           <p:cNvPr id="7" name="section-card-2">
-            <a:extLst>
+            <a:extLst xmlns:a="http://schemas.openxmlformats.org/drawingml/2006/main">
               <a:ext uri="{FF2B5EF4-FFF2-40B4-BE49-F238E27FC236}">
                 <a16:creationId xmlns:a16="http://schemas.microsoft.com/office/drawing/2014/main" id="{A43CB710-5AAE-49BC-B080-8155BC26C3DC}"/>
               </a:ext>
             </a:extLst>
           </p:cNvPr>
           <p:cNvSpPr>
-            <a:spLocks noGrp="1"/>
-          </p:cNvSpPr>
-          <p:nvPr/>
-        </p:nvSpPr>
-        <p:spPr>
-          <a:xfrm>
+            <a:spLocks xmlns:a="http://schemas.openxmlformats.org/drawingml/2006/main" noGrp="1"/>
+          </p:cNvSpPr>
+          <p:nvPr/>
+        </p:nvSpPr>
+        <p:spPr>
+          <a:xfrm xmlns:a="http://schemas.openxmlformats.org/drawingml/2006/main">
             <a:off x="9429750" y="3371850"/>
             <a:ext cx="2095500" cy="2324100"/>
           </a:xfrm>
-          <a:prstGeom prst="roundRect">
+          <a:prstGeom xmlns:a="http://schemas.openxmlformats.org/drawingml/2006/main" prst="roundRect">
             <a:avLst>
               <a:gd name="adj" fmla="val 3636"/>
             </a:avLst>
           </a:prstGeom>
-          <a:solidFill>
+          <a:solidFill xmlns:a="http://schemas.openxmlformats.org/drawingml/2006/main">
             <a:srgbClr val="F2F2F2"/>
           </a:solidFill>
-          <a:ln w="0">
+          <a:ln xmlns:a="http://schemas.openxmlformats.org/drawingml/2006/main" w="0">
             <a:solidFill>
               <a:srgbClr val="F2F2F2"/>
             </a:solidFill>
@@ -6593,33 +6868,34 @@
       <p:sp>
         <p:nvSpPr>
           <p:cNvPr id="8" name="section-stat-1">
-            <a:extLst>
+            <a:extLst xmlns:a="http://schemas.openxmlformats.org/drawingml/2006/main">
               <a:ext uri="{FF2B5EF4-FFF2-40B4-BE49-F238E27FC236}">
                 <a16:creationId xmlns:a16="http://schemas.microsoft.com/office/drawing/2014/main" id="{8C7AF300-BD03-434A-A6EB-DBD5BAB6D95E}"/>
               </a:ext>
             </a:extLst>
           </p:cNvPr>
           <p:cNvSpPr>
-            <a:spLocks noGrp="1"/>
-          </p:cNvSpPr>
-          <p:nvPr/>
-        </p:nvSpPr>
-        <p:spPr>
-          <a:xfrm>
+            <a:spLocks xmlns:a="http://schemas.openxmlformats.org/drawingml/2006/main" noGrp="1"/>
+          </p:cNvSpPr>
+          <p:nvPr/>
+        </p:nvSpPr>
+        <p:spPr>
+          <a:xfrm xmlns:a="http://schemas.openxmlformats.org/drawingml/2006/main">
             <a:off x="7191375" y="3848100"/>
             <a:ext cx="1638300" cy="876300"/>
           </a:xfrm>
-          <a:prstGeom prst="rect">
-            <a:avLst/>
-          </a:prstGeom>
-        </p:spPr>
-        <p:txBody>
-          <a:bodyPr wrap="square" lIns="0" tIns="0" rIns="0" bIns="0" anchor="b">
+          <a:prstGeom xmlns:a="http://schemas.openxmlformats.org/drawingml/2006/main" prst="rect">
+            <a:avLst/>
+          </a:prstGeom>
+        </p:spPr>
+        <p:txBody>
+          <a:bodyPr xmlns:a="http://schemas.openxmlformats.org/drawingml/2006/main" wrap="square" lIns="0" tIns="0" rIns="0" bIns="0" anchor="b">
             <a:noAutofit/>
           </a:bodyPr>
-          <a:lstStyle/>
-          <a:p>
+          <a:lstStyle xmlns:a="http://schemas.openxmlformats.org/drawingml/2006/main"/>
+          <a:p xmlns:a="http://schemas.openxmlformats.org/drawingml/2006/main">
             <a:pPr algn="l">
+              <a:buNone/>
               <a:defRPr sz="2700" b="1">
                 <a:solidFill>
                   <a:srgbClr val="000000"/>
@@ -6639,33 +6915,34 @@
       <p:sp>
         <p:nvSpPr>
           <p:cNvPr id="9" name="section-label-1">
-            <a:extLst>
+            <a:extLst xmlns:a="http://schemas.openxmlformats.org/drawingml/2006/main">
               <a:ext uri="{FF2B5EF4-FFF2-40B4-BE49-F238E27FC236}">
                 <a16:creationId xmlns:a16="http://schemas.microsoft.com/office/drawing/2014/main" id="{92BA99A1-ECE8-4190-913C-7A0B8E696787}"/>
               </a:ext>
             </a:extLst>
           </p:cNvPr>
           <p:cNvSpPr>
-            <a:spLocks noGrp="1"/>
-          </p:cNvSpPr>
-          <p:nvPr/>
-        </p:nvSpPr>
-        <p:spPr>
-          <a:xfrm>
+            <a:spLocks xmlns:a="http://schemas.openxmlformats.org/drawingml/2006/main" noGrp="1"/>
+          </p:cNvSpPr>
+          <p:nvPr/>
+        </p:nvSpPr>
+        <p:spPr>
+          <a:xfrm xmlns:a="http://schemas.openxmlformats.org/drawingml/2006/main">
             <a:off x="7239000" y="4953000"/>
             <a:ext cx="1524000" cy="571500"/>
           </a:xfrm>
-          <a:prstGeom prst="rect">
-            <a:avLst/>
-          </a:prstGeom>
-        </p:spPr>
-        <p:txBody>
-          <a:bodyPr wrap="square" lIns="0" tIns="0" rIns="0" bIns="0" anchor="t">
+          <a:prstGeom xmlns:a="http://schemas.openxmlformats.org/drawingml/2006/main" prst="rect">
+            <a:avLst/>
+          </a:prstGeom>
+        </p:spPr>
+        <p:txBody>
+          <a:bodyPr xmlns:a="http://schemas.openxmlformats.org/drawingml/2006/main" wrap="square" lIns="0" tIns="0" rIns="0" bIns="0" anchor="t">
             <a:noAutofit/>
           </a:bodyPr>
-          <a:lstStyle/>
-          <a:p>
+          <a:lstStyle xmlns:a="http://schemas.openxmlformats.org/drawingml/2006/main"/>
+          <a:p xmlns:a="http://schemas.openxmlformats.org/drawingml/2006/main">
             <a:pPr algn="l">
+              <a:buNone/>
               <a:defRPr sz="1650" b="0">
                 <a:solidFill>
                   <a:srgbClr val="000000"/>
@@ -6685,33 +6962,34 @@
       <p:sp>
         <p:nvSpPr>
           <p:cNvPr id="10" name="section-stat-2">
-            <a:extLst>
+            <a:extLst xmlns:a="http://schemas.openxmlformats.org/drawingml/2006/main">
               <a:ext uri="{FF2B5EF4-FFF2-40B4-BE49-F238E27FC236}">
                 <a16:creationId xmlns:a16="http://schemas.microsoft.com/office/drawing/2014/main" id="{C3A1F476-3CAE-48D9-96BD-BDDEC389A128}"/>
               </a:ext>
             </a:extLst>
           </p:cNvPr>
           <p:cNvSpPr>
-            <a:spLocks noGrp="1"/>
-          </p:cNvSpPr>
-          <p:nvPr/>
-        </p:nvSpPr>
-        <p:spPr>
-          <a:xfrm>
+            <a:spLocks xmlns:a="http://schemas.openxmlformats.org/drawingml/2006/main" noGrp="1"/>
+          </p:cNvSpPr>
+          <p:nvPr/>
+        </p:nvSpPr>
+        <p:spPr>
+          <a:xfrm xmlns:a="http://schemas.openxmlformats.org/drawingml/2006/main">
             <a:off x="9667875" y="3848100"/>
             <a:ext cx="1638300" cy="876300"/>
           </a:xfrm>
-          <a:prstGeom prst="rect">
-            <a:avLst/>
-          </a:prstGeom>
-        </p:spPr>
-        <p:txBody>
-          <a:bodyPr wrap="square" lIns="0" tIns="0" rIns="0" bIns="0" anchor="b">
+          <a:prstGeom xmlns:a="http://schemas.openxmlformats.org/drawingml/2006/main" prst="rect">
+            <a:avLst/>
+          </a:prstGeom>
+        </p:spPr>
+        <p:txBody>
+          <a:bodyPr xmlns:a="http://schemas.openxmlformats.org/drawingml/2006/main" wrap="square" lIns="0" tIns="0" rIns="0" bIns="0" anchor="b">
             <a:noAutofit/>
           </a:bodyPr>
-          <a:lstStyle/>
-          <a:p>
+          <a:lstStyle xmlns:a="http://schemas.openxmlformats.org/drawingml/2006/main"/>
+          <a:p xmlns:a="http://schemas.openxmlformats.org/drawingml/2006/main">
             <a:pPr algn="l">
+              <a:buNone/>
               <a:defRPr sz="2700" b="1">
                 <a:solidFill>
                   <a:srgbClr val="000000"/>
@@ -6731,33 +7009,34 @@
       <p:sp>
         <p:nvSpPr>
           <p:cNvPr id="11" name="section-label-2">
-            <a:extLst>
+            <a:extLst xmlns:a="http://schemas.openxmlformats.org/drawingml/2006/main">
               <a:ext uri="{FF2B5EF4-FFF2-40B4-BE49-F238E27FC236}">
                 <a16:creationId xmlns:a16="http://schemas.microsoft.com/office/drawing/2014/main" id="{E7F761F6-7B2C-408F-9E82-F217AD77C414}"/>
               </a:ext>
             </a:extLst>
           </p:cNvPr>
           <p:cNvSpPr>
-            <a:spLocks noGrp="1"/>
-          </p:cNvSpPr>
-          <p:nvPr/>
-        </p:nvSpPr>
-        <p:spPr>
-          <a:xfrm>
+            <a:spLocks xmlns:a="http://schemas.openxmlformats.org/drawingml/2006/main" noGrp="1"/>
+          </p:cNvSpPr>
+          <p:nvPr/>
+        </p:nvSpPr>
+        <p:spPr>
+          <a:xfrm xmlns:a="http://schemas.openxmlformats.org/drawingml/2006/main">
             <a:off x="9715500" y="4953000"/>
             <a:ext cx="1524000" cy="571500"/>
           </a:xfrm>
-          <a:prstGeom prst="rect">
-            <a:avLst/>
-          </a:prstGeom>
-        </p:spPr>
-        <p:txBody>
-          <a:bodyPr wrap="square" lIns="0" tIns="0" rIns="0" bIns="0" anchor="t">
+          <a:prstGeom xmlns:a="http://schemas.openxmlformats.org/drawingml/2006/main" prst="rect">
+            <a:avLst/>
+          </a:prstGeom>
+        </p:spPr>
+        <p:txBody>
+          <a:bodyPr xmlns:a="http://schemas.openxmlformats.org/drawingml/2006/main" wrap="square" lIns="0" tIns="0" rIns="0" bIns="0" anchor="t">
             <a:noAutofit/>
           </a:bodyPr>
-          <a:lstStyle/>
-          <a:p>
+          <a:lstStyle xmlns:a="http://schemas.openxmlformats.org/drawingml/2006/main"/>
+          <a:p xmlns:a="http://schemas.openxmlformats.org/drawingml/2006/main">
             <a:pPr algn="l">
+              <a:buNone/>
               <a:defRPr sz="1650" b="0">
                 <a:solidFill>
                   <a:srgbClr val="000000"/>
@@ -6777,33 +7056,34 @@
       <p:sp>
         <p:nvSpPr>
           <p:cNvPr id="12" name="section-other-clearances">
-            <a:extLst>
+            <a:extLst xmlns:a="http://schemas.openxmlformats.org/drawingml/2006/main">
               <a:ext uri="{FF2B5EF4-FFF2-40B4-BE49-F238E27FC236}">
                 <a16:creationId xmlns:a16="http://schemas.microsoft.com/office/drawing/2014/main" id="{B5CC5967-840B-459B-BACC-C9F8C054DE34}"/>
               </a:ext>
             </a:extLst>
           </p:cNvPr>
           <p:cNvSpPr>
-            <a:spLocks noGrp="1"/>
-          </p:cNvSpPr>
-          <p:nvPr/>
-        </p:nvSpPr>
-        <p:spPr>
-          <a:xfrm>
+            <a:spLocks xmlns:a="http://schemas.openxmlformats.org/drawingml/2006/main" noGrp="1"/>
+          </p:cNvSpPr>
+          <p:nvPr/>
+        </p:nvSpPr>
+        <p:spPr>
+          <a:xfrm xmlns:a="http://schemas.openxmlformats.org/drawingml/2006/main">
             <a:off x="6953250" y="5905500"/>
             <a:ext cx="4572000" cy="285750"/>
           </a:xfrm>
-          <a:prstGeom prst="rect">
-            <a:avLst/>
-          </a:prstGeom>
-        </p:spPr>
-        <p:txBody>
-          <a:bodyPr wrap="square" lIns="0" tIns="0" rIns="0" bIns="0" anchor="t">
+          <a:prstGeom xmlns:a="http://schemas.openxmlformats.org/drawingml/2006/main" prst="rect">
+            <a:avLst/>
+          </a:prstGeom>
+        </p:spPr>
+        <p:txBody>
+          <a:bodyPr xmlns:a="http://schemas.openxmlformats.org/drawingml/2006/main" wrap="square" lIns="0" tIns="0" rIns="0" bIns="0" anchor="t">
             <a:normAutofit fontScale="88697"/>
           </a:bodyPr>
-          <a:lstStyle/>
-          <a:p>
+          <a:lstStyle xmlns:a="http://schemas.openxmlformats.org/drawingml/2006/main"/>
+          <a:p xmlns:a="http://schemas.openxmlformats.org/drawingml/2006/main">
             <a:pPr algn="l">
+              <a:buNone/>
               <a:defRPr sz="1200" b="0">
                 <a:solidFill>
                   <a:srgbClr val="555555"/>
@@ -6826,9 +7106,6 @@
       </p:ext>
     </p:extLst>
   </p:cSld>
-  <p:clrMapOvr>
-    <a:masterClrMapping/>
-  </p:clrMapOvr>
 </p:sld>
 </file>
 
@@ -7074,254 +7351,5 @@
       </a:bgFillStyleLst>
     </a:fmtScheme>
   </a:themeElements>
-  <a:objectDefaults/>
-  <a:extraClrSchemeLst/>
-</a:theme>
-</file>
-
-<file path=ppt/theme/theme2.xml><?xml version="1.0" encoding="utf-8"?>
-<a:theme xmlns:a="http://schemas.openxmlformats.org/drawingml/2006/main" name="课程设计主题">
-  <a:themeElements>
-    <a:clrScheme name="课程设计主题">
-      <a:dk1>
-        <a:srgbClr val="000000"/>
-      </a:dk1>
-      <a:lt1>
-        <a:srgbClr val="FFFFFF"/>
-      </a:lt1>
-      <a:dk2>
-        <a:srgbClr val="0E2841"/>
-      </a:dk2>
-      <a:lt2>
-        <a:srgbClr val="E8E8E8"/>
-      </a:lt2>
-      <a:accent1>
-        <a:srgbClr val="156082"/>
-      </a:accent1>
-      <a:accent2>
-        <a:srgbClr val="E97132"/>
-      </a:accent2>
-      <a:accent3>
-        <a:srgbClr val="196B24"/>
-      </a:accent3>
-      <a:accent4>
-        <a:srgbClr val="0F9ED5"/>
-      </a:accent4>
-      <a:accent5>
-        <a:srgbClr val="A02B93"/>
-      </a:accent5>
-      <a:accent6>
-        <a:srgbClr val="4EA72E"/>
-      </a:accent6>
-      <a:hlink>
-        <a:srgbClr val="467886"/>
-      </a:hlink>
-      <a:folHlink>
-        <a:srgbClr val="96607D"/>
-      </a:folHlink>
-    </a:clrScheme>
-    <a:fontScheme name="Office">
-      <a:majorFont>
-        <a:latin typeface="Calibri Light"/>
-        <a:ea typeface="Calibri Light"/>
-        <a:cs typeface="Calibri Light"/>
-      </a:majorFont>
-      <a:minorFont>
-        <a:latin typeface="Calibri"/>
-        <a:ea typeface="Calibri"/>
-        <a:cs typeface="Calibri"/>
-      </a:minorFont>
-    </a:fontScheme>
-    <a:fmtScheme name="课程设计主题">
-      <a:fillStyleLst>
-        <a:solidFill>
-          <a:schemeClr val="phClr"/>
-        </a:solidFill>
-        <a:gradFill>
-          <a:gsLst>
-            <a:gs pos="0">
-              <a:schemeClr val="phClr">
-                <a:tint val="67000"/>
-                <a:lumMod val="110000"/>
-                <a:satMod val="105000"/>
-              </a:schemeClr>
-            </a:gs>
-            <a:gs pos="50000">
-              <a:schemeClr val="phClr">
-                <a:tint val="73000"/>
-                <a:lumMod val="105000"/>
-                <a:satMod val="103000"/>
-              </a:schemeClr>
-            </a:gs>
-            <a:gs pos="100000">
-              <a:schemeClr val="phClr">
-                <a:tint val="81000"/>
-                <a:lumMod val="105000"/>
-                <a:satMod val="109000"/>
-              </a:schemeClr>
-            </a:gs>
-          </a:gsLst>
-          <a:lin ang="5400000" scaled="0"/>
-        </a:gradFill>
-        <a:gradFill>
-          <a:gsLst>
-            <a:gs pos="0">
-              <a:schemeClr val="phClr">
-                <a:tint val="94000"/>
-                <a:lumMod val="102000"/>
-                <a:satMod val="103000"/>
-              </a:schemeClr>
-            </a:gs>
-            <a:gs pos="50000">
-              <a:schemeClr val="phClr">
-                <a:shade val="100000"/>
-                <a:lumMod val="100000"/>
-                <a:satMod val="110000"/>
-              </a:schemeClr>
-            </a:gs>
-            <a:gs pos="100000">
-              <a:schemeClr val="phClr">
-                <a:shade val="78000"/>
-                <a:lumMod val="99000"/>
-                <a:satMod val="120000"/>
-              </a:schemeClr>
-            </a:gs>
-          </a:gsLst>
-          <a:lin ang="5400000" scaled="0"/>
-        </a:gradFill>
-      </a:fillStyleLst>
-      <a:lnStyleLst>
-        <a:ln w="12700">
-          <a:solidFill>
-            <a:schemeClr val="phClr"/>
-          </a:solidFill>
-          <a:prstDash val="solid"/>
-        </a:ln>
-        <a:ln w="19050">
-          <a:solidFill>
-            <a:schemeClr val="phClr"/>
-          </a:solidFill>
-          <a:prstDash val="solid"/>
-        </a:ln>
-        <a:ln w="25400">
-          <a:solidFill>
-            <a:schemeClr val="phClr"/>
-          </a:solidFill>
-          <a:prstDash val="solid"/>
-        </a:ln>
-      </a:lnStyleLst>
-      <a:effectStyleLst>
-        <a:effectStyle>
-          <a:effectLst/>
-        </a:effectStyle>
-        <a:effectStyle>
-          <a:effectLst/>
-        </a:effectStyle>
-        <a:effectStyle>
-          <a:effectLst>
-            <a:outerShdw blurRad="57150" dist="19050" dir="5400000">
-              <a:srgbClr val="000000">
-                <a:alpha val="16000"/>
-              </a:srgbClr>
-            </a:outerShdw>
-          </a:effectLst>
-        </a:effectStyle>
-        <a:effectStyle>
-          <a:effectLst>
-            <a:outerShdw blurRad="19050" dist="9525" dir="5400000">
-              <a:srgbClr val="000000">
-                <a:alpha val="6000"/>
-              </a:srgbClr>
-            </a:outerShdw>
-          </a:effectLst>
-        </a:effectStyle>
-        <a:effectStyle>
-          <a:effectLst>
-            <a:outerShdw blurRad="28575" dist="9525" dir="5400000">
-              <a:srgbClr val="000000">
-                <a:alpha val="8000"/>
-              </a:srgbClr>
-            </a:outerShdw>
-          </a:effectLst>
-        </a:effectStyle>
-        <a:effectStyle>
-          <a:effectLst>
-            <a:outerShdw blurRad="57150" dist="19050" dir="5400000">
-              <a:srgbClr val="000000">
-                <a:alpha val="10000"/>
-              </a:srgbClr>
-            </a:outerShdw>
-          </a:effectLst>
-        </a:effectStyle>
-        <a:effectStyle>
-          <a:effectLst>
-            <a:outerShdw blurRad="114300" dist="38100" dir="5400000">
-              <a:srgbClr val="000000">
-                <a:alpha val="12000"/>
-              </a:srgbClr>
-            </a:outerShdw>
-          </a:effectLst>
-        </a:effectStyle>
-        <a:effectStyle>
-          <a:effectLst>
-            <a:outerShdw blurRad="171450" dist="57150" dir="5400000">
-              <a:srgbClr val="000000">
-                <a:alpha val="16000"/>
-              </a:srgbClr>
-            </a:outerShdw>
-          </a:effectLst>
-        </a:effectStyle>
-        <a:effectStyle>
-          <a:effectLst>
-            <a:outerShdw blurRad="266700" dist="95250" dir="5400000">
-              <a:srgbClr val="000000">
-                <a:alpha val="24000"/>
-              </a:srgbClr>
-            </a:outerShdw>
-          </a:effectLst>
-        </a:effectStyle>
-      </a:effectStyleLst>
-      <a:bgFillStyleLst>
-        <a:solidFill>
-          <a:schemeClr val="phClr"/>
-        </a:solidFill>
-        <a:solidFill>
-          <a:schemeClr val="phClr">
-            <a:tint val="95000"/>
-            <a:satMod val="170000"/>
-          </a:schemeClr>
-        </a:solidFill>
-        <a:gradFill>
-          <a:gsLst>
-            <a:gs pos="0">
-              <a:schemeClr val="phClr">
-                <a:tint val="93000"/>
-                <a:shade val="98000"/>
-                <a:lumMod val="102000"/>
-                <a:satMod val="150000"/>
-              </a:schemeClr>
-            </a:gs>
-            <a:gs pos="50000">
-              <a:schemeClr val="phClr">
-                <a:tint val="98000"/>
-                <a:shade val="90000"/>
-                <a:lumMod val="103000"/>
-                <a:satMod val="130000"/>
-              </a:schemeClr>
-            </a:gs>
-            <a:gs pos="100000">
-              <a:schemeClr val="phClr">
-                <a:shade val="63000"/>
-                <a:satMod val="120000"/>
-              </a:schemeClr>
-            </a:gs>
-          </a:gsLst>
-          <a:lin ang="5400000" scaled="0"/>
-        </a:gradFill>
-      </a:bgFillStyleLst>
-    </a:fmtScheme>
-  </a:themeElements>
-  <a:objectDefaults/>
-  <a:extraClrSchemeLst/>
 </a:theme>
 </file>